--- a/Marketing.pptx
+++ b/Marketing.pptx
@@ -5,11 +5,17 @@
     <p:sldMasterId id="2147483648" r:id="rId1"/>
   </p:sldMasterIdLst>
   <p:notesMasterIdLst>
-    <p:notesMasterId r:id="rId4"/>
+    <p:notesMasterId r:id="rId10"/>
   </p:notesMasterIdLst>
   <p:sldIdLst>
     <p:sldId id="287" r:id="rId2"/>
-    <p:sldId id="288" r:id="rId3"/>
+    <p:sldId id="294" r:id="rId3"/>
+    <p:sldId id="292" r:id="rId4"/>
+    <p:sldId id="288" r:id="rId5"/>
+    <p:sldId id="289" r:id="rId6"/>
+    <p:sldId id="290" r:id="rId7"/>
+    <p:sldId id="291" r:id="rId8"/>
+    <p:sldId id="293" r:id="rId9"/>
   </p:sldIdLst>
   <p:sldSz cx="12192000" cy="6858000"/>
   <p:notesSz cx="6858000" cy="9144000"/>
@@ -197,7 +203,7 @@
           </a:lstStyle>
           <a:p>
             <a:fld id="{610AF671-4685-124D-A41D-446D235EA8CE}" type="datetimeFigureOut">
-              <a:t>9/10/22</a:t>
+              <a:t>9/11/22</a:t>
             </a:fld>
             <a:endParaRPr lang="en-US"/>
           </a:p>
@@ -463,6 +469,90 @@
 </p:notesMaster>
 </file>
 
+<file path=ppt/notesSlides/notesSlide1.xml><?xml version="1.0" encoding="utf-8"?>
+<p:notes xmlns:a="http://schemas.openxmlformats.org/drawingml/2006/main" xmlns:r="http://schemas.openxmlformats.org/officeDocument/2006/relationships" xmlns:p="http://schemas.openxmlformats.org/presentationml/2006/main">
+  <p:cSld>
+    <p:spTree>
+      <p:nvGrpSpPr>
+        <p:cNvPr id="1" name=""/>
+        <p:cNvGrpSpPr/>
+        <p:nvPr/>
+      </p:nvGrpSpPr>
+      <p:grpSpPr>
+        <a:xfrm>
+          <a:off x="0" y="0"/>
+          <a:ext cx="0" cy="0"/>
+          <a:chOff x="0" y="0"/>
+          <a:chExt cx="0" cy="0"/>
+        </a:xfrm>
+      </p:grpSpPr>
+      <p:sp>
+        <p:nvSpPr>
+          <p:cNvPr id="2" name="Slide Image Placeholder 1"/>
+          <p:cNvSpPr>
+            <a:spLocks noGrp="1" noRot="1" noChangeAspect="1"/>
+          </p:cNvSpPr>
+          <p:nvPr>
+            <p:ph type="sldImg"/>
+          </p:nvPr>
+        </p:nvSpPr>
+        <p:spPr/>
+      </p:sp>
+      <p:sp>
+        <p:nvSpPr>
+          <p:cNvPr id="3" name="Notes Placeholder 2"/>
+          <p:cNvSpPr>
+            <a:spLocks noGrp="1"/>
+          </p:cNvSpPr>
+          <p:nvPr>
+            <p:ph type="body" idx="1"/>
+          </p:nvPr>
+        </p:nvSpPr>
+        <p:spPr/>
+        <p:txBody>
+          <a:bodyPr/>
+          <a:lstStyle/>
+          <a:p>
+            <a:endParaRPr lang="en-US"/>
+          </a:p>
+        </p:txBody>
+      </p:sp>
+      <p:sp>
+        <p:nvSpPr>
+          <p:cNvPr id="4" name="Slide Number Placeholder 3"/>
+          <p:cNvSpPr>
+            <a:spLocks noGrp="1"/>
+          </p:cNvSpPr>
+          <p:nvPr>
+            <p:ph type="sldNum" sz="quarter" idx="5"/>
+          </p:nvPr>
+        </p:nvSpPr>
+        <p:spPr/>
+        <p:txBody>
+          <a:bodyPr/>
+          <a:lstStyle/>
+          <a:p>
+            <a:fld id="{35DFC609-AB91-B841-B89F-D8507929D09E}" type="slidenum">
+              <a:rPr lang="en-US"/>
+              <a:t>8</a:t>
+            </a:fld>
+            <a:endParaRPr lang="en-US"/>
+          </a:p>
+        </p:txBody>
+      </p:sp>
+    </p:spTree>
+    <p:extLst>
+      <p:ext uri="{BB962C8B-B14F-4D97-AF65-F5344CB8AC3E}">
+        <p14:creationId xmlns:p14="http://schemas.microsoft.com/office/powerpoint/2010/main" val="532916654"/>
+      </p:ext>
+    </p:extLst>
+  </p:cSld>
+  <p:clrMapOvr>
+    <a:masterClrMapping/>
+  </p:clrMapOvr>
+</p:notes>
+</file>
+
 <file path=ppt/slideLayouts/slideLayout1.xml><?xml version="1.0" encoding="utf-8"?>
 <p:sldLayout xmlns:a="http://schemas.openxmlformats.org/drawingml/2006/main" xmlns:r="http://schemas.openxmlformats.org/officeDocument/2006/relationships" xmlns:p="http://schemas.openxmlformats.org/presentationml/2006/main" type="title" preserve="1">
   <p:cSld name="Title Slide">
@@ -610,7 +700,7 @@
           <a:p>
             <a:fld id="{2D90B581-06C6-5A4B-9E30-3EAD5667F4B3}" type="datetimeFigureOut">
               <a:rPr lang="en-US" smtClean="0"/>
-              <a:t>9/10/22</a:t>
+              <a:t>9/11/22</a:t>
             </a:fld>
             <a:endParaRPr lang="en-US"/>
           </a:p>
@@ -808,7 +898,7 @@
           <a:p>
             <a:fld id="{2D90B581-06C6-5A4B-9E30-3EAD5667F4B3}" type="datetimeFigureOut">
               <a:rPr lang="en-US" smtClean="0"/>
-              <a:t>9/10/22</a:t>
+              <a:t>9/11/22</a:t>
             </a:fld>
             <a:endParaRPr lang="en-US"/>
           </a:p>
@@ -1016,7 +1106,7 @@
           <a:p>
             <a:fld id="{2D90B581-06C6-5A4B-9E30-3EAD5667F4B3}" type="datetimeFigureOut">
               <a:rPr lang="en-US" smtClean="0"/>
-              <a:t>9/10/22</a:t>
+              <a:t>9/11/22</a:t>
             </a:fld>
             <a:endParaRPr lang="en-US"/>
           </a:p>
@@ -1214,7 +1304,7 @@
           <a:p>
             <a:fld id="{2D90B581-06C6-5A4B-9E30-3EAD5667F4B3}" type="datetimeFigureOut">
               <a:rPr lang="en-US" smtClean="0"/>
-              <a:t>9/10/22</a:t>
+              <a:t>9/11/22</a:t>
             </a:fld>
             <a:endParaRPr lang="en-US"/>
           </a:p>
@@ -1489,7 +1579,7 @@
           <a:p>
             <a:fld id="{2D90B581-06C6-5A4B-9E30-3EAD5667F4B3}" type="datetimeFigureOut">
               <a:rPr lang="en-US" smtClean="0"/>
-              <a:t>9/10/22</a:t>
+              <a:t>9/11/22</a:t>
             </a:fld>
             <a:endParaRPr lang="en-US"/>
           </a:p>
@@ -1754,7 +1844,7 @@
           <a:p>
             <a:fld id="{2D90B581-06C6-5A4B-9E30-3EAD5667F4B3}" type="datetimeFigureOut">
               <a:rPr lang="en-US" smtClean="0"/>
-              <a:t>9/10/22</a:t>
+              <a:t>9/11/22</a:t>
             </a:fld>
             <a:endParaRPr lang="en-US"/>
           </a:p>
@@ -2166,7 +2256,7 @@
           <a:p>
             <a:fld id="{2D90B581-06C6-5A4B-9E30-3EAD5667F4B3}" type="datetimeFigureOut">
               <a:rPr lang="en-US" smtClean="0"/>
-              <a:t>9/10/22</a:t>
+              <a:t>9/11/22</a:t>
             </a:fld>
             <a:endParaRPr lang="en-US"/>
           </a:p>
@@ -2307,7 +2397,7 @@
           <a:p>
             <a:fld id="{2D90B581-06C6-5A4B-9E30-3EAD5667F4B3}" type="datetimeFigureOut">
               <a:rPr lang="en-US" smtClean="0"/>
-              <a:t>9/10/22</a:t>
+              <a:t>9/11/22</a:t>
             </a:fld>
             <a:endParaRPr lang="en-US"/>
           </a:p>
@@ -2420,7 +2510,7 @@
           <a:p>
             <a:fld id="{2D90B581-06C6-5A4B-9E30-3EAD5667F4B3}" type="datetimeFigureOut">
               <a:rPr lang="en-US" smtClean="0"/>
-              <a:t>9/10/22</a:t>
+              <a:t>9/11/22</a:t>
             </a:fld>
             <a:endParaRPr lang="en-US"/>
           </a:p>
@@ -2731,7 +2821,7 @@
           <a:p>
             <a:fld id="{2D90B581-06C6-5A4B-9E30-3EAD5667F4B3}" type="datetimeFigureOut">
               <a:rPr lang="en-US" smtClean="0"/>
-              <a:t>9/10/22</a:t>
+              <a:t>9/11/22</a:t>
             </a:fld>
             <a:endParaRPr lang="en-US"/>
           </a:p>
@@ -3019,7 +3109,7 @@
           <a:p>
             <a:fld id="{2D90B581-06C6-5A4B-9E30-3EAD5667F4B3}" type="datetimeFigureOut">
               <a:rPr lang="en-US" smtClean="0"/>
-              <a:t>9/10/22</a:t>
+              <a:t>9/11/22</a:t>
             </a:fld>
             <a:endParaRPr lang="en-US"/>
           </a:p>
@@ -3260,7 +3350,7 @@
           <a:p>
             <a:fld id="{2D90B581-06C6-5A4B-9E30-3EAD5667F4B3}" type="datetimeFigureOut">
               <a:rPr lang="en-US" smtClean="0"/>
-              <a:t>9/10/22</a:t>
+              <a:t>9/11/22</a:t>
             </a:fld>
             <a:endParaRPr lang="en-US"/>
           </a:p>
@@ -3732,7 +3822,7 @@
         <p:spPr>
           <a:xfrm>
             <a:off x="6864295" y="5004393"/>
-            <a:ext cx="1986455" cy="523220"/>
+            <a:ext cx="2174602" cy="523220"/>
           </a:xfrm>
           <a:prstGeom prst="rect">
             <a:avLst/>
@@ -3747,13 +3837,13 @@
           <a:p>
             <a:r>
               <a:rPr lang="en-US" sz="1400"/>
-              <a:t>for a good client </a:t>
+              <a:t>for a good client</a:t>
             </a:r>
           </a:p>
           <a:p>
             <a:r>
               <a:rPr lang="en-US" sz="1400"/>
-              <a:t>we are </a:t>
+              <a:t>we are "</a:t>
             </a:r>
             <a:r>
               <a:rPr lang="en-US" sz="1400" b="1">
@@ -3763,6 +3853,15 @@
               </a:rPr>
               <a:t>Welcome Guest</a:t>
             </a:r>
+            <a:r>
+              <a:rPr lang="en-US" sz="1400"/>
+              <a:t>"</a:t>
+            </a:r>
+            <a:endParaRPr lang="en-US" sz="1400" b="1">
+              <a:solidFill>
+                <a:srgbClr val="FF0000"/>
+              </a:solidFill>
+            </a:endParaRPr>
           </a:p>
         </p:txBody>
       </p:sp>
@@ -4169,52 +4268,95 @@
           <a:chExt cx="0" cy="0"/>
         </a:xfrm>
       </p:grpSpPr>
-      <p:sp>
-        <p:nvSpPr>
-          <p:cNvPr id="4" name="Rectangle 3">
-            <a:extLst>
-              <a:ext uri="{FF2B5EF4-FFF2-40B4-BE49-F238E27FC236}">
-                <a16:creationId xmlns:a16="http://schemas.microsoft.com/office/drawing/2014/main" id="{B7F35B93-487F-1D49-A679-7ACD78250CA1}"/>
-              </a:ext>
-            </a:extLst>
-          </p:cNvPr>
-          <p:cNvSpPr/>
-          <p:nvPr/>
-        </p:nvSpPr>
-        <p:spPr>
-          <a:xfrm>
-            <a:off x="2775018" y="357083"/>
-            <a:ext cx="6641963" cy="707886"/>
-          </a:xfrm>
-          <a:prstGeom prst="rect">
-            <a:avLst/>
-          </a:prstGeom>
-        </p:spPr>
-        <p:txBody>
-          <a:bodyPr wrap="square">
-            <a:spAutoFit/>
-          </a:bodyPr>
-          <a:lstStyle/>
-          <a:p>
-            <a:pPr algn="ctr"/>
-            <a:r>
-              <a:rPr lang="en-US" sz="4000" b="1" dirty="0">
+      <p:pic>
+        <p:nvPicPr>
+          <p:cNvPr id="2" name="Picture 18" descr="The 22 Best Marketing Books You Need to Read in 2022">
+            <a:extLst>
+              <a:ext uri="{FF2B5EF4-FFF2-40B4-BE49-F238E27FC236}">
+                <a16:creationId xmlns:a16="http://schemas.microsoft.com/office/drawing/2014/main" id="{C94B2ABF-F0EE-B0E9-85AD-761EB9B369D1}"/>
+              </a:ext>
+            </a:extLst>
+          </p:cNvPr>
+          <p:cNvPicPr>
+            <a:picLocks noChangeAspect="1" noChangeArrowheads="1"/>
+          </p:cNvPicPr>
+          <p:nvPr/>
+        </p:nvPicPr>
+        <p:blipFill>
+          <a:blip r:embed="rId2" cstate="email">
+            <a:extLst>
+              <a:ext uri="{28A0092B-C50C-407E-A947-70E740481C1C}">
+                <a14:useLocalDpi xmlns:a14="http://schemas.microsoft.com/office/drawing/2010/main"/>
+              </a:ext>
+            </a:extLst>
+          </a:blip>
+          <a:srcRect/>
+          <a:stretch>
+            <a:fillRect/>
+          </a:stretch>
+        </p:blipFill>
+        <p:spPr bwMode="auto">
+          <a:xfrm>
+            <a:off x="4591092" y="4679876"/>
+            <a:ext cx="1299945" cy="1969613"/>
+          </a:xfrm>
+          <a:prstGeom prst="rect">
+            <a:avLst/>
+          </a:prstGeom>
+          <a:noFill/>
+          <a:extLst>
+            <a:ext uri="{909E8E84-426E-40DD-AFC4-6F175D3DCCD1}">
+              <a14:hiddenFill xmlns:a14="http://schemas.microsoft.com/office/drawing/2010/main">
                 <a:solidFill>
-                  <a:srgbClr val="00B0F0"/>
+                  <a:srgbClr val="FFFFFF"/>
                 </a:solidFill>
-                <a:latin typeface="Arial" panose="020B0604020202020204" pitchFamily="34" charset="0"/>
-              </a:rPr>
-              <a:t>Typical Marketing Funnel</a:t>
-            </a:r>
-          </a:p>
-        </p:txBody>
-      </p:sp>
-      <p:sp>
-        <p:nvSpPr>
-          <p:cNvPr id="2" name="TextBox 1">
-            <a:extLst>
-              <a:ext uri="{FF2B5EF4-FFF2-40B4-BE49-F238E27FC236}">
-                <a16:creationId xmlns:a16="http://schemas.microsoft.com/office/drawing/2014/main" id="{DBD59AE5-D04D-38DA-9DF7-81B0D93E17DE}"/>
+              </a14:hiddenFill>
+            </a:ext>
+          </a:extLst>
+        </p:spPr>
+      </p:pic>
+      <p:pic>
+        <p:nvPicPr>
+          <p:cNvPr id="3" name="Picture 2">
+            <a:extLst>
+              <a:ext uri="{FF2B5EF4-FFF2-40B4-BE49-F238E27FC236}">
+                <a16:creationId xmlns:a16="http://schemas.microsoft.com/office/drawing/2014/main" id="{2B8F16FA-3710-5E4F-0A1B-7B243FA19017}"/>
+              </a:ext>
+            </a:extLst>
+          </p:cNvPr>
+          <p:cNvPicPr>
+            <a:picLocks noChangeAspect="1"/>
+          </p:cNvPicPr>
+          <p:nvPr/>
+        </p:nvPicPr>
+        <p:blipFill>
+          <a:blip r:embed="rId3" cstate="email">
+            <a:extLst>
+              <a:ext uri="{28A0092B-C50C-407E-A947-70E740481C1C}">
+                <a14:useLocalDpi xmlns:a14="http://schemas.microsoft.com/office/drawing/2010/main"/>
+              </a:ext>
+            </a:extLst>
+          </a:blip>
+          <a:stretch>
+            <a:fillRect/>
+          </a:stretch>
+        </p:blipFill>
+        <p:spPr>
+          <a:xfrm>
+            <a:off x="6402038" y="4679876"/>
+            <a:ext cx="1506044" cy="1573883"/>
+          </a:xfrm>
+          <a:prstGeom prst="rect">
+            <a:avLst/>
+          </a:prstGeom>
+        </p:spPr>
+      </p:pic>
+      <p:sp>
+        <p:nvSpPr>
+          <p:cNvPr id="4" name="TextBox 3">
+            <a:extLst>
+              <a:ext uri="{FF2B5EF4-FFF2-40B4-BE49-F238E27FC236}">
+                <a16:creationId xmlns:a16="http://schemas.microsoft.com/office/drawing/2014/main" id="{33883C80-BDE8-3A8C-DB63-FEA56C6BB3F7}"/>
               </a:ext>
             </a:extLst>
           </p:cNvPr>
@@ -4223,8 +4365,8 @@
         </p:nvSpPr>
         <p:spPr>
           <a:xfrm>
-            <a:off x="279400" y="1676400"/>
-            <a:ext cx="2006600" cy="2308324"/>
+            <a:off x="6402038" y="6253759"/>
+            <a:ext cx="1572329" cy="307777"/>
           </a:xfrm>
           <a:prstGeom prst="rect">
             <a:avLst/>
@@ -4237,113 +4379,20 @@
           </a:bodyPr>
           <a:lstStyle/>
           <a:p>
-            <a:r>
-              <a:rPr lang="en-US">
-                <a:solidFill>
-                  <a:srgbClr val="FF0000"/>
-                </a:solidFill>
-              </a:rPr>
-              <a:t>Information Hooks</a:t>
-            </a:r>
-          </a:p>
-          <a:p>
-            <a:r>
-              <a:rPr lang="en-US" sz="1400">
-                <a:solidFill>
-                  <a:srgbClr val="00B050"/>
-                </a:solidFill>
-              </a:rPr>
-              <a:t>Hundreds/thousands of </a:t>
-            </a:r>
-          </a:p>
-          <a:p>
-            <a:pPr marL="285750" indent="-285750">
-              <a:buFont typeface="Arial" panose="020B0604020202020204" pitchFamily="34" charset="0"/>
-              <a:buChar char="•"/>
-            </a:pPr>
+            <a:pPr algn="ctr"/>
             <a:r>
               <a:rPr lang="en-US" sz="1400"/>
-              <a:t>YouTube Videos</a:t>
-            </a:r>
-          </a:p>
-          <a:p>
-            <a:pPr marL="285750" indent="-285750">
-              <a:buFont typeface="Arial" panose="020B0604020202020204" pitchFamily="34" charset="0"/>
-              <a:buChar char="•"/>
-            </a:pPr>
-            <a:r>
-              <a:rPr lang="en-US" sz="1400"/>
-              <a:t>Linkedin Posts</a:t>
-            </a:r>
-          </a:p>
-          <a:p>
-            <a:pPr marL="285750" indent="-285750">
-              <a:buFont typeface="Arial" panose="020B0604020202020204" pitchFamily="34" charset="0"/>
-              <a:buChar char="•"/>
-            </a:pPr>
-            <a:r>
-              <a:rPr lang="en-US" sz="1400"/>
-              <a:t>Mewdium Articles</a:t>
-            </a:r>
-          </a:p>
-          <a:p>
-            <a:pPr marL="285750" indent="-285750">
-              <a:buFont typeface="Arial" panose="020B0604020202020204" pitchFamily="34" charset="0"/>
-              <a:buChar char="•"/>
-            </a:pPr>
-            <a:r>
-              <a:rPr lang="en-US" sz="1400"/>
-              <a:t>Quora</a:t>
-            </a:r>
-          </a:p>
-          <a:p>
-            <a:pPr marL="285750" indent="-285750">
-              <a:buFont typeface="Arial" panose="020B0604020202020204" pitchFamily="34" charset="0"/>
-              <a:buChar char="•"/>
-            </a:pPr>
-            <a:r>
-              <a:rPr lang="en-US" sz="1400"/>
-              <a:t>StackOverflow</a:t>
-            </a:r>
-          </a:p>
-          <a:p>
-            <a:pPr marL="285750" indent="-285750">
-              <a:buFont typeface="Arial" panose="020B0604020202020204" pitchFamily="34" charset="0"/>
-              <a:buChar char="•"/>
-            </a:pPr>
-            <a:r>
-              <a:rPr lang="en-US" sz="1400"/>
-              <a:t>Facebook</a:t>
-            </a:r>
-          </a:p>
-          <a:p>
-            <a:pPr marL="285750" indent="-285750">
-              <a:buFont typeface="Arial" panose="020B0604020202020204" pitchFamily="34" charset="0"/>
-              <a:buChar char="•"/>
-            </a:pPr>
-            <a:r>
-              <a:rPr lang="en-US" sz="1400"/>
-              <a:t>Instagram</a:t>
-            </a:r>
-          </a:p>
-          <a:p>
-            <a:pPr marL="285750" indent="-285750">
-              <a:buFont typeface="Arial" panose="020B0604020202020204" pitchFamily="34" charset="0"/>
-              <a:buChar char="•"/>
-            </a:pPr>
-            <a:r>
-              <a:rPr lang="en-US" sz="1400"/>
-              <a:t>etc. </a:t>
-            </a:r>
-          </a:p>
-        </p:txBody>
-      </p:sp>
-      <p:sp>
-        <p:nvSpPr>
-          <p:cNvPr id="6" name="TextBox 5">
-            <a:extLst>
-              <a:ext uri="{FF2B5EF4-FFF2-40B4-BE49-F238E27FC236}">
-                <a16:creationId xmlns:a16="http://schemas.microsoft.com/office/drawing/2014/main" id="{7D0ECD3E-FACA-894F-9D1E-634527C097F3}"/>
+              <a:t>Robert Cialdini</a:t>
+            </a:r>
+          </a:p>
+        </p:txBody>
+      </p:sp>
+      <p:sp>
+        <p:nvSpPr>
+          <p:cNvPr id="5" name="TextBox 4">
+            <a:extLst>
+              <a:ext uri="{FF2B5EF4-FFF2-40B4-BE49-F238E27FC236}">
+                <a16:creationId xmlns:a16="http://schemas.microsoft.com/office/drawing/2014/main" id="{D3ACF338-D28C-70C8-3261-FDB5A9F26A3A}"/>
               </a:ext>
             </a:extLst>
           </p:cNvPr>
@@ -4352,15 +4401,16 @@
         </p:nvSpPr>
         <p:spPr>
           <a:xfrm>
-            <a:off x="279400" y="4881786"/>
-            <a:ext cx="1473200" cy="307777"/>
-          </a:xfrm>
-          <a:prstGeom prst="rect">
-            <a:avLst/>
-          </a:prstGeom>
-          <a:solidFill>
-            <a:srgbClr val="92D050"/>
-          </a:solidFill>
+            <a:off x="4915975" y="2983994"/>
+            <a:ext cx="2083330" cy="646331"/>
+          </a:xfrm>
+          <a:prstGeom prst="rect">
+            <a:avLst/>
+          </a:prstGeom>
+          <a:noFill/>
+          <a:ln>
+            <a:noFill/>
+          </a:ln>
         </p:spPr>
         <p:txBody>
           <a:bodyPr wrap="square" rtlCol="0">
@@ -4368,19 +4418,20 @@
           </a:bodyPr>
           <a:lstStyle/>
           <a:p>
-            <a:r>
-              <a:rPr lang="en-US" sz="1400"/>
-              <a:t>Subscriptions</a:t>
-            </a:r>
-          </a:p>
-        </p:txBody>
-      </p:sp>
-      <p:sp>
-        <p:nvSpPr>
-          <p:cNvPr id="7" name="Right Arrow 6">
-            <a:extLst>
-              <a:ext uri="{FF2B5EF4-FFF2-40B4-BE49-F238E27FC236}">
-                <a16:creationId xmlns:a16="http://schemas.microsoft.com/office/drawing/2014/main" id="{9468E329-BBC5-DBDC-EA65-9FD92760B984}"/>
+            <a:pPr algn="ctr"/>
+            <a:r>
+              <a:rPr lang="en-US"/>
+              <a:t>Multi-step Marketing Process</a:t>
+            </a:r>
+          </a:p>
+        </p:txBody>
+      </p:sp>
+      <p:sp>
+        <p:nvSpPr>
+          <p:cNvPr id="6" name="Right Arrow 5">
+            <a:extLst>
+              <a:ext uri="{FF2B5EF4-FFF2-40B4-BE49-F238E27FC236}">
+                <a16:creationId xmlns:a16="http://schemas.microsoft.com/office/drawing/2014/main" id="{74C961F4-2164-09D1-9945-5AF487D022EF}"/>
               </a:ext>
             </a:extLst>
           </p:cNvPr>
@@ -4388,21 +4439,13 @@
           <p:nvPr/>
         </p:nvSpPr>
         <p:spPr>
-          <a:xfrm rot="4320963">
-            <a:off x="719405" y="4239085"/>
-            <a:ext cx="616018" cy="336834"/>
+          <a:xfrm>
+            <a:off x="3528205" y="2746390"/>
+            <a:ext cx="914400" cy="336177"/>
           </a:xfrm>
           <a:prstGeom prst="rightArrow">
             <a:avLst/>
           </a:prstGeom>
-          <a:solidFill>
-            <a:srgbClr val="92D050"/>
-          </a:solidFill>
-          <a:ln>
-            <a:solidFill>
-              <a:srgbClr val="92D050"/>
-            </a:solidFill>
-          </a:ln>
         </p:spPr>
         <p:style>
           <a:lnRef idx="2">
@@ -4425,20 +4468,758 @@
           <a:lstStyle/>
           <a:p>
             <a:pPr algn="ctr"/>
-            <a:endParaRPr lang="en-US">
-              <a:solidFill>
-                <a:srgbClr val="00B050"/>
-              </a:solidFill>
-            </a:endParaRPr>
-          </a:p>
-        </p:txBody>
-      </p:sp>
+            <a:endParaRPr lang="en-US"/>
+          </a:p>
+        </p:txBody>
+      </p:sp>
+      <p:sp>
+        <p:nvSpPr>
+          <p:cNvPr id="7" name="TextBox 6">
+            <a:extLst>
+              <a:ext uri="{FF2B5EF4-FFF2-40B4-BE49-F238E27FC236}">
+                <a16:creationId xmlns:a16="http://schemas.microsoft.com/office/drawing/2014/main" id="{6469D34B-B4D9-6EEC-A4E8-35E730C4A096}"/>
+              </a:ext>
+            </a:extLst>
+          </p:cNvPr>
+          <p:cNvSpPr txBox="1"/>
+          <p:nvPr/>
+        </p:nvSpPr>
+        <p:spPr>
+          <a:xfrm>
+            <a:off x="2191110" y="3127609"/>
+            <a:ext cx="1157422" cy="369332"/>
+          </a:xfrm>
+          <a:prstGeom prst="rect">
+            <a:avLst/>
+          </a:prstGeom>
+          <a:noFill/>
+          <a:ln>
+            <a:noFill/>
+          </a:ln>
+        </p:spPr>
+        <p:txBody>
+          <a:bodyPr wrap="square" rtlCol="0">
+            <a:spAutoFit/>
+          </a:bodyPr>
+          <a:lstStyle/>
+          <a:p>
+            <a:pPr algn="ctr"/>
+            <a:r>
+              <a:rPr lang="en-US"/>
+              <a:t>Budget</a:t>
+            </a:r>
+          </a:p>
+        </p:txBody>
+      </p:sp>
+      <p:sp>
+        <p:nvSpPr>
+          <p:cNvPr id="8" name="Right Arrow 7">
+            <a:extLst>
+              <a:ext uri="{FF2B5EF4-FFF2-40B4-BE49-F238E27FC236}">
+                <a16:creationId xmlns:a16="http://schemas.microsoft.com/office/drawing/2014/main" id="{1BBEC0AA-6416-8659-299E-FFF1E605E307}"/>
+              </a:ext>
+            </a:extLst>
+          </p:cNvPr>
+          <p:cNvSpPr/>
+          <p:nvPr/>
+        </p:nvSpPr>
+        <p:spPr>
+          <a:xfrm>
+            <a:off x="7321486" y="2745755"/>
+            <a:ext cx="914400" cy="336177"/>
+          </a:xfrm>
+          <a:prstGeom prst="rightArrow">
+            <a:avLst/>
+          </a:prstGeom>
+        </p:spPr>
+        <p:style>
+          <a:lnRef idx="2">
+            <a:schemeClr val="accent1">
+              <a:shade val="50000"/>
+            </a:schemeClr>
+          </a:lnRef>
+          <a:fillRef idx="1">
+            <a:schemeClr val="accent1"/>
+          </a:fillRef>
+          <a:effectRef idx="0">
+            <a:schemeClr val="accent1"/>
+          </a:effectRef>
+          <a:fontRef idx="minor">
+            <a:schemeClr val="lt1"/>
+          </a:fontRef>
+        </p:style>
+        <p:txBody>
+          <a:bodyPr rtlCol="0" anchor="ctr"/>
+          <a:lstStyle/>
+          <a:p>
+            <a:pPr algn="ctr"/>
+            <a:endParaRPr lang="en-US"/>
+          </a:p>
+        </p:txBody>
+      </p:sp>
+      <p:sp>
+        <p:nvSpPr>
+          <p:cNvPr id="9" name="TextBox 8">
+            <a:extLst>
+              <a:ext uri="{FF2B5EF4-FFF2-40B4-BE49-F238E27FC236}">
+                <a16:creationId xmlns:a16="http://schemas.microsoft.com/office/drawing/2014/main" id="{D361C8BB-37A9-1EE5-EF30-24B35E454C1A}"/>
+              </a:ext>
+            </a:extLst>
+          </p:cNvPr>
+          <p:cNvSpPr txBox="1"/>
+          <p:nvPr/>
+        </p:nvSpPr>
+        <p:spPr>
+          <a:xfrm>
+            <a:off x="8807983" y="2986073"/>
+            <a:ext cx="1888236" cy="369332"/>
+          </a:xfrm>
+          <a:prstGeom prst="rect">
+            <a:avLst/>
+          </a:prstGeom>
+          <a:noFill/>
+          <a:ln>
+            <a:noFill/>
+          </a:ln>
+        </p:spPr>
+        <p:txBody>
+          <a:bodyPr wrap="square" rtlCol="0">
+            <a:spAutoFit/>
+          </a:bodyPr>
+          <a:lstStyle/>
+          <a:p>
+            <a:pPr algn="ctr"/>
+            <a:r>
+              <a:rPr lang="en-US"/>
+              <a:t>Kidney Donors</a:t>
+            </a:r>
+          </a:p>
+        </p:txBody>
+      </p:sp>
+      <p:sp>
+        <p:nvSpPr>
+          <p:cNvPr id="11" name="TextBox 10">
+            <a:extLst>
+              <a:ext uri="{FF2B5EF4-FFF2-40B4-BE49-F238E27FC236}">
+                <a16:creationId xmlns:a16="http://schemas.microsoft.com/office/drawing/2014/main" id="{EE4BE496-6B3D-E609-9179-704C89A13EC0}"/>
+              </a:ext>
+            </a:extLst>
+          </p:cNvPr>
+          <p:cNvSpPr txBox="1"/>
+          <p:nvPr/>
+        </p:nvSpPr>
+        <p:spPr>
+          <a:xfrm>
+            <a:off x="96275" y="208511"/>
+            <a:ext cx="6133837" cy="523220"/>
+          </a:xfrm>
+          <a:prstGeom prst="rect">
+            <a:avLst/>
+          </a:prstGeom>
+          <a:noFill/>
+        </p:spPr>
+        <p:txBody>
+          <a:bodyPr wrap="square" rtlCol="0">
+            <a:spAutoFit/>
+          </a:bodyPr>
+          <a:lstStyle/>
+          <a:p>
+            <a:r>
+              <a:rPr lang="en-US" sz="2800" b="1"/>
+              <a:t>Marketing as an Engineering Project ...</a:t>
+            </a:r>
+          </a:p>
+        </p:txBody>
+      </p:sp>
+      <p:pic>
+        <p:nvPicPr>
+          <p:cNvPr id="1026" name="Picture 2" descr="Dollar Logo PNG Vector (EPS) Free Download">
+            <a:extLst>
+              <a:ext uri="{FF2B5EF4-FFF2-40B4-BE49-F238E27FC236}">
+                <a16:creationId xmlns:a16="http://schemas.microsoft.com/office/drawing/2014/main" id="{86366383-4146-49A0-3E1E-AC5A33617DFA}"/>
+              </a:ext>
+            </a:extLst>
+          </p:cNvPr>
+          <p:cNvPicPr>
+            <a:picLocks noChangeAspect="1" noChangeArrowheads="1"/>
+          </p:cNvPicPr>
+          <p:nvPr/>
+        </p:nvPicPr>
+        <p:blipFill>
+          <a:blip r:embed="rId4" cstate="email">
+            <a:extLst>
+              <a:ext uri="{28A0092B-C50C-407E-A947-70E740481C1C}">
+                <a14:useLocalDpi xmlns:a14="http://schemas.microsoft.com/office/drawing/2010/main"/>
+              </a:ext>
+            </a:extLst>
+          </a:blip>
+          <a:srcRect/>
+          <a:stretch>
+            <a:fillRect/>
+          </a:stretch>
+        </p:blipFill>
+        <p:spPr bwMode="auto">
+          <a:xfrm>
+            <a:off x="2456792" y="2116346"/>
+            <a:ext cx="499316" cy="954108"/>
+          </a:xfrm>
+          <a:prstGeom prst="rect">
+            <a:avLst/>
+          </a:prstGeom>
+          <a:noFill/>
+          <a:extLst>
+            <a:ext uri="{909E8E84-426E-40DD-AFC4-6F175D3DCCD1}">
+              <a14:hiddenFill xmlns:a14="http://schemas.microsoft.com/office/drawing/2010/main">
+                <a:solidFill>
+                  <a:srgbClr val="FFFFFF"/>
+                </a:solidFill>
+              </a14:hiddenFill>
+            </a:ext>
+          </a:extLst>
+        </p:spPr>
+      </p:pic>
+      <p:pic>
+        <p:nvPicPr>
+          <p:cNvPr id="12" name="Picture 11">
+            <a:extLst>
+              <a:ext uri="{FF2B5EF4-FFF2-40B4-BE49-F238E27FC236}">
+                <a16:creationId xmlns:a16="http://schemas.microsoft.com/office/drawing/2014/main" id="{98ACAD44-80DB-0500-DB6B-8DBFE408122C}"/>
+              </a:ext>
+            </a:extLst>
+          </p:cNvPr>
+          <p:cNvPicPr>
+            <a:picLocks noChangeAspect="1"/>
+          </p:cNvPicPr>
+          <p:nvPr/>
+        </p:nvPicPr>
+        <p:blipFill>
+          <a:blip r:embed="rId5" cstate="email">
+            <a:extLst>
+              <a:ext uri="{28A0092B-C50C-407E-A947-70E740481C1C}">
+                <a14:useLocalDpi xmlns:a14="http://schemas.microsoft.com/office/drawing/2010/main"/>
+              </a:ext>
+            </a:extLst>
+          </a:blip>
+          <a:stretch>
+            <a:fillRect/>
+          </a:stretch>
+        </p:blipFill>
+        <p:spPr>
+          <a:xfrm>
+            <a:off x="4912017" y="2005778"/>
+            <a:ext cx="2087288" cy="923331"/>
+          </a:xfrm>
+          <a:prstGeom prst="rect">
+            <a:avLst/>
+          </a:prstGeom>
+        </p:spPr>
+      </p:pic>
+      <p:pic>
+        <p:nvPicPr>
+          <p:cNvPr id="1028" name="Picture 4" descr="Living Kidney Donor Program | Temple Health">
+            <a:extLst>
+              <a:ext uri="{FF2B5EF4-FFF2-40B4-BE49-F238E27FC236}">
+                <a16:creationId xmlns:a16="http://schemas.microsoft.com/office/drawing/2014/main" id="{2F6400A5-B352-21D9-7AA6-0D7B2D2F9E6E}"/>
+              </a:ext>
+            </a:extLst>
+          </p:cNvPr>
+          <p:cNvPicPr>
+            <a:picLocks noChangeAspect="1" noChangeArrowheads="1"/>
+          </p:cNvPicPr>
+          <p:nvPr/>
+        </p:nvPicPr>
+        <p:blipFill>
+          <a:blip r:embed="rId6" cstate="email">
+            <a:extLst>
+              <a:ext uri="{28A0092B-C50C-407E-A947-70E740481C1C}">
+                <a14:useLocalDpi xmlns:a14="http://schemas.microsoft.com/office/drawing/2010/main"/>
+              </a:ext>
+            </a:extLst>
+          </a:blip>
+          <a:srcRect/>
+          <a:stretch>
+            <a:fillRect/>
+          </a:stretch>
+        </p:blipFill>
+        <p:spPr bwMode="auto">
+          <a:xfrm>
+            <a:off x="8807983" y="1673414"/>
+            <a:ext cx="1888236" cy="1258824"/>
+          </a:xfrm>
+          <a:prstGeom prst="rect">
+            <a:avLst/>
+          </a:prstGeom>
+          <a:noFill/>
+          <a:extLst>
+            <a:ext uri="{909E8E84-426E-40DD-AFC4-6F175D3DCCD1}">
+              <a14:hiddenFill xmlns:a14="http://schemas.microsoft.com/office/drawing/2010/main">
+                <a:solidFill>
+                  <a:srgbClr val="FFFFFF"/>
+                </a:solidFill>
+              </a14:hiddenFill>
+            </a:ext>
+          </a:extLst>
+        </p:spPr>
+      </p:pic>
+    </p:spTree>
+    <p:extLst>
+      <p:ext uri="{BB962C8B-B14F-4D97-AF65-F5344CB8AC3E}">
+        <p14:creationId xmlns:p14="http://schemas.microsoft.com/office/powerpoint/2010/main" val="1587584493"/>
+      </p:ext>
+    </p:extLst>
+  </p:cSld>
+  <p:clrMapOvr>
+    <a:masterClrMapping/>
+  </p:clrMapOvr>
+</p:sld>
+</file>
+
+<file path=ppt/slides/slide3.xml><?xml version="1.0" encoding="utf-8"?>
+<p:sld xmlns:a="http://schemas.openxmlformats.org/drawingml/2006/main" xmlns:r="http://schemas.openxmlformats.org/officeDocument/2006/relationships" xmlns:p="http://schemas.openxmlformats.org/presentationml/2006/main">
+  <p:cSld>
+    <p:spTree>
+      <p:nvGrpSpPr>
+        <p:cNvPr id="1" name=""/>
+        <p:cNvGrpSpPr/>
+        <p:nvPr/>
+      </p:nvGrpSpPr>
+      <p:grpSpPr>
+        <a:xfrm>
+          <a:off x="0" y="0"/>
+          <a:ext cx="0" cy="0"/>
+          <a:chOff x="0" y="0"/>
+          <a:chExt cx="0" cy="0"/>
+        </a:xfrm>
+      </p:grpSpPr>
+      <p:sp>
+        <p:nvSpPr>
+          <p:cNvPr id="2" name="TextBox 1">
+            <a:extLst>
+              <a:ext uri="{FF2B5EF4-FFF2-40B4-BE49-F238E27FC236}">
+                <a16:creationId xmlns:a16="http://schemas.microsoft.com/office/drawing/2014/main" id="{1BA3C32E-01F2-E933-AB54-FD491D6A6FF9}"/>
+              </a:ext>
+            </a:extLst>
+          </p:cNvPr>
+          <p:cNvSpPr txBox="1"/>
+          <p:nvPr/>
+        </p:nvSpPr>
+        <p:spPr>
+          <a:xfrm>
+            <a:off x="117969" y="91777"/>
+            <a:ext cx="3006589" cy="523220"/>
+          </a:xfrm>
+          <a:prstGeom prst="rect">
+            <a:avLst/>
+          </a:prstGeom>
+          <a:noFill/>
+        </p:spPr>
+        <p:txBody>
+          <a:bodyPr wrap="square" rtlCol="0">
+            <a:spAutoFit/>
+          </a:bodyPr>
+          <a:lstStyle/>
+          <a:p>
+            <a:r>
+              <a:rPr lang="en-US" sz="2800" b="1"/>
+              <a:t>Direct Response</a:t>
+            </a:r>
+          </a:p>
+        </p:txBody>
+      </p:sp>
+      <p:sp>
+        <p:nvSpPr>
+          <p:cNvPr id="3" name="TextBox 2">
+            <a:extLst>
+              <a:ext uri="{FF2B5EF4-FFF2-40B4-BE49-F238E27FC236}">
+                <a16:creationId xmlns:a16="http://schemas.microsoft.com/office/drawing/2014/main" id="{12A26FF9-FBA3-1961-D673-C38C1EC75F1A}"/>
+              </a:ext>
+            </a:extLst>
+          </p:cNvPr>
+          <p:cNvSpPr txBox="1"/>
+          <p:nvPr/>
+        </p:nvSpPr>
+        <p:spPr>
+          <a:xfrm>
+            <a:off x="227845" y="1255176"/>
+            <a:ext cx="5342696" cy="2462213"/>
+          </a:xfrm>
+          <a:prstGeom prst="rect">
+            <a:avLst/>
+          </a:prstGeom>
+          <a:solidFill>
+            <a:schemeClr val="accent4">
+              <a:lumMod val="20000"/>
+              <a:lumOff val="80000"/>
+            </a:schemeClr>
+          </a:solidFill>
+          <a:ln>
+            <a:solidFill>
+              <a:srgbClr val="FF0000"/>
+            </a:solidFill>
+          </a:ln>
+        </p:spPr>
+        <p:txBody>
+          <a:bodyPr wrap="square" rtlCol="0">
+            <a:spAutoFit/>
+          </a:bodyPr>
+          <a:lstStyle/>
+          <a:p>
+            <a:r>
+              <a:rPr lang="en-US" sz="1400" b="1">
+                <a:solidFill>
+                  <a:srgbClr val="FF0000"/>
+                </a:solidFill>
+              </a:rPr>
+              <a:t>Direct response marketing</a:t>
+            </a:r>
+            <a:r>
+              <a:rPr lang="en-US" sz="1400"/>
+              <a:t> </a:t>
+            </a:r>
+          </a:p>
+          <a:p>
+            <a:r>
+              <a:rPr lang="en-US" sz="1400"/>
+              <a:t>a.k.a "</a:t>
+            </a:r>
+            <a:r>
+              <a:rPr lang="en-US" sz="1400">
+                <a:solidFill>
+                  <a:srgbClr val="FF0000"/>
+                </a:solidFill>
+              </a:rPr>
+              <a:t>results required marketing</a:t>
+            </a:r>
+            <a:r>
+              <a:rPr lang="en-US" sz="1400"/>
+              <a:t>" (Dan Kennedy):</a:t>
+            </a:r>
+          </a:p>
+          <a:p>
+            <a:pPr marL="285750" indent="-285750">
+              <a:buFont typeface="Arial" panose="020B0604020202020204" pitchFamily="34" charset="0"/>
+              <a:buChar char="•"/>
+            </a:pPr>
+            <a:r>
+              <a:rPr lang="en-US" sz="1400"/>
+              <a:t>A marketing strategy where the goal is to encourage an immediate response from propsects or consumers</a:t>
+            </a:r>
+          </a:p>
+          <a:p>
+            <a:pPr marL="285750" indent="-285750">
+              <a:buFont typeface="Arial" panose="020B0604020202020204" pitchFamily="34" charset="0"/>
+              <a:buChar char="•"/>
+            </a:pPr>
+            <a:r>
+              <a:rPr lang="en-US" sz="1400"/>
+              <a:t>The response can be any action such as visiting a website, making a purchase or even just sharing a post on social media. </a:t>
+            </a:r>
+          </a:p>
+          <a:p>
+            <a:pPr marL="285750" indent="-285750">
+              <a:buFont typeface="Arial" panose="020B0604020202020204" pitchFamily="34" charset="0"/>
+              <a:buChar char="•"/>
+            </a:pPr>
+            <a:r>
+              <a:rPr lang="en-US" sz="1400"/>
+              <a:t>Direct response allows to measure, test, and improve effectiveness of your advertising very quickly.</a:t>
+            </a:r>
+          </a:p>
+          <a:p>
+            <a:pPr marL="285750" indent="-285750">
+              <a:buFont typeface="Arial" panose="020B0604020202020204" pitchFamily="34" charset="0"/>
+              <a:buChar char="•"/>
+            </a:pPr>
+            <a:r>
+              <a:rPr lang="en-US" sz="1400"/>
+              <a:t>Direct Response has its roots in mail order marketing.</a:t>
+            </a:r>
+          </a:p>
+          <a:p>
+            <a:pPr marL="285750" indent="-285750">
+              <a:buFont typeface="Arial" panose="020B0604020202020204" pitchFamily="34" charset="0"/>
+              <a:buChar char="•"/>
+            </a:pPr>
+            <a:r>
+              <a:rPr lang="en-US" sz="1400"/>
+              <a:t>Direct response contrasts with marketing activities that have long-term goals such as building a brand identity or raising awareness.</a:t>
+            </a:r>
+          </a:p>
+        </p:txBody>
+      </p:sp>
+      <p:sp>
+        <p:nvSpPr>
+          <p:cNvPr id="4" name="TextBox 3">
+            <a:extLst>
+              <a:ext uri="{FF2B5EF4-FFF2-40B4-BE49-F238E27FC236}">
+                <a16:creationId xmlns:a16="http://schemas.microsoft.com/office/drawing/2014/main" id="{B928DA49-85E8-AB52-3F10-45840A24B1F7}"/>
+              </a:ext>
+            </a:extLst>
+          </p:cNvPr>
+          <p:cNvSpPr txBox="1"/>
+          <p:nvPr/>
+        </p:nvSpPr>
+        <p:spPr>
+          <a:xfrm>
+            <a:off x="5994782" y="3624917"/>
+            <a:ext cx="2480426" cy="738664"/>
+          </a:xfrm>
+          <a:prstGeom prst="rect">
+            <a:avLst/>
+          </a:prstGeom>
+          <a:noFill/>
+        </p:spPr>
+        <p:txBody>
+          <a:bodyPr wrap="square" rtlCol="0">
+            <a:spAutoFit/>
+          </a:bodyPr>
+          <a:lstStyle/>
+          <a:p>
+            <a:pPr algn="ctr"/>
+            <a:r>
+              <a:rPr lang="en-US" sz="1400"/>
+              <a:t>"Only mail order people know </a:t>
+            </a:r>
+          </a:p>
+          <a:p>
+            <a:pPr algn="ctr"/>
+            <a:r>
+              <a:rPr lang="en-US" sz="1400"/>
+              <a:t>what they are doing"</a:t>
+            </a:r>
+          </a:p>
+          <a:p>
+            <a:pPr algn="ctr"/>
+            <a:r>
+              <a:rPr lang="en-US" sz="1400" b="1">
+                <a:solidFill>
+                  <a:srgbClr val="00B050"/>
+                </a:solidFill>
+              </a:rPr>
+              <a:t>David Ogilvy</a:t>
+            </a:r>
+          </a:p>
+        </p:txBody>
+      </p:sp>
+      <p:pic>
+        <p:nvPicPr>
+          <p:cNvPr id="5" name="Picture 4">
+            <a:extLst>
+              <a:ext uri="{FF2B5EF4-FFF2-40B4-BE49-F238E27FC236}">
+                <a16:creationId xmlns:a16="http://schemas.microsoft.com/office/drawing/2014/main" id="{DC85818A-F432-5D1C-663A-4018D75EECD3}"/>
+              </a:ext>
+            </a:extLst>
+          </p:cNvPr>
+          <p:cNvPicPr>
+            <a:picLocks noChangeAspect="1"/>
+          </p:cNvPicPr>
+          <p:nvPr/>
+        </p:nvPicPr>
+        <p:blipFill>
+          <a:blip r:embed="rId2" cstate="email">
+            <a:extLst>
+              <a:ext uri="{28A0092B-C50C-407E-A947-70E740481C1C}">
+                <a14:useLocalDpi xmlns:a14="http://schemas.microsoft.com/office/drawing/2010/main"/>
+              </a:ext>
+            </a:extLst>
+          </a:blip>
+          <a:stretch>
+            <a:fillRect/>
+          </a:stretch>
+        </p:blipFill>
+        <p:spPr>
+          <a:xfrm>
+            <a:off x="6118619" y="1349633"/>
+            <a:ext cx="2356589" cy="2273300"/>
+          </a:xfrm>
+          <a:prstGeom prst="rect">
+            <a:avLst/>
+          </a:prstGeom>
+        </p:spPr>
+      </p:pic>
+      <p:pic>
+        <p:nvPicPr>
+          <p:cNvPr id="3076" name="Picture 4" descr="A/B testing - Optimizely">
+            <a:extLst>
+              <a:ext uri="{FF2B5EF4-FFF2-40B4-BE49-F238E27FC236}">
+                <a16:creationId xmlns:a16="http://schemas.microsoft.com/office/drawing/2014/main" id="{C6A8F9CE-F81D-F585-0FDD-49617E1E3B61}"/>
+              </a:ext>
+            </a:extLst>
+          </p:cNvPr>
+          <p:cNvPicPr>
+            <a:picLocks noChangeAspect="1" noChangeArrowheads="1"/>
+          </p:cNvPicPr>
+          <p:nvPr/>
+        </p:nvPicPr>
+        <p:blipFill>
+          <a:blip r:embed="rId3" cstate="email">
+            <a:extLst>
+              <a:ext uri="{28A0092B-C50C-407E-A947-70E740481C1C}">
+                <a14:useLocalDpi xmlns:a14="http://schemas.microsoft.com/office/drawing/2010/main"/>
+              </a:ext>
+            </a:extLst>
+          </a:blip>
+          <a:srcRect/>
+          <a:stretch>
+            <a:fillRect/>
+          </a:stretch>
+        </p:blipFill>
+        <p:spPr bwMode="auto">
+          <a:xfrm>
+            <a:off x="2944395" y="4474527"/>
+            <a:ext cx="2918731" cy="1720850"/>
+          </a:xfrm>
+          <a:prstGeom prst="rect">
+            <a:avLst/>
+          </a:prstGeom>
+          <a:noFill/>
+          <a:extLst>
+            <a:ext uri="{909E8E84-426E-40DD-AFC4-6F175D3DCCD1}">
+              <a14:hiddenFill xmlns:a14="http://schemas.microsoft.com/office/drawing/2010/main">
+                <a:solidFill>
+                  <a:srgbClr val="FFFFFF"/>
+                </a:solidFill>
+              </a14:hiddenFill>
+            </a:ext>
+          </a:extLst>
+        </p:spPr>
+      </p:pic>
+      <p:sp>
+        <p:nvSpPr>
+          <p:cNvPr id="6" name="TextBox 5">
+            <a:extLst>
+              <a:ext uri="{FF2B5EF4-FFF2-40B4-BE49-F238E27FC236}">
+                <a16:creationId xmlns:a16="http://schemas.microsoft.com/office/drawing/2014/main" id="{7D696799-7494-07E4-9122-1C48EF575E79}"/>
+              </a:ext>
+            </a:extLst>
+          </p:cNvPr>
+          <p:cNvSpPr txBox="1"/>
+          <p:nvPr/>
+        </p:nvSpPr>
+        <p:spPr>
+          <a:xfrm>
+            <a:off x="2899193" y="6258282"/>
+            <a:ext cx="3009137" cy="369332"/>
+          </a:xfrm>
+          <a:prstGeom prst="rect">
+            <a:avLst/>
+          </a:prstGeom>
+          <a:noFill/>
+        </p:spPr>
+        <p:txBody>
+          <a:bodyPr wrap="square" rtlCol="0">
+            <a:spAutoFit/>
+          </a:bodyPr>
+          <a:lstStyle/>
+          <a:p>
+            <a:pPr algn="ctr"/>
+            <a:r>
+              <a:rPr lang="en-US"/>
+              <a:t>A/B split testing</a:t>
+            </a:r>
+          </a:p>
+        </p:txBody>
+      </p:sp>
+      <p:sp>
+        <p:nvSpPr>
+          <p:cNvPr id="7" name="TextBox 6">
+            <a:extLst>
+              <a:ext uri="{FF2B5EF4-FFF2-40B4-BE49-F238E27FC236}">
+                <a16:creationId xmlns:a16="http://schemas.microsoft.com/office/drawing/2014/main" id="{1ECF0BE7-14A4-86C4-CF96-9C4E8EB91FCB}"/>
+              </a:ext>
+            </a:extLst>
+          </p:cNvPr>
+          <p:cNvSpPr txBox="1"/>
+          <p:nvPr/>
+        </p:nvSpPr>
+        <p:spPr>
+          <a:xfrm>
+            <a:off x="8840904" y="3555770"/>
+            <a:ext cx="3009137" cy="1384995"/>
+          </a:xfrm>
+          <a:prstGeom prst="rect">
+            <a:avLst/>
+          </a:prstGeom>
+          <a:noFill/>
+        </p:spPr>
+        <p:txBody>
+          <a:bodyPr wrap="square" rtlCol="0">
+            <a:spAutoFit/>
+          </a:bodyPr>
+          <a:lstStyle/>
+          <a:p>
+            <a:pPr algn="ctr"/>
+            <a:r>
+              <a:rPr lang="en-US" sz="1400"/>
+              <a:t>"You’re NOT in the marketing business. You’re in the ARITHMETIC business. If your arithmetic doesn’t add up, you won’t have a business for very long. Start counting."</a:t>
+            </a:r>
+          </a:p>
+          <a:p>
+            <a:pPr algn="ctr"/>
+            <a:r>
+              <a:rPr lang="en-US" sz="1400" b="1">
+                <a:solidFill>
+                  <a:srgbClr val="00B050"/>
+                </a:solidFill>
+              </a:rPr>
+              <a:t>Gary Halbert</a:t>
+            </a:r>
+          </a:p>
+        </p:txBody>
+      </p:sp>
+      <p:pic>
+        <p:nvPicPr>
+          <p:cNvPr id="3080" name="Picture 8" descr="The Gary Halbert Letter - Dear Pop, Wherever you are, you'll appreciate  that many of us lessor mortals and shitweasels still celebrate your  birthday by visiting a book store and taking in">
+            <a:extLst>
+              <a:ext uri="{FF2B5EF4-FFF2-40B4-BE49-F238E27FC236}">
+                <a16:creationId xmlns:a16="http://schemas.microsoft.com/office/drawing/2014/main" id="{8D135D07-BEF7-348B-E21F-088CCB34DBFF}"/>
+              </a:ext>
+            </a:extLst>
+          </p:cNvPr>
+          <p:cNvPicPr>
+            <a:picLocks noChangeAspect="1" noChangeArrowheads="1"/>
+          </p:cNvPicPr>
+          <p:nvPr/>
+        </p:nvPicPr>
+        <p:blipFill>
+          <a:blip r:embed="rId4" cstate="email">
+            <a:extLst>
+              <a:ext uri="{28A0092B-C50C-407E-A947-70E740481C1C}">
+                <a14:useLocalDpi xmlns:a14="http://schemas.microsoft.com/office/drawing/2010/main"/>
+              </a:ext>
+            </a:extLst>
+          </a:blip>
+          <a:srcRect/>
+          <a:stretch>
+            <a:fillRect/>
+          </a:stretch>
+        </p:blipFill>
+        <p:spPr bwMode="auto">
+          <a:xfrm>
+            <a:off x="9588499" y="1349633"/>
+            <a:ext cx="1513948" cy="2158181"/>
+          </a:xfrm>
+          <a:prstGeom prst="rect">
+            <a:avLst/>
+          </a:prstGeom>
+          <a:noFill/>
+          <a:extLst>
+            <a:ext uri="{909E8E84-426E-40DD-AFC4-6F175D3DCCD1}">
+              <a14:hiddenFill xmlns:a14="http://schemas.microsoft.com/office/drawing/2010/main">
+                <a:solidFill>
+                  <a:srgbClr val="FFFFFF"/>
+                </a:solidFill>
+              </a14:hiddenFill>
+            </a:ext>
+          </a:extLst>
+        </p:spPr>
+      </p:pic>
       <p:sp>
         <p:nvSpPr>
           <p:cNvPr id="8" name="TextBox 7">
             <a:extLst>
               <a:ext uri="{FF2B5EF4-FFF2-40B4-BE49-F238E27FC236}">
-                <a16:creationId xmlns:a16="http://schemas.microsoft.com/office/drawing/2014/main" id="{907744F2-C292-F900-C46E-5D6FC01C106D}"/>
+                <a16:creationId xmlns:a16="http://schemas.microsoft.com/office/drawing/2014/main" id="{A7C045A9-5368-9957-AA45-90847F555C79}"/>
               </a:ext>
             </a:extLst>
           </p:cNvPr>
@@ -4447,8 +5228,129 @@
         </p:nvSpPr>
         <p:spPr>
           <a:xfrm>
-            <a:off x="3318477" y="2274389"/>
-            <a:ext cx="2006600" cy="1877437"/>
+            <a:off x="6961230" y="5685300"/>
+            <a:ext cx="4141217" cy="369332"/>
+          </a:xfrm>
+          <a:prstGeom prst="rect">
+            <a:avLst/>
+          </a:prstGeom>
+          <a:noFill/>
+        </p:spPr>
+        <p:txBody>
+          <a:bodyPr wrap="square" rtlCol="0">
+            <a:spAutoFit/>
+          </a:bodyPr>
+          <a:lstStyle/>
+          <a:p>
+            <a:r>
+              <a:rPr lang="en-US">
+                <a:solidFill>
+                  <a:srgbClr val="00B0F0"/>
+                </a:solidFill>
+              </a:rPr>
+              <a:t>What you can measure – you can improve</a:t>
+            </a:r>
+          </a:p>
+        </p:txBody>
+      </p:sp>
+    </p:spTree>
+    <p:extLst>
+      <p:ext uri="{BB962C8B-B14F-4D97-AF65-F5344CB8AC3E}">
+        <p14:creationId xmlns:p14="http://schemas.microsoft.com/office/powerpoint/2010/main" val="101491295"/>
+      </p:ext>
+    </p:extLst>
+  </p:cSld>
+  <p:clrMapOvr>
+    <a:masterClrMapping/>
+  </p:clrMapOvr>
+</p:sld>
+</file>
+
+<file path=ppt/slides/slide4.xml><?xml version="1.0" encoding="utf-8"?>
+<p:sld xmlns:a="http://schemas.openxmlformats.org/drawingml/2006/main" xmlns:r="http://schemas.openxmlformats.org/officeDocument/2006/relationships" xmlns:p="http://schemas.openxmlformats.org/presentationml/2006/main">
+  <p:cSld>
+    <p:spTree>
+      <p:nvGrpSpPr>
+        <p:cNvPr id="1" name=""/>
+        <p:cNvGrpSpPr/>
+        <p:nvPr/>
+      </p:nvGrpSpPr>
+      <p:grpSpPr>
+        <a:xfrm>
+          <a:off x="0" y="0"/>
+          <a:ext cx="0" cy="0"/>
+          <a:chOff x="0" y="0"/>
+          <a:chExt cx="0" cy="0"/>
+        </a:xfrm>
+      </p:grpSpPr>
+      <p:sp>
+        <p:nvSpPr>
+          <p:cNvPr id="4" name="Rectangle 3">
+            <a:extLst>
+              <a:ext uri="{FF2B5EF4-FFF2-40B4-BE49-F238E27FC236}">
+                <a16:creationId xmlns:a16="http://schemas.microsoft.com/office/drawing/2014/main" id="{B7F35B93-487F-1D49-A679-7ACD78250CA1}"/>
+              </a:ext>
+            </a:extLst>
+          </p:cNvPr>
+          <p:cNvSpPr/>
+          <p:nvPr/>
+        </p:nvSpPr>
+        <p:spPr>
+          <a:xfrm>
+            <a:off x="5693663" y="19694"/>
+            <a:ext cx="6459725" cy="1323439"/>
+          </a:xfrm>
+          <a:prstGeom prst="rect">
+            <a:avLst/>
+          </a:prstGeom>
+        </p:spPr>
+        <p:txBody>
+          <a:bodyPr wrap="square">
+            <a:spAutoFit/>
+          </a:bodyPr>
+          <a:lstStyle/>
+          <a:p>
+            <a:pPr algn="ctr"/>
+            <a:r>
+              <a:rPr lang="en-US" sz="4000" b="1" dirty="0">
+                <a:solidFill>
+                  <a:srgbClr val="00B0F0"/>
+                </a:solidFill>
+                <a:latin typeface="Arial" panose="020B0604020202020204" pitchFamily="34" charset="0"/>
+              </a:rPr>
+              <a:t>Typical Marketing Funnel </a:t>
+            </a:r>
+          </a:p>
+          <a:p>
+            <a:pPr algn="ctr"/>
+            <a:r>
+              <a:rPr lang="en-US" sz="4000" b="1" dirty="0">
+                <a:solidFill>
+                  <a:srgbClr val="00B0F0"/>
+                </a:solidFill>
+                <a:latin typeface="Arial" panose="020B0604020202020204" pitchFamily="34" charset="0"/>
+              </a:rPr>
+              <a:t>for Expensive Service</a:t>
+            </a:r>
+          </a:p>
+        </p:txBody>
+      </p:sp>
+      <p:sp>
+        <p:nvSpPr>
+          <p:cNvPr id="2" name="TextBox 1">
+            <a:extLst>
+              <a:ext uri="{FF2B5EF4-FFF2-40B4-BE49-F238E27FC236}">
+                <a16:creationId xmlns:a16="http://schemas.microsoft.com/office/drawing/2014/main" id="{DBD59AE5-D04D-38DA-9DF7-81B0D93E17DE}"/>
+              </a:ext>
+            </a:extLst>
+          </p:cNvPr>
+          <p:cNvSpPr txBox="1"/>
+          <p:nvPr/>
+        </p:nvSpPr>
+        <p:spPr>
+          <a:xfrm>
+            <a:off x="279400" y="1676400"/>
+            <a:ext cx="2006600" cy="2308324"/>
           </a:xfrm>
           <a:prstGeom prst="rect">
             <a:avLst/>
@@ -4467,7 +5369,7 @@
                   <a:srgbClr val="FF0000"/>
                 </a:solidFill>
               </a:rPr>
-              <a:t>Landing Pages</a:t>
+              <a:t>Information Hooks</a:t>
             </a:r>
           </a:p>
           <a:p>
@@ -4477,14 +5379,207 @@
                   <a:srgbClr val="00B050"/>
                 </a:solidFill>
               </a:rPr>
-              <a:t>10-20 targeted pages</a:t>
+              <a:t>Hundreds/thousands of </a:t>
+            </a:r>
+          </a:p>
+          <a:p>
+            <a:pPr marL="285750" indent="-285750">
+              <a:buFont typeface="Arial" panose="020B0604020202020204" pitchFamily="34" charset="0"/>
+              <a:buChar char="•"/>
+            </a:pPr>
+            <a:r>
+              <a:rPr lang="en-US" sz="1400"/>
+              <a:t>YouTube Videos</a:t>
+            </a:r>
+          </a:p>
+          <a:p>
+            <a:pPr marL="285750" indent="-285750">
+              <a:buFont typeface="Arial" panose="020B0604020202020204" pitchFamily="34" charset="0"/>
+              <a:buChar char="•"/>
+            </a:pPr>
+            <a:r>
+              <a:rPr lang="en-US" sz="1400"/>
+              <a:t>Linkedin Posts</a:t>
+            </a:r>
+          </a:p>
+          <a:p>
+            <a:pPr marL="285750" indent="-285750">
+              <a:buFont typeface="Arial" panose="020B0604020202020204" pitchFamily="34" charset="0"/>
+              <a:buChar char="•"/>
+            </a:pPr>
+            <a:r>
+              <a:rPr lang="en-US" sz="1400"/>
+              <a:t>Mewdium Articles</a:t>
+            </a:r>
+          </a:p>
+          <a:p>
+            <a:pPr marL="285750" indent="-285750">
+              <a:buFont typeface="Arial" panose="020B0604020202020204" pitchFamily="34" charset="0"/>
+              <a:buChar char="•"/>
+            </a:pPr>
+            <a:r>
+              <a:rPr lang="en-US" sz="1400"/>
+              <a:t>Quora</a:t>
+            </a:r>
+          </a:p>
+          <a:p>
+            <a:pPr marL="285750" indent="-285750">
+              <a:buFont typeface="Arial" panose="020B0604020202020204" pitchFamily="34" charset="0"/>
+              <a:buChar char="•"/>
+            </a:pPr>
+            <a:r>
+              <a:rPr lang="en-US" sz="1400"/>
+              <a:t>StackOverflow</a:t>
+            </a:r>
+          </a:p>
+          <a:p>
+            <a:pPr marL="285750" indent="-285750">
+              <a:buFont typeface="Arial" panose="020B0604020202020204" pitchFamily="34" charset="0"/>
+              <a:buChar char="•"/>
+            </a:pPr>
+            <a:r>
+              <a:rPr lang="en-US" sz="1400"/>
+              <a:t>Facebook</a:t>
+            </a:r>
+          </a:p>
+          <a:p>
+            <a:pPr marL="285750" indent="-285750">
+              <a:buFont typeface="Arial" panose="020B0604020202020204" pitchFamily="34" charset="0"/>
+              <a:buChar char="•"/>
+            </a:pPr>
+            <a:r>
+              <a:rPr lang="en-US" sz="1400"/>
+              <a:t>Instagram</a:t>
+            </a:r>
+          </a:p>
+          <a:p>
+            <a:pPr marL="285750" indent="-285750">
+              <a:buFont typeface="Arial" panose="020B0604020202020204" pitchFamily="34" charset="0"/>
+              <a:buChar char="•"/>
+            </a:pPr>
+            <a:r>
+              <a:rPr lang="en-US" sz="1400"/>
+              <a:t>etc. </a:t>
+            </a:r>
+          </a:p>
+        </p:txBody>
+      </p:sp>
+      <p:sp>
+        <p:nvSpPr>
+          <p:cNvPr id="6" name="TextBox 5">
+            <a:extLst>
+              <a:ext uri="{FF2B5EF4-FFF2-40B4-BE49-F238E27FC236}">
+                <a16:creationId xmlns:a16="http://schemas.microsoft.com/office/drawing/2014/main" id="{7D0ECD3E-FACA-894F-9D1E-634527C097F3}"/>
+              </a:ext>
+            </a:extLst>
+          </p:cNvPr>
+          <p:cNvSpPr txBox="1"/>
+          <p:nvPr/>
+        </p:nvSpPr>
+        <p:spPr>
+          <a:xfrm>
+            <a:off x="391160" y="4685341"/>
+            <a:ext cx="1473200" cy="307777"/>
+          </a:xfrm>
+          <a:prstGeom prst="rect">
+            <a:avLst/>
+          </a:prstGeom>
+          <a:noFill/>
+        </p:spPr>
+        <p:txBody>
+          <a:bodyPr wrap="square" rtlCol="0">
+            <a:spAutoFit/>
+          </a:bodyPr>
+          <a:lstStyle/>
+          <a:p>
+            <a:pPr algn="ctr"/>
+            <a:r>
+              <a:rPr lang="en-US" sz="1400"/>
+              <a:t>Subscriptions</a:t>
+            </a:r>
+          </a:p>
+        </p:txBody>
+      </p:sp>
+      <p:sp>
+        <p:nvSpPr>
+          <p:cNvPr id="8" name="TextBox 7">
+            <a:extLst>
+              <a:ext uri="{FF2B5EF4-FFF2-40B4-BE49-F238E27FC236}">
+                <a16:creationId xmlns:a16="http://schemas.microsoft.com/office/drawing/2014/main" id="{907744F2-C292-F900-C46E-5D6FC01C106D}"/>
+              </a:ext>
+            </a:extLst>
+          </p:cNvPr>
+          <p:cNvSpPr txBox="1"/>
+          <p:nvPr/>
+        </p:nvSpPr>
+        <p:spPr>
+          <a:xfrm>
+            <a:off x="3163170" y="2231857"/>
+            <a:ext cx="2451098" cy="2092881"/>
+          </a:xfrm>
+          <a:prstGeom prst="rect">
+            <a:avLst/>
+          </a:prstGeom>
+          <a:noFill/>
+        </p:spPr>
+        <p:txBody>
+          <a:bodyPr wrap="square" rtlCol="0">
+            <a:spAutoFit/>
+          </a:bodyPr>
+          <a:lstStyle/>
+          <a:p>
+            <a:r>
+              <a:rPr lang="en-US">
+                <a:solidFill>
+                  <a:srgbClr val="FF0000"/>
+                </a:solidFill>
+              </a:rPr>
+              <a:t>Email Capture:</a:t>
+            </a:r>
+          </a:p>
+          <a:p>
+            <a:r>
+              <a:rPr lang="en-US" sz="1400">
+                <a:solidFill>
+                  <a:srgbClr val="FF0000"/>
+                </a:solidFill>
+              </a:rPr>
+              <a:t>Website Landing Pages</a:t>
+            </a:r>
+          </a:p>
+          <a:p>
+            <a:r>
+              <a:rPr lang="en-US" sz="1400">
+                <a:solidFill>
+                  <a:srgbClr val="00B050"/>
+                </a:solidFill>
+              </a:rPr>
+              <a:t>10-20 website landing pages</a:t>
             </a:r>
             <a:endParaRPr lang="en-US" sz="1400"/>
           </a:p>
           <a:p>
             <a:r>
               <a:rPr lang="en-US" sz="1400"/>
-              <a:t>Offer Free Reports in exchange for email address. Reports promise to explain how to avoid mistakes and unnecessary costs, etc.</a:t>
+              <a:t>Offer Free Reports in exchange for </a:t>
+            </a:r>
+            <a:r>
+              <a:rPr lang="en-US" sz="1400">
+                <a:solidFill>
+                  <a:srgbClr val="FF0000"/>
+                </a:solidFill>
+              </a:rPr>
+              <a:t>email address</a:t>
+            </a:r>
+            <a:r>
+              <a:rPr lang="en-US" sz="1400"/>
+              <a:t>. </a:t>
+            </a:r>
+          </a:p>
+          <a:p>
+            <a:r>
+              <a:rPr lang="en-US" sz="1400"/>
+              <a:t>The Free Repots explains how to avoid costly mistakes, how to do things easier, cheaper, faster, more effectively, etc.</a:t>
             </a:r>
           </a:p>
         </p:txBody>
@@ -4503,7 +5598,7 @@
         </p:nvSpPr>
         <p:spPr>
           <a:xfrm>
-            <a:off x="6184902" y="2562427"/>
+            <a:off x="6536704" y="2495642"/>
             <a:ext cx="2451098" cy="1231106"/>
           </a:xfrm>
           <a:prstGeom prst="rect">
@@ -4539,20 +5634,24 @@
           </a:p>
           <a:p>
             <a:r>
+              <a:rPr lang="en-US" sz="1400">
+                <a:solidFill>
+                  <a:srgbClr val="FF0000"/>
+                </a:solidFill>
+              </a:rPr>
+              <a:t>Builds relationship</a:t>
+            </a:r>
+          </a:p>
+          <a:p>
+            <a:r>
               <a:rPr lang="en-US" sz="1400"/>
-              <a:t>Builds relationship</a:t>
+              <a:t>Educational Marketing</a:t>
             </a:r>
           </a:p>
           <a:p>
             <a:r>
               <a:rPr lang="en-US" sz="1400"/>
-              <a:t>Build trust</a:t>
-            </a:r>
-          </a:p>
-          <a:p>
-            <a:r>
-              <a:rPr lang="en-US" sz="1400"/>
-              <a:t>Triggers Sales</a:t>
+              <a:t>Build trust, Triggers Sales</a:t>
             </a:r>
           </a:p>
         </p:txBody>
@@ -4571,7 +5670,7 @@
         </p:nvSpPr>
         <p:spPr>
           <a:xfrm>
-            <a:off x="9055100" y="2799040"/>
+            <a:off x="9661481" y="2922522"/>
             <a:ext cx="1498600" cy="584775"/>
           </a:xfrm>
           <a:prstGeom prst="rect">
@@ -4660,7 +5759,7 @@
         </p:nvCxnSpPr>
         <p:spPr>
           <a:xfrm flipV="1">
-            <a:off x="762000" y="3793533"/>
+            <a:off x="762000" y="3879798"/>
             <a:ext cx="9956800" cy="1967881"/>
           </a:xfrm>
           <a:prstGeom prst="line">
@@ -4688,10 +5787,4883 @@
           </a:fontRef>
         </p:style>
       </p:cxnSp>
+      <p:sp>
+        <p:nvSpPr>
+          <p:cNvPr id="3" name="TextBox 2">
+            <a:extLst>
+              <a:ext uri="{FF2B5EF4-FFF2-40B4-BE49-F238E27FC236}">
+                <a16:creationId xmlns:a16="http://schemas.microsoft.com/office/drawing/2014/main" id="{6BCC68EE-9FBD-003E-1CA1-7841A42F09D0}"/>
+              </a:ext>
+            </a:extLst>
+          </p:cNvPr>
+          <p:cNvSpPr txBox="1"/>
+          <p:nvPr/>
+        </p:nvSpPr>
+        <p:spPr>
+          <a:xfrm>
+            <a:off x="6606755" y="5213329"/>
+            <a:ext cx="2537245" cy="646331"/>
+          </a:xfrm>
+          <a:prstGeom prst="rect">
+            <a:avLst/>
+          </a:prstGeom>
+          <a:noFill/>
+        </p:spPr>
+        <p:txBody>
+          <a:bodyPr wrap="square" rtlCol="0">
+            <a:spAutoFit/>
+          </a:bodyPr>
+          <a:lstStyle/>
+          <a:p>
+            <a:pPr algn="ctr"/>
+            <a:r>
+              <a:rPr lang="en-US" b="1">
+                <a:solidFill>
+                  <a:srgbClr val="00B0F0"/>
+                </a:solidFill>
+              </a:rPr>
+              <a:t>Marketing is All About </a:t>
+            </a:r>
+          </a:p>
+          <a:p>
+            <a:pPr algn="ctr"/>
+            <a:r>
+              <a:rPr lang="en-US" b="1">
+                <a:solidFill>
+                  <a:srgbClr val="00B0F0"/>
+                </a:solidFill>
+              </a:rPr>
+              <a:t>Building Relationships</a:t>
+            </a:r>
+          </a:p>
+        </p:txBody>
+      </p:sp>
+      <p:cxnSp>
+        <p:nvCxnSpPr>
+          <p:cNvPr id="10" name="Straight Arrow Connector 9">
+            <a:extLst>
+              <a:ext uri="{FF2B5EF4-FFF2-40B4-BE49-F238E27FC236}">
+                <a16:creationId xmlns:a16="http://schemas.microsoft.com/office/drawing/2014/main" id="{BF2F82CC-19BF-34DF-2E65-B216FA835FE7}"/>
+              </a:ext>
+            </a:extLst>
+          </p:cNvPr>
+          <p:cNvCxnSpPr>
+            <a:cxnSpLocks/>
+          </p:cNvCxnSpPr>
+          <p:nvPr/>
+        </p:nvCxnSpPr>
+        <p:spPr>
+          <a:xfrm>
+            <a:off x="1127760" y="3793533"/>
+            <a:ext cx="0" cy="809831"/>
+          </a:xfrm>
+          <a:prstGeom prst="straightConnector1">
+            <a:avLst/>
+          </a:prstGeom>
+          <a:ln w="76200">
+            <a:solidFill>
+              <a:srgbClr val="92D050"/>
+            </a:solidFill>
+            <a:headEnd type="triangle"/>
+            <a:tailEnd type="triangle"/>
+          </a:ln>
+        </p:spPr>
+        <p:style>
+          <a:lnRef idx="1">
+            <a:schemeClr val="accent1"/>
+          </a:lnRef>
+          <a:fillRef idx="0">
+            <a:schemeClr val="accent1"/>
+          </a:fillRef>
+          <a:effectRef idx="0">
+            <a:schemeClr val="accent1"/>
+          </a:effectRef>
+          <a:fontRef idx="minor">
+            <a:schemeClr val="tx1"/>
+          </a:fontRef>
+        </p:style>
+      </p:cxnSp>
+      <p:sp>
+        <p:nvSpPr>
+          <p:cNvPr id="13" name="Oval 12">
+            <a:extLst>
+              <a:ext uri="{FF2B5EF4-FFF2-40B4-BE49-F238E27FC236}">
+                <a16:creationId xmlns:a16="http://schemas.microsoft.com/office/drawing/2014/main" id="{F0915E2D-137D-F463-5DF6-F8AC3A806CAD}"/>
+              </a:ext>
+            </a:extLst>
+          </p:cNvPr>
+          <p:cNvSpPr/>
+          <p:nvPr/>
+        </p:nvSpPr>
+        <p:spPr>
+          <a:xfrm>
+            <a:off x="6594791" y="3867761"/>
+            <a:ext cx="130594" cy="130594"/>
+          </a:xfrm>
+          <a:prstGeom prst="ellipse">
+            <a:avLst/>
+          </a:prstGeom>
+        </p:spPr>
+        <p:style>
+          <a:lnRef idx="2">
+            <a:schemeClr val="accent1">
+              <a:shade val="50000"/>
+            </a:schemeClr>
+          </a:lnRef>
+          <a:fillRef idx="1">
+            <a:schemeClr val="accent1"/>
+          </a:fillRef>
+          <a:effectRef idx="0">
+            <a:schemeClr val="accent1"/>
+          </a:effectRef>
+          <a:fontRef idx="minor">
+            <a:schemeClr val="lt1"/>
+          </a:fontRef>
+        </p:style>
+        <p:txBody>
+          <a:bodyPr rtlCol="0" anchor="ctr"/>
+          <a:lstStyle/>
+          <a:p>
+            <a:pPr algn="ctr"/>
+            <a:endParaRPr lang="en-US"/>
+          </a:p>
+        </p:txBody>
+      </p:sp>
+      <p:sp>
+        <p:nvSpPr>
+          <p:cNvPr id="14" name="Oval 13">
+            <a:extLst>
+              <a:ext uri="{FF2B5EF4-FFF2-40B4-BE49-F238E27FC236}">
+                <a16:creationId xmlns:a16="http://schemas.microsoft.com/office/drawing/2014/main" id="{75623690-EECA-8552-EA9A-C5F1745571B3}"/>
+              </a:ext>
+            </a:extLst>
+          </p:cNvPr>
+          <p:cNvSpPr/>
+          <p:nvPr/>
+        </p:nvSpPr>
+        <p:spPr>
+          <a:xfrm>
+            <a:off x="6830038" y="3867761"/>
+            <a:ext cx="130594" cy="130594"/>
+          </a:xfrm>
+          <a:prstGeom prst="ellipse">
+            <a:avLst/>
+          </a:prstGeom>
+        </p:spPr>
+        <p:style>
+          <a:lnRef idx="2">
+            <a:schemeClr val="accent1">
+              <a:shade val="50000"/>
+            </a:schemeClr>
+          </a:lnRef>
+          <a:fillRef idx="1">
+            <a:schemeClr val="accent1"/>
+          </a:fillRef>
+          <a:effectRef idx="0">
+            <a:schemeClr val="accent1"/>
+          </a:effectRef>
+          <a:fontRef idx="minor">
+            <a:schemeClr val="lt1"/>
+          </a:fontRef>
+        </p:style>
+        <p:txBody>
+          <a:bodyPr rtlCol="0" anchor="ctr"/>
+          <a:lstStyle/>
+          <a:p>
+            <a:pPr algn="ctr"/>
+            <a:endParaRPr lang="en-US"/>
+          </a:p>
+        </p:txBody>
+      </p:sp>
+      <p:sp>
+        <p:nvSpPr>
+          <p:cNvPr id="15" name="Oval 14">
+            <a:extLst>
+              <a:ext uri="{FF2B5EF4-FFF2-40B4-BE49-F238E27FC236}">
+                <a16:creationId xmlns:a16="http://schemas.microsoft.com/office/drawing/2014/main" id="{6B7D20F8-672F-5710-8457-33E360572E22}"/>
+              </a:ext>
+            </a:extLst>
+          </p:cNvPr>
+          <p:cNvSpPr/>
+          <p:nvPr/>
+        </p:nvSpPr>
+        <p:spPr>
+          <a:xfrm>
+            <a:off x="7065285" y="3867761"/>
+            <a:ext cx="130594" cy="130594"/>
+          </a:xfrm>
+          <a:prstGeom prst="ellipse">
+            <a:avLst/>
+          </a:prstGeom>
+        </p:spPr>
+        <p:style>
+          <a:lnRef idx="2">
+            <a:schemeClr val="accent1">
+              <a:shade val="50000"/>
+            </a:schemeClr>
+          </a:lnRef>
+          <a:fillRef idx="1">
+            <a:schemeClr val="accent1"/>
+          </a:fillRef>
+          <a:effectRef idx="0">
+            <a:schemeClr val="accent1"/>
+          </a:effectRef>
+          <a:fontRef idx="minor">
+            <a:schemeClr val="lt1"/>
+          </a:fontRef>
+        </p:style>
+        <p:txBody>
+          <a:bodyPr rtlCol="0" anchor="ctr"/>
+          <a:lstStyle/>
+          <a:p>
+            <a:pPr algn="ctr"/>
+            <a:endParaRPr lang="en-US"/>
+          </a:p>
+        </p:txBody>
+      </p:sp>
+      <p:sp>
+        <p:nvSpPr>
+          <p:cNvPr id="16" name="Oval 15">
+            <a:extLst>
+              <a:ext uri="{FF2B5EF4-FFF2-40B4-BE49-F238E27FC236}">
+                <a16:creationId xmlns:a16="http://schemas.microsoft.com/office/drawing/2014/main" id="{32FE7564-EBE3-601C-9933-AFD33CA0FF17}"/>
+              </a:ext>
+            </a:extLst>
+          </p:cNvPr>
+          <p:cNvSpPr/>
+          <p:nvPr/>
+        </p:nvSpPr>
+        <p:spPr>
+          <a:xfrm>
+            <a:off x="7300532" y="3867761"/>
+            <a:ext cx="130594" cy="130594"/>
+          </a:xfrm>
+          <a:prstGeom prst="ellipse">
+            <a:avLst/>
+          </a:prstGeom>
+        </p:spPr>
+        <p:style>
+          <a:lnRef idx="2">
+            <a:schemeClr val="accent1">
+              <a:shade val="50000"/>
+            </a:schemeClr>
+          </a:lnRef>
+          <a:fillRef idx="1">
+            <a:schemeClr val="accent1"/>
+          </a:fillRef>
+          <a:effectRef idx="0">
+            <a:schemeClr val="accent1"/>
+          </a:effectRef>
+          <a:fontRef idx="minor">
+            <a:schemeClr val="lt1"/>
+          </a:fontRef>
+        </p:style>
+        <p:txBody>
+          <a:bodyPr rtlCol="0" anchor="ctr"/>
+          <a:lstStyle/>
+          <a:p>
+            <a:pPr algn="ctr"/>
+            <a:endParaRPr lang="en-US"/>
+          </a:p>
+        </p:txBody>
+      </p:sp>
+      <p:sp>
+        <p:nvSpPr>
+          <p:cNvPr id="18" name="Oval 17">
+            <a:extLst>
+              <a:ext uri="{FF2B5EF4-FFF2-40B4-BE49-F238E27FC236}">
+                <a16:creationId xmlns:a16="http://schemas.microsoft.com/office/drawing/2014/main" id="{703A4E67-0D11-8FD4-556D-50CE588A6DF0}"/>
+              </a:ext>
+            </a:extLst>
+          </p:cNvPr>
+          <p:cNvSpPr/>
+          <p:nvPr/>
+        </p:nvSpPr>
+        <p:spPr>
+          <a:xfrm>
+            <a:off x="7535779" y="3867761"/>
+            <a:ext cx="130594" cy="130594"/>
+          </a:xfrm>
+          <a:prstGeom prst="ellipse">
+            <a:avLst/>
+          </a:prstGeom>
+        </p:spPr>
+        <p:style>
+          <a:lnRef idx="2">
+            <a:schemeClr val="accent1">
+              <a:shade val="50000"/>
+            </a:schemeClr>
+          </a:lnRef>
+          <a:fillRef idx="1">
+            <a:schemeClr val="accent1"/>
+          </a:fillRef>
+          <a:effectRef idx="0">
+            <a:schemeClr val="accent1"/>
+          </a:effectRef>
+          <a:fontRef idx="minor">
+            <a:schemeClr val="lt1"/>
+          </a:fontRef>
+        </p:style>
+        <p:txBody>
+          <a:bodyPr rtlCol="0" anchor="ctr"/>
+          <a:lstStyle/>
+          <a:p>
+            <a:pPr algn="ctr"/>
+            <a:endParaRPr lang="en-US"/>
+          </a:p>
+        </p:txBody>
+      </p:sp>
+      <p:sp>
+        <p:nvSpPr>
+          <p:cNvPr id="19" name="Oval 18">
+            <a:extLst>
+              <a:ext uri="{FF2B5EF4-FFF2-40B4-BE49-F238E27FC236}">
+                <a16:creationId xmlns:a16="http://schemas.microsoft.com/office/drawing/2014/main" id="{A1F55F18-155C-C290-057D-FEF9ADAA9ED7}"/>
+              </a:ext>
+            </a:extLst>
+          </p:cNvPr>
+          <p:cNvSpPr/>
+          <p:nvPr/>
+        </p:nvSpPr>
+        <p:spPr>
+          <a:xfrm>
+            <a:off x="7771026" y="3867761"/>
+            <a:ext cx="130594" cy="130594"/>
+          </a:xfrm>
+          <a:prstGeom prst="ellipse">
+            <a:avLst/>
+          </a:prstGeom>
+        </p:spPr>
+        <p:style>
+          <a:lnRef idx="2">
+            <a:schemeClr val="accent1">
+              <a:shade val="50000"/>
+            </a:schemeClr>
+          </a:lnRef>
+          <a:fillRef idx="1">
+            <a:schemeClr val="accent1"/>
+          </a:fillRef>
+          <a:effectRef idx="0">
+            <a:schemeClr val="accent1"/>
+          </a:effectRef>
+          <a:fontRef idx="minor">
+            <a:schemeClr val="lt1"/>
+          </a:fontRef>
+        </p:style>
+        <p:txBody>
+          <a:bodyPr rtlCol="0" anchor="ctr"/>
+          <a:lstStyle/>
+          <a:p>
+            <a:pPr algn="ctr"/>
+            <a:endParaRPr lang="en-US"/>
+          </a:p>
+        </p:txBody>
+      </p:sp>
+      <p:sp>
+        <p:nvSpPr>
+          <p:cNvPr id="22" name="Oval 21">
+            <a:extLst>
+              <a:ext uri="{FF2B5EF4-FFF2-40B4-BE49-F238E27FC236}">
+                <a16:creationId xmlns:a16="http://schemas.microsoft.com/office/drawing/2014/main" id="{CCFAAA32-AD1E-50B2-9FA5-AEAD096CC0E9}"/>
+              </a:ext>
+            </a:extLst>
+          </p:cNvPr>
+          <p:cNvSpPr/>
+          <p:nvPr/>
+        </p:nvSpPr>
+        <p:spPr>
+          <a:xfrm>
+            <a:off x="8006273" y="3867761"/>
+            <a:ext cx="130594" cy="130594"/>
+          </a:xfrm>
+          <a:prstGeom prst="ellipse">
+            <a:avLst/>
+          </a:prstGeom>
+        </p:spPr>
+        <p:style>
+          <a:lnRef idx="2">
+            <a:schemeClr val="accent1">
+              <a:shade val="50000"/>
+            </a:schemeClr>
+          </a:lnRef>
+          <a:fillRef idx="1">
+            <a:schemeClr val="accent1"/>
+          </a:fillRef>
+          <a:effectRef idx="0">
+            <a:schemeClr val="accent1"/>
+          </a:effectRef>
+          <a:fontRef idx="minor">
+            <a:schemeClr val="lt1"/>
+          </a:fontRef>
+        </p:style>
+        <p:txBody>
+          <a:bodyPr rtlCol="0" anchor="ctr"/>
+          <a:lstStyle/>
+          <a:p>
+            <a:pPr algn="ctr"/>
+            <a:endParaRPr lang="en-US"/>
+          </a:p>
+        </p:txBody>
+      </p:sp>
+      <p:sp>
+        <p:nvSpPr>
+          <p:cNvPr id="23" name="Oval 22">
+            <a:extLst>
+              <a:ext uri="{FF2B5EF4-FFF2-40B4-BE49-F238E27FC236}">
+                <a16:creationId xmlns:a16="http://schemas.microsoft.com/office/drawing/2014/main" id="{C2C39B53-F979-CAB4-43C1-0806CACCDADD}"/>
+              </a:ext>
+            </a:extLst>
+          </p:cNvPr>
+          <p:cNvSpPr/>
+          <p:nvPr/>
+        </p:nvSpPr>
+        <p:spPr>
+          <a:xfrm>
+            <a:off x="8241520" y="3867761"/>
+            <a:ext cx="130594" cy="130594"/>
+          </a:xfrm>
+          <a:prstGeom prst="ellipse">
+            <a:avLst/>
+          </a:prstGeom>
+        </p:spPr>
+        <p:style>
+          <a:lnRef idx="2">
+            <a:schemeClr val="accent1">
+              <a:shade val="50000"/>
+            </a:schemeClr>
+          </a:lnRef>
+          <a:fillRef idx="1">
+            <a:schemeClr val="accent1"/>
+          </a:fillRef>
+          <a:effectRef idx="0">
+            <a:schemeClr val="accent1"/>
+          </a:effectRef>
+          <a:fontRef idx="minor">
+            <a:schemeClr val="lt1"/>
+          </a:fontRef>
+        </p:style>
+        <p:txBody>
+          <a:bodyPr rtlCol="0" anchor="ctr"/>
+          <a:lstStyle/>
+          <a:p>
+            <a:pPr algn="ctr"/>
+            <a:endParaRPr lang="en-US"/>
+          </a:p>
+        </p:txBody>
+      </p:sp>
+      <p:sp>
+        <p:nvSpPr>
+          <p:cNvPr id="24" name="Oval 23">
+            <a:extLst>
+              <a:ext uri="{FF2B5EF4-FFF2-40B4-BE49-F238E27FC236}">
+                <a16:creationId xmlns:a16="http://schemas.microsoft.com/office/drawing/2014/main" id="{F2DA5C76-02F1-8B5C-62BF-4AB3B2E3FE96}"/>
+              </a:ext>
+            </a:extLst>
+          </p:cNvPr>
+          <p:cNvSpPr/>
+          <p:nvPr/>
+        </p:nvSpPr>
+        <p:spPr>
+          <a:xfrm>
+            <a:off x="8476766" y="3867761"/>
+            <a:ext cx="130594" cy="130594"/>
+          </a:xfrm>
+          <a:prstGeom prst="ellipse">
+            <a:avLst/>
+          </a:prstGeom>
+        </p:spPr>
+        <p:style>
+          <a:lnRef idx="2">
+            <a:schemeClr val="accent1">
+              <a:shade val="50000"/>
+            </a:schemeClr>
+          </a:lnRef>
+          <a:fillRef idx="1">
+            <a:schemeClr val="accent1"/>
+          </a:fillRef>
+          <a:effectRef idx="0">
+            <a:schemeClr val="accent1"/>
+          </a:effectRef>
+          <a:fontRef idx="minor">
+            <a:schemeClr val="lt1"/>
+          </a:fontRef>
+        </p:style>
+        <p:txBody>
+          <a:bodyPr rtlCol="0" anchor="ctr"/>
+          <a:lstStyle/>
+          <a:p>
+            <a:pPr algn="ctr"/>
+            <a:endParaRPr lang="en-US"/>
+          </a:p>
+        </p:txBody>
+      </p:sp>
     </p:spTree>
     <p:extLst>
       <p:ext uri="{BB962C8B-B14F-4D97-AF65-F5344CB8AC3E}">
         <p14:creationId xmlns:p14="http://schemas.microsoft.com/office/powerpoint/2010/main" val="698478498"/>
+      </p:ext>
+    </p:extLst>
+  </p:cSld>
+  <p:clrMapOvr>
+    <a:masterClrMapping/>
+  </p:clrMapOvr>
+</p:sld>
+</file>
+
+<file path=ppt/slides/slide5.xml><?xml version="1.0" encoding="utf-8"?>
+<p:sld xmlns:a="http://schemas.openxmlformats.org/drawingml/2006/main" xmlns:r="http://schemas.openxmlformats.org/officeDocument/2006/relationships" xmlns:p="http://schemas.openxmlformats.org/presentationml/2006/main">
+  <p:cSld>
+    <p:spTree>
+      <p:nvGrpSpPr>
+        <p:cNvPr id="1" name=""/>
+        <p:cNvGrpSpPr/>
+        <p:nvPr/>
+      </p:nvGrpSpPr>
+      <p:grpSpPr>
+        <a:xfrm>
+          <a:off x="0" y="0"/>
+          <a:ext cx="0" cy="0"/>
+          <a:chOff x="0" y="0"/>
+          <a:chExt cx="0" cy="0"/>
+        </a:xfrm>
+      </p:grpSpPr>
+      <p:sp>
+        <p:nvSpPr>
+          <p:cNvPr id="3" name="TextBox 2">
+            <a:extLst>
+              <a:ext uri="{FF2B5EF4-FFF2-40B4-BE49-F238E27FC236}">
+                <a16:creationId xmlns:a16="http://schemas.microsoft.com/office/drawing/2014/main" id="{2E0F8C94-6073-C6DF-83C0-6F0A6F0EBB17}"/>
+              </a:ext>
+            </a:extLst>
+          </p:cNvPr>
+          <p:cNvSpPr txBox="1"/>
+          <p:nvPr/>
+        </p:nvSpPr>
+        <p:spPr>
+          <a:xfrm>
+            <a:off x="1271943" y="4225330"/>
+            <a:ext cx="6678449" cy="2031325"/>
+          </a:xfrm>
+          <a:prstGeom prst="rect">
+            <a:avLst/>
+          </a:prstGeom>
+          <a:solidFill>
+            <a:schemeClr val="accent4">
+              <a:lumMod val="20000"/>
+              <a:lumOff val="80000"/>
+            </a:schemeClr>
+          </a:solidFill>
+          <a:ln>
+            <a:solidFill>
+              <a:srgbClr val="FF0000"/>
+            </a:solidFill>
+          </a:ln>
+        </p:spPr>
+        <p:txBody>
+          <a:bodyPr wrap="square" rtlCol="0">
+            <a:spAutoFit/>
+          </a:bodyPr>
+          <a:lstStyle/>
+          <a:p>
+            <a:pPr marL="285750" indent="-285750">
+              <a:buFont typeface="Arial" panose="020B0604020202020204" pitchFamily="34" charset="0"/>
+              <a:buChar char="•"/>
+            </a:pPr>
+            <a:r>
+              <a:rPr lang="en-US" sz="1400"/>
+              <a:t>YouTube, LinkedIn posts, Facebook, other social media, blogging</a:t>
+            </a:r>
+          </a:p>
+          <a:p>
+            <a:pPr marL="285750" indent="-285750">
+              <a:buFont typeface="Arial" panose="020B0604020202020204" pitchFamily="34" charset="0"/>
+              <a:buChar char="•"/>
+            </a:pPr>
+            <a:r>
+              <a:rPr lang="en-US" sz="1400"/>
+              <a:t>Host-parasite relationships: partnerships, celebrities, thought leaders</a:t>
+            </a:r>
+          </a:p>
+          <a:p>
+            <a:pPr marL="285750" indent="-285750">
+              <a:buFont typeface="Arial" panose="020B0604020202020204" pitchFamily="34" charset="0"/>
+              <a:buChar char="•"/>
+            </a:pPr>
+            <a:r>
+              <a:rPr lang="en-US" sz="1400"/>
+              <a:t>Paid online advertising (Facebook, Google, Linkedin, Advertising exchanges, ...</a:t>
+            </a:r>
+          </a:p>
+          <a:p>
+            <a:pPr marL="285750" indent="-285750">
+              <a:buFont typeface="Arial" panose="020B0604020202020204" pitchFamily="34" charset="0"/>
+              <a:buChar char="•"/>
+            </a:pPr>
+            <a:r>
+              <a:rPr lang="en-US" sz="1400"/>
+              <a:t>Television, radio</a:t>
+            </a:r>
+          </a:p>
+          <a:p>
+            <a:pPr marL="285750" indent="-285750">
+              <a:buFont typeface="Arial" panose="020B0604020202020204" pitchFamily="34" charset="0"/>
+              <a:buChar char="•"/>
+            </a:pPr>
+            <a:r>
+              <a:rPr lang="en-US" sz="1400"/>
+              <a:t>Paper/Print: classified ads, ads in magazines and newspapers</a:t>
+            </a:r>
+          </a:p>
+          <a:p>
+            <a:pPr marL="285750" indent="-285750">
+              <a:buFont typeface="Arial" panose="020B0604020202020204" pitchFamily="34" charset="0"/>
+              <a:buChar char="•"/>
+            </a:pPr>
+            <a:r>
+              <a:rPr lang="en-US" sz="1400"/>
+              <a:t>Mailing lists (SRDS catalog)</a:t>
+            </a:r>
+          </a:p>
+          <a:p>
+            <a:pPr marL="285750" indent="-285750">
+              <a:buFont typeface="Arial" panose="020B0604020202020204" pitchFamily="34" charset="0"/>
+              <a:buChar char="•"/>
+            </a:pPr>
+            <a:r>
+              <a:rPr lang="en-US" sz="1400"/>
+              <a:t>Direct mail - letters, postcards</a:t>
+            </a:r>
+          </a:p>
+          <a:p>
+            <a:pPr marL="285750" indent="-285750">
+              <a:buFont typeface="Arial" panose="020B0604020202020204" pitchFamily="34" charset="0"/>
+              <a:buChar char="•"/>
+            </a:pPr>
+            <a:r>
+              <a:rPr lang="en-US" sz="1400"/>
+              <a:t>Subscriptions – monthly newsletter, e-magazine, email autoresponder</a:t>
+            </a:r>
+          </a:p>
+          <a:p>
+            <a:pPr marL="285750" indent="-285750">
+              <a:buFont typeface="Arial" panose="020B0604020202020204" pitchFamily="34" charset="0"/>
+              <a:buChar char="•"/>
+            </a:pPr>
+            <a:r>
+              <a:rPr lang="en-US" sz="1400" b="1">
+                <a:solidFill>
+                  <a:srgbClr val="00B050"/>
+                </a:solidFill>
+              </a:rPr>
+              <a:t>Multi-step marketing funnel</a:t>
+            </a:r>
+            <a:r>
+              <a:rPr lang="en-US" sz="1400"/>
+              <a:t> (small ad =&gt; pre-recorded message =&gt; free report =&gt; ...)</a:t>
+            </a:r>
+          </a:p>
+        </p:txBody>
+      </p:sp>
+      <p:sp>
+        <p:nvSpPr>
+          <p:cNvPr id="10" name="TextBox 9">
+            <a:extLst>
+              <a:ext uri="{FF2B5EF4-FFF2-40B4-BE49-F238E27FC236}">
+                <a16:creationId xmlns:a16="http://schemas.microsoft.com/office/drawing/2014/main" id="{08326137-CDAE-41C6-831A-EF3D435DC7B8}"/>
+              </a:ext>
+            </a:extLst>
+          </p:cNvPr>
+          <p:cNvSpPr txBox="1"/>
+          <p:nvPr/>
+        </p:nvSpPr>
+        <p:spPr>
+          <a:xfrm>
+            <a:off x="7479761" y="2356083"/>
+            <a:ext cx="3996998" cy="1384995"/>
+          </a:xfrm>
+          <a:prstGeom prst="rect">
+            <a:avLst/>
+          </a:prstGeom>
+          <a:solidFill>
+            <a:schemeClr val="accent4">
+              <a:lumMod val="20000"/>
+              <a:lumOff val="80000"/>
+            </a:schemeClr>
+          </a:solidFill>
+          <a:ln>
+            <a:solidFill>
+              <a:srgbClr val="FF0000"/>
+            </a:solidFill>
+          </a:ln>
+        </p:spPr>
+        <p:txBody>
+          <a:bodyPr wrap="square" rtlCol="0">
+            <a:spAutoFit/>
+          </a:bodyPr>
+          <a:lstStyle/>
+          <a:p>
+            <a:r>
+              <a:rPr lang="en-US" sz="1400"/>
+              <a:t>Copywriting - science and art.</a:t>
+            </a:r>
+          </a:p>
+          <a:p>
+            <a:r>
+              <a:rPr lang="en-US" sz="1400">
+                <a:solidFill>
+                  <a:srgbClr val="FF0000"/>
+                </a:solidFill>
+              </a:rPr>
+              <a:t>"Always enter the conversation already occurring in the prospect's mind."</a:t>
+            </a:r>
+            <a:r>
+              <a:rPr lang="en-US" sz="1400"/>
+              <a:t> </a:t>
+            </a:r>
+          </a:p>
+          <a:p>
+            <a:r>
+              <a:rPr lang="en-US" sz="1400"/>
+              <a:t>(This was famously stated in 1937 by </a:t>
+            </a:r>
+            <a:r>
+              <a:rPr lang="en-US" sz="1400">
+                <a:solidFill>
+                  <a:srgbClr val="00B050"/>
+                </a:solidFill>
+              </a:rPr>
+              <a:t>Robert Collier</a:t>
+            </a:r>
+            <a:r>
+              <a:rPr lang="en-US" sz="1400"/>
+              <a:t> in one of the best classic marketing books available: "The Robert Collier Letter Book".)</a:t>
+            </a:r>
+          </a:p>
+        </p:txBody>
+      </p:sp>
+      <p:sp>
+        <p:nvSpPr>
+          <p:cNvPr id="11" name="TextBox 10">
+            <a:extLst>
+              <a:ext uri="{FF2B5EF4-FFF2-40B4-BE49-F238E27FC236}">
+                <a16:creationId xmlns:a16="http://schemas.microsoft.com/office/drawing/2014/main" id="{92AA18E2-BF5A-DD33-6A23-D7522F8CDD8E}"/>
+              </a:ext>
+            </a:extLst>
+          </p:cNvPr>
+          <p:cNvSpPr txBox="1"/>
+          <p:nvPr/>
+        </p:nvSpPr>
+        <p:spPr>
+          <a:xfrm>
+            <a:off x="84083" y="84082"/>
+            <a:ext cx="3037489" cy="523220"/>
+          </a:xfrm>
+          <a:prstGeom prst="rect">
+            <a:avLst/>
+          </a:prstGeom>
+          <a:noFill/>
+        </p:spPr>
+        <p:txBody>
+          <a:bodyPr wrap="square" rtlCol="0">
+            <a:spAutoFit/>
+          </a:bodyPr>
+          <a:lstStyle/>
+          <a:p>
+            <a:r>
+              <a:rPr lang="en-US" sz="2800" b="1"/>
+              <a:t>Three Things ...</a:t>
+            </a:r>
+          </a:p>
+        </p:txBody>
+      </p:sp>
+      <p:sp>
+        <p:nvSpPr>
+          <p:cNvPr id="12" name="TextBox 11">
+            <a:extLst>
+              <a:ext uri="{FF2B5EF4-FFF2-40B4-BE49-F238E27FC236}">
+                <a16:creationId xmlns:a16="http://schemas.microsoft.com/office/drawing/2014/main" id="{E92EC960-AD19-1B3D-472E-0464E037E111}"/>
+              </a:ext>
+            </a:extLst>
+          </p:cNvPr>
+          <p:cNvSpPr txBox="1"/>
+          <p:nvPr/>
+        </p:nvSpPr>
+        <p:spPr>
+          <a:xfrm>
+            <a:off x="1410185" y="2073281"/>
+            <a:ext cx="4085581" cy="1477328"/>
+          </a:xfrm>
+          <a:prstGeom prst="rect">
+            <a:avLst/>
+          </a:prstGeom>
+          <a:solidFill>
+            <a:schemeClr val="accent4">
+              <a:lumMod val="20000"/>
+              <a:lumOff val="80000"/>
+            </a:schemeClr>
+          </a:solidFill>
+          <a:ln>
+            <a:solidFill>
+              <a:srgbClr val="FF0000"/>
+            </a:solidFill>
+          </a:ln>
+        </p:spPr>
+        <p:txBody>
+          <a:bodyPr wrap="square" rtlCol="0">
+            <a:spAutoFit/>
+          </a:bodyPr>
+          <a:lstStyle/>
+          <a:p>
+            <a:r>
+              <a:rPr lang="en-US" b="1">
+                <a:solidFill>
+                  <a:srgbClr val="00B050"/>
+                </a:solidFill>
+              </a:rPr>
+              <a:t>There are three things you need </a:t>
+            </a:r>
+          </a:p>
+          <a:p>
+            <a:r>
+              <a:rPr lang="en-US" b="1">
+                <a:solidFill>
+                  <a:srgbClr val="00B050"/>
+                </a:solidFill>
+              </a:rPr>
+              <a:t>in order to sell something…</a:t>
+            </a:r>
+            <a:endParaRPr lang="en-US">
+              <a:solidFill>
+                <a:srgbClr val="00B0F0"/>
+              </a:solidFill>
+            </a:endParaRPr>
+          </a:p>
+          <a:p>
+            <a:pPr marL="342900" indent="-342900">
+              <a:buFont typeface="+mj-lt"/>
+              <a:buAutoNum type="arabicPeriod"/>
+            </a:pPr>
+            <a:r>
+              <a:rPr lang="en-US"/>
+              <a:t>Market (targeted mailing list)</a:t>
+            </a:r>
+          </a:p>
+          <a:p>
+            <a:pPr marL="342900" indent="-342900">
+              <a:buFont typeface="+mj-lt"/>
+              <a:buAutoNum type="arabicPeriod"/>
+            </a:pPr>
+            <a:r>
+              <a:rPr lang="en-US"/>
+              <a:t>Message (sales letter)</a:t>
+            </a:r>
+          </a:p>
+          <a:p>
+            <a:pPr marL="342900" indent="-342900">
+              <a:buFont typeface="+mj-lt"/>
+              <a:buAutoNum type="arabicPeriod"/>
+            </a:pPr>
+            <a:r>
+              <a:rPr lang="en-US"/>
+              <a:t>Media (delivery mechanism)</a:t>
+            </a:r>
+            <a:endParaRPr lang="en-US">
+              <a:solidFill>
+                <a:srgbClr val="7030A0"/>
+              </a:solidFill>
+            </a:endParaRPr>
+          </a:p>
+        </p:txBody>
+      </p:sp>
+      <p:pic>
+        <p:nvPicPr>
+          <p:cNvPr id="4098" name="Picture 2" descr="Brand New! Dan Kennedy's “Never Out of Work” Program!">
+            <a:extLst>
+              <a:ext uri="{FF2B5EF4-FFF2-40B4-BE49-F238E27FC236}">
+                <a16:creationId xmlns:a16="http://schemas.microsoft.com/office/drawing/2014/main" id="{6CA1757B-CFB0-C092-3D00-133A698B640A}"/>
+              </a:ext>
+            </a:extLst>
+          </p:cNvPr>
+          <p:cNvPicPr>
+            <a:picLocks noChangeAspect="1" noChangeArrowheads="1"/>
+          </p:cNvPicPr>
+          <p:nvPr/>
+        </p:nvPicPr>
+        <p:blipFill>
+          <a:blip r:embed="rId2" cstate="email">
+            <a:extLst>
+              <a:ext uri="{28A0092B-C50C-407E-A947-70E740481C1C}">
+                <a14:useLocalDpi xmlns:a14="http://schemas.microsoft.com/office/drawing/2010/main"/>
+              </a:ext>
+            </a:extLst>
+          </a:blip>
+          <a:srcRect/>
+          <a:stretch>
+            <a:fillRect/>
+          </a:stretch>
+        </p:blipFill>
+        <p:spPr bwMode="auto">
+          <a:xfrm>
+            <a:off x="3730295" y="231392"/>
+            <a:ext cx="1070528" cy="1477328"/>
+          </a:xfrm>
+          <a:prstGeom prst="rect">
+            <a:avLst/>
+          </a:prstGeom>
+          <a:noFill/>
+          <a:extLst>
+            <a:ext uri="{909E8E84-426E-40DD-AFC4-6F175D3DCCD1}">
+              <a14:hiddenFill xmlns:a14="http://schemas.microsoft.com/office/drawing/2010/main">
+                <a:solidFill>
+                  <a:srgbClr val="FFFFFF"/>
+                </a:solidFill>
+              </a14:hiddenFill>
+            </a:ext>
+          </a:extLst>
+        </p:spPr>
+      </p:pic>
+      <p:sp>
+        <p:nvSpPr>
+          <p:cNvPr id="13" name="TextBox 12">
+            <a:extLst>
+              <a:ext uri="{FF2B5EF4-FFF2-40B4-BE49-F238E27FC236}">
+                <a16:creationId xmlns:a16="http://schemas.microsoft.com/office/drawing/2014/main" id="{46AE8B3C-924A-58C9-BE24-56AE458B1F5D}"/>
+              </a:ext>
+            </a:extLst>
+          </p:cNvPr>
+          <p:cNvSpPr txBox="1"/>
+          <p:nvPr/>
+        </p:nvSpPr>
+        <p:spPr>
+          <a:xfrm>
+            <a:off x="3573297" y="1721088"/>
+            <a:ext cx="1384523" cy="307777"/>
+          </a:xfrm>
+          <a:prstGeom prst="rect">
+            <a:avLst/>
+          </a:prstGeom>
+          <a:noFill/>
+        </p:spPr>
+        <p:txBody>
+          <a:bodyPr wrap="square" rtlCol="0">
+            <a:spAutoFit/>
+          </a:bodyPr>
+          <a:lstStyle/>
+          <a:p>
+            <a:pPr algn="ctr"/>
+            <a:r>
+              <a:rPr lang="en-US" sz="1400"/>
+              <a:t>Dan Kennedy</a:t>
+            </a:r>
+          </a:p>
+        </p:txBody>
+      </p:sp>
+      <p:pic>
+        <p:nvPicPr>
+          <p:cNvPr id="14" name="Picture 13">
+            <a:extLst>
+              <a:ext uri="{FF2B5EF4-FFF2-40B4-BE49-F238E27FC236}">
+                <a16:creationId xmlns:a16="http://schemas.microsoft.com/office/drawing/2014/main" id="{361E47F7-EC09-069F-3C54-B8D513DB78FD}"/>
+              </a:ext>
+            </a:extLst>
+          </p:cNvPr>
+          <p:cNvPicPr>
+            <a:picLocks noChangeAspect="1"/>
+          </p:cNvPicPr>
+          <p:nvPr/>
+        </p:nvPicPr>
+        <p:blipFill>
+          <a:blip r:embed="rId3" cstate="email">
+            <a:extLst>
+              <a:ext uri="{28A0092B-C50C-407E-A947-70E740481C1C}">
+                <a14:useLocalDpi xmlns:a14="http://schemas.microsoft.com/office/drawing/2010/main"/>
+              </a:ext>
+            </a:extLst>
+          </a:blip>
+          <a:stretch>
+            <a:fillRect/>
+          </a:stretch>
+        </p:blipFill>
+        <p:spPr>
+          <a:xfrm>
+            <a:off x="8515873" y="187358"/>
+            <a:ext cx="1384523" cy="1515250"/>
+          </a:xfrm>
+          <a:prstGeom prst="rect">
+            <a:avLst/>
+          </a:prstGeom>
+        </p:spPr>
+      </p:pic>
+      <p:sp>
+        <p:nvSpPr>
+          <p:cNvPr id="15" name="TextBox 14">
+            <a:extLst>
+              <a:ext uri="{FF2B5EF4-FFF2-40B4-BE49-F238E27FC236}">
+                <a16:creationId xmlns:a16="http://schemas.microsoft.com/office/drawing/2014/main" id="{BDA2E486-7EDA-AE23-5B91-7CE91B9B58A7}"/>
+              </a:ext>
+            </a:extLst>
+          </p:cNvPr>
+          <p:cNvSpPr txBox="1"/>
+          <p:nvPr/>
+        </p:nvSpPr>
+        <p:spPr>
+          <a:xfrm>
+            <a:off x="8672870" y="1702608"/>
+            <a:ext cx="3492603" cy="461665"/>
+          </a:xfrm>
+          <a:prstGeom prst="rect">
+            <a:avLst/>
+          </a:prstGeom>
+          <a:noFill/>
+        </p:spPr>
+        <p:txBody>
+          <a:bodyPr wrap="square" rtlCol="0">
+            <a:spAutoFit/>
+          </a:bodyPr>
+          <a:lstStyle/>
+          <a:p>
+            <a:r>
+              <a:rPr lang="en-US" sz="1400"/>
+              <a:t>Robert Collier</a:t>
+            </a:r>
+          </a:p>
+          <a:p>
+            <a:r>
+              <a:rPr lang="en-US" sz="1000">
+                <a:hlinkClick r:id="rId4"/>
+              </a:rPr>
+              <a:t>https://en.wikipedia.org/wiki/Robert_Collier_%28author%29</a:t>
+            </a:r>
+            <a:endParaRPr lang="en-US" sz="1000"/>
+          </a:p>
+        </p:txBody>
+      </p:sp>
+    </p:spTree>
+    <p:extLst>
+      <p:ext uri="{BB962C8B-B14F-4D97-AF65-F5344CB8AC3E}">
+        <p14:creationId xmlns:p14="http://schemas.microsoft.com/office/powerpoint/2010/main" val="2841672921"/>
+      </p:ext>
+    </p:extLst>
+  </p:cSld>
+  <p:clrMapOvr>
+    <a:masterClrMapping/>
+  </p:clrMapOvr>
+</p:sld>
+</file>
+
+<file path=ppt/slides/slide6.xml><?xml version="1.0" encoding="utf-8"?>
+<p:sld xmlns:a="http://schemas.openxmlformats.org/drawingml/2006/main" xmlns:r="http://schemas.openxmlformats.org/officeDocument/2006/relationships" xmlns:p="http://schemas.openxmlformats.org/presentationml/2006/main">
+  <p:cSld>
+    <p:spTree>
+      <p:nvGrpSpPr>
+        <p:cNvPr id="1" name=""/>
+        <p:cNvGrpSpPr/>
+        <p:nvPr/>
+      </p:nvGrpSpPr>
+      <p:grpSpPr>
+        <a:xfrm>
+          <a:off x="0" y="0"/>
+          <a:ext cx="0" cy="0"/>
+          <a:chOff x="0" y="0"/>
+          <a:chExt cx="0" cy="0"/>
+        </a:xfrm>
+      </p:grpSpPr>
+      <p:sp>
+        <p:nvSpPr>
+          <p:cNvPr id="2" name="TextBox 1">
+            <a:extLst>
+              <a:ext uri="{FF2B5EF4-FFF2-40B4-BE49-F238E27FC236}">
+                <a16:creationId xmlns:a16="http://schemas.microsoft.com/office/drawing/2014/main" id="{88D024D0-48D8-E973-15B2-8889105B8783}"/>
+              </a:ext>
+            </a:extLst>
+          </p:cNvPr>
+          <p:cNvSpPr txBox="1"/>
+          <p:nvPr/>
+        </p:nvSpPr>
+        <p:spPr>
+          <a:xfrm>
+            <a:off x="1002" y="2248929"/>
+            <a:ext cx="1461377" cy="307777"/>
+          </a:xfrm>
+          <a:prstGeom prst="rect">
+            <a:avLst/>
+          </a:prstGeom>
+          <a:noFill/>
+        </p:spPr>
+        <p:txBody>
+          <a:bodyPr wrap="square" rtlCol="0">
+            <a:spAutoFit/>
+          </a:bodyPr>
+          <a:lstStyle/>
+          <a:p>
+            <a:pPr algn="ctr"/>
+            <a:r>
+              <a:rPr lang="en-US" sz="1400"/>
+              <a:t>Gary Halbert</a:t>
+            </a:r>
+          </a:p>
+        </p:txBody>
+      </p:sp>
+      <p:pic>
+        <p:nvPicPr>
+          <p:cNvPr id="4" name="Picture 3">
+            <a:extLst>
+              <a:ext uri="{FF2B5EF4-FFF2-40B4-BE49-F238E27FC236}">
+                <a16:creationId xmlns:a16="http://schemas.microsoft.com/office/drawing/2014/main" id="{609FD4D4-B91D-E0D7-413E-AA302D9EBC45}"/>
+              </a:ext>
+            </a:extLst>
+          </p:cNvPr>
+          <p:cNvPicPr>
+            <a:picLocks noChangeAspect="1"/>
+          </p:cNvPicPr>
+          <p:nvPr/>
+        </p:nvPicPr>
+        <p:blipFill>
+          <a:blip r:embed="rId2"/>
+          <a:stretch>
+            <a:fillRect/>
+          </a:stretch>
+        </p:blipFill>
+        <p:spPr>
+          <a:xfrm>
+            <a:off x="9392754" y="2899632"/>
+            <a:ext cx="1119390" cy="1600727"/>
+          </a:xfrm>
+          <a:prstGeom prst="rect">
+            <a:avLst/>
+          </a:prstGeom>
+        </p:spPr>
+      </p:pic>
+      <p:pic>
+        <p:nvPicPr>
+          <p:cNvPr id="6" name="Picture 5">
+            <a:extLst>
+              <a:ext uri="{FF2B5EF4-FFF2-40B4-BE49-F238E27FC236}">
+                <a16:creationId xmlns:a16="http://schemas.microsoft.com/office/drawing/2014/main" id="{AB18AF02-0762-CC52-6881-0A40E7065A2D}"/>
+              </a:ext>
+            </a:extLst>
+          </p:cNvPr>
+          <p:cNvPicPr>
+            <a:picLocks noChangeAspect="1"/>
+          </p:cNvPicPr>
+          <p:nvPr/>
+        </p:nvPicPr>
+        <p:blipFill>
+          <a:blip r:embed="rId3"/>
+          <a:stretch>
+            <a:fillRect/>
+          </a:stretch>
+        </p:blipFill>
+        <p:spPr>
+          <a:xfrm>
+            <a:off x="3474493" y="2962146"/>
+            <a:ext cx="965200" cy="1320800"/>
+          </a:xfrm>
+          <a:prstGeom prst="rect">
+            <a:avLst/>
+          </a:prstGeom>
+        </p:spPr>
+      </p:pic>
+      <p:pic>
+        <p:nvPicPr>
+          <p:cNvPr id="10" name="Picture 9">
+            <a:extLst>
+              <a:ext uri="{FF2B5EF4-FFF2-40B4-BE49-F238E27FC236}">
+                <a16:creationId xmlns:a16="http://schemas.microsoft.com/office/drawing/2014/main" id="{AE668C9A-5298-7B89-C341-350ECE2B2DAF}"/>
+              </a:ext>
+            </a:extLst>
+          </p:cNvPr>
+          <p:cNvPicPr>
+            <a:picLocks noChangeAspect="1"/>
+          </p:cNvPicPr>
+          <p:nvPr/>
+        </p:nvPicPr>
+        <p:blipFill>
+          <a:blip r:embed="rId4"/>
+          <a:stretch>
+            <a:fillRect/>
+          </a:stretch>
+        </p:blipFill>
+        <p:spPr>
+          <a:xfrm>
+            <a:off x="10735730" y="2874233"/>
+            <a:ext cx="1144642" cy="1573883"/>
+          </a:xfrm>
+          <a:prstGeom prst="rect">
+            <a:avLst/>
+          </a:prstGeom>
+        </p:spPr>
+      </p:pic>
+      <p:pic>
+        <p:nvPicPr>
+          <p:cNvPr id="12" name="Picture 11">
+            <a:extLst>
+              <a:ext uri="{FF2B5EF4-FFF2-40B4-BE49-F238E27FC236}">
+                <a16:creationId xmlns:a16="http://schemas.microsoft.com/office/drawing/2014/main" id="{61F13966-DEA4-17AA-5789-F9F818CC913D}"/>
+              </a:ext>
+            </a:extLst>
+          </p:cNvPr>
+          <p:cNvPicPr>
+            <a:picLocks noChangeAspect="1"/>
+          </p:cNvPicPr>
+          <p:nvPr/>
+        </p:nvPicPr>
+        <p:blipFill>
+          <a:blip r:embed="rId5"/>
+          <a:stretch>
+            <a:fillRect/>
+          </a:stretch>
+        </p:blipFill>
+        <p:spPr>
+          <a:xfrm>
+            <a:off x="10931028" y="5037728"/>
+            <a:ext cx="1105783" cy="1270825"/>
+          </a:xfrm>
+          <a:prstGeom prst="rect">
+            <a:avLst/>
+          </a:prstGeom>
+        </p:spPr>
+      </p:pic>
+      <p:pic>
+        <p:nvPicPr>
+          <p:cNvPr id="14" name="Picture 13">
+            <a:extLst>
+              <a:ext uri="{FF2B5EF4-FFF2-40B4-BE49-F238E27FC236}">
+                <a16:creationId xmlns:a16="http://schemas.microsoft.com/office/drawing/2014/main" id="{C22C936E-F2A5-2870-5B78-9EF2AEBEDF42}"/>
+              </a:ext>
+            </a:extLst>
+          </p:cNvPr>
+          <p:cNvPicPr>
+            <a:picLocks noChangeAspect="1"/>
+          </p:cNvPicPr>
+          <p:nvPr/>
+        </p:nvPicPr>
+        <p:blipFill>
+          <a:blip r:embed="rId6"/>
+          <a:stretch>
+            <a:fillRect/>
+          </a:stretch>
+        </p:blipFill>
+        <p:spPr>
+          <a:xfrm>
+            <a:off x="6695613" y="872933"/>
+            <a:ext cx="1282700" cy="1625748"/>
+          </a:xfrm>
+          <a:prstGeom prst="rect">
+            <a:avLst/>
+          </a:prstGeom>
+        </p:spPr>
+      </p:pic>
+      <p:pic>
+        <p:nvPicPr>
+          <p:cNvPr id="16" name="Picture 15">
+            <a:extLst>
+              <a:ext uri="{FF2B5EF4-FFF2-40B4-BE49-F238E27FC236}">
+                <a16:creationId xmlns:a16="http://schemas.microsoft.com/office/drawing/2014/main" id="{5CD3CBD5-F68C-834C-7B9D-52C1B0766400}"/>
+              </a:ext>
+            </a:extLst>
+          </p:cNvPr>
+          <p:cNvPicPr>
+            <a:picLocks noChangeAspect="1"/>
+          </p:cNvPicPr>
+          <p:nvPr/>
+        </p:nvPicPr>
+        <p:blipFill>
+          <a:blip r:embed="rId7" cstate="email">
+            <a:extLst>
+              <a:ext uri="{28A0092B-C50C-407E-A947-70E740481C1C}">
+                <a14:useLocalDpi xmlns:a14="http://schemas.microsoft.com/office/drawing/2010/main"/>
+              </a:ext>
+            </a:extLst>
+          </a:blip>
+          <a:stretch>
+            <a:fillRect/>
+          </a:stretch>
+        </p:blipFill>
+        <p:spPr>
+          <a:xfrm>
+            <a:off x="6742113" y="4972211"/>
+            <a:ext cx="1074432" cy="1294828"/>
+          </a:xfrm>
+          <a:prstGeom prst="rect">
+            <a:avLst/>
+          </a:prstGeom>
+        </p:spPr>
+      </p:pic>
+      <p:pic>
+        <p:nvPicPr>
+          <p:cNvPr id="18" name="Picture 17">
+            <a:extLst>
+              <a:ext uri="{FF2B5EF4-FFF2-40B4-BE49-F238E27FC236}">
+                <a16:creationId xmlns:a16="http://schemas.microsoft.com/office/drawing/2014/main" id="{A8B9A1E9-D4C2-E79E-A62F-A953044ED21D}"/>
+              </a:ext>
+            </a:extLst>
+          </p:cNvPr>
+          <p:cNvPicPr>
+            <a:picLocks noChangeAspect="1"/>
+          </p:cNvPicPr>
+          <p:nvPr/>
+        </p:nvPicPr>
+        <p:blipFill>
+          <a:blip r:embed="rId8"/>
+          <a:stretch>
+            <a:fillRect/>
+          </a:stretch>
+        </p:blipFill>
+        <p:spPr>
+          <a:xfrm>
+            <a:off x="5832568" y="2950992"/>
+            <a:ext cx="1061712" cy="1454546"/>
+          </a:xfrm>
+          <a:prstGeom prst="rect">
+            <a:avLst/>
+          </a:prstGeom>
+        </p:spPr>
+      </p:pic>
+      <p:pic>
+        <p:nvPicPr>
+          <p:cNvPr id="20" name="Picture 19">
+            <a:extLst>
+              <a:ext uri="{FF2B5EF4-FFF2-40B4-BE49-F238E27FC236}">
+                <a16:creationId xmlns:a16="http://schemas.microsoft.com/office/drawing/2014/main" id="{8AB588CD-1374-40EE-6991-145EFD22FE74}"/>
+              </a:ext>
+            </a:extLst>
+          </p:cNvPr>
+          <p:cNvPicPr>
+            <a:picLocks noChangeAspect="1"/>
+          </p:cNvPicPr>
+          <p:nvPr/>
+        </p:nvPicPr>
+        <p:blipFill rotWithShape="1">
+          <a:blip r:embed="rId9" cstate="email">
+            <a:extLst>
+              <a:ext uri="{28A0092B-C50C-407E-A947-70E740481C1C}">
+                <a14:useLocalDpi xmlns:a14="http://schemas.microsoft.com/office/drawing/2010/main"/>
+              </a:ext>
+            </a:extLst>
+          </a:blip>
+          <a:srcRect/>
+          <a:stretch/>
+        </p:blipFill>
+        <p:spPr>
+          <a:xfrm>
+            <a:off x="1462379" y="907360"/>
+            <a:ext cx="1282700" cy="1498217"/>
+          </a:xfrm>
+          <a:prstGeom prst="rect">
+            <a:avLst/>
+          </a:prstGeom>
+        </p:spPr>
+      </p:pic>
+      <p:pic>
+        <p:nvPicPr>
+          <p:cNvPr id="24" name="Picture 23">
+            <a:extLst>
+              <a:ext uri="{FF2B5EF4-FFF2-40B4-BE49-F238E27FC236}">
+                <a16:creationId xmlns:a16="http://schemas.microsoft.com/office/drawing/2014/main" id="{9D79AFB0-37F2-F014-F36A-E3AAF38C806B}"/>
+              </a:ext>
+            </a:extLst>
+          </p:cNvPr>
+          <p:cNvPicPr>
+            <a:picLocks noChangeAspect="1"/>
+          </p:cNvPicPr>
+          <p:nvPr/>
+        </p:nvPicPr>
+        <p:blipFill rotWithShape="1">
+          <a:blip r:embed="rId10" cstate="email">
+            <a:extLst>
+              <a:ext uri="{28A0092B-C50C-407E-A947-70E740481C1C}">
+                <a14:useLocalDpi xmlns:a14="http://schemas.microsoft.com/office/drawing/2010/main"/>
+              </a:ext>
+            </a:extLst>
+          </a:blip>
+          <a:srcRect/>
+          <a:stretch/>
+        </p:blipFill>
+        <p:spPr>
+          <a:xfrm>
+            <a:off x="4971287" y="851535"/>
+            <a:ext cx="1282700" cy="1554042"/>
+          </a:xfrm>
+          <a:prstGeom prst="rect">
+            <a:avLst/>
+          </a:prstGeom>
+        </p:spPr>
+      </p:pic>
+      <p:pic>
+        <p:nvPicPr>
+          <p:cNvPr id="26" name="Picture 25">
+            <a:extLst>
+              <a:ext uri="{FF2B5EF4-FFF2-40B4-BE49-F238E27FC236}">
+                <a16:creationId xmlns:a16="http://schemas.microsoft.com/office/drawing/2014/main" id="{05FE0A24-4B4B-2A63-09D5-46477C58C348}"/>
+              </a:ext>
+            </a:extLst>
+          </p:cNvPr>
+          <p:cNvPicPr>
+            <a:picLocks noChangeAspect="1"/>
+          </p:cNvPicPr>
+          <p:nvPr/>
+        </p:nvPicPr>
+        <p:blipFill>
+          <a:blip r:embed="rId11"/>
+          <a:stretch>
+            <a:fillRect/>
+          </a:stretch>
+        </p:blipFill>
+        <p:spPr>
+          <a:xfrm>
+            <a:off x="8305772" y="2971149"/>
+            <a:ext cx="991253" cy="1476967"/>
+          </a:xfrm>
+          <a:prstGeom prst="rect">
+            <a:avLst/>
+          </a:prstGeom>
+        </p:spPr>
+      </p:pic>
+      <p:pic>
+        <p:nvPicPr>
+          <p:cNvPr id="28" name="Picture 27">
+            <a:extLst>
+              <a:ext uri="{FF2B5EF4-FFF2-40B4-BE49-F238E27FC236}">
+                <a16:creationId xmlns:a16="http://schemas.microsoft.com/office/drawing/2014/main" id="{3C17CE06-C7A4-D45C-919D-5BED66F4A0AA}"/>
+              </a:ext>
+            </a:extLst>
+          </p:cNvPr>
+          <p:cNvPicPr>
+            <a:picLocks noChangeAspect="1"/>
+          </p:cNvPicPr>
+          <p:nvPr/>
+        </p:nvPicPr>
+        <p:blipFill>
+          <a:blip r:embed="rId12"/>
+          <a:stretch>
+            <a:fillRect/>
+          </a:stretch>
+        </p:blipFill>
+        <p:spPr>
+          <a:xfrm>
+            <a:off x="1366501" y="4843929"/>
+            <a:ext cx="1079500" cy="1358900"/>
+          </a:xfrm>
+          <a:prstGeom prst="rect">
+            <a:avLst/>
+          </a:prstGeom>
+        </p:spPr>
+      </p:pic>
+      <p:sp>
+        <p:nvSpPr>
+          <p:cNvPr id="29" name="TextBox 28">
+            <a:extLst>
+              <a:ext uri="{FF2B5EF4-FFF2-40B4-BE49-F238E27FC236}">
+                <a16:creationId xmlns:a16="http://schemas.microsoft.com/office/drawing/2014/main" id="{8C4B38FA-0499-362A-0527-23EA6F50F91F}"/>
+              </a:ext>
+            </a:extLst>
+          </p:cNvPr>
+          <p:cNvSpPr txBox="1"/>
+          <p:nvPr/>
+        </p:nvSpPr>
+        <p:spPr>
+          <a:xfrm>
+            <a:off x="1463104" y="2371252"/>
+            <a:ext cx="1258724" cy="307777"/>
+          </a:xfrm>
+          <a:prstGeom prst="rect">
+            <a:avLst/>
+          </a:prstGeom>
+          <a:noFill/>
+        </p:spPr>
+        <p:txBody>
+          <a:bodyPr wrap="square" rtlCol="0">
+            <a:spAutoFit/>
+          </a:bodyPr>
+          <a:lstStyle/>
+          <a:p>
+            <a:pPr algn="ctr"/>
+            <a:r>
+              <a:rPr lang="en-US" sz="1400"/>
+              <a:t>Jay Abraham</a:t>
+            </a:r>
+          </a:p>
+        </p:txBody>
+      </p:sp>
+      <p:pic>
+        <p:nvPicPr>
+          <p:cNvPr id="1026" name="Picture 2" descr="Ken McCarthy">
+            <a:extLst>
+              <a:ext uri="{FF2B5EF4-FFF2-40B4-BE49-F238E27FC236}">
+                <a16:creationId xmlns:a16="http://schemas.microsoft.com/office/drawing/2014/main" id="{F1463AAC-C91F-5649-6B45-6B84656A9311}"/>
+              </a:ext>
+            </a:extLst>
+          </p:cNvPr>
+          <p:cNvPicPr>
+            <a:picLocks noChangeAspect="1" noChangeArrowheads="1"/>
+          </p:cNvPicPr>
+          <p:nvPr/>
+        </p:nvPicPr>
+        <p:blipFill>
+          <a:blip r:embed="rId13" cstate="email">
+            <a:extLst>
+              <a:ext uri="{28A0092B-C50C-407E-A947-70E740481C1C}">
+                <a14:useLocalDpi xmlns:a14="http://schemas.microsoft.com/office/drawing/2010/main"/>
+              </a:ext>
+            </a:extLst>
+          </a:blip>
+          <a:srcRect/>
+          <a:stretch>
+            <a:fillRect/>
+          </a:stretch>
+        </p:blipFill>
+        <p:spPr bwMode="auto">
+          <a:xfrm>
+            <a:off x="3160050" y="862462"/>
+            <a:ext cx="1496108" cy="1496108"/>
+          </a:xfrm>
+          <a:prstGeom prst="rect">
+            <a:avLst/>
+          </a:prstGeom>
+          <a:noFill/>
+          <a:extLst>
+            <a:ext uri="{909E8E84-426E-40DD-AFC4-6F175D3DCCD1}">
+              <a14:hiddenFill xmlns:a14="http://schemas.microsoft.com/office/drawing/2010/main">
+                <a:solidFill>
+                  <a:srgbClr val="FFFFFF"/>
+                </a:solidFill>
+              </a14:hiddenFill>
+            </a:ext>
+          </a:extLst>
+        </p:spPr>
+      </p:pic>
+      <p:sp>
+        <p:nvSpPr>
+          <p:cNvPr id="30" name="TextBox 29">
+            <a:extLst>
+              <a:ext uri="{FF2B5EF4-FFF2-40B4-BE49-F238E27FC236}">
+                <a16:creationId xmlns:a16="http://schemas.microsoft.com/office/drawing/2014/main" id="{1ADAC591-7AE9-4E32-7CA2-D46908FE4529}"/>
+              </a:ext>
+            </a:extLst>
+          </p:cNvPr>
+          <p:cNvSpPr txBox="1"/>
+          <p:nvPr/>
+        </p:nvSpPr>
+        <p:spPr>
+          <a:xfrm>
+            <a:off x="5000255" y="2400708"/>
+            <a:ext cx="1258724" cy="307777"/>
+          </a:xfrm>
+          <a:prstGeom prst="rect">
+            <a:avLst/>
+          </a:prstGeom>
+          <a:noFill/>
+        </p:spPr>
+        <p:txBody>
+          <a:bodyPr wrap="square" rtlCol="0">
+            <a:spAutoFit/>
+          </a:bodyPr>
+          <a:lstStyle/>
+          <a:p>
+            <a:pPr algn="ctr"/>
+            <a:r>
+              <a:rPr lang="en-US" sz="1400"/>
+              <a:t>Dan Kennedy</a:t>
+            </a:r>
+          </a:p>
+        </p:txBody>
+      </p:sp>
+      <p:pic>
+        <p:nvPicPr>
+          <p:cNvPr id="31" name="Picture 30">
+            <a:extLst>
+              <a:ext uri="{FF2B5EF4-FFF2-40B4-BE49-F238E27FC236}">
+                <a16:creationId xmlns:a16="http://schemas.microsoft.com/office/drawing/2014/main" id="{140E6BE5-5782-3E2F-142A-9FDA845C0858}"/>
+              </a:ext>
+            </a:extLst>
+          </p:cNvPr>
+          <p:cNvPicPr>
+            <a:picLocks noChangeAspect="1"/>
+          </p:cNvPicPr>
+          <p:nvPr/>
+        </p:nvPicPr>
+        <p:blipFill>
+          <a:blip r:embed="rId14" cstate="email">
+            <a:extLst>
+              <a:ext uri="{28A0092B-C50C-407E-A947-70E740481C1C}">
+                <a14:useLocalDpi xmlns:a14="http://schemas.microsoft.com/office/drawing/2010/main"/>
+              </a:ext>
+            </a:extLst>
+          </a:blip>
+          <a:stretch>
+            <a:fillRect/>
+          </a:stretch>
+        </p:blipFill>
+        <p:spPr>
+          <a:xfrm>
+            <a:off x="218836" y="3100054"/>
+            <a:ext cx="1374860" cy="1053881"/>
+          </a:xfrm>
+          <a:prstGeom prst="rect">
+            <a:avLst/>
+          </a:prstGeom>
+        </p:spPr>
+      </p:pic>
+      <p:sp>
+        <p:nvSpPr>
+          <p:cNvPr id="32" name="TextBox 31">
+            <a:extLst>
+              <a:ext uri="{FF2B5EF4-FFF2-40B4-BE49-F238E27FC236}">
+                <a16:creationId xmlns:a16="http://schemas.microsoft.com/office/drawing/2014/main" id="{8F01917E-7A33-6ECA-387E-75FCD878ADC6}"/>
+              </a:ext>
+            </a:extLst>
+          </p:cNvPr>
+          <p:cNvSpPr txBox="1"/>
+          <p:nvPr/>
+        </p:nvSpPr>
+        <p:spPr>
+          <a:xfrm>
+            <a:off x="3253957" y="2344792"/>
+            <a:ext cx="1258724" cy="307777"/>
+          </a:xfrm>
+          <a:prstGeom prst="rect">
+            <a:avLst/>
+          </a:prstGeom>
+          <a:noFill/>
+        </p:spPr>
+        <p:txBody>
+          <a:bodyPr wrap="square" rtlCol="0">
+            <a:spAutoFit/>
+          </a:bodyPr>
+          <a:lstStyle/>
+          <a:p>
+            <a:pPr algn="ctr"/>
+            <a:r>
+              <a:rPr lang="en-US" sz="1400"/>
+              <a:t>Ken McCarthy</a:t>
+            </a:r>
+          </a:p>
+        </p:txBody>
+      </p:sp>
+      <p:sp>
+        <p:nvSpPr>
+          <p:cNvPr id="33" name="TextBox 32">
+            <a:extLst>
+              <a:ext uri="{FF2B5EF4-FFF2-40B4-BE49-F238E27FC236}">
+                <a16:creationId xmlns:a16="http://schemas.microsoft.com/office/drawing/2014/main" id="{446C2F84-4409-B5CB-F522-6A70FF69C84F}"/>
+              </a:ext>
+            </a:extLst>
+          </p:cNvPr>
+          <p:cNvSpPr txBox="1"/>
+          <p:nvPr/>
+        </p:nvSpPr>
+        <p:spPr>
+          <a:xfrm>
+            <a:off x="6687523" y="2515033"/>
+            <a:ext cx="1258724" cy="307777"/>
+          </a:xfrm>
+          <a:prstGeom prst="rect">
+            <a:avLst/>
+          </a:prstGeom>
+          <a:noFill/>
+        </p:spPr>
+        <p:txBody>
+          <a:bodyPr wrap="square" rtlCol="0">
+            <a:spAutoFit/>
+          </a:bodyPr>
+          <a:lstStyle/>
+          <a:p>
+            <a:pPr algn="ctr"/>
+            <a:r>
+              <a:rPr lang="en-US" sz="1400"/>
+              <a:t>Joe Sugarman</a:t>
+            </a:r>
+          </a:p>
+        </p:txBody>
+      </p:sp>
+      <p:sp>
+        <p:nvSpPr>
+          <p:cNvPr id="34" name="TextBox 33">
+            <a:extLst>
+              <a:ext uri="{FF2B5EF4-FFF2-40B4-BE49-F238E27FC236}">
+                <a16:creationId xmlns:a16="http://schemas.microsoft.com/office/drawing/2014/main" id="{183C104E-0C54-D0FA-A90D-FA3C1E644630}"/>
+              </a:ext>
+            </a:extLst>
+          </p:cNvPr>
+          <p:cNvSpPr txBox="1"/>
+          <p:nvPr/>
+        </p:nvSpPr>
+        <p:spPr>
+          <a:xfrm>
+            <a:off x="302798" y="4169199"/>
+            <a:ext cx="1258724" cy="307777"/>
+          </a:xfrm>
+          <a:prstGeom prst="rect">
+            <a:avLst/>
+          </a:prstGeom>
+          <a:noFill/>
+        </p:spPr>
+        <p:txBody>
+          <a:bodyPr wrap="square" rtlCol="0">
+            <a:spAutoFit/>
+          </a:bodyPr>
+          <a:lstStyle/>
+          <a:p>
+            <a:pPr algn="ctr"/>
+            <a:r>
+              <a:rPr lang="en-US" sz="1400"/>
+              <a:t>Joe Polish</a:t>
+            </a:r>
+          </a:p>
+        </p:txBody>
+      </p:sp>
+      <p:sp>
+        <p:nvSpPr>
+          <p:cNvPr id="35" name="TextBox 34">
+            <a:extLst>
+              <a:ext uri="{FF2B5EF4-FFF2-40B4-BE49-F238E27FC236}">
+                <a16:creationId xmlns:a16="http://schemas.microsoft.com/office/drawing/2014/main" id="{F78CD55E-3F20-A351-D22D-746FBF18C577}"/>
+              </a:ext>
+            </a:extLst>
+          </p:cNvPr>
+          <p:cNvSpPr txBox="1"/>
+          <p:nvPr/>
+        </p:nvSpPr>
+        <p:spPr>
+          <a:xfrm>
+            <a:off x="10594499" y="4444478"/>
+            <a:ext cx="1411413" cy="307777"/>
+          </a:xfrm>
+          <a:prstGeom prst="rect">
+            <a:avLst/>
+          </a:prstGeom>
+          <a:noFill/>
+        </p:spPr>
+        <p:txBody>
+          <a:bodyPr wrap="square" rtlCol="0">
+            <a:spAutoFit/>
+          </a:bodyPr>
+          <a:lstStyle/>
+          <a:p>
+            <a:pPr algn="ctr"/>
+            <a:r>
+              <a:rPr lang="en-US" sz="1400"/>
+              <a:t>Paul Hartunian</a:t>
+            </a:r>
+          </a:p>
+        </p:txBody>
+      </p:sp>
+      <p:sp>
+        <p:nvSpPr>
+          <p:cNvPr id="36" name="TextBox 35">
+            <a:extLst>
+              <a:ext uri="{FF2B5EF4-FFF2-40B4-BE49-F238E27FC236}">
+                <a16:creationId xmlns:a16="http://schemas.microsoft.com/office/drawing/2014/main" id="{7DF8B202-423B-F834-1EEC-7ED53B62E9A6}"/>
+              </a:ext>
+            </a:extLst>
+          </p:cNvPr>
+          <p:cNvSpPr txBox="1"/>
+          <p:nvPr/>
+        </p:nvSpPr>
+        <p:spPr>
+          <a:xfrm>
+            <a:off x="2589545" y="6266687"/>
+            <a:ext cx="965730" cy="307777"/>
+          </a:xfrm>
+          <a:prstGeom prst="rect">
+            <a:avLst/>
+          </a:prstGeom>
+          <a:noFill/>
+        </p:spPr>
+        <p:txBody>
+          <a:bodyPr wrap="square" rtlCol="0">
+            <a:spAutoFit/>
+          </a:bodyPr>
+          <a:lstStyle/>
+          <a:p>
+            <a:pPr algn="ctr"/>
+            <a:r>
+              <a:rPr lang="en-US" sz="1400"/>
+              <a:t>Frank Kern</a:t>
+            </a:r>
+          </a:p>
+        </p:txBody>
+      </p:sp>
+      <p:sp>
+        <p:nvSpPr>
+          <p:cNvPr id="37" name="TextBox 36">
+            <a:extLst>
+              <a:ext uri="{FF2B5EF4-FFF2-40B4-BE49-F238E27FC236}">
+                <a16:creationId xmlns:a16="http://schemas.microsoft.com/office/drawing/2014/main" id="{3F8C6211-39E8-27FA-FD35-E6D386F96EFD}"/>
+              </a:ext>
+            </a:extLst>
+          </p:cNvPr>
+          <p:cNvSpPr txBox="1"/>
+          <p:nvPr/>
+        </p:nvSpPr>
+        <p:spPr>
+          <a:xfrm>
+            <a:off x="3358552" y="4314348"/>
+            <a:ext cx="1258724" cy="307777"/>
+          </a:xfrm>
+          <a:prstGeom prst="rect">
+            <a:avLst/>
+          </a:prstGeom>
+          <a:noFill/>
+        </p:spPr>
+        <p:txBody>
+          <a:bodyPr wrap="square" rtlCol="0">
+            <a:spAutoFit/>
+          </a:bodyPr>
+          <a:lstStyle/>
+          <a:p>
+            <a:pPr algn="ctr"/>
+            <a:r>
+              <a:rPr lang="en-US" sz="1400"/>
+              <a:t>Ten Nicholas</a:t>
+            </a:r>
+          </a:p>
+        </p:txBody>
+      </p:sp>
+      <p:sp>
+        <p:nvSpPr>
+          <p:cNvPr id="38" name="TextBox 37">
+            <a:extLst>
+              <a:ext uri="{FF2B5EF4-FFF2-40B4-BE49-F238E27FC236}">
+                <a16:creationId xmlns:a16="http://schemas.microsoft.com/office/drawing/2014/main" id="{9D79F227-F775-203D-E26F-95EED8F845B0}"/>
+              </a:ext>
+            </a:extLst>
+          </p:cNvPr>
+          <p:cNvSpPr txBox="1"/>
+          <p:nvPr/>
+        </p:nvSpPr>
+        <p:spPr>
+          <a:xfrm>
+            <a:off x="5885732" y="4460105"/>
+            <a:ext cx="938951" cy="307777"/>
+          </a:xfrm>
+          <a:prstGeom prst="rect">
+            <a:avLst/>
+          </a:prstGeom>
+          <a:noFill/>
+        </p:spPr>
+        <p:txBody>
+          <a:bodyPr wrap="square" rtlCol="0">
+            <a:spAutoFit/>
+          </a:bodyPr>
+          <a:lstStyle/>
+          <a:p>
+            <a:pPr algn="ctr"/>
+            <a:r>
+              <a:rPr lang="en-US" sz="1400"/>
+              <a:t>Jeff Paul</a:t>
+            </a:r>
+          </a:p>
+        </p:txBody>
+      </p:sp>
+      <p:sp>
+        <p:nvSpPr>
+          <p:cNvPr id="39" name="TextBox 38">
+            <a:extLst>
+              <a:ext uri="{FF2B5EF4-FFF2-40B4-BE49-F238E27FC236}">
+                <a16:creationId xmlns:a16="http://schemas.microsoft.com/office/drawing/2014/main" id="{3C936025-9B9B-488E-B916-2AAFFB254A6A}"/>
+              </a:ext>
+            </a:extLst>
+          </p:cNvPr>
+          <p:cNvSpPr txBox="1"/>
+          <p:nvPr/>
+        </p:nvSpPr>
+        <p:spPr>
+          <a:xfrm>
+            <a:off x="6557821" y="6373476"/>
+            <a:ext cx="1258724" cy="307777"/>
+          </a:xfrm>
+          <a:prstGeom prst="rect">
+            <a:avLst/>
+          </a:prstGeom>
+          <a:noFill/>
+        </p:spPr>
+        <p:txBody>
+          <a:bodyPr wrap="square" rtlCol="0">
+            <a:spAutoFit/>
+          </a:bodyPr>
+          <a:lstStyle/>
+          <a:p>
+            <a:pPr algn="ctr"/>
+            <a:r>
+              <a:rPr lang="en-US" sz="1400"/>
+              <a:t>Jeffrey Lant</a:t>
+            </a:r>
+          </a:p>
+        </p:txBody>
+      </p:sp>
+      <p:sp>
+        <p:nvSpPr>
+          <p:cNvPr id="40" name="TextBox 39">
+            <a:extLst>
+              <a:ext uri="{FF2B5EF4-FFF2-40B4-BE49-F238E27FC236}">
+                <a16:creationId xmlns:a16="http://schemas.microsoft.com/office/drawing/2014/main" id="{95B2396B-345E-089E-9208-5FB9E62D51CE}"/>
+              </a:ext>
+            </a:extLst>
+          </p:cNvPr>
+          <p:cNvSpPr txBox="1"/>
+          <p:nvPr/>
+        </p:nvSpPr>
+        <p:spPr>
+          <a:xfrm>
+            <a:off x="8161257" y="4453749"/>
+            <a:ext cx="1258724" cy="307777"/>
+          </a:xfrm>
+          <a:prstGeom prst="rect">
+            <a:avLst/>
+          </a:prstGeom>
+          <a:noFill/>
+        </p:spPr>
+        <p:txBody>
+          <a:bodyPr wrap="square" rtlCol="0">
+            <a:spAutoFit/>
+          </a:bodyPr>
+          <a:lstStyle/>
+          <a:p>
+            <a:pPr algn="ctr"/>
+            <a:r>
+              <a:rPr lang="en-US" sz="1400"/>
+              <a:t>Brian Tracy</a:t>
+            </a:r>
+          </a:p>
+        </p:txBody>
+      </p:sp>
+      <p:sp>
+        <p:nvSpPr>
+          <p:cNvPr id="41" name="TextBox 40">
+            <a:extLst>
+              <a:ext uri="{FF2B5EF4-FFF2-40B4-BE49-F238E27FC236}">
+                <a16:creationId xmlns:a16="http://schemas.microsoft.com/office/drawing/2014/main" id="{FCCC38D7-9A66-4D5F-E48B-060389E4D2D3}"/>
+              </a:ext>
+            </a:extLst>
+          </p:cNvPr>
+          <p:cNvSpPr txBox="1"/>
+          <p:nvPr/>
+        </p:nvSpPr>
+        <p:spPr>
+          <a:xfrm>
+            <a:off x="9318983" y="4486073"/>
+            <a:ext cx="1258724" cy="307777"/>
+          </a:xfrm>
+          <a:prstGeom prst="rect">
+            <a:avLst/>
+          </a:prstGeom>
+          <a:noFill/>
+        </p:spPr>
+        <p:txBody>
+          <a:bodyPr wrap="square" rtlCol="0">
+            <a:spAutoFit/>
+          </a:bodyPr>
+          <a:lstStyle/>
+          <a:p>
+            <a:pPr algn="ctr"/>
+            <a:r>
+              <a:rPr lang="en-US" sz="1400"/>
+              <a:t>Zig Ziglar</a:t>
+            </a:r>
+          </a:p>
+        </p:txBody>
+      </p:sp>
+      <p:sp>
+        <p:nvSpPr>
+          <p:cNvPr id="42" name="TextBox 41">
+            <a:extLst>
+              <a:ext uri="{FF2B5EF4-FFF2-40B4-BE49-F238E27FC236}">
+                <a16:creationId xmlns:a16="http://schemas.microsoft.com/office/drawing/2014/main" id="{30A7E541-5E46-E0CD-CF54-625BC439CB01}"/>
+              </a:ext>
+            </a:extLst>
+          </p:cNvPr>
+          <p:cNvSpPr txBox="1"/>
+          <p:nvPr/>
+        </p:nvSpPr>
+        <p:spPr>
+          <a:xfrm>
+            <a:off x="9676678" y="6359843"/>
+            <a:ext cx="1258724" cy="307777"/>
+          </a:xfrm>
+          <a:prstGeom prst="rect">
+            <a:avLst/>
+          </a:prstGeom>
+          <a:noFill/>
+        </p:spPr>
+        <p:txBody>
+          <a:bodyPr wrap="square" rtlCol="0">
+            <a:spAutoFit/>
+          </a:bodyPr>
+          <a:lstStyle/>
+          <a:p>
+            <a:pPr algn="ctr"/>
+            <a:r>
+              <a:rPr lang="en-US" sz="1400"/>
+              <a:t>Robert Allen</a:t>
+            </a:r>
+          </a:p>
+        </p:txBody>
+      </p:sp>
+      <p:sp>
+        <p:nvSpPr>
+          <p:cNvPr id="43" name="TextBox 42">
+            <a:extLst>
+              <a:ext uri="{FF2B5EF4-FFF2-40B4-BE49-F238E27FC236}">
+                <a16:creationId xmlns:a16="http://schemas.microsoft.com/office/drawing/2014/main" id="{89D734C3-9216-5C38-340B-55B799140DD2}"/>
+              </a:ext>
+            </a:extLst>
+          </p:cNvPr>
+          <p:cNvSpPr txBox="1"/>
+          <p:nvPr/>
+        </p:nvSpPr>
+        <p:spPr>
+          <a:xfrm>
+            <a:off x="10877359" y="6359843"/>
+            <a:ext cx="1128553" cy="307777"/>
+          </a:xfrm>
+          <a:prstGeom prst="rect">
+            <a:avLst/>
+          </a:prstGeom>
+          <a:noFill/>
+        </p:spPr>
+        <p:txBody>
+          <a:bodyPr wrap="square" rtlCol="0">
+            <a:spAutoFit/>
+          </a:bodyPr>
+          <a:lstStyle/>
+          <a:p>
+            <a:pPr algn="ctr"/>
+            <a:r>
+              <a:rPr lang="en-US" sz="1400"/>
+              <a:t>Mike Enlow</a:t>
+            </a:r>
+          </a:p>
+        </p:txBody>
+      </p:sp>
+      <p:pic>
+        <p:nvPicPr>
+          <p:cNvPr id="44" name="Picture 43">
+            <a:extLst>
+              <a:ext uri="{FF2B5EF4-FFF2-40B4-BE49-F238E27FC236}">
+                <a16:creationId xmlns:a16="http://schemas.microsoft.com/office/drawing/2014/main" id="{F89707CA-730D-CDFF-04EF-2FEB974B6FD4}"/>
+              </a:ext>
+            </a:extLst>
+          </p:cNvPr>
+          <p:cNvPicPr>
+            <a:picLocks noChangeAspect="1"/>
+          </p:cNvPicPr>
+          <p:nvPr/>
+        </p:nvPicPr>
+        <p:blipFill>
+          <a:blip r:embed="rId15" cstate="email">
+            <a:extLst>
+              <a:ext uri="{28A0092B-C50C-407E-A947-70E740481C1C}">
+                <a14:useLocalDpi xmlns:a14="http://schemas.microsoft.com/office/drawing/2010/main"/>
+              </a:ext>
+            </a:extLst>
+          </a:blip>
+          <a:stretch>
+            <a:fillRect/>
+          </a:stretch>
+        </p:blipFill>
+        <p:spPr>
+          <a:xfrm>
+            <a:off x="8429923" y="862462"/>
+            <a:ext cx="1572329" cy="1649028"/>
+          </a:xfrm>
+          <a:prstGeom prst="rect">
+            <a:avLst/>
+          </a:prstGeom>
+        </p:spPr>
+      </p:pic>
+      <p:sp>
+        <p:nvSpPr>
+          <p:cNvPr id="45" name="TextBox 44">
+            <a:extLst>
+              <a:ext uri="{FF2B5EF4-FFF2-40B4-BE49-F238E27FC236}">
+                <a16:creationId xmlns:a16="http://schemas.microsoft.com/office/drawing/2014/main" id="{6FEBFD51-3C80-9156-1094-3B8538859EDA}"/>
+              </a:ext>
+            </a:extLst>
+          </p:cNvPr>
+          <p:cNvSpPr txBox="1"/>
+          <p:nvPr/>
+        </p:nvSpPr>
+        <p:spPr>
+          <a:xfrm>
+            <a:off x="8419939" y="2515034"/>
+            <a:ext cx="1572329" cy="307777"/>
+          </a:xfrm>
+          <a:prstGeom prst="rect">
+            <a:avLst/>
+          </a:prstGeom>
+          <a:noFill/>
+        </p:spPr>
+        <p:txBody>
+          <a:bodyPr wrap="square" rtlCol="0">
+            <a:spAutoFit/>
+          </a:bodyPr>
+          <a:lstStyle/>
+          <a:p>
+            <a:pPr algn="ctr"/>
+            <a:r>
+              <a:rPr lang="en-US" sz="1400"/>
+              <a:t>Gary Bencivenga</a:t>
+            </a:r>
+          </a:p>
+        </p:txBody>
+      </p:sp>
+      <p:pic>
+        <p:nvPicPr>
+          <p:cNvPr id="46" name="Picture 45">
+            <a:extLst>
+              <a:ext uri="{FF2B5EF4-FFF2-40B4-BE49-F238E27FC236}">
+                <a16:creationId xmlns:a16="http://schemas.microsoft.com/office/drawing/2014/main" id="{27A2765F-965C-5D94-2DBB-F66F1C866BA1}"/>
+              </a:ext>
+            </a:extLst>
+          </p:cNvPr>
+          <p:cNvPicPr>
+            <a:picLocks noChangeAspect="1"/>
+          </p:cNvPicPr>
+          <p:nvPr/>
+        </p:nvPicPr>
+        <p:blipFill rotWithShape="1">
+          <a:blip r:embed="rId16" cstate="email">
+            <a:extLst>
+              <a:ext uri="{28A0092B-C50C-407E-A947-70E740481C1C}">
+                <a14:useLocalDpi xmlns:a14="http://schemas.microsoft.com/office/drawing/2010/main"/>
+              </a:ext>
+            </a:extLst>
+          </a:blip>
+          <a:srcRect/>
+          <a:stretch/>
+        </p:blipFill>
+        <p:spPr>
+          <a:xfrm>
+            <a:off x="2569107" y="4818055"/>
+            <a:ext cx="1088609" cy="1410648"/>
+          </a:xfrm>
+          <a:prstGeom prst="rect">
+            <a:avLst/>
+          </a:prstGeom>
+        </p:spPr>
+      </p:pic>
+      <p:sp>
+        <p:nvSpPr>
+          <p:cNvPr id="47" name="TextBox 46">
+            <a:extLst>
+              <a:ext uri="{FF2B5EF4-FFF2-40B4-BE49-F238E27FC236}">
+                <a16:creationId xmlns:a16="http://schemas.microsoft.com/office/drawing/2014/main" id="{E977961F-738B-C7B6-7492-9BBDD81D01E0}"/>
+              </a:ext>
+            </a:extLst>
+          </p:cNvPr>
+          <p:cNvSpPr txBox="1"/>
+          <p:nvPr/>
+        </p:nvSpPr>
+        <p:spPr>
+          <a:xfrm>
+            <a:off x="1300709" y="6276401"/>
+            <a:ext cx="1258724" cy="307777"/>
+          </a:xfrm>
+          <a:prstGeom prst="rect">
+            <a:avLst/>
+          </a:prstGeom>
+          <a:noFill/>
+        </p:spPr>
+        <p:txBody>
+          <a:bodyPr wrap="square" rtlCol="0">
+            <a:spAutoFit/>
+          </a:bodyPr>
+          <a:lstStyle/>
+          <a:p>
+            <a:pPr algn="ctr"/>
+            <a:r>
+              <a:rPr lang="en-US" sz="1400"/>
+              <a:t>Bob Serling</a:t>
+            </a:r>
+          </a:p>
+        </p:txBody>
+      </p:sp>
+      <p:pic>
+        <p:nvPicPr>
+          <p:cNvPr id="48" name="Picture 47">
+            <a:extLst>
+              <a:ext uri="{FF2B5EF4-FFF2-40B4-BE49-F238E27FC236}">
+                <a16:creationId xmlns:a16="http://schemas.microsoft.com/office/drawing/2014/main" id="{AF0A3377-FDCD-B849-41DF-4767A6569F9D}"/>
+              </a:ext>
+            </a:extLst>
+          </p:cNvPr>
+          <p:cNvPicPr>
+            <a:picLocks noChangeAspect="1"/>
+          </p:cNvPicPr>
+          <p:nvPr/>
+        </p:nvPicPr>
+        <p:blipFill>
+          <a:blip r:embed="rId17" cstate="email">
+            <a:extLst>
+              <a:ext uri="{28A0092B-C50C-407E-A947-70E740481C1C}">
+                <a14:useLocalDpi xmlns:a14="http://schemas.microsoft.com/office/drawing/2010/main"/>
+              </a:ext>
+            </a:extLst>
+          </a:blip>
+          <a:stretch>
+            <a:fillRect/>
+          </a:stretch>
+        </p:blipFill>
+        <p:spPr>
+          <a:xfrm>
+            <a:off x="8317698" y="5013468"/>
+            <a:ext cx="1270825" cy="1270825"/>
+          </a:xfrm>
+          <a:prstGeom prst="rect">
+            <a:avLst/>
+          </a:prstGeom>
+        </p:spPr>
+      </p:pic>
+      <p:sp>
+        <p:nvSpPr>
+          <p:cNvPr id="49" name="TextBox 48">
+            <a:extLst>
+              <a:ext uri="{FF2B5EF4-FFF2-40B4-BE49-F238E27FC236}">
+                <a16:creationId xmlns:a16="http://schemas.microsoft.com/office/drawing/2014/main" id="{33515F78-4F73-1F17-8555-02AEF171B280}"/>
+              </a:ext>
+            </a:extLst>
+          </p:cNvPr>
+          <p:cNvSpPr txBox="1"/>
+          <p:nvPr/>
+        </p:nvSpPr>
+        <p:spPr>
+          <a:xfrm>
+            <a:off x="7942170" y="6293674"/>
+            <a:ext cx="1940740" cy="492443"/>
+          </a:xfrm>
+          <a:prstGeom prst="rect">
+            <a:avLst/>
+          </a:prstGeom>
+          <a:noFill/>
+        </p:spPr>
+        <p:txBody>
+          <a:bodyPr wrap="square" rtlCol="0">
+            <a:spAutoFit/>
+          </a:bodyPr>
+          <a:lstStyle/>
+          <a:p>
+            <a:pPr algn="ctr"/>
+            <a:r>
+              <a:rPr lang="en-US" sz="1400"/>
+              <a:t>Bill Myers</a:t>
+            </a:r>
+          </a:p>
+          <a:p>
+            <a:pPr algn="ctr"/>
+            <a:r>
+              <a:rPr lang="en-US" sz="1200"/>
+              <a:t>https://www.bmyers.com</a:t>
+            </a:r>
+          </a:p>
+        </p:txBody>
+      </p:sp>
+      <p:pic>
+        <p:nvPicPr>
+          <p:cNvPr id="1032" name="Picture 8" descr="Insights from copywriting legend Gary Halbert - Copy Dojo">
+            <a:extLst>
+              <a:ext uri="{FF2B5EF4-FFF2-40B4-BE49-F238E27FC236}">
+                <a16:creationId xmlns:a16="http://schemas.microsoft.com/office/drawing/2014/main" id="{8AB05F49-47E9-D0F9-52A3-A67AA068E216}"/>
+              </a:ext>
+            </a:extLst>
+          </p:cNvPr>
+          <p:cNvPicPr>
+            <a:picLocks noChangeAspect="1" noChangeArrowheads="1"/>
+          </p:cNvPicPr>
+          <p:nvPr/>
+        </p:nvPicPr>
+        <p:blipFill>
+          <a:blip r:embed="rId18" cstate="email">
+            <a:extLst>
+              <a:ext uri="{28A0092B-C50C-407E-A947-70E740481C1C}">
+                <a14:useLocalDpi xmlns:a14="http://schemas.microsoft.com/office/drawing/2010/main"/>
+              </a:ext>
+            </a:extLst>
+          </a:blip>
+          <a:srcRect/>
+          <a:stretch>
+            <a:fillRect/>
+          </a:stretch>
+        </p:blipFill>
+        <p:spPr bwMode="auto">
+          <a:xfrm>
+            <a:off x="54081" y="851535"/>
+            <a:ext cx="1355220" cy="1351348"/>
+          </a:xfrm>
+          <a:prstGeom prst="rect">
+            <a:avLst/>
+          </a:prstGeom>
+          <a:noFill/>
+          <a:extLst>
+            <a:ext uri="{909E8E84-426E-40DD-AFC4-6F175D3DCCD1}">
+              <a14:hiddenFill xmlns:a14="http://schemas.microsoft.com/office/drawing/2010/main">
+                <a:solidFill>
+                  <a:srgbClr val="FFFFFF"/>
+                </a:solidFill>
+              </a14:hiddenFill>
+            </a:ext>
+          </a:extLst>
+        </p:spPr>
+      </p:pic>
+      <p:pic>
+        <p:nvPicPr>
+          <p:cNvPr id="50" name="Picture 49">
+            <a:extLst>
+              <a:ext uri="{FF2B5EF4-FFF2-40B4-BE49-F238E27FC236}">
+                <a16:creationId xmlns:a16="http://schemas.microsoft.com/office/drawing/2014/main" id="{135C1E17-7BF6-80FF-4270-8158A9FE955E}"/>
+              </a:ext>
+            </a:extLst>
+          </p:cNvPr>
+          <p:cNvPicPr>
+            <a:picLocks noChangeAspect="1"/>
+          </p:cNvPicPr>
+          <p:nvPr/>
+        </p:nvPicPr>
+        <p:blipFill>
+          <a:blip r:embed="rId19" cstate="email">
+            <a:extLst>
+              <a:ext uri="{28A0092B-C50C-407E-A947-70E740481C1C}">
+                <a14:useLocalDpi xmlns:a14="http://schemas.microsoft.com/office/drawing/2010/main"/>
+              </a:ext>
+            </a:extLst>
+          </a:blip>
+          <a:stretch>
+            <a:fillRect/>
+          </a:stretch>
+        </p:blipFill>
+        <p:spPr>
+          <a:xfrm>
+            <a:off x="1788803" y="2962146"/>
+            <a:ext cx="1406511" cy="1410648"/>
+          </a:xfrm>
+          <a:prstGeom prst="rect">
+            <a:avLst/>
+          </a:prstGeom>
+        </p:spPr>
+      </p:pic>
+      <p:sp>
+        <p:nvSpPr>
+          <p:cNvPr id="51" name="TextBox 50">
+            <a:extLst>
+              <a:ext uri="{FF2B5EF4-FFF2-40B4-BE49-F238E27FC236}">
+                <a16:creationId xmlns:a16="http://schemas.microsoft.com/office/drawing/2014/main" id="{711E2303-7A21-B48C-F562-9278DCCADE2B}"/>
+              </a:ext>
+            </a:extLst>
+          </p:cNvPr>
+          <p:cNvSpPr txBox="1"/>
+          <p:nvPr/>
+        </p:nvSpPr>
+        <p:spPr>
+          <a:xfrm>
+            <a:off x="1830675" y="4347975"/>
+            <a:ext cx="1258724" cy="307777"/>
+          </a:xfrm>
+          <a:prstGeom prst="rect">
+            <a:avLst/>
+          </a:prstGeom>
+          <a:noFill/>
+        </p:spPr>
+        <p:txBody>
+          <a:bodyPr wrap="square" rtlCol="0">
+            <a:spAutoFit/>
+          </a:bodyPr>
+          <a:lstStyle/>
+          <a:p>
+            <a:pPr algn="ctr"/>
+            <a:r>
+              <a:rPr lang="en-US" sz="1400"/>
+              <a:t>Dean Jackson</a:t>
+            </a:r>
+          </a:p>
+        </p:txBody>
+      </p:sp>
+      <p:pic>
+        <p:nvPicPr>
+          <p:cNvPr id="52" name="Picture 51">
+            <a:extLst>
+              <a:ext uri="{FF2B5EF4-FFF2-40B4-BE49-F238E27FC236}">
+                <a16:creationId xmlns:a16="http://schemas.microsoft.com/office/drawing/2014/main" id="{D621CA2E-956D-E905-E8E6-1358FC9473D9}"/>
+              </a:ext>
+            </a:extLst>
+          </p:cNvPr>
+          <p:cNvPicPr>
+            <a:picLocks noChangeAspect="1"/>
+          </p:cNvPicPr>
+          <p:nvPr/>
+        </p:nvPicPr>
+        <p:blipFill>
+          <a:blip r:embed="rId20" cstate="email">
+            <a:extLst>
+              <a:ext uri="{28A0092B-C50C-407E-A947-70E740481C1C}">
+                <a14:useLocalDpi xmlns:a14="http://schemas.microsoft.com/office/drawing/2010/main"/>
+              </a:ext>
+            </a:extLst>
+          </a:blip>
+          <a:stretch>
+            <a:fillRect/>
+          </a:stretch>
+        </p:blipFill>
+        <p:spPr>
+          <a:xfrm>
+            <a:off x="10312387" y="880482"/>
+            <a:ext cx="1506044" cy="1573883"/>
+          </a:xfrm>
+          <a:prstGeom prst="rect">
+            <a:avLst/>
+          </a:prstGeom>
+        </p:spPr>
+      </p:pic>
+      <p:sp>
+        <p:nvSpPr>
+          <p:cNvPr id="53" name="TextBox 52">
+            <a:extLst>
+              <a:ext uri="{FF2B5EF4-FFF2-40B4-BE49-F238E27FC236}">
+                <a16:creationId xmlns:a16="http://schemas.microsoft.com/office/drawing/2014/main" id="{6E7D7325-78A6-D7B0-48AD-92B8AFCB3D57}"/>
+              </a:ext>
+            </a:extLst>
+          </p:cNvPr>
+          <p:cNvSpPr txBox="1"/>
+          <p:nvPr/>
+        </p:nvSpPr>
+        <p:spPr>
+          <a:xfrm>
+            <a:off x="10271125" y="2478458"/>
+            <a:ext cx="1572329" cy="307777"/>
+          </a:xfrm>
+          <a:prstGeom prst="rect">
+            <a:avLst/>
+          </a:prstGeom>
+          <a:noFill/>
+        </p:spPr>
+        <p:txBody>
+          <a:bodyPr wrap="square" rtlCol="0">
+            <a:spAutoFit/>
+          </a:bodyPr>
+          <a:lstStyle/>
+          <a:p>
+            <a:pPr algn="ctr"/>
+            <a:r>
+              <a:rPr lang="en-US" sz="1400"/>
+              <a:t>Robert Cialdini</a:t>
+            </a:r>
+          </a:p>
+        </p:txBody>
+      </p:sp>
+      <p:sp>
+        <p:nvSpPr>
+          <p:cNvPr id="54" name="TextBox 53">
+            <a:extLst>
+              <a:ext uri="{FF2B5EF4-FFF2-40B4-BE49-F238E27FC236}">
+                <a16:creationId xmlns:a16="http://schemas.microsoft.com/office/drawing/2014/main" id="{5E412054-73FA-D017-3B19-E00DC037BFB5}"/>
+              </a:ext>
+            </a:extLst>
+          </p:cNvPr>
+          <p:cNvSpPr txBox="1"/>
+          <p:nvPr/>
+        </p:nvSpPr>
+        <p:spPr>
+          <a:xfrm>
+            <a:off x="3756301" y="6373476"/>
+            <a:ext cx="1258724" cy="523220"/>
+          </a:xfrm>
+          <a:prstGeom prst="rect">
+            <a:avLst/>
+          </a:prstGeom>
+          <a:noFill/>
+        </p:spPr>
+        <p:txBody>
+          <a:bodyPr wrap="square" rtlCol="0">
+            <a:spAutoFit/>
+          </a:bodyPr>
+          <a:lstStyle/>
+          <a:p>
+            <a:pPr algn="ctr"/>
+            <a:r>
+              <a:rPr lang="en-US" sz="1400"/>
+              <a:t>Stuart Goldsmith</a:t>
+            </a:r>
+          </a:p>
+        </p:txBody>
+      </p:sp>
+      <p:pic>
+        <p:nvPicPr>
+          <p:cNvPr id="56" name="Picture 55">
+            <a:extLst>
+              <a:ext uri="{FF2B5EF4-FFF2-40B4-BE49-F238E27FC236}">
+                <a16:creationId xmlns:a16="http://schemas.microsoft.com/office/drawing/2014/main" id="{737625E7-7189-E505-F95F-83A2F25AFECF}"/>
+              </a:ext>
+            </a:extLst>
+          </p:cNvPr>
+          <p:cNvPicPr>
+            <a:picLocks noChangeAspect="1"/>
+          </p:cNvPicPr>
+          <p:nvPr/>
+        </p:nvPicPr>
+        <p:blipFill>
+          <a:blip r:embed="rId21" cstate="email">
+            <a:extLst>
+              <a:ext uri="{28A0092B-C50C-407E-A947-70E740481C1C}">
+                <a14:useLocalDpi xmlns:a14="http://schemas.microsoft.com/office/drawing/2010/main"/>
+              </a:ext>
+            </a:extLst>
+          </a:blip>
+          <a:stretch>
+            <a:fillRect/>
+          </a:stretch>
+        </p:blipFill>
+        <p:spPr>
+          <a:xfrm>
+            <a:off x="9710702" y="5034640"/>
+            <a:ext cx="1109472" cy="1325203"/>
+          </a:xfrm>
+          <a:prstGeom prst="rect">
+            <a:avLst/>
+          </a:prstGeom>
+        </p:spPr>
+      </p:pic>
+      <p:sp>
+        <p:nvSpPr>
+          <p:cNvPr id="57" name="TextBox 56">
+            <a:extLst>
+              <a:ext uri="{FF2B5EF4-FFF2-40B4-BE49-F238E27FC236}">
+                <a16:creationId xmlns:a16="http://schemas.microsoft.com/office/drawing/2014/main" id="{C2EF79D2-1C4D-20EE-2373-3F185D4E944D}"/>
+              </a:ext>
+            </a:extLst>
+          </p:cNvPr>
+          <p:cNvSpPr txBox="1"/>
+          <p:nvPr/>
+        </p:nvSpPr>
+        <p:spPr>
+          <a:xfrm>
+            <a:off x="6961486" y="4498205"/>
+            <a:ext cx="1258724" cy="307777"/>
+          </a:xfrm>
+          <a:prstGeom prst="rect">
+            <a:avLst/>
+          </a:prstGeom>
+          <a:noFill/>
+        </p:spPr>
+        <p:txBody>
+          <a:bodyPr wrap="square" rtlCol="0">
+            <a:spAutoFit/>
+          </a:bodyPr>
+          <a:lstStyle/>
+          <a:p>
+            <a:pPr algn="ctr"/>
+            <a:r>
+              <a:rPr lang="en-US" sz="1400"/>
+              <a:t>Joe Girard</a:t>
+            </a:r>
+          </a:p>
+        </p:txBody>
+      </p:sp>
+      <p:pic>
+        <p:nvPicPr>
+          <p:cNvPr id="1040" name="Picture 16" descr="10 bizarre and daring feats of salesmanship - Joe Girard (7) - FORTUNE">
+            <a:extLst>
+              <a:ext uri="{FF2B5EF4-FFF2-40B4-BE49-F238E27FC236}">
+                <a16:creationId xmlns:a16="http://schemas.microsoft.com/office/drawing/2014/main" id="{0BDAEA8E-F072-2017-9BDD-81203EF6D3AA}"/>
+              </a:ext>
+            </a:extLst>
+          </p:cNvPr>
+          <p:cNvPicPr>
+            <a:picLocks noChangeAspect="1" noChangeArrowheads="1"/>
+          </p:cNvPicPr>
+          <p:nvPr/>
+        </p:nvPicPr>
+        <p:blipFill rotWithShape="1">
+          <a:blip r:embed="rId22" cstate="email">
+            <a:extLst>
+              <a:ext uri="{28A0092B-C50C-407E-A947-70E740481C1C}">
+                <a14:useLocalDpi xmlns:a14="http://schemas.microsoft.com/office/drawing/2010/main"/>
+              </a:ext>
+            </a:extLst>
+          </a:blip>
+          <a:srcRect/>
+          <a:stretch/>
+        </p:blipFill>
+        <p:spPr bwMode="auto">
+          <a:xfrm>
+            <a:off x="6994152" y="2921898"/>
+            <a:ext cx="1196152" cy="1563750"/>
+          </a:xfrm>
+          <a:prstGeom prst="rect">
+            <a:avLst/>
+          </a:prstGeom>
+          <a:noFill/>
+          <a:extLst>
+            <a:ext uri="{909E8E84-426E-40DD-AFC4-6F175D3DCCD1}">
+              <a14:hiddenFill xmlns:a14="http://schemas.microsoft.com/office/drawing/2010/main">
+                <a:solidFill>
+                  <a:srgbClr val="FFFFFF"/>
+                </a:solidFill>
+              </a14:hiddenFill>
+            </a:ext>
+          </a:extLst>
+        </p:spPr>
+      </p:pic>
+      <p:pic>
+        <p:nvPicPr>
+          <p:cNvPr id="3" name="Picture 2">
+            <a:extLst>
+              <a:ext uri="{FF2B5EF4-FFF2-40B4-BE49-F238E27FC236}">
+                <a16:creationId xmlns:a16="http://schemas.microsoft.com/office/drawing/2014/main" id="{D651B47E-50FE-CB92-9F80-3CC2CF13EFE1}"/>
+              </a:ext>
+            </a:extLst>
+          </p:cNvPr>
+          <p:cNvPicPr>
+            <a:picLocks noChangeAspect="1"/>
+          </p:cNvPicPr>
+          <p:nvPr/>
+        </p:nvPicPr>
+        <p:blipFill>
+          <a:blip r:embed="rId23" cstate="email">
+            <a:extLst>
+              <a:ext uri="{28A0092B-C50C-407E-A947-70E740481C1C}">
+                <a14:useLocalDpi xmlns:a14="http://schemas.microsoft.com/office/drawing/2010/main"/>
+              </a:ext>
+            </a:extLst>
+          </a:blip>
+          <a:stretch>
+            <a:fillRect/>
+          </a:stretch>
+        </p:blipFill>
+        <p:spPr>
+          <a:xfrm>
+            <a:off x="3840640" y="4957623"/>
+            <a:ext cx="1166271" cy="1350930"/>
+          </a:xfrm>
+          <a:prstGeom prst="rect">
+            <a:avLst/>
+          </a:prstGeom>
+        </p:spPr>
+      </p:pic>
+      <p:pic>
+        <p:nvPicPr>
+          <p:cNvPr id="5" name="Picture 4">
+            <a:extLst>
+              <a:ext uri="{FF2B5EF4-FFF2-40B4-BE49-F238E27FC236}">
+                <a16:creationId xmlns:a16="http://schemas.microsoft.com/office/drawing/2014/main" id="{C108628B-A87C-F1B6-D3EF-FE5E9F8E108A}"/>
+              </a:ext>
+            </a:extLst>
+          </p:cNvPr>
+          <p:cNvPicPr>
+            <a:picLocks noChangeAspect="1"/>
+          </p:cNvPicPr>
+          <p:nvPr/>
+        </p:nvPicPr>
+        <p:blipFill>
+          <a:blip r:embed="rId24" cstate="email">
+            <a:extLst>
+              <a:ext uri="{28A0092B-C50C-407E-A947-70E740481C1C}">
+                <a14:useLocalDpi xmlns:a14="http://schemas.microsoft.com/office/drawing/2010/main"/>
+              </a:ext>
+            </a:extLst>
+          </a:blip>
+          <a:stretch>
+            <a:fillRect/>
+          </a:stretch>
+        </p:blipFill>
+        <p:spPr>
+          <a:xfrm>
+            <a:off x="91361" y="4835630"/>
+            <a:ext cx="1168794" cy="1473697"/>
+          </a:xfrm>
+          <a:prstGeom prst="rect">
+            <a:avLst/>
+          </a:prstGeom>
+        </p:spPr>
+      </p:pic>
+      <p:sp>
+        <p:nvSpPr>
+          <p:cNvPr id="7" name="TextBox 6">
+            <a:extLst>
+              <a:ext uri="{FF2B5EF4-FFF2-40B4-BE49-F238E27FC236}">
+                <a16:creationId xmlns:a16="http://schemas.microsoft.com/office/drawing/2014/main" id="{AF25D7B4-4BF9-7BAA-1339-ECF0D4DBC643}"/>
+              </a:ext>
+            </a:extLst>
+          </p:cNvPr>
+          <p:cNvSpPr txBox="1"/>
+          <p:nvPr/>
+        </p:nvSpPr>
+        <p:spPr>
+          <a:xfrm>
+            <a:off x="54700" y="6341224"/>
+            <a:ext cx="1258724" cy="307777"/>
+          </a:xfrm>
+          <a:prstGeom prst="rect">
+            <a:avLst/>
+          </a:prstGeom>
+          <a:noFill/>
+        </p:spPr>
+        <p:txBody>
+          <a:bodyPr wrap="square" rtlCol="0">
+            <a:spAutoFit/>
+          </a:bodyPr>
+          <a:lstStyle/>
+          <a:p>
+            <a:pPr algn="ctr"/>
+            <a:r>
+              <a:rPr lang="en-US" sz="1400"/>
+              <a:t>Brian Kurtz</a:t>
+            </a:r>
+          </a:p>
+        </p:txBody>
+      </p:sp>
+      <p:sp>
+        <p:nvSpPr>
+          <p:cNvPr id="8" name="TextBox 7">
+            <a:extLst>
+              <a:ext uri="{FF2B5EF4-FFF2-40B4-BE49-F238E27FC236}">
+                <a16:creationId xmlns:a16="http://schemas.microsoft.com/office/drawing/2014/main" id="{2F4DE5D4-BEA6-F188-7843-A16B7651EDE4}"/>
+              </a:ext>
+            </a:extLst>
+          </p:cNvPr>
+          <p:cNvSpPr txBox="1"/>
+          <p:nvPr/>
+        </p:nvSpPr>
+        <p:spPr>
+          <a:xfrm>
+            <a:off x="4571894" y="4319150"/>
+            <a:ext cx="1202468" cy="307777"/>
+          </a:xfrm>
+          <a:prstGeom prst="rect">
+            <a:avLst/>
+          </a:prstGeom>
+          <a:noFill/>
+        </p:spPr>
+        <p:txBody>
+          <a:bodyPr wrap="square" rtlCol="0">
+            <a:spAutoFit/>
+          </a:bodyPr>
+          <a:lstStyle/>
+          <a:p>
+            <a:pPr algn="ctr"/>
+            <a:r>
+              <a:rPr lang="en-US" sz="1400"/>
+              <a:t>John Carlton</a:t>
+            </a:r>
+          </a:p>
+        </p:txBody>
+      </p:sp>
+      <p:pic>
+        <p:nvPicPr>
+          <p:cNvPr id="9" name="Picture 8">
+            <a:extLst>
+              <a:ext uri="{FF2B5EF4-FFF2-40B4-BE49-F238E27FC236}">
+                <a16:creationId xmlns:a16="http://schemas.microsoft.com/office/drawing/2014/main" id="{56F8444B-BA9A-05C9-E3C5-CE2499D45378}"/>
+              </a:ext>
+            </a:extLst>
+          </p:cNvPr>
+          <p:cNvPicPr>
+            <a:picLocks noChangeAspect="1"/>
+          </p:cNvPicPr>
+          <p:nvPr/>
+        </p:nvPicPr>
+        <p:blipFill>
+          <a:blip r:embed="rId25" cstate="email">
+            <a:extLst>
+              <a:ext uri="{28A0092B-C50C-407E-A947-70E740481C1C}">
+                <a14:useLocalDpi xmlns:a14="http://schemas.microsoft.com/office/drawing/2010/main"/>
+              </a:ext>
+            </a:extLst>
+          </a:blip>
+          <a:stretch>
+            <a:fillRect/>
+          </a:stretch>
+        </p:blipFill>
+        <p:spPr>
+          <a:xfrm>
+            <a:off x="4602764" y="2958562"/>
+            <a:ext cx="1129932" cy="1374631"/>
+          </a:xfrm>
+          <a:prstGeom prst="rect">
+            <a:avLst/>
+          </a:prstGeom>
+        </p:spPr>
+      </p:pic>
+      <p:sp>
+        <p:nvSpPr>
+          <p:cNvPr id="11" name="TextBox 10">
+            <a:extLst>
+              <a:ext uri="{FF2B5EF4-FFF2-40B4-BE49-F238E27FC236}">
+                <a16:creationId xmlns:a16="http://schemas.microsoft.com/office/drawing/2014/main" id="{23298DB9-A1DF-8245-1FAD-F6A15A4BA2D0}"/>
+              </a:ext>
+            </a:extLst>
+          </p:cNvPr>
+          <p:cNvSpPr txBox="1"/>
+          <p:nvPr/>
+        </p:nvSpPr>
+        <p:spPr>
+          <a:xfrm>
+            <a:off x="5289782" y="6394741"/>
+            <a:ext cx="1133897" cy="523220"/>
+          </a:xfrm>
+          <a:prstGeom prst="rect">
+            <a:avLst/>
+          </a:prstGeom>
+          <a:noFill/>
+        </p:spPr>
+        <p:txBody>
+          <a:bodyPr wrap="square" rtlCol="0">
+            <a:spAutoFit/>
+          </a:bodyPr>
+          <a:lstStyle/>
+          <a:p>
+            <a:pPr algn="ctr"/>
+            <a:r>
+              <a:rPr lang="en-US" sz="1400"/>
+              <a:t>Alex Mandossian</a:t>
+            </a:r>
+          </a:p>
+        </p:txBody>
+      </p:sp>
+      <p:pic>
+        <p:nvPicPr>
+          <p:cNvPr id="2052" name="Picture 4" descr="Alex Mandossian - YouTube">
+            <a:extLst>
+              <a:ext uri="{FF2B5EF4-FFF2-40B4-BE49-F238E27FC236}">
+                <a16:creationId xmlns:a16="http://schemas.microsoft.com/office/drawing/2014/main" id="{2090BA26-9BE9-F75E-AB4C-2E6D289323D0}"/>
+              </a:ext>
+            </a:extLst>
+          </p:cNvPr>
+          <p:cNvPicPr>
+            <a:picLocks noChangeAspect="1" noChangeArrowheads="1"/>
+          </p:cNvPicPr>
+          <p:nvPr/>
+        </p:nvPicPr>
+        <p:blipFill rotWithShape="1">
+          <a:blip r:embed="rId26" cstate="email">
+            <a:extLst>
+              <a:ext uri="{28A0092B-C50C-407E-A947-70E740481C1C}">
+                <a14:useLocalDpi xmlns:a14="http://schemas.microsoft.com/office/drawing/2010/main"/>
+              </a:ext>
+            </a:extLst>
+          </a:blip>
+          <a:srcRect/>
+          <a:stretch/>
+        </p:blipFill>
+        <p:spPr bwMode="auto">
+          <a:xfrm>
+            <a:off x="5340559" y="4929835"/>
+            <a:ext cx="1075559" cy="1410649"/>
+          </a:xfrm>
+          <a:prstGeom prst="rect">
+            <a:avLst/>
+          </a:prstGeom>
+          <a:noFill/>
+          <a:extLst>
+            <a:ext uri="{909E8E84-426E-40DD-AFC4-6F175D3DCCD1}">
+              <a14:hiddenFill xmlns:a14="http://schemas.microsoft.com/office/drawing/2010/main">
+                <a:solidFill>
+                  <a:srgbClr val="FFFFFF"/>
+                </a:solidFill>
+              </a14:hiddenFill>
+            </a:ext>
+          </a:extLst>
+        </p:spPr>
+      </p:pic>
+      <p:sp>
+        <p:nvSpPr>
+          <p:cNvPr id="13" name="TextBox 12">
+            <a:extLst>
+              <a:ext uri="{FF2B5EF4-FFF2-40B4-BE49-F238E27FC236}">
+                <a16:creationId xmlns:a16="http://schemas.microsoft.com/office/drawing/2014/main" id="{BC1276A6-9E85-F005-4120-4740E9A713A8}"/>
+              </a:ext>
+            </a:extLst>
+          </p:cNvPr>
+          <p:cNvSpPr txBox="1"/>
+          <p:nvPr/>
+        </p:nvSpPr>
+        <p:spPr>
+          <a:xfrm>
+            <a:off x="84083" y="84082"/>
+            <a:ext cx="5902047" cy="523220"/>
+          </a:xfrm>
+          <a:prstGeom prst="rect">
+            <a:avLst/>
+          </a:prstGeom>
+          <a:noFill/>
+        </p:spPr>
+        <p:txBody>
+          <a:bodyPr wrap="square" rtlCol="0">
+            <a:spAutoFit/>
+          </a:bodyPr>
+          <a:lstStyle/>
+          <a:p>
+            <a:r>
+              <a:rPr lang="en-US" sz="2800" b="1"/>
+              <a:t>Some Marketing People to Know ...</a:t>
+            </a:r>
+          </a:p>
+        </p:txBody>
+      </p:sp>
+    </p:spTree>
+    <p:extLst>
+      <p:ext uri="{BB962C8B-B14F-4D97-AF65-F5344CB8AC3E}">
+        <p14:creationId xmlns:p14="http://schemas.microsoft.com/office/powerpoint/2010/main" val="1876813744"/>
+      </p:ext>
+    </p:extLst>
+  </p:cSld>
+  <p:clrMapOvr>
+    <a:masterClrMapping/>
+  </p:clrMapOvr>
+</p:sld>
+</file>
+
+<file path=ppt/slides/slide7.xml><?xml version="1.0" encoding="utf-8"?>
+<p:sld xmlns:a="http://schemas.openxmlformats.org/drawingml/2006/main" xmlns:r="http://schemas.openxmlformats.org/officeDocument/2006/relationships" xmlns:p="http://schemas.openxmlformats.org/presentationml/2006/main">
+  <p:cSld>
+    <p:spTree>
+      <p:nvGrpSpPr>
+        <p:cNvPr id="1" name=""/>
+        <p:cNvGrpSpPr/>
+        <p:nvPr/>
+      </p:nvGrpSpPr>
+      <p:grpSpPr>
+        <a:xfrm>
+          <a:off x="0" y="0"/>
+          <a:ext cx="0" cy="0"/>
+          <a:chOff x="0" y="0"/>
+          <a:chExt cx="0" cy="0"/>
+        </a:xfrm>
+      </p:grpSpPr>
+      <p:pic>
+        <p:nvPicPr>
+          <p:cNvPr id="2050" name="Picture 2" descr="17 Inspiring &amp; Educational Books Every Copywriter Needs to Read">
+            <a:extLst>
+              <a:ext uri="{FF2B5EF4-FFF2-40B4-BE49-F238E27FC236}">
+                <a16:creationId xmlns:a16="http://schemas.microsoft.com/office/drawing/2014/main" id="{49D48706-A75C-CDD2-A540-EA3F6EC5ECF2}"/>
+              </a:ext>
+            </a:extLst>
+          </p:cNvPr>
+          <p:cNvPicPr>
+            <a:picLocks noChangeAspect="1" noChangeArrowheads="1"/>
+          </p:cNvPicPr>
+          <p:nvPr/>
+        </p:nvPicPr>
+        <p:blipFill>
+          <a:blip r:embed="rId2" cstate="email">
+            <a:extLst>
+              <a:ext uri="{28A0092B-C50C-407E-A947-70E740481C1C}">
+                <a14:useLocalDpi xmlns:a14="http://schemas.microsoft.com/office/drawing/2010/main"/>
+              </a:ext>
+            </a:extLst>
+          </a:blip>
+          <a:srcRect/>
+          <a:stretch>
+            <a:fillRect/>
+          </a:stretch>
+        </p:blipFill>
+        <p:spPr bwMode="auto">
+          <a:xfrm>
+            <a:off x="1712690" y="936057"/>
+            <a:ext cx="1469467" cy="1934734"/>
+          </a:xfrm>
+          <a:prstGeom prst="rect">
+            <a:avLst/>
+          </a:prstGeom>
+          <a:noFill/>
+          <a:extLst>
+            <a:ext uri="{909E8E84-426E-40DD-AFC4-6F175D3DCCD1}">
+              <a14:hiddenFill xmlns:a14="http://schemas.microsoft.com/office/drawing/2010/main">
+                <a:solidFill>
+                  <a:srgbClr val="FFFFFF"/>
+                </a:solidFill>
+              </a14:hiddenFill>
+            </a:ext>
+          </a:extLst>
+        </p:spPr>
+      </p:pic>
+      <p:pic>
+        <p:nvPicPr>
+          <p:cNvPr id="2052" name="Picture 4" descr="Ultimate Sales Letter 2nd Ed: Kennedy, Dan S: 0045079202573: Amazon.com:  Books">
+            <a:extLst>
+              <a:ext uri="{FF2B5EF4-FFF2-40B4-BE49-F238E27FC236}">
+                <a16:creationId xmlns:a16="http://schemas.microsoft.com/office/drawing/2014/main" id="{F6D7650D-A565-4473-6D70-07FD330A31B6}"/>
+              </a:ext>
+            </a:extLst>
+          </p:cNvPr>
+          <p:cNvPicPr>
+            <a:picLocks noChangeAspect="1" noChangeArrowheads="1"/>
+          </p:cNvPicPr>
+          <p:nvPr/>
+        </p:nvPicPr>
+        <p:blipFill>
+          <a:blip r:embed="rId3" cstate="email">
+            <a:extLst>
+              <a:ext uri="{28A0092B-C50C-407E-A947-70E740481C1C}">
+                <a14:useLocalDpi xmlns:a14="http://schemas.microsoft.com/office/drawing/2010/main"/>
+              </a:ext>
+            </a:extLst>
+          </a:blip>
+          <a:srcRect/>
+          <a:stretch>
+            <a:fillRect/>
+          </a:stretch>
+        </p:blipFill>
+        <p:spPr bwMode="auto">
+          <a:xfrm>
+            <a:off x="8571933" y="936056"/>
+            <a:ext cx="1400458" cy="2094060"/>
+          </a:xfrm>
+          <a:prstGeom prst="rect">
+            <a:avLst/>
+          </a:prstGeom>
+          <a:noFill/>
+          <a:extLst>
+            <a:ext uri="{909E8E84-426E-40DD-AFC4-6F175D3DCCD1}">
+              <a14:hiddenFill xmlns:a14="http://schemas.microsoft.com/office/drawing/2010/main">
+                <a:solidFill>
+                  <a:srgbClr val="FFFFFF"/>
+                </a:solidFill>
+              </a14:hiddenFill>
+            </a:ext>
+          </a:extLst>
+        </p:spPr>
+      </p:pic>
+      <p:pic>
+        <p:nvPicPr>
+          <p:cNvPr id="2054" name="Picture 6">
+            <a:extLst>
+              <a:ext uri="{FF2B5EF4-FFF2-40B4-BE49-F238E27FC236}">
+                <a16:creationId xmlns:a16="http://schemas.microsoft.com/office/drawing/2014/main" id="{65BB4F09-1849-1039-2316-0C29333ABB79}"/>
+              </a:ext>
+            </a:extLst>
+          </p:cNvPr>
+          <p:cNvPicPr>
+            <a:picLocks noChangeAspect="1" noChangeArrowheads="1"/>
+          </p:cNvPicPr>
+          <p:nvPr/>
+        </p:nvPicPr>
+        <p:blipFill>
+          <a:blip r:embed="rId4" cstate="email">
+            <a:extLst>
+              <a:ext uri="{28A0092B-C50C-407E-A947-70E740481C1C}">
+                <a14:useLocalDpi xmlns:a14="http://schemas.microsoft.com/office/drawing/2010/main"/>
+              </a:ext>
+            </a:extLst>
+          </a:blip>
+          <a:srcRect/>
+          <a:stretch>
+            <a:fillRect/>
+          </a:stretch>
+        </p:blipFill>
+        <p:spPr bwMode="auto">
+          <a:xfrm>
+            <a:off x="5142545" y="923587"/>
+            <a:ext cx="1400458" cy="2115495"/>
+          </a:xfrm>
+          <a:prstGeom prst="rect">
+            <a:avLst/>
+          </a:prstGeom>
+          <a:noFill/>
+          <a:extLst>
+            <a:ext uri="{909E8E84-426E-40DD-AFC4-6F175D3DCCD1}">
+              <a14:hiddenFill xmlns:a14="http://schemas.microsoft.com/office/drawing/2010/main">
+                <a:solidFill>
+                  <a:srgbClr val="FFFFFF"/>
+                </a:solidFill>
+              </a14:hiddenFill>
+            </a:ext>
+          </a:extLst>
+        </p:spPr>
+      </p:pic>
+      <p:pic>
+        <p:nvPicPr>
+          <p:cNvPr id="2056" name="Picture 8" descr="How To Make Maximum Money In Minimum Time: Halbert, Gary C., Halbert, Bond,  Halbert, Kevin C.: 9781500885335: Amazon.com: Books">
+            <a:extLst>
+              <a:ext uri="{FF2B5EF4-FFF2-40B4-BE49-F238E27FC236}">
+                <a16:creationId xmlns:a16="http://schemas.microsoft.com/office/drawing/2014/main" id="{1422F400-CC1B-1515-33AD-35F51D222E89}"/>
+              </a:ext>
+            </a:extLst>
+          </p:cNvPr>
+          <p:cNvPicPr>
+            <a:picLocks noChangeAspect="1" noChangeArrowheads="1"/>
+          </p:cNvPicPr>
+          <p:nvPr/>
+        </p:nvPicPr>
+        <p:blipFill>
+          <a:blip r:embed="rId5" cstate="email">
+            <a:extLst>
+              <a:ext uri="{28A0092B-C50C-407E-A947-70E740481C1C}">
+                <a14:useLocalDpi xmlns:a14="http://schemas.microsoft.com/office/drawing/2010/main"/>
+              </a:ext>
+            </a:extLst>
+          </a:blip>
+          <a:srcRect/>
+          <a:stretch>
+            <a:fillRect/>
+          </a:stretch>
+        </p:blipFill>
+        <p:spPr bwMode="auto">
+          <a:xfrm>
+            <a:off x="102077" y="3991942"/>
+            <a:ext cx="1572768" cy="2032000"/>
+          </a:xfrm>
+          <a:prstGeom prst="rect">
+            <a:avLst/>
+          </a:prstGeom>
+          <a:noFill/>
+          <a:extLst>
+            <a:ext uri="{909E8E84-426E-40DD-AFC4-6F175D3DCCD1}">
+              <a14:hiddenFill xmlns:a14="http://schemas.microsoft.com/office/drawing/2010/main">
+                <a:solidFill>
+                  <a:srgbClr val="FFFFFF"/>
+                </a:solidFill>
+              </a14:hiddenFill>
+            </a:ext>
+          </a:extLst>
+        </p:spPr>
+      </p:pic>
+      <p:pic>
+        <p:nvPicPr>
+          <p:cNvPr id="3" name="Picture 2">
+            <a:extLst>
+              <a:ext uri="{FF2B5EF4-FFF2-40B4-BE49-F238E27FC236}">
+                <a16:creationId xmlns:a16="http://schemas.microsoft.com/office/drawing/2014/main" id="{AB0E2CAF-4F9C-E1C1-27E3-3771E4E58BD6}"/>
+              </a:ext>
+            </a:extLst>
+          </p:cNvPr>
+          <p:cNvPicPr>
+            <a:picLocks noChangeAspect="1"/>
+          </p:cNvPicPr>
+          <p:nvPr/>
+        </p:nvPicPr>
+        <p:blipFill>
+          <a:blip r:embed="rId6" cstate="email">
+            <a:extLst>
+              <a:ext uri="{28A0092B-C50C-407E-A947-70E740481C1C}">
+                <a14:useLocalDpi xmlns:a14="http://schemas.microsoft.com/office/drawing/2010/main"/>
+              </a:ext>
+            </a:extLst>
+          </a:blip>
+          <a:stretch>
+            <a:fillRect/>
+          </a:stretch>
+        </p:blipFill>
+        <p:spPr>
+          <a:xfrm>
+            <a:off x="2342742" y="3991942"/>
+            <a:ext cx="1468175" cy="2032000"/>
+          </a:xfrm>
+          <a:prstGeom prst="rect">
+            <a:avLst/>
+          </a:prstGeom>
+        </p:spPr>
+      </p:pic>
+      <p:pic>
+        <p:nvPicPr>
+          <p:cNvPr id="2058" name="Picture 10" descr="Tested Advertising Methods | Scientific Advertising">
+            <a:extLst>
+              <a:ext uri="{FF2B5EF4-FFF2-40B4-BE49-F238E27FC236}">
+                <a16:creationId xmlns:a16="http://schemas.microsoft.com/office/drawing/2014/main" id="{EA924F99-3B5B-6000-4ACA-4D0A73E5A5B4}"/>
+              </a:ext>
+            </a:extLst>
+          </p:cNvPr>
+          <p:cNvPicPr>
+            <a:picLocks noChangeAspect="1" noChangeArrowheads="1"/>
+          </p:cNvPicPr>
+          <p:nvPr/>
+        </p:nvPicPr>
+        <p:blipFill>
+          <a:blip r:embed="rId7" cstate="email">
+            <a:extLst>
+              <a:ext uri="{28A0092B-C50C-407E-A947-70E740481C1C}">
+                <a14:useLocalDpi xmlns:a14="http://schemas.microsoft.com/office/drawing/2010/main"/>
+              </a:ext>
+            </a:extLst>
+          </a:blip>
+          <a:srcRect/>
+          <a:stretch>
+            <a:fillRect/>
+          </a:stretch>
+        </p:blipFill>
+        <p:spPr bwMode="auto">
+          <a:xfrm>
+            <a:off x="3496393" y="936056"/>
+            <a:ext cx="1331916" cy="2103026"/>
+          </a:xfrm>
+          <a:prstGeom prst="rect">
+            <a:avLst/>
+          </a:prstGeom>
+          <a:noFill/>
+          <a:extLst>
+            <a:ext uri="{909E8E84-426E-40DD-AFC4-6F175D3DCCD1}">
+              <a14:hiddenFill xmlns:a14="http://schemas.microsoft.com/office/drawing/2010/main">
+                <a:solidFill>
+                  <a:srgbClr val="FFFFFF"/>
+                </a:solidFill>
+              </a14:hiddenFill>
+            </a:ext>
+          </a:extLst>
+        </p:spPr>
+      </p:pic>
+      <p:sp>
+        <p:nvSpPr>
+          <p:cNvPr id="4" name="TextBox 3">
+            <a:extLst>
+              <a:ext uri="{FF2B5EF4-FFF2-40B4-BE49-F238E27FC236}">
+                <a16:creationId xmlns:a16="http://schemas.microsoft.com/office/drawing/2014/main" id="{088D0292-9E46-06D7-8791-DA71B82BD16E}"/>
+              </a:ext>
+            </a:extLst>
+          </p:cNvPr>
+          <p:cNvSpPr txBox="1"/>
+          <p:nvPr/>
+        </p:nvSpPr>
+        <p:spPr>
+          <a:xfrm>
+            <a:off x="84083" y="84082"/>
+            <a:ext cx="3037489" cy="523220"/>
+          </a:xfrm>
+          <a:prstGeom prst="rect">
+            <a:avLst/>
+          </a:prstGeom>
+          <a:noFill/>
+        </p:spPr>
+        <p:txBody>
+          <a:bodyPr wrap="square" rtlCol="0">
+            <a:spAutoFit/>
+          </a:bodyPr>
+          <a:lstStyle/>
+          <a:p>
+            <a:r>
+              <a:rPr lang="en-US" sz="2800" b="1"/>
+              <a:t>Some Books ...</a:t>
+            </a:r>
+          </a:p>
+        </p:txBody>
+      </p:sp>
+      <p:pic>
+        <p:nvPicPr>
+          <p:cNvPr id="2060" name="Picture 12" descr="Daniel picked up &quot;Scientific Advertising&quot; by Claude C Hopkins | Family  reading, Advertising, Scientific">
+            <a:extLst>
+              <a:ext uri="{FF2B5EF4-FFF2-40B4-BE49-F238E27FC236}">
+                <a16:creationId xmlns:a16="http://schemas.microsoft.com/office/drawing/2014/main" id="{FDC18349-1E79-0B0B-0CE0-187BFCA6FAC1}"/>
+              </a:ext>
+            </a:extLst>
+          </p:cNvPr>
+          <p:cNvPicPr>
+            <a:picLocks noChangeAspect="1" noChangeArrowheads="1"/>
+          </p:cNvPicPr>
+          <p:nvPr/>
+        </p:nvPicPr>
+        <p:blipFill rotWithShape="1">
+          <a:blip r:embed="rId8" cstate="email">
+            <a:extLst>
+              <a:ext uri="{28A0092B-C50C-407E-A947-70E740481C1C}">
+                <a14:useLocalDpi xmlns:a14="http://schemas.microsoft.com/office/drawing/2010/main"/>
+              </a:ext>
+            </a:extLst>
+          </a:blip>
+          <a:srcRect/>
+          <a:stretch/>
+        </p:blipFill>
+        <p:spPr bwMode="auto">
+          <a:xfrm>
+            <a:off x="84083" y="918378"/>
+            <a:ext cx="1314371" cy="1952413"/>
+          </a:xfrm>
+          <a:prstGeom prst="rect">
+            <a:avLst/>
+          </a:prstGeom>
+          <a:noFill/>
+          <a:extLst>
+            <a:ext uri="{909E8E84-426E-40DD-AFC4-6F175D3DCCD1}">
+              <a14:hiddenFill xmlns:a14="http://schemas.microsoft.com/office/drawing/2010/main">
+                <a:solidFill>
+                  <a:srgbClr val="FFFFFF"/>
+                </a:solidFill>
+              </a14:hiddenFill>
+            </a:ext>
+          </a:extLst>
+        </p:spPr>
+      </p:pic>
+      <p:pic>
+        <p:nvPicPr>
+          <p:cNvPr id="2062" name="Picture 14">
+            <a:extLst>
+              <a:ext uri="{FF2B5EF4-FFF2-40B4-BE49-F238E27FC236}">
+                <a16:creationId xmlns:a16="http://schemas.microsoft.com/office/drawing/2014/main" id="{36E24B96-DF30-D37F-241A-DB8E92229745}"/>
+              </a:ext>
+            </a:extLst>
+          </p:cNvPr>
+          <p:cNvPicPr>
+            <a:picLocks noChangeAspect="1" noChangeArrowheads="1"/>
+          </p:cNvPicPr>
+          <p:nvPr/>
+        </p:nvPicPr>
+        <p:blipFill>
+          <a:blip r:embed="rId9" cstate="email">
+            <a:extLst>
+              <a:ext uri="{28A0092B-C50C-407E-A947-70E740481C1C}">
+                <a14:useLocalDpi xmlns:a14="http://schemas.microsoft.com/office/drawing/2010/main"/>
+              </a:ext>
+            </a:extLst>
+          </a:blip>
+          <a:srcRect/>
+          <a:stretch>
+            <a:fillRect/>
+          </a:stretch>
+        </p:blipFill>
+        <p:spPr bwMode="auto">
+          <a:xfrm>
+            <a:off x="4478814" y="4045235"/>
+            <a:ext cx="1333603" cy="1925415"/>
+          </a:xfrm>
+          <a:prstGeom prst="rect">
+            <a:avLst/>
+          </a:prstGeom>
+          <a:noFill/>
+          <a:extLst>
+            <a:ext uri="{909E8E84-426E-40DD-AFC4-6F175D3DCCD1}">
+              <a14:hiddenFill xmlns:a14="http://schemas.microsoft.com/office/drawing/2010/main">
+                <a:solidFill>
+                  <a:srgbClr val="FFFFFF"/>
+                </a:solidFill>
+              </a14:hiddenFill>
+            </a:ext>
+          </a:extLst>
+        </p:spPr>
+      </p:pic>
+      <p:pic>
+        <p:nvPicPr>
+          <p:cNvPr id="2064" name="Picture 16" descr="System Secrets - Maximum Money in Minimum Time Online Kindle Edition">
+            <a:extLst>
+              <a:ext uri="{FF2B5EF4-FFF2-40B4-BE49-F238E27FC236}">
+                <a16:creationId xmlns:a16="http://schemas.microsoft.com/office/drawing/2014/main" id="{D2BE5293-B927-C7CD-132C-7C490844BAF9}"/>
+              </a:ext>
+            </a:extLst>
+          </p:cNvPr>
+          <p:cNvPicPr>
+            <a:picLocks noChangeAspect="1" noChangeArrowheads="1"/>
+          </p:cNvPicPr>
+          <p:nvPr/>
+        </p:nvPicPr>
+        <p:blipFill>
+          <a:blip r:embed="rId10" cstate="email">
+            <a:extLst>
+              <a:ext uri="{28A0092B-C50C-407E-A947-70E740481C1C}">
+                <a14:useLocalDpi xmlns:a14="http://schemas.microsoft.com/office/drawing/2010/main"/>
+              </a:ext>
+            </a:extLst>
+          </a:blip>
+          <a:srcRect/>
+          <a:stretch>
+            <a:fillRect/>
+          </a:stretch>
+        </p:blipFill>
+        <p:spPr bwMode="auto">
+          <a:xfrm>
+            <a:off x="6480314" y="3906811"/>
+            <a:ext cx="1468175" cy="2202263"/>
+          </a:xfrm>
+          <a:prstGeom prst="rect">
+            <a:avLst/>
+          </a:prstGeom>
+          <a:noFill/>
+          <a:extLst>
+            <a:ext uri="{909E8E84-426E-40DD-AFC4-6F175D3DCCD1}">
+              <a14:hiddenFill xmlns:a14="http://schemas.microsoft.com/office/drawing/2010/main">
+                <a:solidFill>
+                  <a:srgbClr val="FFFFFF"/>
+                </a:solidFill>
+              </a14:hiddenFill>
+            </a:ext>
+          </a:extLst>
+        </p:spPr>
+      </p:pic>
+      <p:pic>
+        <p:nvPicPr>
+          <p:cNvPr id="2066" name="Picture 18" descr="The 22 Best Marketing Books You Need to Read in 2022">
+            <a:extLst>
+              <a:ext uri="{FF2B5EF4-FFF2-40B4-BE49-F238E27FC236}">
+                <a16:creationId xmlns:a16="http://schemas.microsoft.com/office/drawing/2014/main" id="{BD8CFFDB-2D41-35B5-6473-5847A723455E}"/>
+              </a:ext>
+            </a:extLst>
+          </p:cNvPr>
+          <p:cNvPicPr>
+            <a:picLocks noChangeAspect="1" noChangeArrowheads="1"/>
+          </p:cNvPicPr>
+          <p:nvPr/>
+        </p:nvPicPr>
+        <p:blipFill>
+          <a:blip r:embed="rId11" cstate="email">
+            <a:extLst>
+              <a:ext uri="{28A0092B-C50C-407E-A947-70E740481C1C}">
+                <a14:useLocalDpi xmlns:a14="http://schemas.microsoft.com/office/drawing/2010/main"/>
+              </a:ext>
+            </a:extLst>
+          </a:blip>
+          <a:srcRect/>
+          <a:stretch>
+            <a:fillRect/>
+          </a:stretch>
+        </p:blipFill>
+        <p:spPr bwMode="auto">
+          <a:xfrm>
+            <a:off x="8616386" y="4036982"/>
+            <a:ext cx="1281668" cy="1941921"/>
+          </a:xfrm>
+          <a:prstGeom prst="rect">
+            <a:avLst/>
+          </a:prstGeom>
+          <a:noFill/>
+          <a:extLst>
+            <a:ext uri="{909E8E84-426E-40DD-AFC4-6F175D3DCCD1}">
+              <a14:hiddenFill xmlns:a14="http://schemas.microsoft.com/office/drawing/2010/main">
+                <a:solidFill>
+                  <a:srgbClr val="FFFFFF"/>
+                </a:solidFill>
+              </a14:hiddenFill>
+            </a:ext>
+          </a:extLst>
+        </p:spPr>
+      </p:pic>
+      <p:pic>
+        <p:nvPicPr>
+          <p:cNvPr id="2068" name="Picture 20" descr="Hardcover The Robert Collier letter book">
+            <a:extLst>
+              <a:ext uri="{FF2B5EF4-FFF2-40B4-BE49-F238E27FC236}">
+                <a16:creationId xmlns:a16="http://schemas.microsoft.com/office/drawing/2014/main" id="{5DC99545-AC52-C565-A738-A1A6A930A073}"/>
+              </a:ext>
+            </a:extLst>
+          </p:cNvPr>
+          <p:cNvPicPr>
+            <a:picLocks noChangeAspect="1" noChangeArrowheads="1"/>
+          </p:cNvPicPr>
+          <p:nvPr/>
+        </p:nvPicPr>
+        <p:blipFill>
+          <a:blip r:embed="rId12" cstate="email">
+            <a:extLst>
+              <a:ext uri="{28A0092B-C50C-407E-A947-70E740481C1C}">
+                <a14:useLocalDpi xmlns:a14="http://schemas.microsoft.com/office/drawing/2010/main"/>
+              </a:ext>
+            </a:extLst>
+          </a:blip>
+          <a:srcRect/>
+          <a:stretch>
+            <a:fillRect/>
+          </a:stretch>
+        </p:blipFill>
+        <p:spPr bwMode="auto">
+          <a:xfrm>
+            <a:off x="10286628" y="947790"/>
+            <a:ext cx="1519084" cy="2135259"/>
+          </a:xfrm>
+          <a:prstGeom prst="rect">
+            <a:avLst/>
+          </a:prstGeom>
+          <a:noFill/>
+          <a:extLst>
+            <a:ext uri="{909E8E84-426E-40DD-AFC4-6F175D3DCCD1}">
+              <a14:hiddenFill xmlns:a14="http://schemas.microsoft.com/office/drawing/2010/main">
+                <a:solidFill>
+                  <a:srgbClr val="FFFFFF"/>
+                </a:solidFill>
+              </a14:hiddenFill>
+            </a:ext>
+          </a:extLst>
+        </p:spPr>
+      </p:pic>
+      <p:pic>
+        <p:nvPicPr>
+          <p:cNvPr id="2070" name="Picture 22" descr="Mass Market Paperback How to Sell Anything to Anybody Book">
+            <a:extLst>
+              <a:ext uri="{FF2B5EF4-FFF2-40B4-BE49-F238E27FC236}">
+                <a16:creationId xmlns:a16="http://schemas.microsoft.com/office/drawing/2014/main" id="{E7951217-F0F3-73C2-1639-ABB081283EDC}"/>
+              </a:ext>
+            </a:extLst>
+          </p:cNvPr>
+          <p:cNvPicPr>
+            <a:picLocks noChangeAspect="1" noChangeArrowheads="1"/>
+          </p:cNvPicPr>
+          <p:nvPr/>
+        </p:nvPicPr>
+        <p:blipFill>
+          <a:blip r:embed="rId13" cstate="email">
+            <a:extLst>
+              <a:ext uri="{28A0092B-C50C-407E-A947-70E740481C1C}">
+                <a14:useLocalDpi xmlns:a14="http://schemas.microsoft.com/office/drawing/2010/main"/>
+              </a:ext>
+            </a:extLst>
+          </a:blip>
+          <a:srcRect/>
+          <a:stretch>
+            <a:fillRect/>
+          </a:stretch>
+        </p:blipFill>
+        <p:spPr bwMode="auto">
+          <a:xfrm>
+            <a:off x="10565949" y="3940313"/>
+            <a:ext cx="1232350" cy="2135259"/>
+          </a:xfrm>
+          <a:prstGeom prst="rect">
+            <a:avLst/>
+          </a:prstGeom>
+          <a:noFill/>
+          <a:extLst>
+            <a:ext uri="{909E8E84-426E-40DD-AFC4-6F175D3DCCD1}">
+              <a14:hiddenFill xmlns:a14="http://schemas.microsoft.com/office/drawing/2010/main">
+                <a:solidFill>
+                  <a:srgbClr val="FFFFFF"/>
+                </a:solidFill>
+              </a14:hiddenFill>
+            </a:ext>
+          </a:extLst>
+        </p:spPr>
+      </p:pic>
+      <p:pic>
+        <p:nvPicPr>
+          <p:cNvPr id="2" name="Picture 1">
+            <a:extLst>
+              <a:ext uri="{FF2B5EF4-FFF2-40B4-BE49-F238E27FC236}">
+                <a16:creationId xmlns:a16="http://schemas.microsoft.com/office/drawing/2014/main" id="{1AD06594-67A2-EF83-EFD8-439FAAFEFEF4}"/>
+              </a:ext>
+            </a:extLst>
+          </p:cNvPr>
+          <p:cNvPicPr>
+            <a:picLocks noChangeAspect="1"/>
+          </p:cNvPicPr>
+          <p:nvPr/>
+        </p:nvPicPr>
+        <p:blipFill>
+          <a:blip r:embed="rId14" cstate="email">
+            <a:extLst>
+              <a:ext uri="{28A0092B-C50C-407E-A947-70E740481C1C}">
+                <a14:useLocalDpi xmlns:a14="http://schemas.microsoft.com/office/drawing/2010/main"/>
+              </a:ext>
+            </a:extLst>
+          </a:blip>
+          <a:stretch>
+            <a:fillRect/>
+          </a:stretch>
+        </p:blipFill>
+        <p:spPr>
+          <a:xfrm>
+            <a:off x="6857239" y="918378"/>
+            <a:ext cx="1400458" cy="2121906"/>
+          </a:xfrm>
+          <a:prstGeom prst="rect">
+            <a:avLst/>
+          </a:prstGeom>
+        </p:spPr>
+      </p:pic>
+      <p:sp>
+        <p:nvSpPr>
+          <p:cNvPr id="5" name="TextBox 4">
+            <a:extLst>
+              <a:ext uri="{FF2B5EF4-FFF2-40B4-BE49-F238E27FC236}">
+                <a16:creationId xmlns:a16="http://schemas.microsoft.com/office/drawing/2014/main" id="{F5CB0940-14C3-66E0-E60D-A9F68A0EEEB3}"/>
+              </a:ext>
+            </a:extLst>
+          </p:cNvPr>
+          <p:cNvSpPr txBox="1"/>
+          <p:nvPr/>
+        </p:nvSpPr>
+        <p:spPr>
+          <a:xfrm>
+            <a:off x="5161394" y="3069937"/>
+            <a:ext cx="1220781" cy="276999"/>
+          </a:xfrm>
+          <a:prstGeom prst="rect">
+            <a:avLst/>
+          </a:prstGeom>
+          <a:noFill/>
+        </p:spPr>
+        <p:txBody>
+          <a:bodyPr wrap="square" rtlCol="0">
+            <a:spAutoFit/>
+          </a:bodyPr>
+          <a:lstStyle/>
+          <a:p>
+            <a:pPr algn="ctr"/>
+            <a:r>
+              <a:rPr lang="en-US" sz="1200"/>
+              <a:t>Joe Sugarman</a:t>
+            </a:r>
+          </a:p>
+        </p:txBody>
+      </p:sp>
+      <p:sp>
+        <p:nvSpPr>
+          <p:cNvPr id="6" name="TextBox 5">
+            <a:extLst>
+              <a:ext uri="{FF2B5EF4-FFF2-40B4-BE49-F238E27FC236}">
+                <a16:creationId xmlns:a16="http://schemas.microsoft.com/office/drawing/2014/main" id="{85899812-42FE-3072-B080-FFEA2C09E3E9}"/>
+              </a:ext>
+            </a:extLst>
+          </p:cNvPr>
+          <p:cNvSpPr txBox="1"/>
+          <p:nvPr/>
+        </p:nvSpPr>
+        <p:spPr>
+          <a:xfrm>
+            <a:off x="6812211" y="3069937"/>
+            <a:ext cx="1471891" cy="276999"/>
+          </a:xfrm>
+          <a:prstGeom prst="rect">
+            <a:avLst/>
+          </a:prstGeom>
+          <a:noFill/>
+        </p:spPr>
+        <p:txBody>
+          <a:bodyPr wrap="square" rtlCol="0">
+            <a:spAutoFit/>
+          </a:bodyPr>
+          <a:lstStyle/>
+          <a:p>
+            <a:pPr algn="ctr"/>
+            <a:r>
+              <a:rPr lang="en-US" sz="1200"/>
+              <a:t>Eugene M. Schwartz</a:t>
+            </a:r>
+          </a:p>
+        </p:txBody>
+      </p:sp>
+      <p:sp>
+        <p:nvSpPr>
+          <p:cNvPr id="7" name="TextBox 6">
+            <a:extLst>
+              <a:ext uri="{FF2B5EF4-FFF2-40B4-BE49-F238E27FC236}">
+                <a16:creationId xmlns:a16="http://schemas.microsoft.com/office/drawing/2014/main" id="{91417232-E705-6587-4812-12243436B4C0}"/>
+              </a:ext>
+            </a:extLst>
+          </p:cNvPr>
+          <p:cNvSpPr txBox="1"/>
+          <p:nvPr/>
+        </p:nvSpPr>
+        <p:spPr>
+          <a:xfrm>
+            <a:off x="3576942" y="3039082"/>
+            <a:ext cx="1220781" cy="276999"/>
+          </a:xfrm>
+          <a:prstGeom prst="rect">
+            <a:avLst/>
+          </a:prstGeom>
+          <a:noFill/>
+        </p:spPr>
+        <p:txBody>
+          <a:bodyPr wrap="square" rtlCol="0">
+            <a:spAutoFit/>
+          </a:bodyPr>
+          <a:lstStyle/>
+          <a:p>
+            <a:pPr algn="ctr"/>
+            <a:r>
+              <a:rPr lang="en-US" sz="1200"/>
+              <a:t>John Caples</a:t>
+            </a:r>
+          </a:p>
+        </p:txBody>
+      </p:sp>
+      <p:sp>
+        <p:nvSpPr>
+          <p:cNvPr id="8" name="TextBox 7">
+            <a:extLst>
+              <a:ext uri="{FF2B5EF4-FFF2-40B4-BE49-F238E27FC236}">
+                <a16:creationId xmlns:a16="http://schemas.microsoft.com/office/drawing/2014/main" id="{435857AE-2E6E-0151-79D0-EE9D0F9BD5BE}"/>
+              </a:ext>
+            </a:extLst>
+          </p:cNvPr>
+          <p:cNvSpPr txBox="1"/>
+          <p:nvPr/>
+        </p:nvSpPr>
+        <p:spPr>
+          <a:xfrm>
+            <a:off x="1745669" y="2944550"/>
+            <a:ext cx="1214092" cy="276999"/>
+          </a:xfrm>
+          <a:prstGeom prst="rect">
+            <a:avLst/>
+          </a:prstGeom>
+          <a:noFill/>
+        </p:spPr>
+        <p:txBody>
+          <a:bodyPr wrap="square" rtlCol="0">
+            <a:spAutoFit/>
+          </a:bodyPr>
+          <a:lstStyle/>
+          <a:p>
+            <a:pPr algn="ctr"/>
+            <a:r>
+              <a:rPr lang="en-US" sz="1200"/>
+              <a:t>David Ogilvy</a:t>
+            </a:r>
+          </a:p>
+        </p:txBody>
+      </p:sp>
+      <p:sp>
+        <p:nvSpPr>
+          <p:cNvPr id="9" name="TextBox 8">
+            <a:extLst>
+              <a:ext uri="{FF2B5EF4-FFF2-40B4-BE49-F238E27FC236}">
+                <a16:creationId xmlns:a16="http://schemas.microsoft.com/office/drawing/2014/main" id="{CF5D0A30-722C-B8DD-C0A2-D6CD6007AF4F}"/>
+              </a:ext>
+            </a:extLst>
+          </p:cNvPr>
+          <p:cNvSpPr txBox="1"/>
+          <p:nvPr/>
+        </p:nvSpPr>
+        <p:spPr>
+          <a:xfrm>
+            <a:off x="130231" y="2911491"/>
+            <a:ext cx="1235356" cy="276999"/>
+          </a:xfrm>
+          <a:prstGeom prst="rect">
+            <a:avLst/>
+          </a:prstGeom>
+          <a:noFill/>
+        </p:spPr>
+        <p:txBody>
+          <a:bodyPr wrap="square" rtlCol="0">
+            <a:spAutoFit/>
+          </a:bodyPr>
+          <a:lstStyle/>
+          <a:p>
+            <a:pPr algn="ctr"/>
+            <a:r>
+              <a:rPr lang="en-US" sz="1200"/>
+              <a:t>Claude Hopkins</a:t>
+            </a:r>
+          </a:p>
+        </p:txBody>
+      </p:sp>
+      <p:sp>
+        <p:nvSpPr>
+          <p:cNvPr id="10" name="TextBox 9">
+            <a:extLst>
+              <a:ext uri="{FF2B5EF4-FFF2-40B4-BE49-F238E27FC236}">
+                <a16:creationId xmlns:a16="http://schemas.microsoft.com/office/drawing/2014/main" id="{F1D15BED-EB6F-3F1D-1BED-AE554FDC08A1}"/>
+              </a:ext>
+            </a:extLst>
+          </p:cNvPr>
+          <p:cNvSpPr txBox="1"/>
+          <p:nvPr/>
+        </p:nvSpPr>
+        <p:spPr>
+          <a:xfrm>
+            <a:off x="124218" y="6141682"/>
+            <a:ext cx="1786128" cy="276999"/>
+          </a:xfrm>
+          <a:prstGeom prst="rect">
+            <a:avLst/>
+          </a:prstGeom>
+          <a:noFill/>
+        </p:spPr>
+        <p:txBody>
+          <a:bodyPr wrap="square" rtlCol="0">
+            <a:spAutoFit/>
+          </a:bodyPr>
+          <a:lstStyle/>
+          <a:p>
+            <a:pPr algn="ctr"/>
+            <a:r>
+              <a:rPr lang="en-US" sz="1200"/>
+              <a:t>Gary Halbert</a:t>
+            </a:r>
+          </a:p>
+        </p:txBody>
+      </p:sp>
+      <p:sp>
+        <p:nvSpPr>
+          <p:cNvPr id="11" name="TextBox 10">
+            <a:extLst>
+              <a:ext uri="{FF2B5EF4-FFF2-40B4-BE49-F238E27FC236}">
+                <a16:creationId xmlns:a16="http://schemas.microsoft.com/office/drawing/2014/main" id="{FDC5FBEE-EC9A-7F56-2D7C-8E329C72F07B}"/>
+              </a:ext>
+            </a:extLst>
+          </p:cNvPr>
+          <p:cNvSpPr txBox="1"/>
+          <p:nvPr/>
+        </p:nvSpPr>
+        <p:spPr>
+          <a:xfrm>
+            <a:off x="2352715" y="6141682"/>
+            <a:ext cx="1363467" cy="276999"/>
+          </a:xfrm>
+          <a:prstGeom prst="rect">
+            <a:avLst/>
+          </a:prstGeom>
+          <a:noFill/>
+        </p:spPr>
+        <p:txBody>
+          <a:bodyPr wrap="square" rtlCol="0">
+            <a:spAutoFit/>
+          </a:bodyPr>
+          <a:lstStyle/>
+          <a:p>
+            <a:pPr algn="ctr"/>
+            <a:r>
+              <a:rPr lang="en-US" sz="1200"/>
+              <a:t>Stuart Goldsmith</a:t>
+            </a:r>
+          </a:p>
+        </p:txBody>
+      </p:sp>
+      <p:sp>
+        <p:nvSpPr>
+          <p:cNvPr id="12" name="TextBox 11">
+            <a:extLst>
+              <a:ext uri="{FF2B5EF4-FFF2-40B4-BE49-F238E27FC236}">
+                <a16:creationId xmlns:a16="http://schemas.microsoft.com/office/drawing/2014/main" id="{7D05776B-DBF1-D548-1120-B9337AF015D0}"/>
+              </a:ext>
+            </a:extLst>
+          </p:cNvPr>
+          <p:cNvSpPr txBox="1"/>
+          <p:nvPr/>
+        </p:nvSpPr>
+        <p:spPr>
+          <a:xfrm>
+            <a:off x="4478814" y="6141681"/>
+            <a:ext cx="1233437" cy="276999"/>
+          </a:xfrm>
+          <a:prstGeom prst="rect">
+            <a:avLst/>
+          </a:prstGeom>
+          <a:noFill/>
+        </p:spPr>
+        <p:txBody>
+          <a:bodyPr wrap="square" rtlCol="0">
+            <a:spAutoFit/>
+          </a:bodyPr>
+          <a:lstStyle/>
+          <a:p>
+            <a:pPr algn="ctr"/>
+            <a:r>
+              <a:rPr lang="en-US" sz="1200"/>
+              <a:t>Ted Nicholas</a:t>
+            </a:r>
+          </a:p>
+        </p:txBody>
+      </p:sp>
+      <p:sp>
+        <p:nvSpPr>
+          <p:cNvPr id="13" name="TextBox 12">
+            <a:extLst>
+              <a:ext uri="{FF2B5EF4-FFF2-40B4-BE49-F238E27FC236}">
+                <a16:creationId xmlns:a16="http://schemas.microsoft.com/office/drawing/2014/main" id="{3EAD69B7-AD1E-DBCF-2AE5-9C7201A83EE0}"/>
+              </a:ext>
+            </a:extLst>
+          </p:cNvPr>
+          <p:cNvSpPr txBox="1"/>
+          <p:nvPr/>
+        </p:nvSpPr>
+        <p:spPr>
+          <a:xfrm>
+            <a:off x="6590096" y="6139850"/>
+            <a:ext cx="1248609" cy="276999"/>
+          </a:xfrm>
+          <a:prstGeom prst="rect">
+            <a:avLst/>
+          </a:prstGeom>
+          <a:noFill/>
+        </p:spPr>
+        <p:txBody>
+          <a:bodyPr wrap="square" rtlCol="0">
+            <a:spAutoFit/>
+          </a:bodyPr>
+          <a:lstStyle/>
+          <a:p>
+            <a:pPr algn="ctr"/>
+            <a:r>
+              <a:rPr lang="en-US" sz="1200"/>
+              <a:t>Ken McCarthy</a:t>
+            </a:r>
+          </a:p>
+        </p:txBody>
+      </p:sp>
+      <p:sp>
+        <p:nvSpPr>
+          <p:cNvPr id="14" name="TextBox 13">
+            <a:extLst>
+              <a:ext uri="{FF2B5EF4-FFF2-40B4-BE49-F238E27FC236}">
+                <a16:creationId xmlns:a16="http://schemas.microsoft.com/office/drawing/2014/main" id="{95C7C39D-7524-4BDE-4E48-B5973EA82784}"/>
+              </a:ext>
+            </a:extLst>
+          </p:cNvPr>
+          <p:cNvSpPr txBox="1"/>
+          <p:nvPr/>
+        </p:nvSpPr>
+        <p:spPr>
+          <a:xfrm>
+            <a:off x="8586165" y="6167884"/>
+            <a:ext cx="1400458" cy="276999"/>
+          </a:xfrm>
+          <a:prstGeom prst="rect">
+            <a:avLst/>
+          </a:prstGeom>
+          <a:noFill/>
+        </p:spPr>
+        <p:txBody>
+          <a:bodyPr wrap="square" rtlCol="0">
+            <a:spAutoFit/>
+          </a:bodyPr>
+          <a:lstStyle/>
+          <a:p>
+            <a:pPr algn="ctr"/>
+            <a:r>
+              <a:rPr lang="en-US" sz="1200"/>
+              <a:t>Robert Cialdini</a:t>
+            </a:r>
+          </a:p>
+        </p:txBody>
+      </p:sp>
+      <p:sp>
+        <p:nvSpPr>
+          <p:cNvPr id="15" name="TextBox 14">
+            <a:extLst>
+              <a:ext uri="{FF2B5EF4-FFF2-40B4-BE49-F238E27FC236}">
+                <a16:creationId xmlns:a16="http://schemas.microsoft.com/office/drawing/2014/main" id="{22A93B73-8088-1A35-B0D1-96366DEAB4AF}"/>
+              </a:ext>
+            </a:extLst>
+          </p:cNvPr>
+          <p:cNvSpPr txBox="1"/>
+          <p:nvPr/>
+        </p:nvSpPr>
+        <p:spPr>
+          <a:xfrm>
+            <a:off x="10582234" y="6139850"/>
+            <a:ext cx="1097652" cy="276999"/>
+          </a:xfrm>
+          <a:prstGeom prst="rect">
+            <a:avLst/>
+          </a:prstGeom>
+          <a:noFill/>
+        </p:spPr>
+        <p:txBody>
+          <a:bodyPr wrap="square" rtlCol="0">
+            <a:spAutoFit/>
+          </a:bodyPr>
+          <a:lstStyle/>
+          <a:p>
+            <a:pPr algn="ctr"/>
+            <a:r>
+              <a:rPr lang="en-US" sz="1200"/>
+              <a:t>Joe Girard</a:t>
+            </a:r>
+          </a:p>
+        </p:txBody>
+      </p:sp>
+      <p:sp>
+        <p:nvSpPr>
+          <p:cNvPr id="16" name="TextBox 15">
+            <a:extLst>
+              <a:ext uri="{FF2B5EF4-FFF2-40B4-BE49-F238E27FC236}">
+                <a16:creationId xmlns:a16="http://schemas.microsoft.com/office/drawing/2014/main" id="{0A8D589A-60C7-8BD7-6331-B3ACF7B7883F}"/>
+              </a:ext>
+            </a:extLst>
+          </p:cNvPr>
+          <p:cNvSpPr txBox="1"/>
+          <p:nvPr/>
+        </p:nvSpPr>
+        <p:spPr>
+          <a:xfrm>
+            <a:off x="8650173" y="3060347"/>
+            <a:ext cx="1214093" cy="461665"/>
+          </a:xfrm>
+          <a:prstGeom prst="rect">
+            <a:avLst/>
+          </a:prstGeom>
+          <a:noFill/>
+        </p:spPr>
+        <p:txBody>
+          <a:bodyPr wrap="square" rtlCol="0">
+            <a:spAutoFit/>
+          </a:bodyPr>
+          <a:lstStyle/>
+          <a:p>
+            <a:pPr algn="ctr"/>
+            <a:r>
+              <a:rPr lang="en-US" sz="1200"/>
+              <a:t>Dan Kennedy</a:t>
+            </a:r>
+          </a:p>
+          <a:p>
+            <a:pPr algn="ctr"/>
+            <a:r>
+              <a:rPr lang="en-US" sz="1200"/>
+              <a:t>(many books)</a:t>
+            </a:r>
+          </a:p>
+        </p:txBody>
+      </p:sp>
+      <p:sp>
+        <p:nvSpPr>
+          <p:cNvPr id="17" name="TextBox 16">
+            <a:extLst>
+              <a:ext uri="{FF2B5EF4-FFF2-40B4-BE49-F238E27FC236}">
+                <a16:creationId xmlns:a16="http://schemas.microsoft.com/office/drawing/2014/main" id="{22801055-5BAE-0B19-E5AF-4122F032C25A}"/>
+              </a:ext>
+            </a:extLst>
+          </p:cNvPr>
+          <p:cNvSpPr txBox="1"/>
+          <p:nvPr/>
+        </p:nvSpPr>
+        <p:spPr>
+          <a:xfrm>
+            <a:off x="10408693" y="3083049"/>
+            <a:ext cx="1214093" cy="276999"/>
+          </a:xfrm>
+          <a:prstGeom prst="rect">
+            <a:avLst/>
+          </a:prstGeom>
+          <a:noFill/>
+        </p:spPr>
+        <p:txBody>
+          <a:bodyPr wrap="square" rtlCol="0">
+            <a:spAutoFit/>
+          </a:bodyPr>
+          <a:lstStyle/>
+          <a:p>
+            <a:pPr algn="ctr"/>
+            <a:r>
+              <a:rPr lang="en-US" sz="1200"/>
+              <a:t>Robert Collier</a:t>
+            </a:r>
+          </a:p>
+        </p:txBody>
+      </p:sp>
+    </p:spTree>
+    <p:extLst>
+      <p:ext uri="{BB962C8B-B14F-4D97-AF65-F5344CB8AC3E}">
+        <p14:creationId xmlns:p14="http://schemas.microsoft.com/office/powerpoint/2010/main" val="2206367793"/>
+      </p:ext>
+    </p:extLst>
+  </p:cSld>
+  <p:clrMapOvr>
+    <a:masterClrMapping/>
+  </p:clrMapOvr>
+</p:sld>
+</file>
+
+<file path=ppt/slides/slide8.xml><?xml version="1.0" encoding="utf-8"?>
+<p:sld xmlns:a="http://schemas.openxmlformats.org/drawingml/2006/main" xmlns:r="http://schemas.openxmlformats.org/officeDocument/2006/relationships" xmlns:p="http://schemas.openxmlformats.org/presentationml/2006/main">
+  <p:cSld>
+    <p:spTree>
+      <p:nvGrpSpPr>
+        <p:cNvPr id="1" name=""/>
+        <p:cNvGrpSpPr/>
+        <p:nvPr/>
+      </p:nvGrpSpPr>
+      <p:grpSpPr>
+        <a:xfrm>
+          <a:off x="0" y="0"/>
+          <a:ext cx="0" cy="0"/>
+          <a:chOff x="0" y="0"/>
+          <a:chExt cx="0" cy="0"/>
+        </a:xfrm>
+      </p:grpSpPr>
+      <p:sp>
+        <p:nvSpPr>
+          <p:cNvPr id="2" name="TextBox 1">
+            <a:extLst>
+              <a:ext uri="{FF2B5EF4-FFF2-40B4-BE49-F238E27FC236}">
+                <a16:creationId xmlns:a16="http://schemas.microsoft.com/office/drawing/2014/main" id="{1BA3C32E-01F2-E933-AB54-FD491D6A6FF9}"/>
+              </a:ext>
+            </a:extLst>
+          </p:cNvPr>
+          <p:cNvSpPr txBox="1"/>
+          <p:nvPr/>
+        </p:nvSpPr>
+        <p:spPr>
+          <a:xfrm>
+            <a:off x="212099" y="230386"/>
+            <a:ext cx="6709401" cy="523220"/>
+          </a:xfrm>
+          <a:prstGeom prst="rect">
+            <a:avLst/>
+          </a:prstGeom>
+          <a:noFill/>
+        </p:spPr>
+        <p:txBody>
+          <a:bodyPr wrap="square" rtlCol="0">
+            <a:spAutoFit/>
+          </a:bodyPr>
+          <a:lstStyle/>
+          <a:p>
+            <a:r>
+              <a:rPr lang="en-US" sz="2800" b="1"/>
+              <a:t>Direct Response – multi-step optimization</a:t>
+            </a:r>
+          </a:p>
+        </p:txBody>
+      </p:sp>
+      <p:sp>
+        <p:nvSpPr>
+          <p:cNvPr id="9" name="TextBox 8">
+            <a:extLst>
+              <a:ext uri="{FF2B5EF4-FFF2-40B4-BE49-F238E27FC236}">
+                <a16:creationId xmlns:a16="http://schemas.microsoft.com/office/drawing/2014/main" id="{0BB3D61D-3741-0A50-050F-E9642F907A50}"/>
+              </a:ext>
+            </a:extLst>
+          </p:cNvPr>
+          <p:cNvSpPr txBox="1"/>
+          <p:nvPr/>
+        </p:nvSpPr>
+        <p:spPr>
+          <a:xfrm>
+            <a:off x="1789947" y="1349514"/>
+            <a:ext cx="584200" cy="1754326"/>
+          </a:xfrm>
+          <a:prstGeom prst="rect">
+            <a:avLst/>
+          </a:prstGeom>
+          <a:solidFill>
+            <a:srgbClr val="92D050"/>
+          </a:solidFill>
+          <a:ln>
+            <a:solidFill>
+              <a:srgbClr val="FF0000"/>
+            </a:solidFill>
+          </a:ln>
+        </p:spPr>
+        <p:txBody>
+          <a:bodyPr wrap="square" rtlCol="0">
+            <a:spAutoFit/>
+          </a:bodyPr>
+          <a:lstStyle/>
+          <a:p>
+            <a:r>
+              <a:rPr lang="en-US" sz="1200"/>
+              <a:t>Step1</a:t>
+            </a:r>
+          </a:p>
+          <a:p>
+            <a:endParaRPr lang="en-US" sz="1200"/>
+          </a:p>
+          <a:p>
+            <a:endParaRPr lang="en-US" sz="1200"/>
+          </a:p>
+          <a:p>
+            <a:endParaRPr lang="en-US" sz="1200"/>
+          </a:p>
+          <a:p>
+            <a:endParaRPr lang="en-US" sz="1200"/>
+          </a:p>
+          <a:p>
+            <a:endParaRPr lang="en-US" sz="1200"/>
+          </a:p>
+          <a:p>
+            <a:endParaRPr lang="en-US" sz="1200"/>
+          </a:p>
+          <a:p>
+            <a:endParaRPr lang="en-US" sz="1200"/>
+          </a:p>
+          <a:p>
+            <a:endParaRPr lang="en-US" sz="1200"/>
+          </a:p>
+        </p:txBody>
+      </p:sp>
+      <p:sp>
+        <p:nvSpPr>
+          <p:cNvPr id="10" name="TextBox 9">
+            <a:extLst>
+              <a:ext uri="{FF2B5EF4-FFF2-40B4-BE49-F238E27FC236}">
+                <a16:creationId xmlns:a16="http://schemas.microsoft.com/office/drawing/2014/main" id="{CB316C85-C20D-2E32-C4DA-F13B876F0BCA}"/>
+              </a:ext>
+            </a:extLst>
+          </p:cNvPr>
+          <p:cNvSpPr txBox="1"/>
+          <p:nvPr/>
+        </p:nvSpPr>
+        <p:spPr>
+          <a:xfrm>
+            <a:off x="2706125" y="2079807"/>
+            <a:ext cx="584200" cy="1015663"/>
+          </a:xfrm>
+          <a:prstGeom prst="rect">
+            <a:avLst/>
+          </a:prstGeom>
+          <a:solidFill>
+            <a:srgbClr val="92D050"/>
+          </a:solidFill>
+          <a:ln>
+            <a:solidFill>
+              <a:srgbClr val="FF0000"/>
+            </a:solidFill>
+          </a:ln>
+        </p:spPr>
+        <p:txBody>
+          <a:bodyPr wrap="square" rtlCol="0">
+            <a:spAutoFit/>
+          </a:bodyPr>
+          <a:lstStyle/>
+          <a:p>
+            <a:r>
+              <a:rPr lang="en-US" sz="1200"/>
+              <a:t>Step1</a:t>
+            </a:r>
+          </a:p>
+          <a:p>
+            <a:endParaRPr lang="en-US" sz="1200"/>
+          </a:p>
+          <a:p>
+            <a:endParaRPr lang="en-US" sz="1200"/>
+          </a:p>
+          <a:p>
+            <a:endParaRPr lang="en-US" sz="1200"/>
+          </a:p>
+          <a:p>
+            <a:endParaRPr lang="en-US" sz="1200"/>
+          </a:p>
+        </p:txBody>
+      </p:sp>
+      <p:sp>
+        <p:nvSpPr>
+          <p:cNvPr id="11" name="TextBox 10">
+            <a:extLst>
+              <a:ext uri="{FF2B5EF4-FFF2-40B4-BE49-F238E27FC236}">
+                <a16:creationId xmlns:a16="http://schemas.microsoft.com/office/drawing/2014/main" id="{334D6203-C280-85C7-5C8A-9B3AA230E316}"/>
+              </a:ext>
+            </a:extLst>
+          </p:cNvPr>
+          <p:cNvSpPr txBox="1"/>
+          <p:nvPr/>
+        </p:nvSpPr>
+        <p:spPr>
+          <a:xfrm>
+            <a:off x="3688603" y="2595818"/>
+            <a:ext cx="584200" cy="461665"/>
+          </a:xfrm>
+          <a:prstGeom prst="rect">
+            <a:avLst/>
+          </a:prstGeom>
+          <a:solidFill>
+            <a:srgbClr val="92D050"/>
+          </a:solidFill>
+          <a:ln>
+            <a:solidFill>
+              <a:srgbClr val="FF0000"/>
+            </a:solidFill>
+          </a:ln>
+        </p:spPr>
+        <p:txBody>
+          <a:bodyPr wrap="square" rtlCol="0">
+            <a:spAutoFit/>
+          </a:bodyPr>
+          <a:lstStyle/>
+          <a:p>
+            <a:r>
+              <a:rPr lang="en-US" sz="1200"/>
+              <a:t>Step1</a:t>
+            </a:r>
+          </a:p>
+          <a:p>
+            <a:endParaRPr lang="en-US" sz="1200"/>
+          </a:p>
+        </p:txBody>
+      </p:sp>
+      <p:sp>
+        <p:nvSpPr>
+          <p:cNvPr id="12" name="TextBox 11">
+            <a:extLst>
+              <a:ext uri="{FF2B5EF4-FFF2-40B4-BE49-F238E27FC236}">
+                <a16:creationId xmlns:a16="http://schemas.microsoft.com/office/drawing/2014/main" id="{A03F700D-643C-8E38-6CBC-FBE3C122257B}"/>
+              </a:ext>
+            </a:extLst>
+          </p:cNvPr>
+          <p:cNvSpPr txBox="1"/>
+          <p:nvPr/>
+        </p:nvSpPr>
+        <p:spPr>
+          <a:xfrm>
+            <a:off x="4699289" y="2794286"/>
+            <a:ext cx="584200" cy="276999"/>
+          </a:xfrm>
+          <a:prstGeom prst="rect">
+            <a:avLst/>
+          </a:prstGeom>
+          <a:solidFill>
+            <a:srgbClr val="92D050"/>
+          </a:solidFill>
+          <a:ln>
+            <a:solidFill>
+              <a:srgbClr val="FF0000"/>
+            </a:solidFill>
+          </a:ln>
+        </p:spPr>
+        <p:txBody>
+          <a:bodyPr wrap="square" rtlCol="0">
+            <a:spAutoFit/>
+          </a:bodyPr>
+          <a:lstStyle/>
+          <a:p>
+            <a:r>
+              <a:rPr lang="en-US" sz="1200"/>
+              <a:t>Step1</a:t>
+            </a:r>
+          </a:p>
+        </p:txBody>
+      </p:sp>
+      <p:sp>
+        <p:nvSpPr>
+          <p:cNvPr id="13" name="TextBox 12">
+            <a:extLst>
+              <a:ext uri="{FF2B5EF4-FFF2-40B4-BE49-F238E27FC236}">
+                <a16:creationId xmlns:a16="http://schemas.microsoft.com/office/drawing/2014/main" id="{53A9559B-DA48-DA65-CD98-C4F3731086E4}"/>
+              </a:ext>
+            </a:extLst>
+          </p:cNvPr>
+          <p:cNvSpPr txBox="1"/>
+          <p:nvPr/>
+        </p:nvSpPr>
+        <p:spPr>
+          <a:xfrm>
+            <a:off x="5704948" y="2821659"/>
+            <a:ext cx="584200" cy="215444"/>
+          </a:xfrm>
+          <a:prstGeom prst="rect">
+            <a:avLst/>
+          </a:prstGeom>
+          <a:solidFill>
+            <a:srgbClr val="92D050"/>
+          </a:solidFill>
+          <a:ln>
+            <a:solidFill>
+              <a:srgbClr val="FF0000"/>
+            </a:solidFill>
+          </a:ln>
+        </p:spPr>
+        <p:txBody>
+          <a:bodyPr wrap="square" rtlCol="0">
+            <a:spAutoFit/>
+          </a:bodyPr>
+          <a:lstStyle/>
+          <a:p>
+            <a:r>
+              <a:rPr lang="en-US" sz="800"/>
+              <a:t>Step1</a:t>
+            </a:r>
+          </a:p>
+        </p:txBody>
+      </p:sp>
+      <p:sp>
+        <p:nvSpPr>
+          <p:cNvPr id="14" name="Right Arrow 13">
+            <a:extLst>
+              <a:ext uri="{FF2B5EF4-FFF2-40B4-BE49-F238E27FC236}">
+                <a16:creationId xmlns:a16="http://schemas.microsoft.com/office/drawing/2014/main" id="{4AF84898-9486-B7EC-2EDE-77CF9562079E}"/>
+              </a:ext>
+            </a:extLst>
+          </p:cNvPr>
+          <p:cNvSpPr/>
+          <p:nvPr/>
+        </p:nvSpPr>
+        <p:spPr>
+          <a:xfrm>
+            <a:off x="1924189" y="3135292"/>
+            <a:ext cx="4113028" cy="302164"/>
+          </a:xfrm>
+          <a:prstGeom prst="rightArrow">
+            <a:avLst/>
+          </a:prstGeom>
+        </p:spPr>
+        <p:style>
+          <a:lnRef idx="2">
+            <a:schemeClr val="accent1">
+              <a:shade val="50000"/>
+            </a:schemeClr>
+          </a:lnRef>
+          <a:fillRef idx="1">
+            <a:schemeClr val="accent1"/>
+          </a:fillRef>
+          <a:effectRef idx="0">
+            <a:schemeClr val="accent1"/>
+          </a:effectRef>
+          <a:fontRef idx="minor">
+            <a:schemeClr val="lt1"/>
+          </a:fontRef>
+        </p:style>
+        <p:txBody>
+          <a:bodyPr rtlCol="0" anchor="ctr"/>
+          <a:lstStyle/>
+          <a:p>
+            <a:pPr algn="ctr"/>
+            <a:endParaRPr lang="en-US"/>
+          </a:p>
+        </p:txBody>
+      </p:sp>
+      <p:sp>
+        <p:nvSpPr>
+          <p:cNvPr id="18" name="TextBox 17">
+            <a:extLst>
+              <a:ext uri="{FF2B5EF4-FFF2-40B4-BE49-F238E27FC236}">
+                <a16:creationId xmlns:a16="http://schemas.microsoft.com/office/drawing/2014/main" id="{A95D7C33-4630-99AD-DB7C-8E5C32EF03F4}"/>
+              </a:ext>
+            </a:extLst>
+          </p:cNvPr>
+          <p:cNvSpPr txBox="1"/>
+          <p:nvPr/>
+        </p:nvSpPr>
+        <p:spPr>
+          <a:xfrm>
+            <a:off x="1924189" y="3567699"/>
+            <a:ext cx="4113028" cy="369332"/>
+          </a:xfrm>
+          <a:prstGeom prst="rect">
+            <a:avLst/>
+          </a:prstGeom>
+          <a:noFill/>
+        </p:spPr>
+        <p:txBody>
+          <a:bodyPr wrap="square" rtlCol="0">
+            <a:spAutoFit/>
+          </a:bodyPr>
+          <a:lstStyle/>
+          <a:p>
+            <a:r>
+              <a:rPr lang="en-US"/>
+              <a:t>Out = In * conv1 * conv2 * conv3 * conv4</a:t>
+            </a:r>
+          </a:p>
+        </p:txBody>
+      </p:sp>
+      <p:sp>
+        <p:nvSpPr>
+          <p:cNvPr id="8" name="Right Arrow 7">
+            <a:extLst>
+              <a:ext uri="{FF2B5EF4-FFF2-40B4-BE49-F238E27FC236}">
+                <a16:creationId xmlns:a16="http://schemas.microsoft.com/office/drawing/2014/main" id="{053EB959-EC8A-1952-A90A-AAF364987F51}"/>
+              </a:ext>
+            </a:extLst>
+          </p:cNvPr>
+          <p:cNvSpPr/>
+          <p:nvPr/>
+        </p:nvSpPr>
+        <p:spPr>
+          <a:xfrm>
+            <a:off x="698500" y="1900756"/>
+            <a:ext cx="787400" cy="508000"/>
+          </a:xfrm>
+          <a:prstGeom prst="rightArrow">
+            <a:avLst/>
+          </a:prstGeom>
+        </p:spPr>
+        <p:style>
+          <a:lnRef idx="2">
+            <a:schemeClr val="accent1">
+              <a:shade val="50000"/>
+            </a:schemeClr>
+          </a:lnRef>
+          <a:fillRef idx="1">
+            <a:schemeClr val="accent1"/>
+          </a:fillRef>
+          <a:effectRef idx="0">
+            <a:schemeClr val="accent1"/>
+          </a:effectRef>
+          <a:fontRef idx="minor">
+            <a:schemeClr val="lt1"/>
+          </a:fontRef>
+        </p:style>
+        <p:txBody>
+          <a:bodyPr rtlCol="0" anchor="ctr"/>
+          <a:lstStyle/>
+          <a:p>
+            <a:pPr algn="ctr"/>
+            <a:endParaRPr lang="en-US"/>
+          </a:p>
+        </p:txBody>
+      </p:sp>
+      <p:sp>
+        <p:nvSpPr>
+          <p:cNvPr id="15" name="TextBox 14">
+            <a:extLst>
+              <a:ext uri="{FF2B5EF4-FFF2-40B4-BE49-F238E27FC236}">
+                <a16:creationId xmlns:a16="http://schemas.microsoft.com/office/drawing/2014/main" id="{7BF1F632-7312-544C-4CF7-3D250344B57D}"/>
+              </a:ext>
+            </a:extLst>
+          </p:cNvPr>
+          <p:cNvSpPr txBox="1"/>
+          <p:nvPr/>
+        </p:nvSpPr>
+        <p:spPr>
+          <a:xfrm>
+            <a:off x="737489" y="1575235"/>
+            <a:ext cx="609600" cy="373442"/>
+          </a:xfrm>
+          <a:prstGeom prst="rect">
+            <a:avLst/>
+          </a:prstGeom>
+          <a:noFill/>
+        </p:spPr>
+        <p:txBody>
+          <a:bodyPr wrap="square" rtlCol="0">
+            <a:spAutoFit/>
+          </a:bodyPr>
+          <a:lstStyle/>
+          <a:p>
+            <a:r>
+              <a:rPr lang="en-US"/>
+              <a:t>In</a:t>
+            </a:r>
+          </a:p>
+        </p:txBody>
+      </p:sp>
+      <p:sp>
+        <p:nvSpPr>
+          <p:cNvPr id="16" name="Right Arrow 15">
+            <a:extLst>
+              <a:ext uri="{FF2B5EF4-FFF2-40B4-BE49-F238E27FC236}">
+                <a16:creationId xmlns:a16="http://schemas.microsoft.com/office/drawing/2014/main" id="{E43E8D88-C58F-68F4-D0D2-735BA71169C9}"/>
+              </a:ext>
+            </a:extLst>
+          </p:cNvPr>
+          <p:cNvSpPr/>
+          <p:nvPr/>
+        </p:nvSpPr>
+        <p:spPr>
+          <a:xfrm>
+            <a:off x="6616700" y="1938856"/>
+            <a:ext cx="787400" cy="508000"/>
+          </a:xfrm>
+          <a:prstGeom prst="rightArrow">
+            <a:avLst/>
+          </a:prstGeom>
+        </p:spPr>
+        <p:style>
+          <a:lnRef idx="2">
+            <a:schemeClr val="accent1">
+              <a:shade val="50000"/>
+            </a:schemeClr>
+          </a:lnRef>
+          <a:fillRef idx="1">
+            <a:schemeClr val="accent1"/>
+          </a:fillRef>
+          <a:effectRef idx="0">
+            <a:schemeClr val="accent1"/>
+          </a:effectRef>
+          <a:fontRef idx="minor">
+            <a:schemeClr val="lt1"/>
+          </a:fontRef>
+        </p:style>
+        <p:txBody>
+          <a:bodyPr rtlCol="0" anchor="ctr"/>
+          <a:lstStyle/>
+          <a:p>
+            <a:pPr algn="ctr"/>
+            <a:endParaRPr lang="en-US"/>
+          </a:p>
+        </p:txBody>
+      </p:sp>
+      <p:sp>
+        <p:nvSpPr>
+          <p:cNvPr id="17" name="TextBox 16">
+            <a:extLst>
+              <a:ext uri="{FF2B5EF4-FFF2-40B4-BE49-F238E27FC236}">
+                <a16:creationId xmlns:a16="http://schemas.microsoft.com/office/drawing/2014/main" id="{4257FCA9-50E4-E7A9-8082-3A06EE6C740F}"/>
+              </a:ext>
+            </a:extLst>
+          </p:cNvPr>
+          <p:cNvSpPr txBox="1"/>
+          <p:nvPr/>
+        </p:nvSpPr>
+        <p:spPr>
+          <a:xfrm>
+            <a:off x="6655689" y="1613335"/>
+            <a:ext cx="609600" cy="373442"/>
+          </a:xfrm>
+          <a:prstGeom prst="rect">
+            <a:avLst/>
+          </a:prstGeom>
+          <a:noFill/>
+        </p:spPr>
+        <p:txBody>
+          <a:bodyPr wrap="square" rtlCol="0">
+            <a:spAutoFit/>
+          </a:bodyPr>
+          <a:lstStyle/>
+          <a:p>
+            <a:r>
+              <a:rPr lang="en-US"/>
+              <a:t>Out</a:t>
+            </a:r>
+          </a:p>
+        </p:txBody>
+      </p:sp>
+      <p:sp>
+        <p:nvSpPr>
+          <p:cNvPr id="19" name="TextBox 18">
+            <a:extLst>
+              <a:ext uri="{FF2B5EF4-FFF2-40B4-BE49-F238E27FC236}">
+                <a16:creationId xmlns:a16="http://schemas.microsoft.com/office/drawing/2014/main" id="{2C1A9041-F948-6F16-997C-10158C3EEB4B}"/>
+              </a:ext>
+            </a:extLst>
+          </p:cNvPr>
+          <p:cNvSpPr txBox="1"/>
+          <p:nvPr/>
+        </p:nvSpPr>
+        <p:spPr>
+          <a:xfrm>
+            <a:off x="623189" y="2642035"/>
+            <a:ext cx="874514" cy="369332"/>
+          </a:xfrm>
+          <a:prstGeom prst="rect">
+            <a:avLst/>
+          </a:prstGeom>
+          <a:noFill/>
+        </p:spPr>
+        <p:txBody>
+          <a:bodyPr wrap="square" rtlCol="0">
+            <a:spAutoFit/>
+          </a:bodyPr>
+          <a:lstStyle/>
+          <a:p>
+            <a:r>
+              <a:rPr lang="en-US"/>
+              <a:t>Leads</a:t>
+            </a:r>
+          </a:p>
+        </p:txBody>
+      </p:sp>
+      <p:sp>
+        <p:nvSpPr>
+          <p:cNvPr id="20" name="TextBox 19">
+            <a:extLst>
+              <a:ext uri="{FF2B5EF4-FFF2-40B4-BE49-F238E27FC236}">
+                <a16:creationId xmlns:a16="http://schemas.microsoft.com/office/drawing/2014/main" id="{9F0F9F9E-F9BA-5991-CBF5-90A62F49AF01}"/>
+              </a:ext>
+            </a:extLst>
+          </p:cNvPr>
+          <p:cNvSpPr txBox="1"/>
+          <p:nvPr/>
+        </p:nvSpPr>
+        <p:spPr>
+          <a:xfrm>
+            <a:off x="6655689" y="2654735"/>
+            <a:ext cx="874514" cy="369332"/>
+          </a:xfrm>
+          <a:prstGeom prst="rect">
+            <a:avLst/>
+          </a:prstGeom>
+          <a:noFill/>
+        </p:spPr>
+        <p:txBody>
+          <a:bodyPr wrap="square" rtlCol="0">
+            <a:spAutoFit/>
+          </a:bodyPr>
+          <a:lstStyle/>
+          <a:p>
+            <a:r>
+              <a:rPr lang="en-US"/>
+              <a:t>Sales</a:t>
+            </a:r>
+          </a:p>
+        </p:txBody>
+      </p:sp>
+      <p:sp>
+        <p:nvSpPr>
+          <p:cNvPr id="21" name="TextBox 20">
+            <a:extLst>
+              <a:ext uri="{FF2B5EF4-FFF2-40B4-BE49-F238E27FC236}">
+                <a16:creationId xmlns:a16="http://schemas.microsoft.com/office/drawing/2014/main" id="{6CB43EC3-C4B5-7101-065A-63B3C1B8FC2D}"/>
+              </a:ext>
+            </a:extLst>
+          </p:cNvPr>
+          <p:cNvSpPr txBox="1"/>
+          <p:nvPr/>
+        </p:nvSpPr>
+        <p:spPr>
+          <a:xfrm>
+            <a:off x="1347089" y="4479080"/>
+            <a:ext cx="5803900" cy="2031325"/>
+          </a:xfrm>
+          <a:prstGeom prst="rect">
+            <a:avLst/>
+          </a:prstGeom>
+          <a:solidFill>
+            <a:schemeClr val="accent4">
+              <a:lumMod val="20000"/>
+              <a:lumOff val="80000"/>
+            </a:schemeClr>
+          </a:solidFill>
+          <a:ln>
+            <a:solidFill>
+              <a:srgbClr val="FF0000"/>
+            </a:solidFill>
+          </a:ln>
+        </p:spPr>
+        <p:txBody>
+          <a:bodyPr wrap="square" rtlCol="0">
+            <a:spAutoFit/>
+          </a:bodyPr>
+          <a:lstStyle/>
+          <a:p>
+            <a:r>
+              <a:rPr lang="en-US"/>
+              <a:t>If using A/B split testing we have improved conversions between steps above by 20%, </a:t>
+            </a:r>
+          </a:p>
+          <a:p>
+            <a:r>
+              <a:rPr lang="en-US"/>
+              <a:t>then overall improvement will be:</a:t>
+            </a:r>
+          </a:p>
+          <a:p>
+            <a:endParaRPr lang="en-US"/>
+          </a:p>
+          <a:p>
+            <a:r>
+              <a:rPr lang="en-US"/>
+              <a:t>1.2 * 1.2 * 1.2 * 1.2 = 2.1</a:t>
+            </a:r>
+          </a:p>
+          <a:p>
+            <a:endParaRPr lang="en-US"/>
+          </a:p>
+          <a:p>
+            <a:r>
+              <a:rPr lang="en-US"/>
+              <a:t>So we can doulbe our sales by just fine-tuning the messages</a:t>
+            </a:r>
+          </a:p>
+        </p:txBody>
+      </p:sp>
+      <p:pic>
+        <p:nvPicPr>
+          <p:cNvPr id="5122" name="Picture 2" descr="100 Dollar Bill Pool Mosaic">
+            <a:extLst>
+              <a:ext uri="{FF2B5EF4-FFF2-40B4-BE49-F238E27FC236}">
+                <a16:creationId xmlns:a16="http://schemas.microsoft.com/office/drawing/2014/main" id="{B07AFFE0-8303-FF70-53E4-E68F16ACB335}"/>
+              </a:ext>
+            </a:extLst>
+          </p:cNvPr>
+          <p:cNvPicPr>
+            <a:picLocks noChangeAspect="1" noChangeArrowheads="1"/>
+          </p:cNvPicPr>
+          <p:nvPr/>
+        </p:nvPicPr>
+        <p:blipFill>
+          <a:blip r:embed="rId3" cstate="email">
+            <a:extLst>
+              <a:ext uri="{28A0092B-C50C-407E-A947-70E740481C1C}">
+                <a14:useLocalDpi xmlns:a14="http://schemas.microsoft.com/office/drawing/2010/main"/>
+              </a:ext>
+            </a:extLst>
+          </a:blip>
+          <a:srcRect/>
+          <a:stretch>
+            <a:fillRect/>
+          </a:stretch>
+        </p:blipFill>
+        <p:spPr bwMode="auto">
+          <a:xfrm>
+            <a:off x="10010730" y="3621830"/>
+            <a:ext cx="2001362" cy="857250"/>
+          </a:xfrm>
+          <a:prstGeom prst="rect">
+            <a:avLst/>
+          </a:prstGeom>
+          <a:noFill/>
+          <a:extLst>
+            <a:ext uri="{909E8E84-426E-40DD-AFC4-6F175D3DCCD1}">
+              <a14:hiddenFill xmlns:a14="http://schemas.microsoft.com/office/drawing/2010/main">
+                <a:solidFill>
+                  <a:srgbClr val="FFFFFF"/>
+                </a:solidFill>
+              </a14:hiddenFill>
+            </a:ext>
+          </a:extLst>
+        </p:spPr>
+      </p:pic>
+      <p:pic>
+        <p:nvPicPr>
+          <p:cNvPr id="5126" name="Picture 6" descr="United States one-dollar bill - Wikipedia">
+            <a:extLst>
+              <a:ext uri="{FF2B5EF4-FFF2-40B4-BE49-F238E27FC236}">
+                <a16:creationId xmlns:a16="http://schemas.microsoft.com/office/drawing/2014/main" id="{9D0A6DE7-0ACF-A8CF-CC14-4C77F8095710}"/>
+              </a:ext>
+            </a:extLst>
+          </p:cNvPr>
+          <p:cNvPicPr>
+            <a:picLocks noChangeAspect="1" noChangeArrowheads="1"/>
+          </p:cNvPicPr>
+          <p:nvPr/>
+        </p:nvPicPr>
+        <p:blipFill>
+          <a:blip r:embed="rId4" cstate="email">
+            <a:extLst>
+              <a:ext uri="{28A0092B-C50C-407E-A947-70E740481C1C}">
+                <a14:useLocalDpi xmlns:a14="http://schemas.microsoft.com/office/drawing/2010/main"/>
+              </a:ext>
+            </a:extLst>
+          </a:blip>
+          <a:srcRect/>
+          <a:stretch>
+            <a:fillRect/>
+          </a:stretch>
+        </p:blipFill>
+        <p:spPr bwMode="auto">
+          <a:xfrm>
+            <a:off x="10026799" y="2715939"/>
+            <a:ext cx="2008445" cy="857250"/>
+          </a:xfrm>
+          <a:prstGeom prst="rect">
+            <a:avLst/>
+          </a:prstGeom>
+          <a:noFill/>
+          <a:extLst>
+            <a:ext uri="{909E8E84-426E-40DD-AFC4-6F175D3DCCD1}">
+              <a14:hiddenFill xmlns:a14="http://schemas.microsoft.com/office/drawing/2010/main">
+                <a:solidFill>
+                  <a:srgbClr val="FFFFFF"/>
+                </a:solidFill>
+              </a14:hiddenFill>
+            </a:ext>
+          </a:extLst>
+        </p:spPr>
+      </p:pic>
+      <p:sp>
+        <p:nvSpPr>
+          <p:cNvPr id="22" name="TextBox 21">
+            <a:extLst>
+              <a:ext uri="{FF2B5EF4-FFF2-40B4-BE49-F238E27FC236}">
+                <a16:creationId xmlns:a16="http://schemas.microsoft.com/office/drawing/2014/main" id="{C22C1097-F1E5-FA75-58AE-C3BC498CC4E1}"/>
+              </a:ext>
+            </a:extLst>
+          </p:cNvPr>
+          <p:cNvSpPr txBox="1"/>
+          <p:nvPr/>
+        </p:nvSpPr>
+        <p:spPr>
+          <a:xfrm>
+            <a:off x="10033882" y="4479080"/>
+            <a:ext cx="2158117" cy="1815882"/>
+          </a:xfrm>
+          <a:prstGeom prst="rect">
+            <a:avLst/>
+          </a:prstGeom>
+          <a:noFill/>
+        </p:spPr>
+        <p:txBody>
+          <a:bodyPr wrap="square" rtlCol="0">
+            <a:spAutoFit/>
+          </a:bodyPr>
+          <a:lstStyle/>
+          <a:p>
+            <a:r>
+              <a:rPr lang="en-US" sz="1400"/>
+              <a:t>The $1 and $100 bills above take same amount of paper and ink to produce them.</a:t>
+            </a:r>
+          </a:p>
+          <a:p>
+            <a:endParaRPr lang="en-US" sz="1400"/>
+          </a:p>
+          <a:p>
+            <a:r>
+              <a:rPr lang="en-US" sz="1400"/>
+              <a:t>The only difference in value between them is the message on the paper. </a:t>
+            </a:r>
+          </a:p>
+        </p:txBody>
+      </p:sp>
+    </p:spTree>
+    <p:extLst>
+      <p:ext uri="{BB962C8B-B14F-4D97-AF65-F5344CB8AC3E}">
+        <p14:creationId xmlns:p14="http://schemas.microsoft.com/office/powerpoint/2010/main" val="2091058932"/>
       </p:ext>
     </p:extLst>
   </p:cSld>

--- a/Marketing.pptx
+++ b/Marketing.pptx
@@ -5,17 +5,18 @@
     <p:sldMasterId id="2147483648" r:id="rId1"/>
   </p:sldMasterIdLst>
   <p:notesMasterIdLst>
-    <p:notesMasterId r:id="rId10"/>
+    <p:notesMasterId r:id="rId11"/>
   </p:notesMasterIdLst>
   <p:sldIdLst>
     <p:sldId id="287" r:id="rId2"/>
     <p:sldId id="294" r:id="rId3"/>
     <p:sldId id="292" r:id="rId4"/>
     <p:sldId id="288" r:id="rId5"/>
-    <p:sldId id="289" r:id="rId6"/>
+    <p:sldId id="296" r:id="rId6"/>
     <p:sldId id="290" r:id="rId7"/>
     <p:sldId id="291" r:id="rId8"/>
     <p:sldId id="293" r:id="rId9"/>
+    <p:sldId id="295" r:id="rId10"/>
   </p:sldIdLst>
   <p:sldSz cx="12192000" cy="6858000"/>
   <p:notesSz cx="6858000" cy="9144000"/>
@@ -203,7 +204,7 @@
           </a:lstStyle>
           <a:p>
             <a:fld id="{610AF671-4685-124D-A41D-446D235EA8CE}" type="datetimeFigureOut">
-              <a:t>9/11/22</a:t>
+              <a:t>9/13/22</a:t>
             </a:fld>
             <a:endParaRPr lang="en-US"/>
           </a:p>
@@ -700,7 +701,7 @@
           <a:p>
             <a:fld id="{2D90B581-06C6-5A4B-9E30-3EAD5667F4B3}" type="datetimeFigureOut">
               <a:rPr lang="en-US" smtClean="0"/>
-              <a:t>9/11/22</a:t>
+              <a:t>9/13/22</a:t>
             </a:fld>
             <a:endParaRPr lang="en-US"/>
           </a:p>
@@ -898,7 +899,7 @@
           <a:p>
             <a:fld id="{2D90B581-06C6-5A4B-9E30-3EAD5667F4B3}" type="datetimeFigureOut">
               <a:rPr lang="en-US" smtClean="0"/>
-              <a:t>9/11/22</a:t>
+              <a:t>9/13/22</a:t>
             </a:fld>
             <a:endParaRPr lang="en-US"/>
           </a:p>
@@ -1106,7 +1107,7 @@
           <a:p>
             <a:fld id="{2D90B581-06C6-5A4B-9E30-3EAD5667F4B3}" type="datetimeFigureOut">
               <a:rPr lang="en-US" smtClean="0"/>
-              <a:t>9/11/22</a:t>
+              <a:t>9/13/22</a:t>
             </a:fld>
             <a:endParaRPr lang="en-US"/>
           </a:p>
@@ -1304,7 +1305,7 @@
           <a:p>
             <a:fld id="{2D90B581-06C6-5A4B-9E30-3EAD5667F4B3}" type="datetimeFigureOut">
               <a:rPr lang="en-US" smtClean="0"/>
-              <a:t>9/11/22</a:t>
+              <a:t>9/13/22</a:t>
             </a:fld>
             <a:endParaRPr lang="en-US"/>
           </a:p>
@@ -1579,7 +1580,7 @@
           <a:p>
             <a:fld id="{2D90B581-06C6-5A4B-9E30-3EAD5667F4B3}" type="datetimeFigureOut">
               <a:rPr lang="en-US" smtClean="0"/>
-              <a:t>9/11/22</a:t>
+              <a:t>9/13/22</a:t>
             </a:fld>
             <a:endParaRPr lang="en-US"/>
           </a:p>
@@ -1844,7 +1845,7 @@
           <a:p>
             <a:fld id="{2D90B581-06C6-5A4B-9E30-3EAD5667F4B3}" type="datetimeFigureOut">
               <a:rPr lang="en-US" smtClean="0"/>
-              <a:t>9/11/22</a:t>
+              <a:t>9/13/22</a:t>
             </a:fld>
             <a:endParaRPr lang="en-US"/>
           </a:p>
@@ -2256,7 +2257,7 @@
           <a:p>
             <a:fld id="{2D90B581-06C6-5A4B-9E30-3EAD5667F4B3}" type="datetimeFigureOut">
               <a:rPr lang="en-US" smtClean="0"/>
-              <a:t>9/11/22</a:t>
+              <a:t>9/13/22</a:t>
             </a:fld>
             <a:endParaRPr lang="en-US"/>
           </a:p>
@@ -2397,7 +2398,7 @@
           <a:p>
             <a:fld id="{2D90B581-06C6-5A4B-9E30-3EAD5667F4B3}" type="datetimeFigureOut">
               <a:rPr lang="en-US" smtClean="0"/>
-              <a:t>9/11/22</a:t>
+              <a:t>9/13/22</a:t>
             </a:fld>
             <a:endParaRPr lang="en-US"/>
           </a:p>
@@ -2510,7 +2511,7 @@
           <a:p>
             <a:fld id="{2D90B581-06C6-5A4B-9E30-3EAD5667F4B3}" type="datetimeFigureOut">
               <a:rPr lang="en-US" smtClean="0"/>
-              <a:t>9/11/22</a:t>
+              <a:t>9/13/22</a:t>
             </a:fld>
             <a:endParaRPr lang="en-US"/>
           </a:p>
@@ -2821,7 +2822,7 @@
           <a:p>
             <a:fld id="{2D90B581-06C6-5A4B-9E30-3EAD5667F4B3}" type="datetimeFigureOut">
               <a:rPr lang="en-US" smtClean="0"/>
-              <a:t>9/11/22</a:t>
+              <a:t>9/13/22</a:t>
             </a:fld>
             <a:endParaRPr lang="en-US"/>
           </a:p>
@@ -3109,7 +3110,7 @@
           <a:p>
             <a:fld id="{2D90B581-06C6-5A4B-9E30-3EAD5667F4B3}" type="datetimeFigureOut">
               <a:rPr lang="en-US" smtClean="0"/>
-              <a:t>9/11/22</a:t>
+              <a:t>9/13/22</a:t>
             </a:fld>
             <a:endParaRPr lang="en-US"/>
           </a:p>
@@ -3350,7 +3351,7 @@
           <a:p>
             <a:fld id="{2D90B581-06C6-5A4B-9E30-3EAD5667F4B3}" type="datetimeFigureOut">
               <a:rPr lang="en-US" smtClean="0"/>
-              <a:t>9/11/22</a:t>
+              <a:t>9/13/22</a:t>
             </a:fld>
             <a:endParaRPr lang="en-US"/>
           </a:p>
@@ -4165,7 +4166,7 @@
         <p:spPr>
           <a:xfrm>
             <a:off x="130018" y="1642681"/>
-            <a:ext cx="3302000" cy="2031325"/>
+            <a:ext cx="3302000" cy="2585323"/>
           </a:xfrm>
           <a:prstGeom prst="rect">
             <a:avLst/>
@@ -4179,8 +4180,39 @@
           <a:lstStyle/>
           <a:p>
             <a:r>
+              <a:rPr lang="en-US" b="1">
+                <a:solidFill>
+                  <a:srgbClr val="FF0000"/>
+                </a:solidFill>
+              </a:rPr>
+              <a:t>Marketing = Selling in Advance</a:t>
+            </a:r>
+          </a:p>
+          <a:p>
+            <a:endParaRPr lang="en-US"/>
+          </a:p>
+          <a:p>
+            <a:r>
               <a:rPr lang="en-US"/>
-              <a:t>Marketing = Selling in Advance</a:t>
+              <a:t>Marketing educates, </a:t>
+            </a:r>
+          </a:p>
+          <a:p>
+            <a:r>
+              <a:rPr lang="en-US"/>
+              <a:t>builds repo, </a:t>
+            </a:r>
+          </a:p>
+          <a:p>
+            <a:r>
+              <a:rPr lang="en-US"/>
+              <a:t>creates trust, </a:t>
+            </a:r>
+          </a:p>
+          <a:p>
+            <a:r>
+              <a:rPr lang="en-US"/>
+              <a:t>creates comfort</a:t>
             </a:r>
           </a:p>
           <a:p>
@@ -4189,16 +4221,7 @@
           <a:p>
             <a:r>
               <a:rPr lang="en-US"/>
-              <a:t>Marketing educates, builds repo, creates trust, creates comfort</a:t>
-            </a:r>
-          </a:p>
-          <a:p>
-            <a:endParaRPr lang="en-US"/>
-          </a:p>
-          <a:p>
-            <a:r>
-              <a:rPr lang="en-US"/>
-              <a:t>Marketing does this prep work automatically and cost-effectively</a:t>
+              <a:t>Marketing can do this prep work automatically and cost-effectively</a:t>
             </a:r>
           </a:p>
         </p:txBody>
@@ -6329,6 +6352,55 @@
       </p:grpSpPr>
       <p:sp>
         <p:nvSpPr>
+          <p:cNvPr id="5" name="Trapezoid 4">
+            <a:extLst>
+              <a:ext uri="{FF2B5EF4-FFF2-40B4-BE49-F238E27FC236}">
+                <a16:creationId xmlns:a16="http://schemas.microsoft.com/office/drawing/2014/main" id="{47490CA5-C851-20DE-7A93-FCF2100D50E1}"/>
+              </a:ext>
+            </a:extLst>
+          </p:cNvPr>
+          <p:cNvSpPr/>
+          <p:nvPr/>
+        </p:nvSpPr>
+        <p:spPr>
+          <a:xfrm>
+            <a:off x="827617" y="4962480"/>
+            <a:ext cx="1916304" cy="1384995"/>
+          </a:xfrm>
+          <a:prstGeom prst="trapezoid">
+            <a:avLst/>
+          </a:prstGeom>
+          <a:solidFill>
+            <a:srgbClr val="92D050"/>
+          </a:solidFill>
+        </p:spPr>
+        <p:style>
+          <a:lnRef idx="2">
+            <a:schemeClr val="accent1">
+              <a:shade val="50000"/>
+            </a:schemeClr>
+          </a:lnRef>
+          <a:fillRef idx="1">
+            <a:schemeClr val="accent1"/>
+          </a:fillRef>
+          <a:effectRef idx="0">
+            <a:schemeClr val="accent1"/>
+          </a:effectRef>
+          <a:fontRef idx="minor">
+            <a:schemeClr val="lt1"/>
+          </a:fontRef>
+        </p:style>
+        <p:txBody>
+          <a:bodyPr rtlCol="0" anchor="ctr"/>
+          <a:lstStyle/>
+          <a:p>
+            <a:pPr algn="ctr"/>
+            <a:endParaRPr lang="en-US"/>
+          </a:p>
+        </p:txBody>
+      </p:sp>
+      <p:sp>
+        <p:nvSpPr>
           <p:cNvPr id="3" name="TextBox 2">
             <a:extLst>
               <a:ext uri="{FF2B5EF4-FFF2-40B4-BE49-F238E27FC236}">
@@ -6341,7 +6413,7 @@
         </p:nvSpPr>
         <p:spPr>
           <a:xfrm>
-            <a:off x="1271943" y="4225330"/>
+            <a:off x="4798310" y="4639317"/>
             <a:ext cx="6678449" cy="2031325"/>
           </a:xfrm>
           <a:prstGeom prst="rect">
@@ -6590,7 +6662,7 @@
         </p:nvSpPr>
         <p:spPr>
           <a:xfrm>
-            <a:off x="1410185" y="2073281"/>
+            <a:off x="266198" y="2720644"/>
             <a:ext cx="4085581" cy="1477328"/>
           </a:xfrm>
           <a:prstGeom prst="rect">
@@ -6704,7 +6776,7 @@
         </p:blipFill>
         <p:spPr bwMode="auto">
           <a:xfrm>
-            <a:off x="3730295" y="231392"/>
+            <a:off x="715241" y="878755"/>
             <a:ext cx="1070528" cy="1477328"/>
           </a:xfrm>
           <a:prstGeom prst="rect">
@@ -6736,7 +6808,7 @@
         </p:nvSpPr>
         <p:spPr>
           <a:xfrm>
-            <a:off x="3573297" y="1721088"/>
+            <a:off x="558243" y="2368451"/>
             <a:ext cx="1384523" cy="307777"/>
           </a:xfrm>
           <a:prstGeom prst="rect">
@@ -6838,10 +6910,83 @@
           </a:p>
         </p:txBody>
       </p:sp>
+      <p:sp>
+        <p:nvSpPr>
+          <p:cNvPr id="4" name="TextBox 3">
+            <a:extLst>
+              <a:ext uri="{FF2B5EF4-FFF2-40B4-BE49-F238E27FC236}">
+                <a16:creationId xmlns:a16="http://schemas.microsoft.com/office/drawing/2014/main" id="{FACE8171-2240-2295-B2F9-493F3121E4AF}"/>
+              </a:ext>
+            </a:extLst>
+          </p:cNvPr>
+          <p:cNvSpPr txBox="1"/>
+          <p:nvPr/>
+        </p:nvSpPr>
+        <p:spPr>
+          <a:xfrm>
+            <a:off x="827617" y="4962481"/>
+            <a:ext cx="1916304" cy="1508105"/>
+          </a:xfrm>
+          <a:prstGeom prst="rect">
+            <a:avLst/>
+          </a:prstGeom>
+          <a:noFill/>
+        </p:spPr>
+        <p:txBody>
+          <a:bodyPr wrap="square" rtlCol="0">
+            <a:spAutoFit/>
+          </a:bodyPr>
+          <a:lstStyle/>
+          <a:p>
+            <a:pPr algn="ctr"/>
+            <a:r>
+              <a:rPr lang="en-US" sz="1400" b="1">
+                <a:solidFill>
+                  <a:srgbClr val="FF0000"/>
+                </a:solidFill>
+              </a:rPr>
+              <a:t>Message</a:t>
+            </a:r>
+          </a:p>
+          <a:p>
+            <a:pPr algn="ctr"/>
+            <a:r>
+              <a:rPr lang="en-US" sz="2000" b="1">
+                <a:solidFill>
+                  <a:srgbClr val="FF0000"/>
+                </a:solidFill>
+              </a:rPr>
+              <a:t>Delivery</a:t>
+            </a:r>
+          </a:p>
+          <a:p>
+            <a:pPr algn="ctr"/>
+            <a:r>
+              <a:rPr lang="en-US" sz="2600" b="1">
+                <a:solidFill>
+                  <a:srgbClr val="FF0000"/>
+                </a:solidFill>
+              </a:rPr>
+              <a:t>Offer</a:t>
+            </a:r>
+          </a:p>
+          <a:p>
+            <a:pPr algn="ctr"/>
+            <a:r>
+              <a:rPr lang="en-US" sz="3200" b="1">
+                <a:solidFill>
+                  <a:srgbClr val="FF0000"/>
+                </a:solidFill>
+              </a:rPr>
+              <a:t>Market</a:t>
+            </a:r>
+          </a:p>
+        </p:txBody>
+      </p:sp>
     </p:spTree>
     <p:extLst>
       <p:ext uri="{BB962C8B-B14F-4D97-AF65-F5344CB8AC3E}">
-        <p14:creationId xmlns:p14="http://schemas.microsoft.com/office/powerpoint/2010/main" val="2841672921"/>
+        <p14:creationId xmlns:p14="http://schemas.microsoft.com/office/powerpoint/2010/main" val="2992547217"/>
       </p:ext>
     </p:extLst>
   </p:cSld>
@@ -10664,6 +10809,248 @@
     <p:extLst>
       <p:ext uri="{BB962C8B-B14F-4D97-AF65-F5344CB8AC3E}">
         <p14:creationId xmlns:p14="http://schemas.microsoft.com/office/powerpoint/2010/main" val="2091058932"/>
+      </p:ext>
+    </p:extLst>
+  </p:cSld>
+  <p:clrMapOvr>
+    <a:masterClrMapping/>
+  </p:clrMapOvr>
+</p:sld>
+</file>
+
+<file path=ppt/slides/slide9.xml><?xml version="1.0" encoding="utf-8"?>
+<p:sld xmlns:a="http://schemas.openxmlformats.org/drawingml/2006/main" xmlns:r="http://schemas.openxmlformats.org/officeDocument/2006/relationships" xmlns:p="http://schemas.openxmlformats.org/presentationml/2006/main">
+  <p:cSld>
+    <p:spTree>
+      <p:nvGrpSpPr>
+        <p:cNvPr id="1" name=""/>
+        <p:cNvGrpSpPr/>
+        <p:nvPr/>
+      </p:nvGrpSpPr>
+      <p:grpSpPr>
+        <a:xfrm>
+          <a:off x="0" y="0"/>
+          <a:ext cx="0" cy="0"/>
+          <a:chOff x="0" y="0"/>
+          <a:chExt cx="0" cy="0"/>
+        </a:xfrm>
+      </p:grpSpPr>
+      <p:sp>
+        <p:nvSpPr>
+          <p:cNvPr id="2" name="TextBox 1">
+            <a:extLst>
+              <a:ext uri="{FF2B5EF4-FFF2-40B4-BE49-F238E27FC236}">
+                <a16:creationId xmlns:a16="http://schemas.microsoft.com/office/drawing/2014/main" id="{8056B59E-0B59-F174-561B-780DC716BB82}"/>
+              </a:ext>
+            </a:extLst>
+          </p:cNvPr>
+          <p:cNvSpPr txBox="1"/>
+          <p:nvPr/>
+        </p:nvSpPr>
+        <p:spPr>
+          <a:xfrm>
+            <a:off x="673767" y="644893"/>
+            <a:ext cx="5842001" cy="3970318"/>
+          </a:xfrm>
+          <a:prstGeom prst="rect">
+            <a:avLst/>
+          </a:prstGeom>
+          <a:noFill/>
+        </p:spPr>
+        <p:txBody>
+          <a:bodyPr wrap="square" rtlCol="0">
+            <a:spAutoFit/>
+          </a:bodyPr>
+          <a:lstStyle/>
+          <a:p>
+            <a:r>
+              <a:rPr lang="en-US"/>
+              <a:t>Ben Caballero is the most productive individual real estate agent in the United States. </a:t>
+            </a:r>
+          </a:p>
+          <a:p>
+            <a:endParaRPr lang="en-US"/>
+          </a:p>
+          <a:p>
+            <a:r>
+              <a:rPr lang="en-US"/>
+              <a:t>Guinness World Records has recognized him three times for "most annual home sale transactions through MLS by an individual sell side real estate agent."</a:t>
+            </a:r>
+          </a:p>
+          <a:p>
+            <a:endParaRPr lang="en-US"/>
+          </a:p>
+          <a:p>
+            <a:r>
+              <a:rPr lang="en-US"/>
+              <a:t>In 2016 – sold 3,556 homes</a:t>
+            </a:r>
+          </a:p>
+          <a:p>
+            <a:r>
+              <a:rPr lang="en-US"/>
+              <a:t>In 2018 – sold 5,801 homes totaling $2.27 billion in volume</a:t>
+            </a:r>
+          </a:p>
+          <a:p>
+            <a:r>
+              <a:rPr lang="en-US"/>
+              <a:t>In 2020 – sold 6,438 homes totaling $2.46 billion in volume</a:t>
+            </a:r>
+          </a:p>
+          <a:p>
+            <a:endParaRPr lang="en-US"/>
+          </a:p>
+          <a:p>
+            <a:r>
+              <a:rPr lang="en-US">
+                <a:hlinkClick r:id="rId2"/>
+              </a:rPr>
+              <a:t>https://homesusa.com</a:t>
+            </a:r>
+            <a:endParaRPr lang="en-US"/>
+          </a:p>
+          <a:p>
+            <a:r>
+              <a:rPr lang="en-US"/>
+              <a:t>Ben works with 63+ home builders</a:t>
+            </a:r>
+          </a:p>
+          <a:p>
+            <a:r>
+              <a:rPr lang="en-US"/>
+              <a:t>MLS = Multiple Listing Service</a:t>
+            </a:r>
+          </a:p>
+        </p:txBody>
+      </p:sp>
+      <p:sp>
+        <p:nvSpPr>
+          <p:cNvPr id="4" name="TextBox 3">
+            <a:extLst>
+              <a:ext uri="{FF2B5EF4-FFF2-40B4-BE49-F238E27FC236}">
+                <a16:creationId xmlns:a16="http://schemas.microsoft.com/office/drawing/2014/main" id="{EE0B2669-73E7-1559-7150-F118593F2830}"/>
+              </a:ext>
+            </a:extLst>
+          </p:cNvPr>
+          <p:cNvSpPr txBox="1"/>
+          <p:nvPr/>
+        </p:nvSpPr>
+        <p:spPr>
+          <a:xfrm>
+            <a:off x="8790405" y="2867162"/>
+            <a:ext cx="1725328" cy="369332"/>
+          </a:xfrm>
+          <a:prstGeom prst="rect">
+            <a:avLst/>
+          </a:prstGeom>
+          <a:noFill/>
+        </p:spPr>
+        <p:txBody>
+          <a:bodyPr wrap="square">
+            <a:spAutoFit/>
+          </a:bodyPr>
+          <a:lstStyle/>
+          <a:p>
+            <a:pPr algn="ctr"/>
+            <a:r>
+              <a:rPr lang="en-US"/>
+              <a:t>Ben Caballero</a:t>
+            </a:r>
+          </a:p>
+        </p:txBody>
+      </p:sp>
+      <p:pic>
+        <p:nvPicPr>
+          <p:cNvPr id="5" name="Picture 4">
+            <a:extLst>
+              <a:ext uri="{FF2B5EF4-FFF2-40B4-BE49-F238E27FC236}">
+                <a16:creationId xmlns:a16="http://schemas.microsoft.com/office/drawing/2014/main" id="{A9EE0FF1-13F9-4931-2D58-97CD831F3C3E}"/>
+              </a:ext>
+            </a:extLst>
+          </p:cNvPr>
+          <p:cNvPicPr>
+            <a:picLocks noChangeAspect="1"/>
+          </p:cNvPicPr>
+          <p:nvPr/>
+        </p:nvPicPr>
+        <p:blipFill>
+          <a:blip r:embed="rId3" cstate="email">
+            <a:extLst>
+              <a:ext uri="{28A0092B-C50C-407E-A947-70E740481C1C}">
+                <a14:useLocalDpi xmlns:a14="http://schemas.microsoft.com/office/drawing/2010/main"/>
+              </a:ext>
+            </a:extLst>
+          </a:blip>
+          <a:stretch>
+            <a:fillRect/>
+          </a:stretch>
+        </p:blipFill>
+        <p:spPr>
+          <a:xfrm>
+            <a:off x="8899336" y="1206841"/>
+            <a:ext cx="1616397" cy="1660321"/>
+          </a:xfrm>
+          <a:prstGeom prst="rect">
+            <a:avLst/>
+          </a:prstGeom>
+        </p:spPr>
+      </p:pic>
+      <p:sp>
+        <p:nvSpPr>
+          <p:cNvPr id="6" name="TextBox 5">
+            <a:extLst>
+              <a:ext uri="{FF2B5EF4-FFF2-40B4-BE49-F238E27FC236}">
+                <a16:creationId xmlns:a16="http://schemas.microsoft.com/office/drawing/2014/main" id="{116E172C-B3B9-F7D7-9098-4D3C603F8DAE}"/>
+              </a:ext>
+            </a:extLst>
+          </p:cNvPr>
+          <p:cNvSpPr txBox="1"/>
+          <p:nvPr/>
+        </p:nvSpPr>
+        <p:spPr>
+          <a:xfrm>
+            <a:off x="8101264" y="3667673"/>
+            <a:ext cx="3416969" cy="646331"/>
+          </a:xfrm>
+          <a:prstGeom prst="rect">
+            <a:avLst/>
+          </a:prstGeom>
+          <a:noFill/>
+        </p:spPr>
+        <p:txBody>
+          <a:bodyPr wrap="square" rtlCol="0">
+            <a:spAutoFit/>
+          </a:bodyPr>
+          <a:lstStyle/>
+          <a:p>
+            <a:pPr algn="ctr"/>
+            <a:r>
+              <a:rPr lang="en-US" b="1">
+                <a:solidFill>
+                  <a:srgbClr val="FF0000"/>
+                </a:solidFill>
+              </a:rPr>
+              <a:t>His first meeting every day is </a:t>
+            </a:r>
+          </a:p>
+          <a:p>
+            <a:pPr algn="ctr"/>
+            <a:r>
+              <a:rPr lang="en-US" b="1">
+                <a:solidFill>
+                  <a:srgbClr val="FF0000"/>
+                </a:solidFill>
+              </a:rPr>
+              <a:t>with Sales and Marketing Team</a:t>
+            </a:r>
+          </a:p>
+        </p:txBody>
+      </p:sp>
+    </p:spTree>
+    <p:extLst>
+      <p:ext uri="{BB962C8B-B14F-4D97-AF65-F5344CB8AC3E}">
+        <p14:creationId xmlns:p14="http://schemas.microsoft.com/office/powerpoint/2010/main" val="2539886884"/>
       </p:ext>
     </p:extLst>
   </p:cSld>

--- a/Marketing.pptx
+++ b/Marketing.pptx
@@ -204,7 +204,7 @@
           </a:lstStyle>
           <a:p>
             <a:fld id="{610AF671-4685-124D-A41D-446D235EA8CE}" type="datetimeFigureOut">
-              <a:t>9/13/22</a:t>
+              <a:t>9/16/22</a:t>
             </a:fld>
             <a:endParaRPr lang="en-US"/>
           </a:p>
@@ -701,7 +701,7 @@
           <a:p>
             <a:fld id="{2D90B581-06C6-5A4B-9E30-3EAD5667F4B3}" type="datetimeFigureOut">
               <a:rPr lang="en-US" smtClean="0"/>
-              <a:t>9/13/22</a:t>
+              <a:t>9/16/22</a:t>
             </a:fld>
             <a:endParaRPr lang="en-US"/>
           </a:p>
@@ -899,7 +899,7 @@
           <a:p>
             <a:fld id="{2D90B581-06C6-5A4B-9E30-3EAD5667F4B3}" type="datetimeFigureOut">
               <a:rPr lang="en-US" smtClean="0"/>
-              <a:t>9/13/22</a:t>
+              <a:t>9/16/22</a:t>
             </a:fld>
             <a:endParaRPr lang="en-US"/>
           </a:p>
@@ -1107,7 +1107,7 @@
           <a:p>
             <a:fld id="{2D90B581-06C6-5A4B-9E30-3EAD5667F4B3}" type="datetimeFigureOut">
               <a:rPr lang="en-US" smtClean="0"/>
-              <a:t>9/13/22</a:t>
+              <a:t>9/16/22</a:t>
             </a:fld>
             <a:endParaRPr lang="en-US"/>
           </a:p>
@@ -1305,7 +1305,7 @@
           <a:p>
             <a:fld id="{2D90B581-06C6-5A4B-9E30-3EAD5667F4B3}" type="datetimeFigureOut">
               <a:rPr lang="en-US" smtClean="0"/>
-              <a:t>9/13/22</a:t>
+              <a:t>9/16/22</a:t>
             </a:fld>
             <a:endParaRPr lang="en-US"/>
           </a:p>
@@ -1580,7 +1580,7 @@
           <a:p>
             <a:fld id="{2D90B581-06C6-5A4B-9E30-3EAD5667F4B3}" type="datetimeFigureOut">
               <a:rPr lang="en-US" smtClean="0"/>
-              <a:t>9/13/22</a:t>
+              <a:t>9/16/22</a:t>
             </a:fld>
             <a:endParaRPr lang="en-US"/>
           </a:p>
@@ -1845,7 +1845,7 @@
           <a:p>
             <a:fld id="{2D90B581-06C6-5A4B-9E30-3EAD5667F4B3}" type="datetimeFigureOut">
               <a:rPr lang="en-US" smtClean="0"/>
-              <a:t>9/13/22</a:t>
+              <a:t>9/16/22</a:t>
             </a:fld>
             <a:endParaRPr lang="en-US"/>
           </a:p>
@@ -2257,7 +2257,7 @@
           <a:p>
             <a:fld id="{2D90B581-06C6-5A4B-9E30-3EAD5667F4B3}" type="datetimeFigureOut">
               <a:rPr lang="en-US" smtClean="0"/>
-              <a:t>9/13/22</a:t>
+              <a:t>9/16/22</a:t>
             </a:fld>
             <a:endParaRPr lang="en-US"/>
           </a:p>
@@ -2398,7 +2398,7 @@
           <a:p>
             <a:fld id="{2D90B581-06C6-5A4B-9E30-3EAD5667F4B3}" type="datetimeFigureOut">
               <a:rPr lang="en-US" smtClean="0"/>
-              <a:t>9/13/22</a:t>
+              <a:t>9/16/22</a:t>
             </a:fld>
             <a:endParaRPr lang="en-US"/>
           </a:p>
@@ -2511,7 +2511,7 @@
           <a:p>
             <a:fld id="{2D90B581-06C6-5A4B-9E30-3EAD5667F4B3}" type="datetimeFigureOut">
               <a:rPr lang="en-US" smtClean="0"/>
-              <a:t>9/13/22</a:t>
+              <a:t>9/16/22</a:t>
             </a:fld>
             <a:endParaRPr lang="en-US"/>
           </a:p>
@@ -2822,7 +2822,7 @@
           <a:p>
             <a:fld id="{2D90B581-06C6-5A4B-9E30-3EAD5667F4B3}" type="datetimeFigureOut">
               <a:rPr lang="en-US" smtClean="0"/>
-              <a:t>9/13/22</a:t>
+              <a:t>9/16/22</a:t>
             </a:fld>
             <a:endParaRPr lang="en-US"/>
           </a:p>
@@ -3110,7 +3110,7 @@
           <a:p>
             <a:fld id="{2D90B581-06C6-5A4B-9E30-3EAD5667F4B3}" type="datetimeFigureOut">
               <a:rPr lang="en-US" smtClean="0"/>
-              <a:t>9/13/22</a:t>
+              <a:t>9/16/22</a:t>
             </a:fld>
             <a:endParaRPr lang="en-US"/>
           </a:p>
@@ -3351,7 +3351,7 @@
           <a:p>
             <a:fld id="{2D90B581-06C6-5A4B-9E30-3EAD5667F4B3}" type="datetimeFigureOut">
               <a:rPr lang="en-US" smtClean="0"/>
-              <a:t>9/13/22</a:t>
+              <a:t>9/16/22</a:t>
             </a:fld>
             <a:endParaRPr lang="en-US"/>
           </a:p>
@@ -6979,6 +6979,46 @@
                 </a:solidFill>
               </a:rPr>
               <a:t>Market</a:t>
+            </a:r>
+          </a:p>
+        </p:txBody>
+      </p:sp>
+      <p:sp>
+        <p:nvSpPr>
+          <p:cNvPr id="2" name="TextBox 1">
+            <a:extLst>
+              <a:ext uri="{FF2B5EF4-FFF2-40B4-BE49-F238E27FC236}">
+                <a16:creationId xmlns:a16="http://schemas.microsoft.com/office/drawing/2014/main" id="{C04F2F46-3AD2-CF63-8845-A9683602AB23}"/>
+              </a:ext>
+            </a:extLst>
+          </p:cNvPr>
+          <p:cNvSpPr txBox="1"/>
+          <p:nvPr/>
+        </p:nvSpPr>
+        <p:spPr>
+          <a:xfrm>
+            <a:off x="5625982" y="1333276"/>
+            <a:ext cx="2694432" cy="369332"/>
+          </a:xfrm>
+          <a:prstGeom prst="rect">
+            <a:avLst/>
+          </a:prstGeom>
+          <a:noFill/>
+        </p:spPr>
+        <p:txBody>
+          <a:bodyPr wrap="square" rtlCol="0">
+            <a:spAutoFit/>
+          </a:bodyPr>
+          <a:lstStyle/>
+          <a:p>
+            <a:pPr algn="ctr"/>
+            <a:r>
+              <a:rPr lang="en-US" b="1">
+                <a:solidFill>
+                  <a:srgbClr val="FF0000"/>
+                </a:solidFill>
+              </a:rPr>
+              <a:t>Who is Choosing Who ?</a:t>
             </a:r>
           </a:p>
         </p:txBody>

--- a/Marketing.pptx
+++ b/Marketing.pptx
@@ -5,7 +5,7 @@
     <p:sldMasterId id="2147483648" r:id="rId1"/>
   </p:sldMasterIdLst>
   <p:notesMasterIdLst>
-    <p:notesMasterId r:id="rId11"/>
+    <p:notesMasterId r:id="rId13"/>
   </p:notesMasterIdLst>
   <p:sldIdLst>
     <p:sldId id="287" r:id="rId2"/>
@@ -17,6 +17,8 @@
     <p:sldId id="291" r:id="rId8"/>
     <p:sldId id="293" r:id="rId9"/>
     <p:sldId id="295" r:id="rId10"/>
+    <p:sldId id="297" r:id="rId11"/>
+    <p:sldId id="298" r:id="rId12"/>
   </p:sldIdLst>
   <p:sldSz cx="12192000" cy="6858000"/>
   <p:notesSz cx="6858000" cy="9144000"/>
@@ -204,7 +206,7 @@
           </a:lstStyle>
           <a:p>
             <a:fld id="{610AF671-4685-124D-A41D-446D235EA8CE}" type="datetimeFigureOut">
-              <a:t>9/16/22</a:t>
+              <a:t>9/17/22</a:t>
             </a:fld>
             <a:endParaRPr lang="en-US"/>
           </a:p>
@@ -701,7 +703,7 @@
           <a:p>
             <a:fld id="{2D90B581-06C6-5A4B-9E30-3EAD5667F4B3}" type="datetimeFigureOut">
               <a:rPr lang="en-US" smtClean="0"/>
-              <a:t>9/16/22</a:t>
+              <a:t>9/17/22</a:t>
             </a:fld>
             <a:endParaRPr lang="en-US"/>
           </a:p>
@@ -899,7 +901,7 @@
           <a:p>
             <a:fld id="{2D90B581-06C6-5A4B-9E30-3EAD5667F4B3}" type="datetimeFigureOut">
               <a:rPr lang="en-US" smtClean="0"/>
-              <a:t>9/16/22</a:t>
+              <a:t>9/17/22</a:t>
             </a:fld>
             <a:endParaRPr lang="en-US"/>
           </a:p>
@@ -1107,7 +1109,7 @@
           <a:p>
             <a:fld id="{2D90B581-06C6-5A4B-9E30-3EAD5667F4B3}" type="datetimeFigureOut">
               <a:rPr lang="en-US" smtClean="0"/>
-              <a:t>9/16/22</a:t>
+              <a:t>9/17/22</a:t>
             </a:fld>
             <a:endParaRPr lang="en-US"/>
           </a:p>
@@ -1305,7 +1307,7 @@
           <a:p>
             <a:fld id="{2D90B581-06C6-5A4B-9E30-3EAD5667F4B3}" type="datetimeFigureOut">
               <a:rPr lang="en-US" smtClean="0"/>
-              <a:t>9/16/22</a:t>
+              <a:t>9/17/22</a:t>
             </a:fld>
             <a:endParaRPr lang="en-US"/>
           </a:p>
@@ -1580,7 +1582,7 @@
           <a:p>
             <a:fld id="{2D90B581-06C6-5A4B-9E30-3EAD5667F4B3}" type="datetimeFigureOut">
               <a:rPr lang="en-US" smtClean="0"/>
-              <a:t>9/16/22</a:t>
+              <a:t>9/17/22</a:t>
             </a:fld>
             <a:endParaRPr lang="en-US"/>
           </a:p>
@@ -1845,7 +1847,7 @@
           <a:p>
             <a:fld id="{2D90B581-06C6-5A4B-9E30-3EAD5667F4B3}" type="datetimeFigureOut">
               <a:rPr lang="en-US" smtClean="0"/>
-              <a:t>9/16/22</a:t>
+              <a:t>9/17/22</a:t>
             </a:fld>
             <a:endParaRPr lang="en-US"/>
           </a:p>
@@ -2257,7 +2259,7 @@
           <a:p>
             <a:fld id="{2D90B581-06C6-5A4B-9E30-3EAD5667F4B3}" type="datetimeFigureOut">
               <a:rPr lang="en-US" smtClean="0"/>
-              <a:t>9/16/22</a:t>
+              <a:t>9/17/22</a:t>
             </a:fld>
             <a:endParaRPr lang="en-US"/>
           </a:p>
@@ -2398,7 +2400,7 @@
           <a:p>
             <a:fld id="{2D90B581-06C6-5A4B-9E30-3EAD5667F4B3}" type="datetimeFigureOut">
               <a:rPr lang="en-US" smtClean="0"/>
-              <a:t>9/16/22</a:t>
+              <a:t>9/17/22</a:t>
             </a:fld>
             <a:endParaRPr lang="en-US"/>
           </a:p>
@@ -2511,7 +2513,7 @@
           <a:p>
             <a:fld id="{2D90B581-06C6-5A4B-9E30-3EAD5667F4B3}" type="datetimeFigureOut">
               <a:rPr lang="en-US" smtClean="0"/>
-              <a:t>9/16/22</a:t>
+              <a:t>9/17/22</a:t>
             </a:fld>
             <a:endParaRPr lang="en-US"/>
           </a:p>
@@ -2822,7 +2824,7 @@
           <a:p>
             <a:fld id="{2D90B581-06C6-5A4B-9E30-3EAD5667F4B3}" type="datetimeFigureOut">
               <a:rPr lang="en-US" smtClean="0"/>
-              <a:t>9/16/22</a:t>
+              <a:t>9/17/22</a:t>
             </a:fld>
             <a:endParaRPr lang="en-US"/>
           </a:p>
@@ -3110,7 +3112,7 @@
           <a:p>
             <a:fld id="{2D90B581-06C6-5A4B-9E30-3EAD5667F4B3}" type="datetimeFigureOut">
               <a:rPr lang="en-US" smtClean="0"/>
-              <a:t>9/16/22</a:t>
+              <a:t>9/17/22</a:t>
             </a:fld>
             <a:endParaRPr lang="en-US"/>
           </a:p>
@@ -3351,7 +3353,7 @@
           <a:p>
             <a:fld id="{2D90B581-06C6-5A4B-9E30-3EAD5667F4B3}" type="datetimeFigureOut">
               <a:rPr lang="en-US" smtClean="0"/>
-              <a:t>9/16/22</a:t>
+              <a:t>9/17/22</a:t>
             </a:fld>
             <a:endParaRPr lang="en-US"/>
           </a:p>
@@ -4274,6 +4276,1139 @@
 </p:sld>
 </file>
 
+<file path=ppt/slides/slide10.xml><?xml version="1.0" encoding="utf-8"?>
+<p:sld xmlns:a="http://schemas.openxmlformats.org/drawingml/2006/main" xmlns:r="http://schemas.openxmlformats.org/officeDocument/2006/relationships" xmlns:p="http://schemas.openxmlformats.org/presentationml/2006/main">
+  <p:cSld>
+    <p:spTree>
+      <p:nvGrpSpPr>
+        <p:cNvPr id="1" name=""/>
+        <p:cNvGrpSpPr/>
+        <p:nvPr/>
+      </p:nvGrpSpPr>
+      <p:grpSpPr>
+        <a:xfrm>
+          <a:off x="0" y="0"/>
+          <a:ext cx="0" cy="0"/>
+          <a:chOff x="0" y="0"/>
+          <a:chExt cx="0" cy="0"/>
+        </a:xfrm>
+      </p:grpSpPr>
+      <p:sp>
+        <p:nvSpPr>
+          <p:cNvPr id="2" name="TextBox 1">
+            <a:extLst>
+              <a:ext uri="{FF2B5EF4-FFF2-40B4-BE49-F238E27FC236}">
+                <a16:creationId xmlns:a16="http://schemas.microsoft.com/office/drawing/2014/main" id="{8E538E51-1DD2-3AF4-2361-38C71B255C41}"/>
+              </a:ext>
+            </a:extLst>
+          </p:cNvPr>
+          <p:cNvSpPr txBox="1"/>
+          <p:nvPr/>
+        </p:nvSpPr>
+        <p:spPr>
+          <a:xfrm>
+            <a:off x="0" y="0"/>
+            <a:ext cx="2345635" cy="523220"/>
+          </a:xfrm>
+          <a:prstGeom prst="rect">
+            <a:avLst/>
+          </a:prstGeom>
+          <a:noFill/>
+        </p:spPr>
+        <p:txBody>
+          <a:bodyPr wrap="square" rtlCol="0">
+            <a:spAutoFit/>
+          </a:bodyPr>
+          <a:lstStyle/>
+          <a:p>
+            <a:r>
+              <a:rPr lang="en-US" sz="2800" b="1"/>
+              <a:t>Gary Halbert</a:t>
+            </a:r>
+          </a:p>
+        </p:txBody>
+      </p:sp>
+      <p:sp>
+        <p:nvSpPr>
+          <p:cNvPr id="3" name="TextBox 2">
+            <a:extLst>
+              <a:ext uri="{FF2B5EF4-FFF2-40B4-BE49-F238E27FC236}">
+                <a16:creationId xmlns:a16="http://schemas.microsoft.com/office/drawing/2014/main" id="{5B1C5B59-21B8-110A-FDEE-88B4F7A74A8D}"/>
+              </a:ext>
+            </a:extLst>
+          </p:cNvPr>
+          <p:cNvSpPr txBox="1"/>
+          <p:nvPr/>
+        </p:nvSpPr>
+        <p:spPr>
+          <a:xfrm>
+            <a:off x="94047" y="1689281"/>
+            <a:ext cx="7948267" cy="5047536"/>
+          </a:xfrm>
+          <a:prstGeom prst="rect">
+            <a:avLst/>
+          </a:prstGeom>
+          <a:solidFill>
+            <a:schemeClr val="accent4">
+              <a:lumMod val="20000"/>
+              <a:lumOff val="80000"/>
+            </a:schemeClr>
+          </a:solidFill>
+          <a:ln>
+            <a:solidFill>
+              <a:srgbClr val="FF0000"/>
+            </a:solidFill>
+          </a:ln>
+        </p:spPr>
+        <p:txBody>
+          <a:bodyPr wrap="square" rtlCol="0">
+            <a:spAutoFit/>
+          </a:bodyPr>
+          <a:lstStyle/>
+          <a:p>
+            <a:pPr marL="285750" indent="-285750">
+              <a:buFont typeface="Arial" panose="020B0604020202020204" pitchFamily="34" charset="0"/>
+              <a:buChar char="•"/>
+            </a:pPr>
+            <a:r>
+              <a:rPr lang="en-US" sz="1400"/>
+              <a:t>Principle 1 - </a:t>
+            </a:r>
+            <a:r>
+              <a:rPr lang="en-US" sz="1400" b="1">
+                <a:solidFill>
+                  <a:srgbClr val="00B050"/>
+                </a:solidFill>
+              </a:rPr>
+              <a:t>Any Problem in the world can be solved with the RIGHT sales letter.</a:t>
+            </a:r>
+            <a:r>
+              <a:rPr lang="en-US" sz="1400"/>
+              <a:t> </a:t>
+            </a:r>
+            <a:br>
+              <a:rPr lang="en-US" sz="1400"/>
+            </a:br>
+            <a:r>
+              <a:rPr lang="en-US" sz="1400"/>
+              <a:t>Copy = oxygen of marketing. Without good copy, there is no good marketing. </a:t>
+            </a:r>
+            <a:br>
+              <a:rPr lang="en-US" sz="1400"/>
+            </a:br>
+            <a:r>
+              <a:rPr lang="en-US" sz="1400"/>
+              <a:t>Job of marketing – building trust.</a:t>
+            </a:r>
+          </a:p>
+          <a:p>
+            <a:pPr marL="285750" indent="-285750">
+              <a:buFont typeface="Arial" panose="020B0604020202020204" pitchFamily="34" charset="0"/>
+              <a:buChar char="•"/>
+            </a:pPr>
+            <a:r>
+              <a:rPr lang="en-US" sz="1400"/>
+              <a:t>Principle 2 - </a:t>
+            </a:r>
+            <a:r>
+              <a:rPr lang="en-US" sz="1400" b="1">
+                <a:solidFill>
+                  <a:srgbClr val="00B050"/>
+                </a:solidFill>
+              </a:rPr>
+              <a:t>One elegant idea is worth more than 1000 semi-good ideas.</a:t>
+            </a:r>
+            <a:r>
+              <a:rPr lang="en-US" sz="1400"/>
+              <a:t> Idea of sales letter: "Can and copy yourself". "The best way to help the poor is to not be one of them"</a:t>
+            </a:r>
+          </a:p>
+          <a:p>
+            <a:pPr marL="285750" indent="-285750">
+              <a:buFont typeface="Arial" panose="020B0604020202020204" pitchFamily="34" charset="0"/>
+              <a:buChar char="•"/>
+            </a:pPr>
+            <a:r>
+              <a:rPr lang="en-US" sz="1400"/>
+              <a:t>Principle 3 - The money is not in your service or product, </a:t>
+            </a:r>
+            <a:r>
+              <a:rPr lang="en-US" sz="1400" b="1">
+                <a:solidFill>
+                  <a:srgbClr val="00B050"/>
+                </a:solidFill>
+              </a:rPr>
+              <a:t>the money is in selling the service or product</a:t>
+            </a:r>
+            <a:r>
+              <a:rPr lang="en-US" sz="1400"/>
+              <a:t>. Definition of Selling: "</a:t>
+            </a:r>
+            <a:r>
+              <a:rPr lang="en-US" sz="1400">
+                <a:solidFill>
+                  <a:srgbClr val="00B0F0"/>
+                </a:solidFill>
+              </a:rPr>
+              <a:t>Getting someone intellectually engaged in a future result that is good for them and getting them to emotionally commit action to achieve that result" (Dan Sullivan)</a:t>
+            </a:r>
+            <a:r>
+              <a:rPr lang="en-US" sz="1400"/>
+              <a:t>. Ethical marketing related to "good for them" in this definition.</a:t>
+            </a:r>
+          </a:p>
+          <a:p>
+            <a:pPr marL="285750" indent="-285750">
+              <a:buFont typeface="Arial" panose="020B0604020202020204" pitchFamily="34" charset="0"/>
+              <a:buChar char="•"/>
+            </a:pPr>
+            <a:r>
+              <a:rPr lang="en-US" sz="1400"/>
+              <a:t>Principle 4 - </a:t>
+            </a:r>
+            <a:r>
+              <a:rPr lang="en-US" sz="1400" b="1">
+                <a:solidFill>
+                  <a:srgbClr val="00B050"/>
+                </a:solidFill>
+              </a:rPr>
+              <a:t>Add Theatre to your Marketing</a:t>
+            </a:r>
+            <a:r>
+              <a:rPr lang="en-US" sz="1400"/>
+              <a:t>. Examples of Theatre: Theatre is impact, 24 h free recorded message at the end of a book, Flip videos, Adding celebrities and audio to your marketing, Grabbers, Photos, sense of urgency, involvement mechanisms (all automated).</a:t>
+            </a:r>
+          </a:p>
+          <a:p>
+            <a:pPr marL="285750" indent="-285750">
+              <a:buFont typeface="Arial" panose="020B0604020202020204" pitchFamily="34" charset="0"/>
+              <a:buChar char="•"/>
+            </a:pPr>
+            <a:r>
+              <a:rPr lang="en-US" sz="1400"/>
+              <a:t>Principle 5 - </a:t>
+            </a:r>
+            <a:r>
+              <a:rPr lang="en-US" sz="1400" b="1">
+                <a:solidFill>
+                  <a:srgbClr val="00B050"/>
+                </a:solidFill>
+              </a:rPr>
+              <a:t>Do not worry about offending the dogs when you are targeting the foxes</a:t>
+            </a:r>
+            <a:r>
+              <a:rPr lang="en-US" sz="1400"/>
+              <a:t>. Hype used ethically. </a:t>
+            </a:r>
+            <a:r>
+              <a:rPr lang="en-US" sz="1400" b="1">
+                <a:solidFill>
+                  <a:srgbClr val="00B050"/>
+                </a:solidFill>
+              </a:rPr>
+              <a:t>Massive enthusiasm</a:t>
+            </a:r>
+            <a:r>
+              <a:rPr lang="en-US" sz="1400"/>
+              <a:t> for what you are selling. Hype used unethically, lying or bullshitting.</a:t>
+            </a:r>
+          </a:p>
+          <a:p>
+            <a:pPr marL="285750" indent="-285750">
+              <a:buFont typeface="Arial" panose="020B0604020202020204" pitchFamily="34" charset="0"/>
+              <a:buChar char="•"/>
+            </a:pPr>
+            <a:r>
+              <a:rPr lang="en-US" sz="1400"/>
+              <a:t>Principle 6 - What you need the most is a </a:t>
+            </a:r>
+            <a:r>
+              <a:rPr lang="en-US" sz="1400" b="1">
+                <a:solidFill>
+                  <a:srgbClr val="00B050"/>
+                </a:solidFill>
+              </a:rPr>
+              <a:t>hungry crowd</a:t>
+            </a:r>
+            <a:r>
+              <a:rPr lang="en-US" sz="1400"/>
+              <a:t>. </a:t>
+            </a:r>
+            <a:r>
+              <a:rPr lang="en-US" sz="1400" b="1">
+                <a:solidFill>
+                  <a:srgbClr val="00B050"/>
+                </a:solidFill>
+              </a:rPr>
+              <a:t>Hamburger stand story</a:t>
+            </a:r>
+            <a:r>
+              <a:rPr lang="en-US" sz="1400"/>
+              <a:t>. Generate hungry leads.</a:t>
+            </a:r>
+          </a:p>
+          <a:p>
+            <a:pPr marL="285750" indent="-285750">
+              <a:buFont typeface="Arial" panose="020B0604020202020204" pitchFamily="34" charset="0"/>
+              <a:buChar char="•"/>
+            </a:pPr>
+            <a:r>
+              <a:rPr lang="en-US" sz="1400"/>
+              <a:t>Principle 7 - You are in the </a:t>
+            </a:r>
+            <a:r>
+              <a:rPr lang="en-US" sz="1400" b="1">
+                <a:solidFill>
+                  <a:srgbClr val="00B050"/>
+                </a:solidFill>
+              </a:rPr>
+              <a:t>arithmetic business</a:t>
+            </a:r>
+            <a:r>
+              <a:rPr lang="en-US" sz="1400"/>
+              <a:t>. </a:t>
+            </a:r>
+            <a:br>
+              <a:rPr lang="en-US" sz="1400"/>
+            </a:br>
+            <a:r>
+              <a:rPr lang="en-US" sz="1400"/>
+              <a:t>It is much easier to sell one $50,000 project than hundred $500 units.</a:t>
+            </a:r>
+          </a:p>
+          <a:p>
+            <a:pPr marL="285750" indent="-285750">
+              <a:buFont typeface="Arial" panose="020B0604020202020204" pitchFamily="34" charset="0"/>
+              <a:buChar char="•"/>
+            </a:pPr>
+            <a:r>
+              <a:rPr lang="en-US" sz="1400"/>
+              <a:t>Educated consumers are far more powerful than un-educated consumers. </a:t>
+            </a:r>
+            <a:br>
+              <a:rPr lang="en-US" sz="1400"/>
+            </a:br>
+            <a:r>
+              <a:rPr lang="en-US" sz="1400"/>
+              <a:t>Consumer guide to carpet cleaning educates consumer and builds trust into your brand. </a:t>
+            </a:r>
+          </a:p>
+          <a:p>
+            <a:pPr marL="285750" indent="-285750">
+              <a:buFont typeface="Arial" panose="020B0604020202020204" pitchFamily="34" charset="0"/>
+              <a:buChar char="•"/>
+            </a:pPr>
+            <a:r>
+              <a:rPr lang="en-US" sz="1400"/>
+              <a:t>Benefit of using 24h free recorded messages. </a:t>
+            </a:r>
+          </a:p>
+          <a:p>
+            <a:pPr marL="285750" indent="-285750">
+              <a:buFont typeface="Arial" panose="020B0604020202020204" pitchFamily="34" charset="0"/>
+              <a:buChar char="•"/>
+            </a:pPr>
+            <a:r>
+              <a:rPr lang="en-US" sz="1400"/>
+              <a:t>Three things needed to sell: Product or service, Sales pitch, Delivery system</a:t>
+            </a:r>
+          </a:p>
+          <a:p>
+            <a:pPr marL="285750" indent="-285750">
+              <a:buFont typeface="Arial" panose="020B0604020202020204" pitchFamily="34" charset="0"/>
+              <a:buChar char="•"/>
+            </a:pPr>
+            <a:r>
+              <a:rPr lang="en-US" sz="1400"/>
+              <a:t>Everyone is an information marketer</a:t>
+            </a:r>
+          </a:p>
+        </p:txBody>
+      </p:sp>
+      <p:pic>
+        <p:nvPicPr>
+          <p:cNvPr id="4" name="Picture 3">
+            <a:extLst>
+              <a:ext uri="{FF2B5EF4-FFF2-40B4-BE49-F238E27FC236}">
+                <a16:creationId xmlns:a16="http://schemas.microsoft.com/office/drawing/2014/main" id="{A47E055E-65D5-D285-468D-89A787EF8990}"/>
+              </a:ext>
+            </a:extLst>
+          </p:cNvPr>
+          <p:cNvPicPr>
+            <a:picLocks noChangeAspect="1"/>
+          </p:cNvPicPr>
+          <p:nvPr/>
+        </p:nvPicPr>
+        <p:blipFill>
+          <a:blip r:embed="rId2" cstate="email">
+            <a:extLst>
+              <a:ext uri="{28A0092B-C50C-407E-A947-70E740481C1C}">
+                <a14:useLocalDpi xmlns:a14="http://schemas.microsoft.com/office/drawing/2010/main"/>
+              </a:ext>
+            </a:extLst>
+          </a:blip>
+          <a:stretch>
+            <a:fillRect/>
+          </a:stretch>
+        </p:blipFill>
+        <p:spPr>
+          <a:xfrm>
+            <a:off x="8135077" y="96355"/>
+            <a:ext cx="3983736" cy="2073303"/>
+          </a:xfrm>
+          <a:prstGeom prst="rect">
+            <a:avLst/>
+          </a:prstGeom>
+        </p:spPr>
+      </p:pic>
+      <p:sp>
+        <p:nvSpPr>
+          <p:cNvPr id="5" name="TextBox 4">
+            <a:extLst>
+              <a:ext uri="{FF2B5EF4-FFF2-40B4-BE49-F238E27FC236}">
+                <a16:creationId xmlns:a16="http://schemas.microsoft.com/office/drawing/2014/main" id="{14F1FAC0-36F9-C232-F2EA-D7E211726338}"/>
+              </a:ext>
+            </a:extLst>
+          </p:cNvPr>
+          <p:cNvSpPr txBox="1"/>
+          <p:nvPr/>
+        </p:nvSpPr>
+        <p:spPr>
+          <a:xfrm>
+            <a:off x="8113043" y="2210091"/>
+            <a:ext cx="3983736" cy="738664"/>
+          </a:xfrm>
+          <a:prstGeom prst="rect">
+            <a:avLst/>
+          </a:prstGeom>
+          <a:noFill/>
+        </p:spPr>
+        <p:txBody>
+          <a:bodyPr wrap="square" rtlCol="0">
+            <a:spAutoFit/>
+          </a:bodyPr>
+          <a:lstStyle/>
+          <a:p>
+            <a:r>
+              <a:rPr lang="en-US" sz="1400"/>
+              <a:t>Joe Polish Presentation on Gary Halbert</a:t>
+            </a:r>
+            <a:br>
+              <a:rPr lang="en-US" sz="1400"/>
+            </a:br>
+            <a:r>
+              <a:rPr lang="en-US" sz="1400"/>
+              <a:t>Video from Dan Kennedy SuperConference</a:t>
+            </a:r>
+          </a:p>
+          <a:p>
+            <a:r>
+              <a:rPr lang="en-US" sz="1400">
+                <a:hlinkClick r:id="rId3"/>
+              </a:rPr>
+              <a:t>https://www.youtube.com/watch?v=q4WotUTjLJY</a:t>
+            </a:r>
+            <a:endParaRPr lang="en-US" sz="1400"/>
+          </a:p>
+        </p:txBody>
+      </p:sp>
+      <p:pic>
+        <p:nvPicPr>
+          <p:cNvPr id="1026" name="Picture 2" descr="Nothing is Impossible for a Man Who Refuses to Listen to Reason by Gary  Halbert | Great quotes, Quotes, Motivation">
+            <a:extLst>
+              <a:ext uri="{FF2B5EF4-FFF2-40B4-BE49-F238E27FC236}">
+                <a16:creationId xmlns:a16="http://schemas.microsoft.com/office/drawing/2014/main" id="{9E229CDA-0066-D84D-8828-19A72DB38A7A}"/>
+              </a:ext>
+            </a:extLst>
+          </p:cNvPr>
+          <p:cNvPicPr>
+            <a:picLocks noChangeAspect="1" noChangeArrowheads="1"/>
+          </p:cNvPicPr>
+          <p:nvPr/>
+        </p:nvPicPr>
+        <p:blipFill rotWithShape="1">
+          <a:blip r:embed="rId4" cstate="email">
+            <a:extLst>
+              <a:ext uri="{28A0092B-C50C-407E-A947-70E740481C1C}">
+                <a14:useLocalDpi xmlns:a14="http://schemas.microsoft.com/office/drawing/2010/main"/>
+              </a:ext>
+            </a:extLst>
+          </a:blip>
+          <a:srcRect/>
+          <a:stretch/>
+        </p:blipFill>
+        <p:spPr bwMode="auto">
+          <a:xfrm>
+            <a:off x="9384162" y="5065776"/>
+            <a:ext cx="1510019" cy="1724317"/>
+          </a:xfrm>
+          <a:prstGeom prst="rect">
+            <a:avLst/>
+          </a:prstGeom>
+          <a:noFill/>
+          <a:extLst>
+            <a:ext uri="{909E8E84-426E-40DD-AFC4-6F175D3DCCD1}">
+              <a14:hiddenFill xmlns:a14="http://schemas.microsoft.com/office/drawing/2010/main">
+                <a:solidFill>
+                  <a:srgbClr val="FFFFFF"/>
+                </a:solidFill>
+              </a14:hiddenFill>
+            </a:ext>
+          </a:extLst>
+        </p:spPr>
+      </p:pic>
+      <p:pic>
+        <p:nvPicPr>
+          <p:cNvPr id="1028" name="Picture 4" descr="The One Advantage">
+            <a:extLst>
+              <a:ext uri="{FF2B5EF4-FFF2-40B4-BE49-F238E27FC236}">
+                <a16:creationId xmlns:a16="http://schemas.microsoft.com/office/drawing/2014/main" id="{D9C08114-13C7-A111-99C6-E9DAB5DDB2C3}"/>
+              </a:ext>
+            </a:extLst>
+          </p:cNvPr>
+          <p:cNvPicPr>
+            <a:picLocks noChangeAspect="1" noChangeArrowheads="1"/>
+          </p:cNvPicPr>
+          <p:nvPr/>
+        </p:nvPicPr>
+        <p:blipFill>
+          <a:blip r:embed="rId5" cstate="email">
+            <a:extLst>
+              <a:ext uri="{28A0092B-C50C-407E-A947-70E740481C1C}">
+                <a14:useLocalDpi xmlns:a14="http://schemas.microsoft.com/office/drawing/2010/main"/>
+              </a:ext>
+            </a:extLst>
+          </a:blip>
+          <a:srcRect/>
+          <a:stretch>
+            <a:fillRect/>
+          </a:stretch>
+        </p:blipFill>
+        <p:spPr bwMode="auto">
+          <a:xfrm>
+            <a:off x="4263528" y="96355"/>
+            <a:ext cx="3778786" cy="944697"/>
+          </a:xfrm>
+          <a:prstGeom prst="rect">
+            <a:avLst/>
+          </a:prstGeom>
+          <a:noFill/>
+          <a:extLst>
+            <a:ext uri="{909E8E84-426E-40DD-AFC4-6F175D3DCCD1}">
+              <a14:hiddenFill xmlns:a14="http://schemas.microsoft.com/office/drawing/2010/main">
+                <a:solidFill>
+                  <a:srgbClr val="FFFFFF"/>
+                </a:solidFill>
+              </a14:hiddenFill>
+            </a:ext>
+          </a:extLst>
+        </p:spPr>
+      </p:pic>
+      <p:pic>
+        <p:nvPicPr>
+          <p:cNvPr id="1030" name="Picture 6" descr="Marketing Tips From The Late, Great Gary Halbert">
+            <a:extLst>
+              <a:ext uri="{FF2B5EF4-FFF2-40B4-BE49-F238E27FC236}">
+                <a16:creationId xmlns:a16="http://schemas.microsoft.com/office/drawing/2014/main" id="{F9D9D09D-055C-FB65-B3C1-8535279974B3}"/>
+              </a:ext>
+            </a:extLst>
+          </p:cNvPr>
+          <p:cNvPicPr>
+            <a:picLocks noChangeAspect="1" noChangeArrowheads="1"/>
+          </p:cNvPicPr>
+          <p:nvPr/>
+        </p:nvPicPr>
+        <p:blipFill>
+          <a:blip r:embed="rId6" cstate="email">
+            <a:extLst>
+              <a:ext uri="{28A0092B-C50C-407E-A947-70E740481C1C}">
+                <a14:useLocalDpi xmlns:a14="http://schemas.microsoft.com/office/drawing/2010/main"/>
+              </a:ext>
+            </a:extLst>
+          </a:blip>
+          <a:srcRect/>
+          <a:stretch>
+            <a:fillRect/>
+          </a:stretch>
+        </p:blipFill>
+        <p:spPr bwMode="auto">
+          <a:xfrm>
+            <a:off x="8680850" y="3346704"/>
+            <a:ext cx="2904972" cy="1542640"/>
+          </a:xfrm>
+          <a:prstGeom prst="rect">
+            <a:avLst/>
+          </a:prstGeom>
+          <a:noFill/>
+          <a:extLst>
+            <a:ext uri="{909E8E84-426E-40DD-AFC4-6F175D3DCCD1}">
+              <a14:hiddenFill xmlns:a14="http://schemas.microsoft.com/office/drawing/2010/main">
+                <a:solidFill>
+                  <a:srgbClr val="FFFFFF"/>
+                </a:solidFill>
+              </a14:hiddenFill>
+            </a:ext>
+          </a:extLst>
+        </p:spPr>
+      </p:pic>
+      <p:sp>
+        <p:nvSpPr>
+          <p:cNvPr id="6" name="TextBox 5">
+            <a:extLst>
+              <a:ext uri="{FF2B5EF4-FFF2-40B4-BE49-F238E27FC236}">
+                <a16:creationId xmlns:a16="http://schemas.microsoft.com/office/drawing/2014/main" id="{C5069512-0210-61F9-9DA1-784793C438E8}"/>
+              </a:ext>
+            </a:extLst>
+          </p:cNvPr>
+          <p:cNvSpPr txBox="1"/>
+          <p:nvPr/>
+        </p:nvSpPr>
+        <p:spPr>
+          <a:xfrm>
+            <a:off x="94047" y="523220"/>
+            <a:ext cx="2251588" cy="954107"/>
+          </a:xfrm>
+          <a:prstGeom prst="rect">
+            <a:avLst/>
+          </a:prstGeom>
+          <a:noFill/>
+        </p:spPr>
+        <p:txBody>
+          <a:bodyPr wrap="square" rtlCol="0">
+            <a:spAutoFit/>
+          </a:bodyPr>
+          <a:lstStyle/>
+          <a:p>
+            <a:r>
+              <a:rPr lang="en-US" sz="1400"/>
+              <a:t>June 12, 1938 - April 8, 2007</a:t>
+            </a:r>
+          </a:p>
+          <a:p>
+            <a:pPr marL="285750" indent="-285750">
+              <a:buFont typeface="Arial" panose="020B0604020202020204" pitchFamily="34" charset="0"/>
+              <a:buChar char="•"/>
+            </a:pPr>
+            <a:r>
+              <a:rPr lang="en-US" sz="1400"/>
+              <a:t>copywriter</a:t>
+            </a:r>
+          </a:p>
+          <a:p>
+            <a:pPr marL="285750" indent="-285750">
+              <a:buFont typeface="Arial" panose="020B0604020202020204" pitchFamily="34" charset="0"/>
+              <a:buChar char="•"/>
+            </a:pPr>
+            <a:r>
+              <a:rPr lang="en-US" sz="1400"/>
+              <a:t>direct marketer</a:t>
+            </a:r>
+          </a:p>
+          <a:p>
+            <a:pPr marL="285750" indent="-285750">
+              <a:buFont typeface="Arial" panose="020B0604020202020204" pitchFamily="34" charset="0"/>
+              <a:buChar char="•"/>
+            </a:pPr>
+            <a:r>
+              <a:rPr lang="en-US" sz="1400"/>
+              <a:t>educator</a:t>
+            </a:r>
+          </a:p>
+        </p:txBody>
+      </p:sp>
+      <p:pic>
+        <p:nvPicPr>
+          <p:cNvPr id="7" name="Picture 6">
+            <a:extLst>
+              <a:ext uri="{FF2B5EF4-FFF2-40B4-BE49-F238E27FC236}">
+                <a16:creationId xmlns:a16="http://schemas.microsoft.com/office/drawing/2014/main" id="{A335604A-EC38-F1D3-5AB3-CD9F50063D36}"/>
+              </a:ext>
+            </a:extLst>
+          </p:cNvPr>
+          <p:cNvPicPr>
+            <a:picLocks noChangeAspect="1"/>
+          </p:cNvPicPr>
+          <p:nvPr/>
+        </p:nvPicPr>
+        <p:blipFill>
+          <a:blip r:embed="rId7" cstate="email">
+            <a:extLst>
+              <a:ext uri="{28A0092B-C50C-407E-A947-70E740481C1C}">
+                <a14:useLocalDpi xmlns:a14="http://schemas.microsoft.com/office/drawing/2010/main"/>
+              </a:ext>
+            </a:extLst>
+          </a:blip>
+          <a:stretch>
+            <a:fillRect/>
+          </a:stretch>
+        </p:blipFill>
+        <p:spPr>
+          <a:xfrm>
+            <a:off x="2571601" y="96355"/>
+            <a:ext cx="1306335" cy="1414476"/>
+          </a:xfrm>
+          <a:prstGeom prst="rect">
+            <a:avLst/>
+          </a:prstGeom>
+        </p:spPr>
+      </p:pic>
+    </p:spTree>
+    <p:extLst>
+      <p:ext uri="{BB962C8B-B14F-4D97-AF65-F5344CB8AC3E}">
+        <p14:creationId xmlns:p14="http://schemas.microsoft.com/office/powerpoint/2010/main" val="1818587326"/>
+      </p:ext>
+    </p:extLst>
+  </p:cSld>
+  <p:clrMapOvr>
+    <a:masterClrMapping/>
+  </p:clrMapOvr>
+</p:sld>
+</file>
+
+<file path=ppt/slides/slide11.xml><?xml version="1.0" encoding="utf-8"?>
+<p:sld xmlns:a="http://schemas.openxmlformats.org/drawingml/2006/main" xmlns:r="http://schemas.openxmlformats.org/officeDocument/2006/relationships" xmlns:p="http://schemas.openxmlformats.org/presentationml/2006/main">
+  <p:cSld>
+    <p:spTree>
+      <p:nvGrpSpPr>
+        <p:cNvPr id="1" name=""/>
+        <p:cNvGrpSpPr/>
+        <p:nvPr/>
+      </p:nvGrpSpPr>
+      <p:grpSpPr>
+        <a:xfrm>
+          <a:off x="0" y="0"/>
+          <a:ext cx="0" cy="0"/>
+          <a:chOff x="0" y="0"/>
+          <a:chExt cx="0" cy="0"/>
+        </a:xfrm>
+      </p:grpSpPr>
+      <p:sp>
+        <p:nvSpPr>
+          <p:cNvPr id="2" name="TextBox 1">
+            <a:extLst>
+              <a:ext uri="{FF2B5EF4-FFF2-40B4-BE49-F238E27FC236}">
+                <a16:creationId xmlns:a16="http://schemas.microsoft.com/office/drawing/2014/main" id="{E7CC9C75-CF62-026D-FF10-25CD332D5AA7}"/>
+              </a:ext>
+            </a:extLst>
+          </p:cNvPr>
+          <p:cNvSpPr txBox="1"/>
+          <p:nvPr/>
+        </p:nvSpPr>
+        <p:spPr>
+          <a:xfrm>
+            <a:off x="0" y="0"/>
+            <a:ext cx="2500829" cy="523220"/>
+          </a:xfrm>
+          <a:prstGeom prst="rect">
+            <a:avLst/>
+          </a:prstGeom>
+          <a:noFill/>
+        </p:spPr>
+        <p:txBody>
+          <a:bodyPr wrap="square" rtlCol="0">
+            <a:spAutoFit/>
+          </a:bodyPr>
+          <a:lstStyle/>
+          <a:p>
+            <a:r>
+              <a:rPr lang="en-US" sz="2800" b="1"/>
+              <a:t>Jay Abraham</a:t>
+            </a:r>
+          </a:p>
+        </p:txBody>
+      </p:sp>
+      <p:sp>
+        <p:nvSpPr>
+          <p:cNvPr id="3" name="TextBox 2">
+            <a:extLst>
+              <a:ext uri="{FF2B5EF4-FFF2-40B4-BE49-F238E27FC236}">
+                <a16:creationId xmlns:a16="http://schemas.microsoft.com/office/drawing/2014/main" id="{A6AFE783-53A3-3F79-15D0-8D1A01029D98}"/>
+              </a:ext>
+            </a:extLst>
+          </p:cNvPr>
+          <p:cNvSpPr txBox="1"/>
+          <p:nvPr/>
+        </p:nvSpPr>
+        <p:spPr>
+          <a:xfrm>
+            <a:off x="4194563" y="261610"/>
+            <a:ext cx="7736705" cy="6340197"/>
+          </a:xfrm>
+          <a:prstGeom prst="rect">
+            <a:avLst/>
+          </a:prstGeom>
+          <a:solidFill>
+            <a:schemeClr val="accent4">
+              <a:lumMod val="20000"/>
+              <a:lumOff val="80000"/>
+            </a:schemeClr>
+          </a:solidFill>
+          <a:ln>
+            <a:solidFill>
+              <a:srgbClr val="FF0000"/>
+            </a:solidFill>
+          </a:ln>
+        </p:spPr>
+        <p:txBody>
+          <a:bodyPr wrap="square" rtlCol="0">
+            <a:spAutoFit/>
+          </a:bodyPr>
+          <a:lstStyle/>
+          <a:p>
+            <a:pPr marL="342900" indent="-342900">
+              <a:buFont typeface="+mj-lt"/>
+              <a:buAutoNum type="arabicPeriod"/>
+            </a:pPr>
+            <a:r>
+              <a:rPr lang="en-US" sz="1400"/>
+              <a:t>Become the trusted source, the leader in your industry. "Influencer marketing". Read "Speed of Trust".</a:t>
+            </a:r>
+          </a:p>
+          <a:p>
+            <a:pPr marL="342900" indent="-342900">
+              <a:buFont typeface="+mj-lt"/>
+              <a:buAutoNum type="arabicPeriod"/>
+            </a:pPr>
+            <a:r>
+              <a:rPr lang="en-US" sz="1400"/>
+              <a:t>The headline determines 80% of the success of any advertising campaign. </a:t>
+            </a:r>
+            <a:br>
+              <a:rPr lang="en-US" sz="1400"/>
+            </a:br>
+            <a:r>
+              <a:rPr lang="en-US" sz="1400"/>
+              <a:t>Split-test headlines on smaller scale. A/B split testing.</a:t>
+            </a:r>
+          </a:p>
+          <a:p>
+            <a:pPr marL="342900" indent="-342900">
+              <a:buFont typeface="+mj-lt"/>
+              <a:buAutoNum type="arabicPeriod"/>
+            </a:pPr>
+            <a:r>
+              <a:rPr lang="en-US" sz="1400"/>
+              <a:t>Use "word pictures", use power verbs and active voice. Address your clients directly and be firm and brief.</a:t>
+            </a:r>
+          </a:p>
+          <a:p>
+            <a:pPr marL="342900" indent="-342900">
+              <a:buFont typeface="+mj-lt"/>
+              <a:buAutoNum type="arabicPeriod"/>
+            </a:pPr>
+            <a:r>
+              <a:rPr lang="en-US" sz="1400"/>
+              <a:t>Become a performance optimizer. In every organization, you can find areas that are under-performing. Fix them first. This may cause dramatic improvement in the overall business process.</a:t>
+            </a:r>
+          </a:p>
+          <a:p>
+            <a:pPr marL="342900" indent="-342900">
+              <a:buFont typeface="+mj-lt"/>
+              <a:buAutoNum type="arabicPeriod"/>
+            </a:pPr>
+            <a:r>
+              <a:rPr lang="en-US" sz="1400"/>
+              <a:t>Use the Parthenon model of business success. Every business has its impact points – areas where you can achieve the most leverage. It could be your unique selling proposition, a special offer, or an effective marketing process. The idea is to identify, optimize and automatize these “columns” and ultimately build a solid Parthenon which will generate predictable income every month.</a:t>
+            </a:r>
+          </a:p>
+          <a:p>
+            <a:pPr marL="342900" indent="-342900">
+              <a:buFont typeface="+mj-lt"/>
+              <a:buAutoNum type="arabicPeriod"/>
+            </a:pPr>
+            <a:r>
+              <a:rPr lang="en-US" sz="1400"/>
+              <a:t>There’s always a space for true entrepreneurs. Even in saturated markets only ~10% of competitors truly know what they’re doing. The rest 90% is on their way out of the business.</a:t>
+            </a:r>
+          </a:p>
+          <a:p>
+            <a:pPr marL="342900" indent="-342900">
+              <a:buFont typeface="+mj-lt"/>
+              <a:buAutoNum type="arabicPeriod"/>
+            </a:pPr>
+            <a:r>
+              <a:rPr lang="en-US" sz="1400"/>
+              <a:t>Provide value every step of the way. "Anytime you interact with anybody for any amount of time, your opportunity, responsibility and obligation is to make their life better off because you are in it".</a:t>
+            </a:r>
+          </a:p>
+          <a:p>
+            <a:pPr marL="342900" indent="-342900">
+              <a:buFont typeface="+mj-lt"/>
+              <a:buAutoNum type="arabicPeriod"/>
+            </a:pPr>
+            <a:r>
+              <a:rPr lang="en-US" sz="1400"/>
+              <a:t>Think about what you’ve learned after every important conversation, every book you read, every presentation you give, every project and period of your life. Every mistake can be a learning opportunity.</a:t>
+            </a:r>
+          </a:p>
+          <a:p>
+            <a:pPr marL="342900" indent="-342900">
+              <a:buFont typeface="+mj-lt"/>
+              <a:buAutoNum type="arabicPeriod"/>
+            </a:pPr>
+            <a:r>
+              <a:rPr lang="en-US" sz="1400"/>
+              <a:t>Fall in love with your clients, not with your own product or company. Focus on helping. "enlightened self-interest".</a:t>
+            </a:r>
+          </a:p>
+          <a:p>
+            <a:pPr marL="342900" indent="-342900">
+              <a:buFont typeface="+mj-lt"/>
+              <a:buAutoNum type="arabicPeriod"/>
+            </a:pPr>
+            <a:r>
+              <a:rPr lang="en-US" sz="1400"/>
+              <a:t>Life is all about the process, not just goals. Enjoy the process. Live the life of fulfillment.</a:t>
+            </a:r>
+          </a:p>
+          <a:p>
+            <a:pPr marL="342900" indent="-342900">
+              <a:buFont typeface="+mj-lt"/>
+              <a:buAutoNum type="arabicPeriod"/>
+            </a:pPr>
+            <a:r>
+              <a:rPr lang="en-US" sz="1400"/>
+              <a:t>CARING is the key to success. Caring creates trust. Caring makes your clients happy and loyal. It’s amazing that in today’s competitive environment, only a few companies and individuals truly care about the people they serve. To crush in the marketplace always have your client’s best interest in mind. Think about how to make their buying experience so much better than it is right now.</a:t>
+            </a:r>
+          </a:p>
+          <a:p>
+            <a:pPr marL="342900" indent="-342900">
+              <a:buFont typeface="+mj-lt"/>
+              <a:buAutoNum type="arabicPeriod"/>
+            </a:pPr>
+            <a:r>
+              <a:rPr lang="en-US" sz="1400"/>
+              <a:t>Use the Amazon school of marketing. Understand the pulse of the market. Use web for market research. Go on Amazon and check the most successful products in your category, carefully read the reviews, try to understand what are the hidden needs of clients in your niche.</a:t>
+            </a:r>
+          </a:p>
+        </p:txBody>
+      </p:sp>
+      <p:sp>
+        <p:nvSpPr>
+          <p:cNvPr id="4" name="TextBox 3">
+            <a:extLst>
+              <a:ext uri="{FF2B5EF4-FFF2-40B4-BE49-F238E27FC236}">
+                <a16:creationId xmlns:a16="http://schemas.microsoft.com/office/drawing/2014/main" id="{59AAF046-91BB-BF72-B762-BFAF69FDC6F7}"/>
+              </a:ext>
+            </a:extLst>
+          </p:cNvPr>
+          <p:cNvSpPr txBox="1"/>
+          <p:nvPr/>
+        </p:nvSpPr>
+        <p:spPr>
+          <a:xfrm>
+            <a:off x="0" y="523220"/>
+            <a:ext cx="2251588" cy="307777"/>
+          </a:xfrm>
+          <a:prstGeom prst="rect">
+            <a:avLst/>
+          </a:prstGeom>
+          <a:noFill/>
+        </p:spPr>
+        <p:txBody>
+          <a:bodyPr wrap="square" rtlCol="0">
+            <a:spAutoFit/>
+          </a:bodyPr>
+          <a:lstStyle/>
+          <a:p>
+            <a:r>
+              <a:rPr lang="en-US" sz="1400">
+                <a:hlinkClick r:id="rId2"/>
+              </a:rPr>
+              <a:t>https://www.abraham.com</a:t>
+            </a:r>
+            <a:endParaRPr lang="en-US" sz="1400"/>
+          </a:p>
+        </p:txBody>
+      </p:sp>
+      <p:pic>
+        <p:nvPicPr>
+          <p:cNvPr id="2050" name="Picture 2" descr="Jay Abraham | DaymondJohn.com">
+            <a:extLst>
+              <a:ext uri="{FF2B5EF4-FFF2-40B4-BE49-F238E27FC236}">
+                <a16:creationId xmlns:a16="http://schemas.microsoft.com/office/drawing/2014/main" id="{3868B614-7F5D-46FD-D56D-87B65B77BB01}"/>
+              </a:ext>
+            </a:extLst>
+          </p:cNvPr>
+          <p:cNvPicPr>
+            <a:picLocks noChangeAspect="1" noChangeArrowheads="1"/>
+          </p:cNvPicPr>
+          <p:nvPr/>
+        </p:nvPicPr>
+        <p:blipFill rotWithShape="1">
+          <a:blip r:embed="rId3" cstate="email">
+            <a:extLst>
+              <a:ext uri="{28A0092B-C50C-407E-A947-70E740481C1C}">
+                <a14:useLocalDpi xmlns:a14="http://schemas.microsoft.com/office/drawing/2010/main"/>
+              </a:ext>
+            </a:extLst>
+          </a:blip>
+          <a:srcRect/>
+          <a:stretch/>
+        </p:blipFill>
+        <p:spPr bwMode="auto">
+          <a:xfrm>
+            <a:off x="1125794" y="1259924"/>
+            <a:ext cx="1527610" cy="2054493"/>
+          </a:xfrm>
+          <a:prstGeom prst="rect">
+            <a:avLst/>
+          </a:prstGeom>
+          <a:noFill/>
+          <a:extLst>
+            <a:ext uri="{909E8E84-426E-40DD-AFC4-6F175D3DCCD1}">
+              <a14:hiddenFill xmlns:a14="http://schemas.microsoft.com/office/drawing/2010/main">
+                <a:solidFill>
+                  <a:srgbClr val="FFFFFF"/>
+                </a:solidFill>
+              </a14:hiddenFill>
+            </a:ext>
+          </a:extLst>
+        </p:spPr>
+      </p:pic>
+      <p:sp>
+        <p:nvSpPr>
+          <p:cNvPr id="5" name="TextBox 4">
+            <a:extLst>
+              <a:ext uri="{FF2B5EF4-FFF2-40B4-BE49-F238E27FC236}">
+                <a16:creationId xmlns:a16="http://schemas.microsoft.com/office/drawing/2014/main" id="{0EE2180E-4927-02DD-4716-32AC9BEBA360}"/>
+              </a:ext>
+            </a:extLst>
+          </p:cNvPr>
+          <p:cNvSpPr txBox="1"/>
+          <p:nvPr/>
+        </p:nvSpPr>
+        <p:spPr>
+          <a:xfrm>
+            <a:off x="469158" y="3461594"/>
+            <a:ext cx="3012710" cy="738664"/>
+          </a:xfrm>
+          <a:prstGeom prst="rect">
+            <a:avLst/>
+          </a:prstGeom>
+          <a:noFill/>
+        </p:spPr>
+        <p:txBody>
+          <a:bodyPr wrap="square" rtlCol="0">
+            <a:spAutoFit/>
+          </a:bodyPr>
+          <a:lstStyle/>
+          <a:p>
+            <a:r>
+              <a:rPr lang="en-US" sz="1400"/>
+              <a:t>The 21.7 Billion Dollar Man and </a:t>
+            </a:r>
+          </a:p>
+          <a:p>
+            <a:r>
+              <a:rPr lang="en-US" sz="1400"/>
+              <a:t>One of The Most Effective Strategic </a:t>
+            </a:r>
+          </a:p>
+          <a:p>
+            <a:r>
+              <a:rPr lang="en-US" sz="1400"/>
+              <a:t>Marketing &amp; Business Growth Experts</a:t>
+            </a:r>
+          </a:p>
+        </p:txBody>
+      </p:sp>
+      <p:pic>
+        <p:nvPicPr>
+          <p:cNvPr id="2052" name="Picture 4" descr="Getting Everything You Can Out of All You've Got: 21 Ways You Can Out-Think, Out-Perform, and Out-Earn the Competition">
+            <a:extLst>
+              <a:ext uri="{FF2B5EF4-FFF2-40B4-BE49-F238E27FC236}">
+                <a16:creationId xmlns:a16="http://schemas.microsoft.com/office/drawing/2014/main" id="{A1573404-15CE-547E-F8C2-ABE7C2358EC4}"/>
+              </a:ext>
+            </a:extLst>
+          </p:cNvPr>
+          <p:cNvPicPr>
+            <a:picLocks noChangeAspect="1" noChangeArrowheads="1"/>
+          </p:cNvPicPr>
+          <p:nvPr/>
+        </p:nvPicPr>
+        <p:blipFill>
+          <a:blip r:embed="rId4">
+            <a:extLst>
+              <a:ext uri="{28A0092B-C50C-407E-A947-70E740481C1C}">
+                <a14:useLocalDpi xmlns:a14="http://schemas.microsoft.com/office/drawing/2010/main"/>
+              </a:ext>
+            </a:extLst>
+          </a:blip>
+          <a:srcRect/>
+          <a:stretch>
+            <a:fillRect/>
+          </a:stretch>
+        </p:blipFill>
+        <p:spPr bwMode="auto">
+          <a:xfrm>
+            <a:off x="1975513" y="4494611"/>
+            <a:ext cx="1420908" cy="2107196"/>
+          </a:xfrm>
+          <a:prstGeom prst="rect">
+            <a:avLst/>
+          </a:prstGeom>
+          <a:noFill/>
+          <a:extLst>
+            <a:ext uri="{909E8E84-426E-40DD-AFC4-6F175D3DCCD1}">
+              <a14:hiddenFill xmlns:a14="http://schemas.microsoft.com/office/drawing/2010/main">
+                <a:solidFill>
+                  <a:srgbClr val="FFFFFF"/>
+                </a:solidFill>
+              </a14:hiddenFill>
+            </a:ext>
+          </a:extLst>
+        </p:spPr>
+      </p:pic>
+      <p:pic>
+        <p:nvPicPr>
+          <p:cNvPr id="6" name="Picture 5">
+            <a:extLst>
+              <a:ext uri="{FF2B5EF4-FFF2-40B4-BE49-F238E27FC236}">
+                <a16:creationId xmlns:a16="http://schemas.microsoft.com/office/drawing/2014/main" id="{0D68FF2B-9BB7-82C6-CE6E-3F53D2496C93}"/>
+              </a:ext>
+            </a:extLst>
+          </p:cNvPr>
+          <p:cNvPicPr>
+            <a:picLocks noChangeAspect="1"/>
+          </p:cNvPicPr>
+          <p:nvPr/>
+        </p:nvPicPr>
+        <p:blipFill>
+          <a:blip r:embed="rId5" cstate="email">
+            <a:extLst>
+              <a:ext uri="{28A0092B-C50C-407E-A947-70E740481C1C}">
+                <a14:useLocalDpi xmlns:a14="http://schemas.microsoft.com/office/drawing/2010/main"/>
+              </a:ext>
+            </a:extLst>
+          </a:blip>
+          <a:stretch>
+            <a:fillRect/>
+          </a:stretch>
+        </p:blipFill>
+        <p:spPr>
+          <a:xfrm>
+            <a:off x="398582" y="4494611"/>
+            <a:ext cx="1390990" cy="2136163"/>
+          </a:xfrm>
+          <a:prstGeom prst="rect">
+            <a:avLst/>
+          </a:prstGeom>
+        </p:spPr>
+      </p:pic>
+    </p:spTree>
+    <p:extLst>
+      <p:ext uri="{BB962C8B-B14F-4D97-AF65-F5344CB8AC3E}">
+        <p14:creationId xmlns:p14="http://schemas.microsoft.com/office/powerpoint/2010/main" val="3108894200"/>
+      </p:ext>
+    </p:extLst>
+  </p:cSld>
+  <p:clrMapOvr>
+    <a:masterClrMapping/>
+  </p:clrMapOvr>
+</p:sld>
+</file>
+
 <file path=ppt/slides/slide2.xml><?xml version="1.0" encoding="utf-8"?>
 <p:sld xmlns:a="http://schemas.openxmlformats.org/drawingml/2006/main" xmlns:r="http://schemas.openxmlformats.org/officeDocument/2006/relationships" xmlns:p="http://schemas.openxmlformats.org/presentationml/2006/main">
   <p:cSld>
@@ -6551,7 +7686,7 @@
         <p:spPr>
           <a:xfrm>
             <a:off x="7479761" y="2356083"/>
-            <a:ext cx="3996998" cy="1384995"/>
+            <a:ext cx="3996998" cy="1600438"/>
           </a:xfrm>
           <a:prstGeom prst="rect">
             <a:avLst/>
@@ -6581,6 +7716,12 @@
           </a:p>
           <a:p>
             <a:r>
+              <a:rPr lang="en-US" sz="1400"/>
+              <a:t>Who is Choosing Who ?</a:t>
+            </a:r>
+          </a:p>
+          <a:p>
+            <a:r>
               <a:rPr lang="en-US" sz="1400">
                 <a:solidFill>
                   <a:srgbClr val="FF0000"/>
@@ -6896,7 +8037,7 @@
           <a:p>
             <a:r>
               <a:rPr lang="en-US" sz="1400"/>
-              <a:t>Robert Collier</a:t>
+              <a:t>Robert J Collier (1876 – 1918)</a:t>
             </a:r>
           </a:p>
           <a:p>
@@ -6983,46 +8124,41 @@
           </a:p>
         </p:txBody>
       </p:sp>
-      <p:sp>
-        <p:nvSpPr>
-          <p:cNvPr id="2" name="TextBox 1">
-            <a:extLst>
-              <a:ext uri="{FF2B5EF4-FFF2-40B4-BE49-F238E27FC236}">
-                <a16:creationId xmlns:a16="http://schemas.microsoft.com/office/drawing/2014/main" id="{C04F2F46-3AD2-CF63-8845-A9683602AB23}"/>
-              </a:ext>
-            </a:extLst>
-          </p:cNvPr>
-          <p:cNvSpPr txBox="1"/>
-          <p:nvPr/>
-        </p:nvSpPr>
-        <p:spPr>
-          <a:xfrm>
-            <a:off x="5625982" y="1333276"/>
-            <a:ext cx="2694432" cy="369332"/>
-          </a:xfrm>
-          <a:prstGeom prst="rect">
-            <a:avLst/>
-          </a:prstGeom>
-          <a:noFill/>
-        </p:spPr>
-        <p:txBody>
-          <a:bodyPr wrap="square" rtlCol="0">
-            <a:spAutoFit/>
-          </a:bodyPr>
-          <a:lstStyle/>
-          <a:p>
-            <a:pPr algn="ctr"/>
-            <a:r>
-              <a:rPr lang="en-US" b="1">
-                <a:solidFill>
-                  <a:srgbClr val="FF0000"/>
-                </a:solidFill>
-              </a:rPr>
-              <a:t>Who is Choosing Who ?</a:t>
-            </a:r>
-          </a:p>
-        </p:txBody>
-      </p:sp>
+      <p:pic>
+        <p:nvPicPr>
+          <p:cNvPr id="6" name="Picture 5">
+            <a:extLst>
+              <a:ext uri="{FF2B5EF4-FFF2-40B4-BE49-F238E27FC236}">
+                <a16:creationId xmlns:a16="http://schemas.microsoft.com/office/drawing/2014/main" id="{81777DC1-7B71-F35D-2DA4-E5917239C886}"/>
+              </a:ext>
+            </a:extLst>
+          </p:cNvPr>
+          <p:cNvPicPr>
+            <a:picLocks noChangeAspect="1"/>
+          </p:cNvPicPr>
+          <p:nvPr/>
+        </p:nvPicPr>
+        <p:blipFill rotWithShape="1">
+          <a:blip r:embed="rId5" cstate="email">
+            <a:extLst>
+              <a:ext uri="{28A0092B-C50C-407E-A947-70E740481C1C}">
+                <a14:useLocalDpi xmlns:a14="http://schemas.microsoft.com/office/drawing/2010/main"/>
+              </a:ext>
+            </a:extLst>
+          </a:blip>
+          <a:srcRect/>
+          <a:stretch/>
+        </p:blipFill>
+        <p:spPr>
+          <a:xfrm>
+            <a:off x="10300771" y="187357"/>
+            <a:ext cx="1212407" cy="1515251"/>
+          </a:xfrm>
+          <a:prstGeom prst="rect">
+            <a:avLst/>
+          </a:prstGeom>
+        </p:spPr>
+      </p:pic>
     </p:spTree>
     <p:extLst>
       <p:ext uri="{BB962C8B-B14F-4D97-AF65-F5344CB8AC3E}">
@@ -10652,8 +11788,8 @@
         </p:nvSpPr>
         <p:spPr>
           <a:xfrm>
-            <a:off x="1347089" y="4479080"/>
-            <a:ext cx="5803900" cy="2031325"/>
+            <a:off x="1663404" y="4303930"/>
+            <a:ext cx="5418340" cy="523220"/>
           </a:xfrm>
           <a:prstGeom prst="rect">
             <a:avLst/>
@@ -10677,32 +11813,15 @@
           <a:lstStyle/>
           <a:p>
             <a:r>
-              <a:rPr lang="en-US"/>
-              <a:t>If using A/B split testing we have improved conversions between steps above by 20%, </a:t>
-            </a:r>
-          </a:p>
-          <a:p>
-            <a:r>
-              <a:rPr lang="en-US"/>
-              <a:t>then overall improvement will be:</a:t>
-            </a:r>
-          </a:p>
-          <a:p>
-            <a:endParaRPr lang="en-US"/>
-          </a:p>
-          <a:p>
-            <a:r>
-              <a:rPr lang="en-US"/>
-              <a:t>1.2 * 1.2 * 1.2 * 1.2 = 2.1</a:t>
-            </a:r>
-          </a:p>
-          <a:p>
-            <a:endParaRPr lang="en-US"/>
-          </a:p>
-          <a:p>
-            <a:r>
-              <a:rPr lang="en-US"/>
-              <a:t>So we can doulbe our sales by just fine-tuning the messages</a:t>
+              <a:rPr lang="en-US" sz="1400"/>
+              <a:t>If using A/B split testing we improve conversions between steps above, </a:t>
+            </a:r>
+            <a:br>
+              <a:rPr lang="en-US" sz="1400"/>
+            </a:br>
+            <a:r>
+              <a:rPr lang="en-US" sz="1400"/>
+              <a:t>the overall sales will grow exponentially.</a:t>
             </a:r>
           </a:p>
         </p:txBody>
@@ -10845,6 +11964,205 @@
           </a:p>
         </p:txBody>
       </p:sp>
+      <p:graphicFrame>
+        <p:nvGraphicFramePr>
+          <p:cNvPr id="5" name="Table 5">
+            <a:extLst>
+              <a:ext uri="{FF2B5EF4-FFF2-40B4-BE49-F238E27FC236}">
+                <a16:creationId xmlns:a16="http://schemas.microsoft.com/office/drawing/2014/main" id="{30CC9742-B66F-A146-AD9C-93C31D834F2F}"/>
+              </a:ext>
+            </a:extLst>
+          </p:cNvPr>
+          <p:cNvGraphicFramePr>
+            <a:graphicFrameLocks noGrp="1"/>
+          </p:cNvGraphicFramePr>
+          <p:nvPr>
+            <p:extLst>
+              <p:ext uri="{D42A27DB-BD31-4B8C-83A1-F6EECF244321}">
+                <p14:modId xmlns:p14="http://schemas.microsoft.com/office/powerpoint/2010/main" val="333452837"/>
+              </p:ext>
+            </p:extLst>
+          </p:nvPr>
+        </p:nvGraphicFramePr>
+        <p:xfrm>
+          <a:off x="1663404" y="4946052"/>
+          <a:ext cx="3441286" cy="1501406"/>
+        </p:xfrm>
+        <a:graphic>
+          <a:graphicData uri="http://schemas.openxmlformats.org/drawingml/2006/table">
+            <a:tbl>
+              <a:tblPr firstRow="1" bandRow="1">
+                <a:tableStyleId>{E8B1032C-EA38-4F05-BA0D-38AFFFC7BED3}</a:tableStyleId>
+              </a:tblPr>
+              <a:tblGrid>
+                <a:gridCol w="832225">
+                  <a:extLst>
+                    <a:ext uri="{9D8B030D-6E8A-4147-A177-3AD203B41FA5}">
+                      <a16:colId xmlns:a16="http://schemas.microsoft.com/office/drawing/2014/main" val="3508890907"/>
+                    </a:ext>
+                  </a:extLst>
+                </a:gridCol>
+                <a:gridCol w="2609061">
+                  <a:extLst>
+                    <a:ext uri="{9D8B030D-6E8A-4147-A177-3AD203B41FA5}">
+                      <a16:colId xmlns:a16="http://schemas.microsoft.com/office/drawing/2014/main" val="1251666213"/>
+                    </a:ext>
+                  </a:extLst>
+                </a:gridCol>
+              </a:tblGrid>
+              <a:tr h="384488">
+                <a:tc>
+                  <a:txBody>
+                    <a:bodyPr/>
+                    <a:lstStyle/>
+                    <a:p>
+                      <a:r>
+                        <a:rPr lang="en-US" sz="1400"/>
+                        <a:t>Step %</a:t>
+                      </a:r>
+                    </a:p>
+                  </a:txBody>
+                  <a:tcPr/>
+                </a:tc>
+                <a:tc>
+                  <a:txBody>
+                    <a:bodyPr/>
+                    <a:lstStyle/>
+                    <a:p>
+                      <a:r>
+                        <a:rPr lang="en-US" sz="1400"/>
+                        <a:t>Overall improvement</a:t>
+                      </a:r>
+                    </a:p>
+                  </a:txBody>
+                  <a:tcPr/>
+                </a:tc>
+                <a:extLst>
+                  <a:ext uri="{0D108BD9-81ED-4DB2-BD59-A6C34878D82A}">
+                    <a16:rowId xmlns:a16="http://schemas.microsoft.com/office/drawing/2014/main" val="891348057"/>
+                  </a:ext>
+                </a:extLst>
+              </a:tr>
+              <a:tr h="372306">
+                <a:tc>
+                  <a:txBody>
+                    <a:bodyPr/>
+                    <a:lstStyle/>
+                    <a:p>
+                      <a:r>
+                        <a:rPr lang="en-US" sz="1400"/>
+                        <a:t>20%</a:t>
+                      </a:r>
+                    </a:p>
+                  </a:txBody>
+                  <a:tcPr/>
+                </a:tc>
+                <a:tc>
+                  <a:txBody>
+                    <a:bodyPr/>
+                    <a:lstStyle/>
+                    <a:p>
+                      <a:pPr marL="0" marR="0" lvl="0" indent="0" algn="l" defTabSz="914400" rtl="0" eaLnBrk="1" fontAlgn="auto" latinLnBrk="0" hangingPunct="1">
+                        <a:lnSpc>
+                          <a:spcPct val="100000"/>
+                        </a:lnSpc>
+                        <a:spcBef>
+                          <a:spcPts val="0"/>
+                        </a:spcBef>
+                        <a:spcAft>
+                          <a:spcPts val="0"/>
+                        </a:spcAft>
+                        <a:buClrTx/>
+                        <a:buSzTx/>
+                        <a:buFontTx/>
+                        <a:buNone/>
+                        <a:tabLst/>
+                        <a:defRPr/>
+                      </a:pPr>
+                      <a:r>
+                        <a:rPr lang="en-US" sz="1400"/>
+                        <a:t>1.2 * 1.2 * 1.2 * 1.2 = 2.1</a:t>
+                      </a:r>
+                    </a:p>
+                  </a:txBody>
+                  <a:tcPr/>
+                </a:tc>
+                <a:extLst>
+                  <a:ext uri="{0D108BD9-81ED-4DB2-BD59-A6C34878D82A}">
+                    <a16:rowId xmlns:a16="http://schemas.microsoft.com/office/drawing/2014/main" val="2773556733"/>
+                  </a:ext>
+                </a:extLst>
+              </a:tr>
+              <a:tr h="372306">
+                <a:tc>
+                  <a:txBody>
+                    <a:bodyPr/>
+                    <a:lstStyle/>
+                    <a:p>
+                      <a:r>
+                        <a:rPr lang="en-US" sz="1400"/>
+                        <a:t>50%</a:t>
+                      </a:r>
+                    </a:p>
+                  </a:txBody>
+                  <a:tcPr/>
+                </a:tc>
+                <a:tc>
+                  <a:txBody>
+                    <a:bodyPr/>
+                    <a:lstStyle/>
+                    <a:p>
+                      <a:r>
+                        <a:rPr lang="en-US" sz="1400"/>
+                        <a:t>1.5 * 1.5 * 1.5 * 1.5 = 5.06</a:t>
+                      </a:r>
+                    </a:p>
+                  </a:txBody>
+                  <a:tcPr/>
+                </a:tc>
+                <a:extLst>
+                  <a:ext uri="{0D108BD9-81ED-4DB2-BD59-A6C34878D82A}">
+                    <a16:rowId xmlns:a16="http://schemas.microsoft.com/office/drawing/2014/main" val="3850503321"/>
+                  </a:ext>
+                </a:extLst>
+              </a:tr>
+              <a:tr h="372306">
+                <a:tc>
+                  <a:txBody>
+                    <a:bodyPr/>
+                    <a:lstStyle/>
+                    <a:p>
+                      <a:r>
+                        <a:rPr lang="en-US" sz="1400"/>
+                        <a:t>100%</a:t>
+                      </a:r>
+                    </a:p>
+                  </a:txBody>
+                  <a:tcPr/>
+                </a:tc>
+                <a:tc>
+                  <a:txBody>
+                    <a:bodyPr/>
+                    <a:lstStyle/>
+                    <a:p>
+                      <a:r>
+                        <a:rPr lang="en-US" sz="1400"/>
+                        <a:t>2 * 2 * 2 * 2 = 8</a:t>
+                      </a:r>
+                    </a:p>
+                  </a:txBody>
+                  <a:tcPr/>
+                </a:tc>
+                <a:extLst>
+                  <a:ext uri="{0D108BD9-81ED-4DB2-BD59-A6C34878D82A}">
+                    <a16:rowId xmlns:a16="http://schemas.microsoft.com/office/drawing/2014/main" val="3567164877"/>
+                  </a:ext>
+                </a:extLst>
+              </a:tr>
+            </a:tbl>
+          </a:graphicData>
+        </a:graphic>
+      </p:graphicFrame>
     </p:spTree>
     <p:extLst>
       <p:ext uri="{BB962C8B-B14F-4D97-AF65-F5344CB8AC3E}">
@@ -10889,8 +12207,8 @@
         </p:nvSpPr>
         <p:spPr>
           <a:xfrm>
-            <a:off x="673767" y="644893"/>
-            <a:ext cx="5842001" cy="3970318"/>
+            <a:off x="176271" y="924297"/>
+            <a:ext cx="6521984" cy="4524315"/>
           </a:xfrm>
           <a:prstGeom prst="rect">
             <a:avLst/>
@@ -10905,7 +12223,7 @@
           <a:p>
             <a:r>
               <a:rPr lang="en-US"/>
-              <a:t>Ben Caballero is the most productive individual real estate agent in the United States. </a:t>
+              <a:t>On average, a real estate agent working  full time sells 15 homes in one year.   Up to 50 with a F/T assistant.</a:t>
             </a:r>
           </a:p>
           <a:p>
@@ -10914,7 +12232,7 @@
           <a:p>
             <a:r>
               <a:rPr lang="en-US"/>
-              <a:t>Guinness World Records has recognized him three times for "most annual home sale transactions through MLS by an individual sell side real estate agent."</a:t>
+              <a:t>Ben Caballero is the most productive individual real estate agent in the United States. His website provides MLS (Multiple Listing Service) with 63+ home builders.</a:t>
             </a:r>
           </a:p>
           <a:p>
@@ -10940,6 +12258,31 @@
           </a:p>
           <a:p>
             <a:endParaRPr lang="en-US"/>
+          </a:p>
+          <a:p>
+            <a:r>
+              <a:rPr lang="en-US"/>
+              <a:t>Guinness World Records has recognized him three times for "most annual home sale transactions through MLS by an </a:t>
+            </a:r>
+            <a:r>
+              <a:rPr lang="en-US">
+                <a:solidFill>
+                  <a:srgbClr val="00B050"/>
+                </a:solidFill>
+              </a:rPr>
+              <a:t>individual sell side real estate agent</a:t>
+            </a:r>
+            <a:r>
+              <a:rPr lang="en-US"/>
+              <a:t>." </a:t>
+            </a:r>
+            <a:br>
+              <a:rPr lang="en-US"/>
+            </a:br>
+            <a:r>
+              <a:rPr lang="en-US"/>
+              <a:t>His company was founded in 2007 and has ~35 employees.</a:t>
+            </a:r>
           </a:p>
           <a:p>
             <a:r>
@@ -10950,18 +12293,6 @@
             </a:r>
             <a:endParaRPr lang="en-US"/>
           </a:p>
-          <a:p>
-            <a:r>
-              <a:rPr lang="en-US"/>
-              <a:t>Ben works with 63+ home builders</a:t>
-            </a:r>
-          </a:p>
-          <a:p>
-            <a:r>
-              <a:rPr lang="en-US"/>
-              <a:t>MLS = Multiple Listing Service</a:t>
-            </a:r>
-          </a:p>
         </p:txBody>
       </p:sp>
       <p:sp>
@@ -10978,7 +12309,7 @@
         </p:nvSpPr>
         <p:spPr>
           <a:xfrm>
-            <a:off x="8790405" y="2867162"/>
+            <a:off x="8779388" y="1879370"/>
             <a:ext cx="1725328" cy="369332"/>
           </a:xfrm>
           <a:prstGeom prst="rect">
@@ -11028,7 +12359,7 @@
         </p:blipFill>
         <p:spPr>
           <a:xfrm>
-            <a:off x="8899336" y="1206841"/>
+            <a:off x="8888319" y="219049"/>
             <a:ext cx="1616397" cy="1660321"/>
           </a:xfrm>
           <a:prstGeom prst="rect">
@@ -11050,7 +12381,7 @@
         </p:nvSpPr>
         <p:spPr>
           <a:xfrm>
-            <a:off x="8101264" y="3667673"/>
+            <a:off x="7988032" y="2252922"/>
             <a:ext cx="3416969" cy="646331"/>
           </a:xfrm>
           <a:prstGeom prst="rect">
@@ -11071,7 +12402,7 @@
                   <a:srgbClr val="FF0000"/>
                 </a:solidFill>
               </a:rPr>
-              <a:t>His first meeting every day is </a:t>
+              <a:t>Ben's first meeting every day is </a:t>
             </a:r>
           </a:p>
           <a:p>
@@ -11087,6 +12418,77 @@
           </a:p>
         </p:txBody>
       </p:sp>
+      <p:sp>
+        <p:nvSpPr>
+          <p:cNvPr id="7" name="TextBox 6">
+            <a:extLst>
+              <a:ext uri="{FF2B5EF4-FFF2-40B4-BE49-F238E27FC236}">
+                <a16:creationId xmlns:a16="http://schemas.microsoft.com/office/drawing/2014/main" id="{5B399984-58C8-AF30-33B0-2E7EA2AAAEE9}"/>
+              </a:ext>
+            </a:extLst>
+          </p:cNvPr>
+          <p:cNvSpPr txBox="1"/>
+          <p:nvPr/>
+        </p:nvSpPr>
+        <p:spPr>
+          <a:xfrm>
+            <a:off x="1" y="0"/>
+            <a:ext cx="7392318" cy="523220"/>
+          </a:xfrm>
+          <a:prstGeom prst="rect">
+            <a:avLst/>
+          </a:prstGeom>
+          <a:noFill/>
+        </p:spPr>
+        <p:txBody>
+          <a:bodyPr wrap="square" rtlCol="0">
+            <a:spAutoFit/>
+          </a:bodyPr>
+          <a:lstStyle/>
+          <a:p>
+            <a:r>
+              <a:rPr lang="en-US" sz="2800" b="1"/>
+              <a:t>Selling x200 Times More Than National Average</a:t>
+            </a:r>
+          </a:p>
+        </p:txBody>
+      </p:sp>
+      <p:pic>
+        <p:nvPicPr>
+          <p:cNvPr id="8" name="Picture 7">
+            <a:extLst>
+              <a:ext uri="{FF2B5EF4-FFF2-40B4-BE49-F238E27FC236}">
+                <a16:creationId xmlns:a16="http://schemas.microsoft.com/office/drawing/2014/main" id="{8EA6E9E1-4556-6E7F-3336-92C2FA49F6D9}"/>
+              </a:ext>
+            </a:extLst>
+          </p:cNvPr>
+          <p:cNvPicPr>
+            <a:picLocks noChangeAspect="1"/>
+          </p:cNvPicPr>
+          <p:nvPr/>
+        </p:nvPicPr>
+        <p:blipFill>
+          <a:blip r:embed="rId4" cstate="email">
+            <a:extLst>
+              <a:ext uri="{28A0092B-C50C-407E-A947-70E740481C1C}">
+                <a14:useLocalDpi xmlns:a14="http://schemas.microsoft.com/office/drawing/2010/main"/>
+              </a:ext>
+            </a:extLst>
+          </a:blip>
+          <a:stretch>
+            <a:fillRect/>
+          </a:stretch>
+        </p:blipFill>
+        <p:spPr>
+          <a:xfrm>
+            <a:off x="7520339" y="3186454"/>
+            <a:ext cx="4495390" cy="3452497"/>
+          </a:xfrm>
+          <a:prstGeom prst="rect">
+            <a:avLst/>
+          </a:prstGeom>
+        </p:spPr>
+      </p:pic>
     </p:spTree>
     <p:extLst>
       <p:ext uri="{BB962C8B-B14F-4D97-AF65-F5344CB8AC3E}">

--- a/Marketing.pptx
+++ b/Marketing.pptx
@@ -5,7 +5,7 @@
     <p:sldMasterId id="2147483648" r:id="rId1"/>
   </p:sldMasterIdLst>
   <p:notesMasterIdLst>
-    <p:notesMasterId r:id="rId13"/>
+    <p:notesMasterId r:id="rId17"/>
   </p:notesMasterIdLst>
   <p:sldIdLst>
     <p:sldId id="287" r:id="rId2"/>
@@ -19,6 +19,10 @@
     <p:sldId id="295" r:id="rId10"/>
     <p:sldId id="297" r:id="rId11"/>
     <p:sldId id="298" r:id="rId12"/>
+    <p:sldId id="299" r:id="rId13"/>
+    <p:sldId id="300" r:id="rId14"/>
+    <p:sldId id="302" r:id="rId15"/>
+    <p:sldId id="301" r:id="rId16"/>
   </p:sldIdLst>
   <p:sldSz cx="12192000" cy="6858000"/>
   <p:notesSz cx="6858000" cy="9144000"/>
@@ -206,7 +210,7 @@
           </a:lstStyle>
           <a:p>
             <a:fld id="{610AF671-4685-124D-A41D-446D235EA8CE}" type="datetimeFigureOut">
-              <a:t>9/17/22</a:t>
+              <a:t>9/18/22</a:t>
             </a:fld>
             <a:endParaRPr lang="en-US"/>
           </a:p>
@@ -703,7 +707,7 @@
           <a:p>
             <a:fld id="{2D90B581-06C6-5A4B-9E30-3EAD5667F4B3}" type="datetimeFigureOut">
               <a:rPr lang="en-US" smtClean="0"/>
-              <a:t>9/17/22</a:t>
+              <a:t>9/18/22</a:t>
             </a:fld>
             <a:endParaRPr lang="en-US"/>
           </a:p>
@@ -901,7 +905,7 @@
           <a:p>
             <a:fld id="{2D90B581-06C6-5A4B-9E30-3EAD5667F4B3}" type="datetimeFigureOut">
               <a:rPr lang="en-US" smtClean="0"/>
-              <a:t>9/17/22</a:t>
+              <a:t>9/18/22</a:t>
             </a:fld>
             <a:endParaRPr lang="en-US"/>
           </a:p>
@@ -1109,7 +1113,7 @@
           <a:p>
             <a:fld id="{2D90B581-06C6-5A4B-9E30-3EAD5667F4B3}" type="datetimeFigureOut">
               <a:rPr lang="en-US" smtClean="0"/>
-              <a:t>9/17/22</a:t>
+              <a:t>9/18/22</a:t>
             </a:fld>
             <a:endParaRPr lang="en-US"/>
           </a:p>
@@ -1307,7 +1311,7 @@
           <a:p>
             <a:fld id="{2D90B581-06C6-5A4B-9E30-3EAD5667F4B3}" type="datetimeFigureOut">
               <a:rPr lang="en-US" smtClean="0"/>
-              <a:t>9/17/22</a:t>
+              <a:t>9/18/22</a:t>
             </a:fld>
             <a:endParaRPr lang="en-US"/>
           </a:p>
@@ -1582,7 +1586,7 @@
           <a:p>
             <a:fld id="{2D90B581-06C6-5A4B-9E30-3EAD5667F4B3}" type="datetimeFigureOut">
               <a:rPr lang="en-US" smtClean="0"/>
-              <a:t>9/17/22</a:t>
+              <a:t>9/18/22</a:t>
             </a:fld>
             <a:endParaRPr lang="en-US"/>
           </a:p>
@@ -1847,7 +1851,7 @@
           <a:p>
             <a:fld id="{2D90B581-06C6-5A4B-9E30-3EAD5667F4B3}" type="datetimeFigureOut">
               <a:rPr lang="en-US" smtClean="0"/>
-              <a:t>9/17/22</a:t>
+              <a:t>9/18/22</a:t>
             </a:fld>
             <a:endParaRPr lang="en-US"/>
           </a:p>
@@ -2259,7 +2263,7 @@
           <a:p>
             <a:fld id="{2D90B581-06C6-5A4B-9E30-3EAD5667F4B3}" type="datetimeFigureOut">
               <a:rPr lang="en-US" smtClean="0"/>
-              <a:t>9/17/22</a:t>
+              <a:t>9/18/22</a:t>
             </a:fld>
             <a:endParaRPr lang="en-US"/>
           </a:p>
@@ -2400,7 +2404,7 @@
           <a:p>
             <a:fld id="{2D90B581-06C6-5A4B-9E30-3EAD5667F4B3}" type="datetimeFigureOut">
               <a:rPr lang="en-US" smtClean="0"/>
-              <a:t>9/17/22</a:t>
+              <a:t>9/18/22</a:t>
             </a:fld>
             <a:endParaRPr lang="en-US"/>
           </a:p>
@@ -2513,7 +2517,7 @@
           <a:p>
             <a:fld id="{2D90B581-06C6-5A4B-9E30-3EAD5667F4B3}" type="datetimeFigureOut">
               <a:rPr lang="en-US" smtClean="0"/>
-              <a:t>9/17/22</a:t>
+              <a:t>9/18/22</a:t>
             </a:fld>
             <a:endParaRPr lang="en-US"/>
           </a:p>
@@ -2824,7 +2828,7 @@
           <a:p>
             <a:fld id="{2D90B581-06C6-5A4B-9E30-3EAD5667F4B3}" type="datetimeFigureOut">
               <a:rPr lang="en-US" smtClean="0"/>
-              <a:t>9/17/22</a:t>
+              <a:t>9/18/22</a:t>
             </a:fld>
             <a:endParaRPr lang="en-US"/>
           </a:p>
@@ -3112,7 +3116,7 @@
           <a:p>
             <a:fld id="{2D90B581-06C6-5A4B-9E30-3EAD5667F4B3}" type="datetimeFigureOut">
               <a:rPr lang="en-US" smtClean="0"/>
-              <a:t>9/17/22</a:t>
+              <a:t>9/18/22</a:t>
             </a:fld>
             <a:endParaRPr lang="en-US"/>
           </a:p>
@@ -3353,7 +3357,7 @@
           <a:p>
             <a:fld id="{2D90B581-06C6-5A4B-9E30-3EAD5667F4B3}" type="datetimeFigureOut">
               <a:rPr lang="en-US" smtClean="0"/>
-              <a:t>9/17/22</a:t>
+              <a:t>9/18/22</a:t>
             </a:fld>
             <a:endParaRPr lang="en-US"/>
           </a:p>
@@ -4343,7 +4347,7 @@
         <p:spPr>
           <a:xfrm>
             <a:off x="94047" y="1689281"/>
-            <a:ext cx="7948267" cy="5047536"/>
+            <a:ext cx="7948267" cy="4832092"/>
           </a:xfrm>
           <a:prstGeom prst="rect">
             <a:avLst/>
@@ -4438,11 +4442,18 @@
                   <a:srgbClr val="00B050"/>
                 </a:solidFill>
               </a:rPr>
-              <a:t>the money is in selling the service or product</a:t>
-            </a:r>
-            <a:r>
-              <a:rPr lang="en-US" sz="1400"/>
-              <a:t>. Definition of Selling: "</a:t>
+              <a:t>but in selling it</a:t>
+            </a:r>
+            <a:r>
+              <a:rPr lang="en-US" sz="1400"/>
+              <a:t>.</a:t>
+            </a:r>
+            <a:br>
+              <a:rPr lang="en-US" sz="1400"/>
+            </a:br>
+            <a:r>
+              <a:rPr lang="en-US" sz="1400"/>
+              <a:t>Definition of Selling: "</a:t>
             </a:r>
             <a:r>
               <a:rPr lang="en-US" sz="1400">
@@ -4454,7 +4465,7 @@
             </a:r>
             <a:r>
               <a:rPr lang="en-US" sz="1400"/>
-              <a:t>. Ethical marketing related to "good for them" in this definition.</a:t>
+              <a:t>. </a:t>
             </a:r>
           </a:p>
           <a:p>
@@ -4520,7 +4531,7 @@
             </a:pPr>
             <a:r>
               <a:rPr lang="en-US" sz="1400"/>
-              <a:t>Principle 6 - What you need the most is a </a:t>
+              <a:t>Principle 6 – </a:t>
             </a:r>
             <a:r>
               <a:rPr lang="en-US" sz="1400" b="1">
@@ -4528,11 +4539,11 @@
                   <a:srgbClr val="00B050"/>
                 </a:solidFill>
               </a:rPr>
-              <a:t>hungry crowd</a:t>
-            </a:r>
-            <a:r>
-              <a:rPr lang="en-US" sz="1400"/>
-              <a:t>. </a:t>
+              <a:t>HUNGRY CROWD</a:t>
+            </a:r>
+            <a:r>
+              <a:rPr lang="en-US" sz="1400"/>
+              <a:t> is what you need the most. </a:t>
             </a:r>
             <a:r>
               <a:rPr lang="en-US" sz="1400" b="1">
@@ -4544,7 +4555,14 @@
             </a:r>
             <a:r>
               <a:rPr lang="en-US" sz="1400"/>
-              <a:t>. Generate hungry leads.</a:t>
+              <a:t>. </a:t>
+            </a:r>
+            <a:br>
+              <a:rPr lang="en-US" sz="1400"/>
+            </a:br>
+            <a:r>
+              <a:rPr lang="en-US" sz="1400"/>
+              <a:t>Generate hungry leads.</a:t>
             </a:r>
           </a:p>
           <a:p>
@@ -5031,8 +5049,8 @@
         </p:nvSpPr>
         <p:spPr>
           <a:xfrm>
-            <a:off x="4194563" y="261610"/>
-            <a:ext cx="7736705" cy="6340197"/>
+            <a:off x="3702206" y="150098"/>
+            <a:ext cx="8395388" cy="6555641"/>
           </a:xfrm>
           <a:prstGeom prst="rect">
             <a:avLst/>
@@ -5060,8 +5078,16 @@
               <a:buAutoNum type="arabicPeriod"/>
             </a:pPr>
             <a:r>
-              <a:rPr lang="en-US" sz="1400"/>
-              <a:t>Become the trusted source, the leader in your industry. "Influencer marketing". Read "Speed of Trust".</a:t>
+              <a:rPr lang="en-US" sz="1400" b="1">
+                <a:solidFill>
+                  <a:srgbClr val="00B050"/>
+                </a:solidFill>
+              </a:rPr>
+              <a:t>Unique Selling Proposition</a:t>
+            </a:r>
+            <a:r>
+              <a:rPr lang="en-US" sz="1400"/>
+              <a:t>. Examples: FedEx. Domino Pizza.</a:t>
             </a:r>
           </a:p>
           <a:p>
@@ -5070,16 +5096,51 @@
               <a:buAutoNum type="arabicPeriod"/>
             </a:pPr>
             <a:r>
-              <a:rPr lang="en-US" sz="1400"/>
-              <a:t>The headline determines 80% of the success of any advertising campaign. </a:t>
-            </a:r>
-            <a:br>
-              <a:rPr lang="en-US" sz="1400"/>
-            </a:br>
-            <a:r>
-              <a:rPr lang="en-US" sz="1400"/>
-              <a:t>Split-test headlines on smaller scale. A/B split testing.</a:t>
-            </a:r>
+              <a:rPr lang="en-US" sz="1400" b="1">
+                <a:solidFill>
+                  <a:srgbClr val="00B050"/>
+                </a:solidFill>
+              </a:rPr>
+              <a:t>Lifetime value of a client</a:t>
+            </a:r>
+            <a:r>
+              <a:rPr lang="en-US" sz="1400"/>
+              <a:t>. Front End – Back End Marketing. </a:t>
+            </a:r>
+            <a:r>
+              <a:rPr lang="en-US" sz="1400">
+                <a:solidFill>
+                  <a:srgbClr val="202124"/>
+                </a:solidFill>
+                <a:latin typeface="Roboto" panose="02000000000000000000" pitchFamily="2" charset="0"/>
+              </a:rPr>
+              <a:t>C</a:t>
+            </a:r>
+            <a:r>
+              <a:rPr lang="en-US" sz="1400" b="0" i="0">
+                <a:solidFill>
+                  <a:srgbClr val="202124"/>
+                </a:solidFill>
+                <a:effectLst/>
+                <a:latin typeface="Roboto" panose="02000000000000000000" pitchFamily="2" charset="0"/>
+              </a:rPr>
+              <a:t>lient acquisition cost. </a:t>
+            </a:r>
+            <a:r>
+              <a:rPr lang="en-US" sz="1400"/>
+              <a:t>Example: </a:t>
+            </a:r>
+            <a:r>
+              <a:rPr lang="en-US" sz="1400" b="0" i="0">
+                <a:solidFill>
+                  <a:srgbClr val="202124"/>
+                </a:solidFill>
+                <a:effectLst/>
+                <a:latin typeface="Roboto" panose="02000000000000000000" pitchFamily="2" charset="0"/>
+              </a:rPr>
+              <a:t>Icy Hot promotion – spend 115% of the initial selling price to acquire a customer.</a:t>
+            </a:r>
+            <a:endParaRPr lang="en-US" sz="1400"/>
           </a:p>
           <a:p>
             <a:pPr marL="342900" indent="-342900">
@@ -5088,8 +5149,27 @@
             </a:pPr>
             <a:r>
               <a:rPr lang="en-US" sz="1400"/>
-              <a:t>Use "word pictures", use power verbs and active voice. Address your clients directly and be firm and brief.</a:t>
-            </a:r>
+              <a:t>Become a </a:t>
+            </a:r>
+            <a:r>
+              <a:rPr lang="en-US" sz="1400" b="1">
+                <a:solidFill>
+                  <a:srgbClr val="00B050"/>
+                </a:solidFill>
+              </a:rPr>
+              <a:t>match-maker</a:t>
+            </a:r>
+            <a:r>
+              <a:rPr lang="en-US" sz="1400"/>
+              <a:t>. </a:t>
+            </a:r>
+            <a:r>
+              <a:rPr lang="en-US" sz="1400">
+                <a:hlinkClick r:id="rId2"/>
+              </a:rPr>
+              <a:t>https://www.youtube.com/watch?v=9NNKHhapVMM</a:t>
+            </a:r>
+            <a:endParaRPr lang="en-US" sz="1400"/>
           </a:p>
           <a:p>
             <a:pPr marL="342900" indent="-342900">
@@ -5098,7 +5178,19 @@
             </a:pPr>
             <a:r>
               <a:rPr lang="en-US" sz="1400"/>
-              <a:t>Become a performance optimizer. In every organization, you can find areas that are under-performing. Fix them first. This may cause dramatic improvement in the overall business process.</a:t>
+              <a:t>Become the trusted source, the leader in your industry. "</a:t>
+            </a:r>
+            <a:r>
+              <a:rPr lang="en-US" sz="1400" b="1">
+                <a:solidFill>
+                  <a:srgbClr val="00B050"/>
+                </a:solidFill>
+              </a:rPr>
+              <a:t>Influencer marketing</a:t>
+            </a:r>
+            <a:r>
+              <a:rPr lang="en-US" sz="1400"/>
+              <a:t>". Read "Speed of Trust".</a:t>
             </a:r>
           </a:p>
           <a:p>
@@ -5108,7 +5200,38 @@
             </a:pPr>
             <a:r>
               <a:rPr lang="en-US" sz="1400"/>
-              <a:t>Use the Parthenon model of business success. Every business has its impact points – areas where you can achieve the most leverage. It could be your unique selling proposition, a special offer, or an effective marketing process. The idea is to identify, optimize and automatize these “columns” and ultimately build a solid Parthenon which will generate predictable income every month.</a:t>
+              <a:t>The </a:t>
+            </a:r>
+            <a:r>
+              <a:rPr lang="en-US" sz="1400" b="1">
+                <a:solidFill>
+                  <a:srgbClr val="00B050"/>
+                </a:solidFill>
+              </a:rPr>
+              <a:t>headline determines 80% of the success</a:t>
+            </a:r>
+            <a:r>
+              <a:rPr lang="en-US" sz="1400"/>
+              <a:t> of any advertising campaign. </a:t>
+            </a:r>
+            <a:br>
+              <a:rPr lang="en-US" sz="1400"/>
+            </a:br>
+            <a:r>
+              <a:rPr lang="en-US" sz="1400"/>
+              <a:t>Split-test headlines on smaller scale. </a:t>
+            </a:r>
+            <a:r>
+              <a:rPr lang="en-US" sz="1400" b="1">
+                <a:solidFill>
+                  <a:srgbClr val="00B050"/>
+                </a:solidFill>
+              </a:rPr>
+              <a:t>A/B split testing</a:t>
+            </a:r>
+            <a:r>
+              <a:rPr lang="en-US" sz="1400"/>
+              <a:t>.</a:t>
             </a:r>
           </a:p>
           <a:p>
@@ -5118,7 +5241,19 @@
             </a:pPr>
             <a:r>
               <a:rPr lang="en-US" sz="1400"/>
-              <a:t>There’s always a space for true entrepreneurs. Even in saturated markets only ~10% of competitors truly know what they’re doing. The rest 90% is on their way out of the business.</a:t>
+              <a:t>Use "</a:t>
+            </a:r>
+            <a:r>
+              <a:rPr lang="en-US" sz="1400" b="1">
+                <a:solidFill>
+                  <a:srgbClr val="00B050"/>
+                </a:solidFill>
+              </a:rPr>
+              <a:t>word pictures</a:t>
+            </a:r>
+            <a:r>
+              <a:rPr lang="en-US" sz="1400"/>
+              <a:t>", use power verbs and active voice. Address your clients directly and be firm and brief.</a:t>
             </a:r>
           </a:p>
           <a:p>
@@ -5128,7 +5263,19 @@
             </a:pPr>
             <a:r>
               <a:rPr lang="en-US" sz="1400"/>
-              <a:t>Provide value every step of the way. "Anytime you interact with anybody for any amount of time, your opportunity, responsibility and obligation is to make their life better off because you are in it".</a:t>
+              <a:t>Become a </a:t>
+            </a:r>
+            <a:r>
+              <a:rPr lang="en-US" sz="1400" b="1">
+                <a:solidFill>
+                  <a:srgbClr val="00B050"/>
+                </a:solidFill>
+              </a:rPr>
+              <a:t>performance optimizer</a:t>
+            </a:r>
+            <a:r>
+              <a:rPr lang="en-US" sz="1400"/>
+              <a:t>. In every organization, you can find areas that are under-performing. Fix them first. This may cause dramatic improvement in the overall business process.</a:t>
             </a:r>
           </a:p>
           <a:p>
@@ -5138,7 +5285,19 @@
             </a:pPr>
             <a:r>
               <a:rPr lang="en-US" sz="1400"/>
-              <a:t>Think about what you’ve learned after every important conversation, every book you read, every presentation you give, every project and period of your life. Every mistake can be a learning opportunity.</a:t>
+              <a:t>Use the </a:t>
+            </a:r>
+            <a:r>
+              <a:rPr lang="en-US" sz="1400" b="1">
+                <a:solidFill>
+                  <a:srgbClr val="00B050"/>
+                </a:solidFill>
+              </a:rPr>
+              <a:t>Parthenon model</a:t>
+            </a:r>
+            <a:r>
+              <a:rPr lang="en-US" sz="1400"/>
+              <a:t> of business success. Every business has its impact points – areas where you can achieve the most leverage. It could be your unique selling proposition, a special offer, or an effective marketing process. The idea is to identify, optimize and automatize these “columns” and ultimately build a solid Parthenon which will generate predictable income every month.</a:t>
             </a:r>
           </a:p>
           <a:p>
@@ -5147,8 +5306,16 @@
               <a:buAutoNum type="arabicPeriod"/>
             </a:pPr>
             <a:r>
-              <a:rPr lang="en-US" sz="1400"/>
-              <a:t>Fall in love with your clients, not with your own product or company. Focus on helping. "enlightened self-interest".</a:t>
+              <a:rPr lang="en-US" sz="1400" b="1">
+                <a:solidFill>
+                  <a:srgbClr val="00B050"/>
+                </a:solidFill>
+              </a:rPr>
+              <a:t>There’s always a space for true entrepreneurs</a:t>
+            </a:r>
+            <a:r>
+              <a:rPr lang="en-US" sz="1400"/>
+              <a:t>. Even in saturated markets only ~10% of competitors truly know what they’re doing. The rest 90% is on their way out of the business.</a:t>
             </a:r>
           </a:p>
           <a:p>
@@ -5157,8 +5324,16 @@
               <a:buAutoNum type="arabicPeriod"/>
             </a:pPr>
             <a:r>
-              <a:rPr lang="en-US" sz="1400"/>
-              <a:t>Life is all about the process, not just goals. Enjoy the process. Live the life of fulfillment.</a:t>
+              <a:rPr lang="en-US" sz="1400" b="1">
+                <a:solidFill>
+                  <a:srgbClr val="00B050"/>
+                </a:solidFill>
+              </a:rPr>
+              <a:t>Provide value</a:t>
+            </a:r>
+            <a:r>
+              <a:rPr lang="en-US" sz="1400"/>
+              <a:t> every step of the way. "Anytime you interact with anybody for any amount of time, your opportunity, responsibility and obligation is to make their life better off because you are in it".</a:t>
             </a:r>
           </a:p>
           <a:p>
@@ -5168,7 +5343,19 @@
             </a:pPr>
             <a:r>
               <a:rPr lang="en-US" sz="1400"/>
-              <a:t>CARING is the key to success. Caring creates trust. Caring makes your clients happy and loyal. It’s amazing that in today’s competitive environment, only a few companies and individuals truly care about the people they serve. To crush in the marketplace always have your client’s best interest in mind. Think about how to make their buying experience so much better than it is right now.</a:t>
+              <a:t>Think about what you’ve learned after every important conversation, every book you read, every presentation you give, every project and period of your life. </a:t>
+            </a:r>
+            <a:r>
+              <a:rPr lang="en-US" sz="1400" b="1">
+                <a:solidFill>
+                  <a:srgbClr val="00B050"/>
+                </a:solidFill>
+              </a:rPr>
+              <a:t>Every mistake can be a learning opportunity</a:t>
+            </a:r>
+            <a:r>
+              <a:rPr lang="en-US" sz="1400"/>
+              <a:t>.</a:t>
             </a:r>
           </a:p>
           <a:p>
@@ -5177,8 +5364,62 @@
               <a:buAutoNum type="arabicPeriod"/>
             </a:pPr>
             <a:r>
-              <a:rPr lang="en-US" sz="1400"/>
-              <a:t>Use the Amazon school of marketing. Understand the pulse of the market. Use web for market research. Go on Amazon and check the most successful products in your category, carefully read the reviews, try to understand what are the hidden needs of clients in your niche.</a:t>
+              <a:rPr lang="en-US" sz="1400" b="1">
+                <a:solidFill>
+                  <a:srgbClr val="00B050"/>
+                </a:solidFill>
+              </a:rPr>
+              <a:t>Fall in love with your clients</a:t>
+            </a:r>
+            <a:r>
+              <a:rPr lang="en-US" sz="1400"/>
+              <a:t>, not with your own product or company. Focus on helping. "enlightened self-interest".</a:t>
+            </a:r>
+          </a:p>
+          <a:p>
+            <a:pPr marL="342900" indent="-342900">
+              <a:buFont typeface="+mj-lt"/>
+              <a:buAutoNum type="arabicPeriod"/>
+            </a:pPr>
+            <a:r>
+              <a:rPr lang="en-US" sz="1400"/>
+              <a:t>Life is all about the process, not just goals. Enjoy the process. Live the life of fulfillment.</a:t>
+            </a:r>
+          </a:p>
+          <a:p>
+            <a:pPr marL="342900" indent="-342900">
+              <a:buFont typeface="+mj-lt"/>
+              <a:buAutoNum type="arabicPeriod"/>
+            </a:pPr>
+            <a:r>
+              <a:rPr lang="en-US" sz="1400" b="1">
+                <a:solidFill>
+                  <a:srgbClr val="00B050"/>
+                </a:solidFill>
+              </a:rPr>
+              <a:t>CARING is the key to success</a:t>
+            </a:r>
+            <a:r>
+              <a:rPr lang="en-US" sz="1400"/>
+              <a:t>. Caring creates trust. Caring makes your clients happy and loyal. It’s amazing that in today’s competitive environment, only a few companies and individuals truly care about the people they serve. To crush in the marketplace always have your client’s best interest in mind. Think about how to make their buying experience so much better than it is right now.</a:t>
+            </a:r>
+          </a:p>
+          <a:p>
+            <a:pPr marL="342900" indent="-342900">
+              <a:buFont typeface="+mj-lt"/>
+              <a:buAutoNum type="arabicPeriod"/>
+            </a:pPr>
+            <a:r>
+              <a:rPr lang="en-US" sz="1400" b="1">
+                <a:solidFill>
+                  <a:srgbClr val="00B050"/>
+                </a:solidFill>
+              </a:rPr>
+              <a:t>Use web/Amazon for market research</a:t>
+            </a:r>
+            <a:r>
+              <a:rPr lang="en-US" sz="1400"/>
+              <a:t>. For example, go on Amazon and check the most successful products in your category, carefully read the reviews, try to understand what are the hidden needs of clients in your niche.</a:t>
             </a:r>
           </a:p>
         </p:txBody>
@@ -5213,7 +5454,7 @@
           <a:p>
             <a:r>
               <a:rPr lang="en-US" sz="1400">
-                <a:hlinkClick r:id="rId2"/>
+                <a:hlinkClick r:id="rId3"/>
               </a:rPr>
               <a:t>https://www.abraham.com</a:t>
             </a:r>
@@ -5236,7 +5477,7 @@
           <p:nvPr/>
         </p:nvPicPr>
         <p:blipFill rotWithShape="1">
-          <a:blip r:embed="rId3" cstate="email">
+          <a:blip r:embed="rId4" cstate="email">
             <a:extLst>
               <a:ext uri="{28A0092B-C50C-407E-A947-70E740481C1C}">
                 <a14:useLocalDpi xmlns:a14="http://schemas.microsoft.com/office/drawing/2010/main"/>
@@ -5248,7 +5489,7 @@
         </p:blipFill>
         <p:spPr bwMode="auto">
           <a:xfrm>
-            <a:off x="1125794" y="1259924"/>
+            <a:off x="325900" y="905705"/>
             <a:ext cx="1527610" cy="2054493"/>
           </a:xfrm>
           <a:prstGeom prst="rect">
@@ -5280,8 +5521,8 @@
         </p:nvSpPr>
         <p:spPr>
           <a:xfrm>
-            <a:off x="469158" y="3461594"/>
-            <a:ext cx="3012710" cy="738664"/>
+            <a:off x="94407" y="3034906"/>
+            <a:ext cx="2251588" cy="954107"/>
           </a:xfrm>
           <a:prstGeom prst="rect">
             <a:avLst/>
@@ -5296,19 +5537,25 @@
           <a:p>
             <a:r>
               <a:rPr lang="en-US" sz="1400"/>
-              <a:t>The 21.7 Billion Dollar Man and </a:t>
-            </a:r>
-          </a:p>
-          <a:p>
-            <a:r>
-              <a:rPr lang="en-US" sz="1400"/>
-              <a:t>One of The Most Effective Strategic </a:t>
-            </a:r>
-          </a:p>
-          <a:p>
-            <a:r>
-              <a:rPr lang="en-US" sz="1400"/>
-              <a:t>Marketing &amp; Business Growth Experts</a:t>
+              <a:t>The 21.7 Billion Dollar Man</a:t>
+            </a:r>
+          </a:p>
+          <a:p>
+            <a:r>
+              <a:rPr lang="en-US" sz="1400"/>
+              <a:t>One of The Most Effective </a:t>
+            </a:r>
+          </a:p>
+          <a:p>
+            <a:r>
+              <a:rPr lang="en-US" sz="1400"/>
+              <a:t>Strategic Marketing &amp; </a:t>
+            </a:r>
+          </a:p>
+          <a:p>
+            <a:r>
+              <a:rPr lang="en-US" sz="1400"/>
+              <a:t>Business Growth Experts</a:t>
             </a:r>
           </a:p>
         </p:txBody>
@@ -5328,7 +5575,7 @@
           <p:nvPr/>
         </p:nvPicPr>
         <p:blipFill>
-          <a:blip r:embed="rId4">
+          <a:blip r:embed="rId5" cstate="email">
             <a:extLst>
               <a:ext uri="{28A0092B-C50C-407E-A947-70E740481C1C}">
                 <a14:useLocalDpi xmlns:a14="http://schemas.microsoft.com/office/drawing/2010/main"/>
@@ -5342,8 +5589,8 @@
         </p:blipFill>
         <p:spPr bwMode="auto">
           <a:xfrm>
-            <a:off x="1975513" y="4494611"/>
-            <a:ext cx="1420908" cy="2107196"/>
+            <a:off x="1274362" y="5073804"/>
+            <a:ext cx="1049883" cy="1556969"/>
           </a:xfrm>
           <a:prstGeom prst="rect">
             <a:avLst/>
@@ -5375,7 +5622,7 @@
           <p:nvPr/>
         </p:nvPicPr>
         <p:blipFill>
-          <a:blip r:embed="rId5" cstate="email">
+          <a:blip r:embed="rId6" cstate="email">
             <a:extLst>
               <a:ext uri="{28A0092B-C50C-407E-A947-70E740481C1C}">
                 <a14:useLocalDpi xmlns:a14="http://schemas.microsoft.com/office/drawing/2010/main"/>
@@ -5388,8 +5635,8 @@
         </p:blipFill>
         <p:spPr>
           <a:xfrm>
-            <a:off x="398582" y="4494611"/>
-            <a:ext cx="1390990" cy="2136163"/>
+            <a:off x="182138" y="5073805"/>
+            <a:ext cx="1013840" cy="1556969"/>
           </a:xfrm>
           <a:prstGeom prst="rect">
             <a:avLst/>
@@ -5400,6 +5647,1899 @@
     <p:extLst>
       <p:ext uri="{BB962C8B-B14F-4D97-AF65-F5344CB8AC3E}">
         <p14:creationId xmlns:p14="http://schemas.microsoft.com/office/powerpoint/2010/main" val="3108894200"/>
+      </p:ext>
+    </p:extLst>
+  </p:cSld>
+  <p:clrMapOvr>
+    <a:masterClrMapping/>
+  </p:clrMapOvr>
+</p:sld>
+</file>
+
+<file path=ppt/slides/slide12.xml><?xml version="1.0" encoding="utf-8"?>
+<p:sld xmlns:a="http://schemas.openxmlformats.org/drawingml/2006/main" xmlns:r="http://schemas.openxmlformats.org/officeDocument/2006/relationships" xmlns:p="http://schemas.openxmlformats.org/presentationml/2006/main">
+  <p:cSld>
+    <p:spTree>
+      <p:nvGrpSpPr>
+        <p:cNvPr id="1" name=""/>
+        <p:cNvGrpSpPr/>
+        <p:nvPr/>
+      </p:nvGrpSpPr>
+      <p:grpSpPr>
+        <a:xfrm>
+          <a:off x="0" y="0"/>
+          <a:ext cx="0" cy="0"/>
+          <a:chOff x="0" y="0"/>
+          <a:chExt cx="0" cy="0"/>
+        </a:xfrm>
+      </p:grpSpPr>
+      <p:sp>
+        <p:nvSpPr>
+          <p:cNvPr id="2" name="TextBox 1">
+            <a:extLst>
+              <a:ext uri="{FF2B5EF4-FFF2-40B4-BE49-F238E27FC236}">
+                <a16:creationId xmlns:a16="http://schemas.microsoft.com/office/drawing/2014/main" id="{59C5136C-10BA-4B41-BFCF-2DE090D80C95}"/>
+              </a:ext>
+            </a:extLst>
+          </p:cNvPr>
+          <p:cNvSpPr txBox="1"/>
+          <p:nvPr/>
+        </p:nvSpPr>
+        <p:spPr>
+          <a:xfrm>
+            <a:off x="0" y="0"/>
+            <a:ext cx="2500829" cy="523220"/>
+          </a:xfrm>
+          <a:prstGeom prst="rect">
+            <a:avLst/>
+          </a:prstGeom>
+          <a:noFill/>
+        </p:spPr>
+        <p:txBody>
+          <a:bodyPr wrap="square" rtlCol="0">
+            <a:spAutoFit/>
+          </a:bodyPr>
+          <a:lstStyle/>
+          <a:p>
+            <a:r>
+              <a:rPr lang="en-US" sz="2800" b="1"/>
+              <a:t>Ken McCarthy</a:t>
+            </a:r>
+          </a:p>
+        </p:txBody>
+      </p:sp>
+      <p:sp>
+        <p:nvSpPr>
+          <p:cNvPr id="3" name="TextBox 2">
+            <a:extLst>
+              <a:ext uri="{FF2B5EF4-FFF2-40B4-BE49-F238E27FC236}">
+                <a16:creationId xmlns:a16="http://schemas.microsoft.com/office/drawing/2014/main" id="{C2DCDBC0-6AA0-BFBE-C6C6-817A0C57CC10}"/>
+              </a:ext>
+            </a:extLst>
+          </p:cNvPr>
+          <p:cNvSpPr txBox="1"/>
+          <p:nvPr/>
+        </p:nvSpPr>
+        <p:spPr>
+          <a:xfrm>
+            <a:off x="125620" y="2368084"/>
+            <a:ext cx="2375209" cy="738664"/>
+          </a:xfrm>
+          <a:prstGeom prst="rect">
+            <a:avLst/>
+          </a:prstGeom>
+          <a:noFill/>
+        </p:spPr>
+        <p:txBody>
+          <a:bodyPr wrap="square" rtlCol="0">
+            <a:spAutoFit/>
+          </a:bodyPr>
+          <a:lstStyle/>
+          <a:p>
+            <a:r>
+              <a:rPr lang="en-US" sz="1400"/>
+              <a:t>American activist, educator, entrepreneur, and Internet commercialization pioneer.</a:t>
+            </a:r>
+          </a:p>
+        </p:txBody>
+      </p:sp>
+      <p:pic>
+        <p:nvPicPr>
+          <p:cNvPr id="1026" name="Picture 2">
+            <a:extLst>
+              <a:ext uri="{FF2B5EF4-FFF2-40B4-BE49-F238E27FC236}">
+                <a16:creationId xmlns:a16="http://schemas.microsoft.com/office/drawing/2014/main" id="{FCE2743D-9B83-54D7-0F20-4831FE611DDA}"/>
+              </a:ext>
+            </a:extLst>
+          </p:cNvPr>
+          <p:cNvPicPr>
+            <a:picLocks noChangeAspect="1" noChangeArrowheads="1"/>
+          </p:cNvPicPr>
+          <p:nvPr/>
+        </p:nvPicPr>
+        <p:blipFill>
+          <a:blip r:embed="rId2" cstate="email">
+            <a:extLst>
+              <a:ext uri="{28A0092B-C50C-407E-A947-70E740481C1C}">
+                <a14:useLocalDpi xmlns:a14="http://schemas.microsoft.com/office/drawing/2010/main"/>
+              </a:ext>
+            </a:extLst>
+          </a:blip>
+          <a:srcRect/>
+          <a:stretch>
+            <a:fillRect/>
+          </a:stretch>
+        </p:blipFill>
+        <p:spPr bwMode="auto">
+          <a:xfrm>
+            <a:off x="292888" y="651902"/>
+            <a:ext cx="1587500" cy="1587500"/>
+          </a:xfrm>
+          <a:prstGeom prst="rect">
+            <a:avLst/>
+          </a:prstGeom>
+          <a:noFill/>
+          <a:extLst>
+            <a:ext uri="{909E8E84-426E-40DD-AFC4-6F175D3DCCD1}">
+              <a14:hiddenFill xmlns:a14="http://schemas.microsoft.com/office/drawing/2010/main">
+                <a:solidFill>
+                  <a:srgbClr val="FFFFFF"/>
+                </a:solidFill>
+              </a14:hiddenFill>
+            </a:ext>
+          </a:extLst>
+        </p:spPr>
+      </p:pic>
+      <p:sp>
+        <p:nvSpPr>
+          <p:cNvPr id="4" name="TextBox 3">
+            <a:extLst>
+              <a:ext uri="{FF2B5EF4-FFF2-40B4-BE49-F238E27FC236}">
+                <a16:creationId xmlns:a16="http://schemas.microsoft.com/office/drawing/2014/main" id="{13675D2D-8FD0-CF9C-1FD2-C3FEE0E5A933}"/>
+              </a:ext>
+            </a:extLst>
+          </p:cNvPr>
+          <p:cNvSpPr txBox="1"/>
+          <p:nvPr/>
+        </p:nvSpPr>
+        <p:spPr>
+          <a:xfrm>
+            <a:off x="292887" y="3106748"/>
+            <a:ext cx="3922273" cy="1615827"/>
+          </a:xfrm>
+          <a:prstGeom prst="rect">
+            <a:avLst/>
+          </a:prstGeom>
+          <a:noFill/>
+        </p:spPr>
+        <p:txBody>
+          <a:bodyPr wrap="square" rtlCol="0">
+            <a:spAutoFit/>
+          </a:bodyPr>
+          <a:lstStyle/>
+          <a:p>
+            <a:r>
+              <a:rPr lang="en-US" sz="1100"/>
+              <a:t>.. </a:t>
+            </a:r>
+            <a:r>
+              <a:rPr lang="en-US" sz="1100">
+                <a:hlinkClick r:id="rId3"/>
+              </a:rPr>
+              <a:t>https://www.kenmccarthy.com</a:t>
+            </a:r>
+            <a:endParaRPr lang="en-US" sz="1100"/>
+          </a:p>
+          <a:p>
+            <a:r>
+              <a:rPr lang="en-US" sz="1100"/>
+              <a:t>.. </a:t>
+            </a:r>
+            <a:r>
+              <a:rPr lang="en-US" sz="1100">
+                <a:hlinkClick r:id="rId4"/>
+              </a:rPr>
+              <a:t>https://en.wikipedia.org/wiki/Ken_McCarthy</a:t>
+            </a:r>
+            <a:endParaRPr lang="en-US" sz="1100"/>
+          </a:p>
+          <a:p>
+            <a:r>
+              <a:rPr lang="en-US" sz="1100"/>
+              <a:t>.. </a:t>
+            </a:r>
+            <a:r>
+              <a:rPr lang="en-US" sz="1100">
+                <a:hlinkClick r:id="rId5"/>
+              </a:rPr>
+              <a:t>https://thesystemblog.com</a:t>
+            </a:r>
+            <a:endParaRPr lang="en-US" sz="1100"/>
+          </a:p>
+          <a:p>
+            <a:r>
+              <a:rPr lang="en-US" sz="1100"/>
+              <a:t>.. </a:t>
+            </a:r>
+            <a:r>
+              <a:rPr lang="en-US" sz="1100">
+                <a:hlinkClick r:id="rId6"/>
+              </a:rPr>
+              <a:t>https://www.thesystemclub.com</a:t>
+            </a:r>
+            <a:endParaRPr lang="en-US" sz="1100"/>
+          </a:p>
+          <a:p>
+            <a:r>
+              <a:rPr lang="en-US" sz="1100"/>
+              <a:t>.. </a:t>
+            </a:r>
+            <a:r>
+              <a:rPr lang="en-US" sz="1100">
+                <a:hlinkClick r:id="rId7"/>
+              </a:rPr>
+              <a:t>https://www.kenscatalog.com</a:t>
+            </a:r>
+            <a:endParaRPr lang="en-US" sz="1100"/>
+          </a:p>
+          <a:p>
+            <a:r>
+              <a:rPr lang="en-US" sz="1100"/>
+              <a:t>.. </a:t>
+            </a:r>
+            <a:r>
+              <a:rPr lang="en-US" sz="1100">
+                <a:hlinkClick r:id="rId8"/>
+              </a:rPr>
+              <a:t>https://www.realecontv.com/videos/in-humor-truth</a:t>
+            </a:r>
+            <a:endParaRPr lang="en-US" sz="1100"/>
+          </a:p>
+          <a:p>
+            <a:r>
+              <a:rPr lang="en-US" sz="1100"/>
+              <a:t>.. </a:t>
+            </a:r>
+            <a:r>
+              <a:rPr lang="en-US" sz="1100">
+                <a:hlinkClick r:id="rId9"/>
+              </a:rPr>
+              <a:t>https://www.20sjazz.com</a:t>
+            </a:r>
+            <a:endParaRPr lang="en-US" sz="1100"/>
+          </a:p>
+          <a:p>
+            <a:r>
+              <a:rPr lang="en-US" sz="1100"/>
+              <a:t>.. </a:t>
+            </a:r>
+            <a:r>
+              <a:rPr lang="en-US" sz="1100">
+                <a:hlinkClick r:id="rId10"/>
+              </a:rPr>
+              <a:t>https://www.jazzonthetube.com</a:t>
+            </a:r>
+            <a:endParaRPr lang="en-US" sz="1100"/>
+          </a:p>
+          <a:p>
+            <a:r>
+              <a:rPr lang="en-US" sz="1100"/>
+              <a:t>.. etc. etc.</a:t>
+            </a:r>
+          </a:p>
+        </p:txBody>
+      </p:sp>
+      <p:pic>
+        <p:nvPicPr>
+          <p:cNvPr id="1028" name="Picture 4" descr="The Nuremberg Code: 75th Anniversary Commemorative Edition (Multi-Language Edition) Kindle Edition">
+            <a:extLst>
+              <a:ext uri="{FF2B5EF4-FFF2-40B4-BE49-F238E27FC236}">
+                <a16:creationId xmlns:a16="http://schemas.microsoft.com/office/drawing/2014/main" id="{D4759DA6-291F-28E9-6038-4953EC6F0918}"/>
+              </a:ext>
+            </a:extLst>
+          </p:cNvPr>
+          <p:cNvPicPr>
+            <a:picLocks noChangeAspect="1" noChangeArrowheads="1"/>
+          </p:cNvPicPr>
+          <p:nvPr/>
+        </p:nvPicPr>
+        <p:blipFill>
+          <a:blip r:embed="rId11" cstate="email">
+            <a:extLst>
+              <a:ext uri="{28A0092B-C50C-407E-A947-70E740481C1C}">
+                <a14:useLocalDpi xmlns:a14="http://schemas.microsoft.com/office/drawing/2010/main"/>
+              </a:ext>
+            </a:extLst>
+          </a:blip>
+          <a:srcRect/>
+          <a:stretch>
+            <a:fillRect/>
+          </a:stretch>
+        </p:blipFill>
+        <p:spPr bwMode="auto">
+          <a:xfrm>
+            <a:off x="2750651" y="5391612"/>
+            <a:ext cx="878469" cy="1317704"/>
+          </a:xfrm>
+          <a:prstGeom prst="rect">
+            <a:avLst/>
+          </a:prstGeom>
+          <a:noFill/>
+          <a:extLst>
+            <a:ext uri="{909E8E84-426E-40DD-AFC4-6F175D3DCCD1}">
+              <a14:hiddenFill xmlns:a14="http://schemas.microsoft.com/office/drawing/2010/main">
+                <a:solidFill>
+                  <a:srgbClr val="FFFFFF"/>
+                </a:solidFill>
+              </a14:hiddenFill>
+            </a:ext>
+          </a:extLst>
+        </p:spPr>
+      </p:pic>
+      <p:pic>
+        <p:nvPicPr>
+          <p:cNvPr id="1030" name="Picture 6" descr="Unraveling the CoVid Con: The 2020-2022 Blog Posts of Ken McCarthy - How One Marketer Exposed The Truth When It Mattered Kindle Edition">
+            <a:extLst>
+              <a:ext uri="{FF2B5EF4-FFF2-40B4-BE49-F238E27FC236}">
+                <a16:creationId xmlns:a16="http://schemas.microsoft.com/office/drawing/2014/main" id="{46E45389-CA8F-5BAF-1173-748ED16A9AFE}"/>
+              </a:ext>
+            </a:extLst>
+          </p:cNvPr>
+          <p:cNvPicPr>
+            <a:picLocks noChangeAspect="1" noChangeArrowheads="1"/>
+          </p:cNvPicPr>
+          <p:nvPr/>
+        </p:nvPicPr>
+        <p:blipFill>
+          <a:blip r:embed="rId12" cstate="email">
+            <a:extLst>
+              <a:ext uri="{28A0092B-C50C-407E-A947-70E740481C1C}">
+                <a14:useLocalDpi xmlns:a14="http://schemas.microsoft.com/office/drawing/2010/main"/>
+              </a:ext>
+            </a:extLst>
+          </a:blip>
+          <a:srcRect/>
+          <a:stretch>
+            <a:fillRect/>
+          </a:stretch>
+        </p:blipFill>
+        <p:spPr bwMode="auto">
+          <a:xfrm>
+            <a:off x="1872182" y="5391612"/>
+            <a:ext cx="878468" cy="1317702"/>
+          </a:xfrm>
+          <a:prstGeom prst="rect">
+            <a:avLst/>
+          </a:prstGeom>
+          <a:noFill/>
+          <a:extLst>
+            <a:ext uri="{909E8E84-426E-40DD-AFC4-6F175D3DCCD1}">
+              <a14:hiddenFill xmlns:a14="http://schemas.microsoft.com/office/drawing/2010/main">
+                <a:solidFill>
+                  <a:srgbClr val="FFFFFF"/>
+                </a:solidFill>
+              </a14:hiddenFill>
+            </a:ext>
+          </a:extLst>
+        </p:spPr>
+      </p:pic>
+      <p:pic>
+        <p:nvPicPr>
+          <p:cNvPr id="1032" name="Picture 8" descr="System Secrets - Maximum Money in Minimum Time Online Kindle Edition">
+            <a:extLst>
+              <a:ext uri="{FF2B5EF4-FFF2-40B4-BE49-F238E27FC236}">
+                <a16:creationId xmlns:a16="http://schemas.microsoft.com/office/drawing/2014/main" id="{8E61EE0D-8B9D-F630-614C-4AEFB029FEBE}"/>
+              </a:ext>
+            </a:extLst>
+          </p:cNvPr>
+          <p:cNvPicPr>
+            <a:picLocks noChangeAspect="1" noChangeArrowheads="1"/>
+          </p:cNvPicPr>
+          <p:nvPr/>
+        </p:nvPicPr>
+        <p:blipFill>
+          <a:blip r:embed="rId13" cstate="email">
+            <a:extLst>
+              <a:ext uri="{28A0092B-C50C-407E-A947-70E740481C1C}">
+                <a14:useLocalDpi xmlns:a14="http://schemas.microsoft.com/office/drawing/2010/main"/>
+              </a:ext>
+            </a:extLst>
+          </a:blip>
+          <a:srcRect/>
+          <a:stretch>
+            <a:fillRect/>
+          </a:stretch>
+        </p:blipFill>
+        <p:spPr bwMode="auto">
+          <a:xfrm>
+            <a:off x="70638" y="5391614"/>
+            <a:ext cx="878468" cy="1317702"/>
+          </a:xfrm>
+          <a:prstGeom prst="rect">
+            <a:avLst/>
+          </a:prstGeom>
+          <a:noFill/>
+          <a:extLst>
+            <a:ext uri="{909E8E84-426E-40DD-AFC4-6F175D3DCCD1}">
+              <a14:hiddenFill xmlns:a14="http://schemas.microsoft.com/office/drawing/2010/main">
+                <a:solidFill>
+                  <a:srgbClr val="FFFFFF"/>
+                </a:solidFill>
+              </a14:hiddenFill>
+            </a:ext>
+          </a:extLst>
+        </p:spPr>
+      </p:pic>
+      <p:pic>
+        <p:nvPicPr>
+          <p:cNvPr id="1034" name="Picture 10" descr="The System Club Letters - 57 Big Ideas to Transform Your Business and Your Life Kindle Edition">
+            <a:extLst>
+              <a:ext uri="{FF2B5EF4-FFF2-40B4-BE49-F238E27FC236}">
+                <a16:creationId xmlns:a16="http://schemas.microsoft.com/office/drawing/2014/main" id="{B02F88B6-E42E-D898-0BA6-C9C608F22FDB}"/>
+              </a:ext>
+            </a:extLst>
+          </p:cNvPr>
+          <p:cNvPicPr>
+            <a:picLocks noChangeAspect="1" noChangeArrowheads="1"/>
+          </p:cNvPicPr>
+          <p:nvPr/>
+        </p:nvPicPr>
+        <p:blipFill>
+          <a:blip r:embed="rId14" cstate="email">
+            <a:extLst>
+              <a:ext uri="{28A0092B-C50C-407E-A947-70E740481C1C}">
+                <a14:useLocalDpi xmlns:a14="http://schemas.microsoft.com/office/drawing/2010/main"/>
+              </a:ext>
+            </a:extLst>
+          </a:blip>
+          <a:srcRect/>
+          <a:stretch>
+            <a:fillRect/>
+          </a:stretch>
+        </p:blipFill>
+        <p:spPr bwMode="auto">
+          <a:xfrm>
+            <a:off x="993712" y="5391612"/>
+            <a:ext cx="878470" cy="1317704"/>
+          </a:xfrm>
+          <a:prstGeom prst="rect">
+            <a:avLst/>
+          </a:prstGeom>
+          <a:noFill/>
+          <a:extLst>
+            <a:ext uri="{909E8E84-426E-40DD-AFC4-6F175D3DCCD1}">
+              <a14:hiddenFill xmlns:a14="http://schemas.microsoft.com/office/drawing/2010/main">
+                <a:solidFill>
+                  <a:srgbClr val="FFFFFF"/>
+                </a:solidFill>
+              </a14:hiddenFill>
+            </a:ext>
+          </a:extLst>
+        </p:spPr>
+      </p:pic>
+      <p:pic>
+        <p:nvPicPr>
+          <p:cNvPr id="1036" name="Picture 12" descr="Financial Independence Day Blueprint Kindle Edition">
+            <a:extLst>
+              <a:ext uri="{FF2B5EF4-FFF2-40B4-BE49-F238E27FC236}">
+                <a16:creationId xmlns:a16="http://schemas.microsoft.com/office/drawing/2014/main" id="{7A090784-4905-E903-04AE-EE91E3036E98}"/>
+              </a:ext>
+            </a:extLst>
+          </p:cNvPr>
+          <p:cNvPicPr>
+            <a:picLocks noChangeAspect="1" noChangeArrowheads="1"/>
+          </p:cNvPicPr>
+          <p:nvPr/>
+        </p:nvPicPr>
+        <p:blipFill>
+          <a:blip r:embed="rId15" cstate="email">
+            <a:extLst>
+              <a:ext uri="{28A0092B-C50C-407E-A947-70E740481C1C}">
+                <a14:useLocalDpi xmlns:a14="http://schemas.microsoft.com/office/drawing/2010/main"/>
+              </a:ext>
+            </a:extLst>
+          </a:blip>
+          <a:srcRect/>
+          <a:stretch>
+            <a:fillRect/>
+          </a:stretch>
+        </p:blipFill>
+        <p:spPr bwMode="auto">
+          <a:xfrm>
+            <a:off x="3629119" y="5391610"/>
+            <a:ext cx="878469" cy="1317704"/>
+          </a:xfrm>
+          <a:prstGeom prst="rect">
+            <a:avLst/>
+          </a:prstGeom>
+          <a:noFill/>
+          <a:extLst>
+            <a:ext uri="{909E8E84-426E-40DD-AFC4-6F175D3DCCD1}">
+              <a14:hiddenFill xmlns:a14="http://schemas.microsoft.com/office/drawing/2010/main">
+                <a:solidFill>
+                  <a:srgbClr val="FFFFFF"/>
+                </a:solidFill>
+              </a14:hiddenFill>
+            </a:ext>
+          </a:extLst>
+        </p:spPr>
+      </p:pic>
+      <p:pic>
+        <p:nvPicPr>
+          <p:cNvPr id="1038" name="Picture 14">
+            <a:extLst>
+              <a:ext uri="{FF2B5EF4-FFF2-40B4-BE49-F238E27FC236}">
+                <a16:creationId xmlns:a16="http://schemas.microsoft.com/office/drawing/2014/main" id="{EEFD10C3-4083-19FD-F88C-7F0732FD07E3}"/>
+              </a:ext>
+            </a:extLst>
+          </p:cNvPr>
+          <p:cNvPicPr>
+            <a:picLocks noChangeAspect="1" noChangeArrowheads="1"/>
+          </p:cNvPicPr>
+          <p:nvPr/>
+        </p:nvPicPr>
+        <p:blipFill>
+          <a:blip r:embed="rId16">
+            <a:extLst>
+              <a:ext uri="{28A0092B-C50C-407E-A947-70E740481C1C}">
+                <a14:useLocalDpi xmlns:a14="http://schemas.microsoft.com/office/drawing/2010/main"/>
+              </a:ext>
+            </a:extLst>
+          </a:blip>
+          <a:srcRect/>
+          <a:stretch>
+            <a:fillRect/>
+          </a:stretch>
+        </p:blipFill>
+        <p:spPr bwMode="auto">
+          <a:xfrm>
+            <a:off x="4559629" y="5341484"/>
+            <a:ext cx="1489537" cy="1477328"/>
+          </a:xfrm>
+          <a:prstGeom prst="rect">
+            <a:avLst/>
+          </a:prstGeom>
+          <a:noFill/>
+          <a:extLst>
+            <a:ext uri="{909E8E84-426E-40DD-AFC4-6F175D3DCCD1}">
+              <a14:hiddenFill xmlns:a14="http://schemas.microsoft.com/office/drawing/2010/main">
+                <a:solidFill>
+                  <a:srgbClr val="FFFFFF"/>
+                </a:solidFill>
+              </a14:hiddenFill>
+            </a:ext>
+          </a:extLst>
+        </p:spPr>
+      </p:pic>
+      <p:sp>
+        <p:nvSpPr>
+          <p:cNvPr id="5" name="TextBox 4">
+            <a:extLst>
+              <a:ext uri="{FF2B5EF4-FFF2-40B4-BE49-F238E27FC236}">
+                <a16:creationId xmlns:a16="http://schemas.microsoft.com/office/drawing/2014/main" id="{17B2BE3F-C137-EF49-2335-0846FD05F1F1}"/>
+              </a:ext>
+            </a:extLst>
+          </p:cNvPr>
+          <p:cNvSpPr txBox="1"/>
+          <p:nvPr/>
+        </p:nvSpPr>
+        <p:spPr>
+          <a:xfrm>
+            <a:off x="4438946" y="793568"/>
+            <a:ext cx="7627434" cy="3754874"/>
+          </a:xfrm>
+          <a:prstGeom prst="rect">
+            <a:avLst/>
+          </a:prstGeom>
+          <a:solidFill>
+            <a:schemeClr val="accent4">
+              <a:lumMod val="20000"/>
+              <a:lumOff val="80000"/>
+            </a:schemeClr>
+          </a:solidFill>
+          <a:ln>
+            <a:solidFill>
+              <a:srgbClr val="FF0000"/>
+            </a:solidFill>
+          </a:ln>
+        </p:spPr>
+        <p:txBody>
+          <a:bodyPr wrap="square" rtlCol="0">
+            <a:spAutoFit/>
+          </a:bodyPr>
+          <a:lstStyle/>
+          <a:p>
+            <a:pPr marL="171450" indent="-171450">
+              <a:buFont typeface="Arial" panose="020B0604020202020204" pitchFamily="34" charset="0"/>
+              <a:buChar char="•"/>
+            </a:pPr>
+            <a:r>
+              <a:rPr lang="en-US" sz="1400"/>
+              <a:t>McCarthy is best known for his pioneering work in the movement to commercialize the Internet in 1990s – email advertising, banner ads, pay-per-click advertising, Internet video, click-through rates as the key metric</a:t>
+            </a:r>
+          </a:p>
+          <a:p>
+            <a:pPr marL="171450" indent="-171450">
+              <a:buFont typeface="Arial" panose="020B0604020202020204" pitchFamily="34" charset="0"/>
+              <a:buChar char="•"/>
+            </a:pPr>
+            <a:r>
+              <a:rPr lang="en-US" sz="1400"/>
+              <a:t>In 1994, he organized and sponsored the first conference ever held on potential commercial applications of the World Wide Web. McCarthy described in detail the new content marketing and distribution model (The Long Tail)</a:t>
+            </a:r>
+          </a:p>
+          <a:p>
+            <a:pPr marL="171450" indent="-171450">
+              <a:buFont typeface="Arial" panose="020B0604020202020204" pitchFamily="34" charset="0"/>
+              <a:buChar char="•"/>
+            </a:pPr>
+            <a:r>
+              <a:rPr lang="en-US" sz="1400"/>
+              <a:t>In 1995, McCarthy organized and sponsored a conference on the topic of using the web as a local publishing medium to assist community building. Many projects resulted from that (New York, New Orleans, etc.)</a:t>
+            </a:r>
+          </a:p>
+          <a:p>
+            <a:pPr marL="171450" indent="-171450">
+              <a:buFont typeface="Arial" panose="020B0604020202020204" pitchFamily="34" charset="0"/>
+              <a:buChar char="•"/>
+            </a:pPr>
+            <a:r>
+              <a:rPr lang="en-US" sz="1400"/>
+              <a:t>System Seminar (2000 – 2010), The System</a:t>
+            </a:r>
+          </a:p>
+          <a:p>
+            <a:pPr marL="171450" indent="-171450">
+              <a:buFont typeface="Arial" panose="020B0604020202020204" pitchFamily="34" charset="0"/>
+              <a:buChar char="•"/>
+            </a:pPr>
+            <a:r>
+              <a:rPr lang="en-US" sz="1400"/>
+              <a:t>Internet video publishing, The System Video Blog</a:t>
+            </a:r>
+          </a:p>
+          <a:p>
+            <a:pPr marL="171450" indent="-171450">
+              <a:buFont typeface="Arial" panose="020B0604020202020204" pitchFamily="34" charset="0"/>
+              <a:buChar char="•"/>
+            </a:pPr>
+            <a:r>
+              <a:rPr lang="en-US" sz="1400"/>
+              <a:t>Music industry, digital production, </a:t>
+            </a:r>
+            <a:r>
+              <a:rPr lang="en-US" sz="1400">
+                <a:hlinkClick r:id="rId10"/>
+              </a:rPr>
+              <a:t>https://www.jazzonthetube.com</a:t>
+            </a:r>
+            <a:endParaRPr lang="en-US" sz="1400"/>
+          </a:p>
+          <a:p>
+            <a:pPr marL="171450" indent="-171450">
+              <a:buFont typeface="Arial" panose="020B0604020202020204" pitchFamily="34" charset="0"/>
+              <a:buChar char="•"/>
+            </a:pPr>
+            <a:r>
+              <a:rPr lang="en-US" sz="1400"/>
+              <a:t>Communications consultant to Bankers Trust and First Boston</a:t>
+            </a:r>
+          </a:p>
+          <a:p>
+            <a:pPr marL="171450" indent="-171450">
+              <a:buFont typeface="Arial" panose="020B0604020202020204" pitchFamily="34" charset="0"/>
+              <a:buChar char="•"/>
+            </a:pPr>
+            <a:r>
+              <a:rPr lang="en-US" sz="1400"/>
+              <a:t>Published a large number of articles, several books</a:t>
+            </a:r>
+          </a:p>
+          <a:p>
+            <a:pPr marL="171450" indent="-171450">
+              <a:buFont typeface="Arial" panose="020B0604020202020204" pitchFamily="34" charset="0"/>
+              <a:buChar char="•"/>
+            </a:pPr>
+            <a:r>
+              <a:rPr lang="en-US" sz="1400"/>
+              <a:t>In 1999, McCarthy collaborated with filmmaker Rick Goldsmith to create an online archive[27] of the work of American investigative journalist George Seldes (1890–1995) in support of Goldsmith's Academy Award-nominated film Tell the Truth and Run: George Seldes and the American Press.</a:t>
+            </a:r>
+          </a:p>
+        </p:txBody>
+      </p:sp>
+      <p:sp>
+        <p:nvSpPr>
+          <p:cNvPr id="6" name="TextBox 5">
+            <a:extLst>
+              <a:ext uri="{FF2B5EF4-FFF2-40B4-BE49-F238E27FC236}">
+                <a16:creationId xmlns:a16="http://schemas.microsoft.com/office/drawing/2014/main" id="{97E18216-141F-25FF-ACEC-7D03EF63ACE6}"/>
+              </a:ext>
+            </a:extLst>
+          </p:cNvPr>
+          <p:cNvSpPr txBox="1"/>
+          <p:nvPr/>
+        </p:nvSpPr>
+        <p:spPr>
+          <a:xfrm>
+            <a:off x="4438946" y="261610"/>
+            <a:ext cx="4705054" cy="523220"/>
+          </a:xfrm>
+          <a:prstGeom prst="rect">
+            <a:avLst/>
+          </a:prstGeom>
+          <a:noFill/>
+        </p:spPr>
+        <p:txBody>
+          <a:bodyPr wrap="square" rtlCol="0">
+            <a:spAutoFit/>
+          </a:bodyPr>
+          <a:lstStyle/>
+          <a:p>
+            <a:r>
+              <a:rPr lang="en-US" sz="1400"/>
+              <a:t>"When people go to a web page, the thing that they want more than anything else is instant clarity."  - Ken McCarthy</a:t>
+            </a:r>
+          </a:p>
+        </p:txBody>
+      </p:sp>
+      <p:sp>
+        <p:nvSpPr>
+          <p:cNvPr id="7" name="TextBox 6">
+            <a:extLst>
+              <a:ext uri="{FF2B5EF4-FFF2-40B4-BE49-F238E27FC236}">
+                <a16:creationId xmlns:a16="http://schemas.microsoft.com/office/drawing/2014/main" id="{477010D0-6379-2E36-0086-95011CBACA96}"/>
+              </a:ext>
+            </a:extLst>
+          </p:cNvPr>
+          <p:cNvSpPr txBox="1"/>
+          <p:nvPr/>
+        </p:nvSpPr>
+        <p:spPr>
+          <a:xfrm>
+            <a:off x="6142836" y="4890266"/>
+            <a:ext cx="5923543" cy="1815882"/>
+          </a:xfrm>
+          <a:prstGeom prst="rect">
+            <a:avLst/>
+          </a:prstGeom>
+          <a:solidFill>
+            <a:schemeClr val="accent4">
+              <a:lumMod val="20000"/>
+              <a:lumOff val="80000"/>
+            </a:schemeClr>
+          </a:solidFill>
+          <a:ln>
+            <a:solidFill>
+              <a:srgbClr val="FF0000"/>
+            </a:solidFill>
+          </a:ln>
+        </p:spPr>
+        <p:txBody>
+          <a:bodyPr wrap="square" rtlCol="0">
+            <a:spAutoFit/>
+          </a:bodyPr>
+          <a:lstStyle/>
+          <a:p>
+            <a:r>
+              <a:rPr lang="en-US" sz="1400"/>
+              <a:t>"Write BULLETS that wound, with the only remedy coming from buying the product." - Ken McCarthy</a:t>
+            </a:r>
+          </a:p>
+          <a:p>
+            <a:endParaRPr lang="en-US" sz="1400"/>
+          </a:p>
+          <a:p>
+            <a:r>
+              <a:rPr lang="en-US" sz="1400"/>
+              <a:t>What the bullet bottom line?</a:t>
+            </a:r>
+          </a:p>
+          <a:p>
+            <a:r>
+              <a:rPr lang="en-US" sz="1400"/>
+              <a:t>.. Convert features to benefits to feeling</a:t>
+            </a:r>
+          </a:p>
+          <a:p>
+            <a:r>
+              <a:rPr lang="en-US" sz="1400"/>
+              <a:t>.. Bring facts to life</a:t>
+            </a:r>
+          </a:p>
+          <a:p>
+            <a:r>
+              <a:rPr lang="en-US" sz="1400"/>
+              <a:t>.. TRANSLATE</a:t>
+            </a:r>
+          </a:p>
+          <a:p>
+            <a:r>
+              <a:rPr lang="en-US" sz="1400"/>
+              <a:t>Customers don’t have time or energy to process your message…that’s your job</a:t>
+            </a:r>
+          </a:p>
+        </p:txBody>
+      </p:sp>
+    </p:spTree>
+    <p:extLst>
+      <p:ext uri="{BB962C8B-B14F-4D97-AF65-F5344CB8AC3E}">
+        <p14:creationId xmlns:p14="http://schemas.microsoft.com/office/powerpoint/2010/main" val="3607356973"/>
+      </p:ext>
+    </p:extLst>
+  </p:cSld>
+  <p:clrMapOvr>
+    <a:masterClrMapping/>
+  </p:clrMapOvr>
+</p:sld>
+</file>
+
+<file path=ppt/slides/slide13.xml><?xml version="1.0" encoding="utf-8"?>
+<p:sld xmlns:a="http://schemas.openxmlformats.org/drawingml/2006/main" xmlns:r="http://schemas.openxmlformats.org/officeDocument/2006/relationships" xmlns:p="http://schemas.openxmlformats.org/presentationml/2006/main">
+  <p:cSld>
+    <p:spTree>
+      <p:nvGrpSpPr>
+        <p:cNvPr id="1" name=""/>
+        <p:cNvGrpSpPr/>
+        <p:nvPr/>
+      </p:nvGrpSpPr>
+      <p:grpSpPr>
+        <a:xfrm>
+          <a:off x="0" y="0"/>
+          <a:ext cx="0" cy="0"/>
+          <a:chOff x="0" y="0"/>
+          <a:chExt cx="0" cy="0"/>
+        </a:xfrm>
+      </p:grpSpPr>
+      <p:sp>
+        <p:nvSpPr>
+          <p:cNvPr id="2" name="TextBox 1">
+            <a:extLst>
+              <a:ext uri="{FF2B5EF4-FFF2-40B4-BE49-F238E27FC236}">
+                <a16:creationId xmlns:a16="http://schemas.microsoft.com/office/drawing/2014/main" id="{93B9DC60-5A1D-4E4C-5992-53A419130EBB}"/>
+              </a:ext>
+            </a:extLst>
+          </p:cNvPr>
+          <p:cNvSpPr txBox="1"/>
+          <p:nvPr/>
+        </p:nvSpPr>
+        <p:spPr>
+          <a:xfrm>
+            <a:off x="1" y="0"/>
+            <a:ext cx="9095014" cy="523220"/>
+          </a:xfrm>
+          <a:prstGeom prst="rect">
+            <a:avLst/>
+          </a:prstGeom>
+          <a:noFill/>
+        </p:spPr>
+        <p:txBody>
+          <a:bodyPr wrap="square" rtlCol="0">
+            <a:spAutoFit/>
+          </a:bodyPr>
+          <a:lstStyle/>
+          <a:p>
+            <a:r>
+              <a:rPr lang="en-US" sz="2800" b="1"/>
+              <a:t>Ken McCarthy's Short List of top DM and copywriting books</a:t>
+            </a:r>
+          </a:p>
+        </p:txBody>
+      </p:sp>
+      <p:sp>
+        <p:nvSpPr>
+          <p:cNvPr id="3" name="TextBox 2">
+            <a:extLst>
+              <a:ext uri="{FF2B5EF4-FFF2-40B4-BE49-F238E27FC236}">
+                <a16:creationId xmlns:a16="http://schemas.microsoft.com/office/drawing/2014/main" id="{6024C392-B62B-6A61-E9D4-EEDD2FE02EC5}"/>
+              </a:ext>
+            </a:extLst>
+          </p:cNvPr>
+          <p:cNvSpPr txBox="1"/>
+          <p:nvPr/>
+        </p:nvSpPr>
+        <p:spPr>
+          <a:xfrm>
+            <a:off x="1959429" y="1460499"/>
+            <a:ext cx="5519057" cy="4616648"/>
+          </a:xfrm>
+          <a:prstGeom prst="rect">
+            <a:avLst/>
+          </a:prstGeom>
+          <a:solidFill>
+            <a:schemeClr val="accent4">
+              <a:lumMod val="20000"/>
+              <a:lumOff val="80000"/>
+            </a:schemeClr>
+          </a:solidFill>
+          <a:ln>
+            <a:solidFill>
+              <a:srgbClr val="FF0000"/>
+            </a:solidFill>
+          </a:ln>
+        </p:spPr>
+        <p:txBody>
+          <a:bodyPr wrap="square" rtlCol="0">
+            <a:spAutoFit/>
+          </a:bodyPr>
+          <a:lstStyle/>
+          <a:p>
+            <a:r>
+              <a:rPr lang="en-US" sz="1400"/>
+              <a:t>1. My Life in Advertising - Claude Hopkins</a:t>
+            </a:r>
+          </a:p>
+          <a:p>
+            <a:r>
+              <a:rPr lang="en-US" sz="1400"/>
+              <a:t>2. The Robert Collier Letter Book - Robert Collier</a:t>
+            </a:r>
+          </a:p>
+          <a:p>
+            <a:r>
+              <a:rPr lang="en-US" sz="1400"/>
+              <a:t>3. Tested Advertising Methods - John Caples</a:t>
+            </a:r>
+          </a:p>
+          <a:p>
+            <a:r>
+              <a:rPr lang="en-US" sz="1400"/>
+              <a:t>4. How to Write a Good Advertisement - Victor Schwab</a:t>
+            </a:r>
+          </a:p>
+          <a:p>
+            <a:r>
+              <a:rPr lang="en-US" sz="1400"/>
+              <a:t>5. Scientific Advertising - Claude Hopkins</a:t>
+            </a:r>
+          </a:p>
+          <a:p>
+            <a:r>
+              <a:rPr lang="en-US" sz="1400"/>
+              <a:t>6. My First Sixty Years in Advertising - Max Sackeheim</a:t>
+            </a:r>
+          </a:p>
+          <a:p>
+            <a:r>
+              <a:rPr lang="en-US" sz="1400"/>
+              <a:t>7. Breakthrough Advertising - Eugene Schwartz</a:t>
+            </a:r>
+          </a:p>
+          <a:p>
+            <a:r>
+              <a:rPr lang="en-US" sz="1400"/>
+              <a:t>8. Secrets of Successful Direct Mail - Richard Benson</a:t>
+            </a:r>
+          </a:p>
+          <a:p>
+            <a:r>
+              <a:rPr lang="en-US" sz="1400"/>
+              <a:t>9. Mail Order Know-How - Cecil Hoge, Sr.</a:t>
+            </a:r>
+          </a:p>
+          <a:p>
+            <a:r>
+              <a:rPr lang="en-US" sz="1400"/>
+              <a:t>10. Mail Order Moonlighting - Cecil Hoge, Sr.</a:t>
+            </a:r>
+          </a:p>
+          <a:p>
+            <a:r>
+              <a:rPr lang="en-US" sz="1400"/>
+              <a:t>11. Million Dollar Mailings - Denny Hatch</a:t>
+            </a:r>
+          </a:p>
+          <a:p>
+            <a:r>
+              <a:rPr lang="en-US" sz="1400"/>
+              <a:t>12. Method Marketing - Denny Hatch</a:t>
+            </a:r>
+          </a:p>
+          <a:p>
+            <a:r>
+              <a:rPr lang="en-US" sz="1400"/>
+              <a:t>13. 2,239 Tested Secrets for Direct Marketing Success - Denny Hatch</a:t>
+            </a:r>
+          </a:p>
+          <a:p>
+            <a:r>
+              <a:rPr lang="en-US" sz="1400"/>
+              <a:t>14. Being Direct - Lester Wunderman</a:t>
+            </a:r>
+          </a:p>
+          <a:p>
+            <a:r>
+              <a:rPr lang="en-US" sz="1400"/>
+              <a:t>15. The Solid Gold Mailbox - Walter Weintz</a:t>
+            </a:r>
+          </a:p>
+          <a:p>
+            <a:r>
+              <a:rPr lang="en-US" sz="1400"/>
+              <a:t>16. Handbook of Direct Mail - Siegfried Vogele</a:t>
+            </a:r>
+          </a:p>
+          <a:p>
+            <a:r>
+              <a:rPr lang="en-US" sz="1400"/>
+              <a:t>17. Jump Start Your Business Brain - Doug Hall</a:t>
+            </a:r>
+          </a:p>
+          <a:p>
+            <a:r>
+              <a:rPr lang="en-US" sz="1400"/>
+              <a:t>18. Meaningful Marketing - Doug Hall</a:t>
+            </a:r>
+          </a:p>
+          <a:p>
+            <a:r>
+              <a:rPr lang="en-US" sz="1400"/>
+              <a:t>19. Jump Start Your Marketing Brain - Doug Hall</a:t>
+            </a:r>
+          </a:p>
+          <a:p>
+            <a:r>
+              <a:rPr lang="en-US" sz="1400"/>
+              <a:t>20. Which Ad Pulled Best - Philip Burton</a:t>
+            </a:r>
+          </a:p>
+          <a:p>
+            <a:r>
+              <a:rPr lang="en-US" sz="1400"/>
+              <a:t>21. Confessions of an Advertising Man - David Ogilvy</a:t>
+            </a:r>
+          </a:p>
+        </p:txBody>
+      </p:sp>
+      <p:pic>
+        <p:nvPicPr>
+          <p:cNvPr id="4" name="Picture 3">
+            <a:extLst>
+              <a:ext uri="{FF2B5EF4-FFF2-40B4-BE49-F238E27FC236}">
+                <a16:creationId xmlns:a16="http://schemas.microsoft.com/office/drawing/2014/main" id="{1A02436C-E504-78E3-7173-18E135B8D2B1}"/>
+              </a:ext>
+            </a:extLst>
+          </p:cNvPr>
+          <p:cNvPicPr>
+            <a:picLocks noChangeAspect="1"/>
+          </p:cNvPicPr>
+          <p:nvPr/>
+        </p:nvPicPr>
+        <p:blipFill>
+          <a:blip r:embed="rId2" cstate="email">
+            <a:extLst>
+              <a:ext uri="{28A0092B-C50C-407E-A947-70E740481C1C}">
+                <a14:useLocalDpi xmlns:a14="http://schemas.microsoft.com/office/drawing/2010/main"/>
+              </a:ext>
+            </a:extLst>
+          </a:blip>
+          <a:stretch>
+            <a:fillRect/>
+          </a:stretch>
+        </p:blipFill>
+        <p:spPr>
+          <a:xfrm>
+            <a:off x="298450" y="783771"/>
+            <a:ext cx="1308100" cy="1320800"/>
+          </a:xfrm>
+          <a:prstGeom prst="rect">
+            <a:avLst/>
+          </a:prstGeom>
+        </p:spPr>
+      </p:pic>
+    </p:spTree>
+    <p:extLst>
+      <p:ext uri="{BB962C8B-B14F-4D97-AF65-F5344CB8AC3E}">
+        <p14:creationId xmlns:p14="http://schemas.microsoft.com/office/powerpoint/2010/main" val="1016868065"/>
+      </p:ext>
+    </p:extLst>
+  </p:cSld>
+  <p:clrMapOvr>
+    <a:masterClrMapping/>
+  </p:clrMapOvr>
+</p:sld>
+</file>
+
+<file path=ppt/slides/slide14.xml><?xml version="1.0" encoding="utf-8"?>
+<p:sld xmlns:a="http://schemas.openxmlformats.org/drawingml/2006/main" xmlns:r="http://schemas.openxmlformats.org/officeDocument/2006/relationships" xmlns:p="http://schemas.openxmlformats.org/presentationml/2006/main">
+  <p:cSld>
+    <p:spTree>
+      <p:nvGrpSpPr>
+        <p:cNvPr id="1" name=""/>
+        <p:cNvGrpSpPr/>
+        <p:nvPr/>
+      </p:nvGrpSpPr>
+      <p:grpSpPr>
+        <a:xfrm>
+          <a:off x="0" y="0"/>
+          <a:ext cx="0" cy="0"/>
+          <a:chOff x="0" y="0"/>
+          <a:chExt cx="0" cy="0"/>
+        </a:xfrm>
+      </p:grpSpPr>
+      <p:pic>
+        <p:nvPicPr>
+          <p:cNvPr id="2" name="Picture 1">
+            <a:extLst>
+              <a:ext uri="{FF2B5EF4-FFF2-40B4-BE49-F238E27FC236}">
+                <a16:creationId xmlns:a16="http://schemas.microsoft.com/office/drawing/2014/main" id="{43D71B51-733F-46F0-8B80-BD88ABB148C4}"/>
+              </a:ext>
+            </a:extLst>
+          </p:cNvPr>
+          <p:cNvPicPr>
+            <a:picLocks noChangeAspect="1"/>
+          </p:cNvPicPr>
+          <p:nvPr/>
+        </p:nvPicPr>
+        <p:blipFill>
+          <a:blip r:embed="rId2" cstate="email">
+            <a:extLst>
+              <a:ext uri="{28A0092B-C50C-407E-A947-70E740481C1C}">
+                <a14:useLocalDpi xmlns:a14="http://schemas.microsoft.com/office/drawing/2010/main"/>
+              </a:ext>
+            </a:extLst>
+          </a:blip>
+          <a:stretch>
+            <a:fillRect/>
+          </a:stretch>
+        </p:blipFill>
+        <p:spPr>
+          <a:xfrm>
+            <a:off x="3009702" y="1894115"/>
+            <a:ext cx="4216968" cy="4729843"/>
+          </a:xfrm>
+          <a:prstGeom prst="rect">
+            <a:avLst/>
+          </a:prstGeom>
+        </p:spPr>
+      </p:pic>
+      <p:pic>
+        <p:nvPicPr>
+          <p:cNvPr id="3" name="Picture 2">
+            <a:extLst>
+              <a:ext uri="{FF2B5EF4-FFF2-40B4-BE49-F238E27FC236}">
+                <a16:creationId xmlns:a16="http://schemas.microsoft.com/office/drawing/2014/main" id="{0785CE93-441B-8E1D-BDAF-8722E5FC5EF3}"/>
+              </a:ext>
+            </a:extLst>
+          </p:cNvPr>
+          <p:cNvPicPr>
+            <a:picLocks noChangeAspect="1"/>
+          </p:cNvPicPr>
+          <p:nvPr/>
+        </p:nvPicPr>
+        <p:blipFill>
+          <a:blip r:embed="rId3" cstate="email">
+            <a:extLst>
+              <a:ext uri="{28A0092B-C50C-407E-A947-70E740481C1C}">
+                <a14:useLocalDpi xmlns:a14="http://schemas.microsoft.com/office/drawing/2010/main"/>
+              </a:ext>
+            </a:extLst>
+          </a:blip>
+          <a:stretch>
+            <a:fillRect/>
+          </a:stretch>
+        </p:blipFill>
+        <p:spPr>
+          <a:xfrm>
+            <a:off x="7796859" y="1894114"/>
+            <a:ext cx="4216969" cy="4729844"/>
+          </a:xfrm>
+          <a:prstGeom prst="rect">
+            <a:avLst/>
+          </a:prstGeom>
+        </p:spPr>
+      </p:pic>
+      <p:pic>
+        <p:nvPicPr>
+          <p:cNvPr id="1026" name="Picture 2">
+            <a:extLst>
+              <a:ext uri="{FF2B5EF4-FFF2-40B4-BE49-F238E27FC236}">
+                <a16:creationId xmlns:a16="http://schemas.microsoft.com/office/drawing/2014/main" id="{9FC98F6F-EF0C-1EF5-FC36-ADCD78851DFD}"/>
+              </a:ext>
+            </a:extLst>
+          </p:cNvPr>
+          <p:cNvPicPr>
+            <a:picLocks noChangeAspect="1" noChangeArrowheads="1"/>
+          </p:cNvPicPr>
+          <p:nvPr/>
+        </p:nvPicPr>
+        <p:blipFill>
+          <a:blip r:embed="rId4" cstate="email">
+            <a:extLst>
+              <a:ext uri="{28A0092B-C50C-407E-A947-70E740481C1C}">
+                <a14:useLocalDpi xmlns:a14="http://schemas.microsoft.com/office/drawing/2010/main"/>
+              </a:ext>
+            </a:extLst>
+          </a:blip>
+          <a:srcRect/>
+          <a:stretch>
+            <a:fillRect/>
+          </a:stretch>
+        </p:blipFill>
+        <p:spPr bwMode="auto">
+          <a:xfrm>
+            <a:off x="301914" y="794656"/>
+            <a:ext cx="2198915" cy="2198915"/>
+          </a:xfrm>
+          <a:prstGeom prst="rect">
+            <a:avLst/>
+          </a:prstGeom>
+          <a:noFill/>
+          <a:extLst>
+            <a:ext uri="{909E8E84-426E-40DD-AFC4-6F175D3DCCD1}">
+              <a14:hiddenFill xmlns:a14="http://schemas.microsoft.com/office/drawing/2010/main">
+                <a:solidFill>
+                  <a:srgbClr val="FFFFFF"/>
+                </a:solidFill>
+              </a14:hiddenFill>
+            </a:ext>
+          </a:extLst>
+        </p:spPr>
+      </p:pic>
+      <p:sp>
+        <p:nvSpPr>
+          <p:cNvPr id="4" name="TextBox 3">
+            <a:extLst>
+              <a:ext uri="{FF2B5EF4-FFF2-40B4-BE49-F238E27FC236}">
+                <a16:creationId xmlns:a16="http://schemas.microsoft.com/office/drawing/2014/main" id="{D8B9B672-6955-DD5A-A415-87ABF4AF4136}"/>
+              </a:ext>
+            </a:extLst>
+          </p:cNvPr>
+          <p:cNvSpPr txBox="1"/>
+          <p:nvPr/>
+        </p:nvSpPr>
+        <p:spPr>
+          <a:xfrm>
+            <a:off x="0" y="0"/>
+            <a:ext cx="2500829" cy="523220"/>
+          </a:xfrm>
+          <a:prstGeom prst="rect">
+            <a:avLst/>
+          </a:prstGeom>
+          <a:noFill/>
+        </p:spPr>
+        <p:txBody>
+          <a:bodyPr wrap="square" rtlCol="0">
+            <a:spAutoFit/>
+          </a:bodyPr>
+          <a:lstStyle/>
+          <a:p>
+            <a:r>
+              <a:rPr lang="en-US" sz="2800" b="1"/>
+              <a:t>Dan S. Kennedy</a:t>
+            </a:r>
+          </a:p>
+        </p:txBody>
+      </p:sp>
+      <p:sp>
+        <p:nvSpPr>
+          <p:cNvPr id="5" name="TextBox 4">
+            <a:extLst>
+              <a:ext uri="{FF2B5EF4-FFF2-40B4-BE49-F238E27FC236}">
+                <a16:creationId xmlns:a16="http://schemas.microsoft.com/office/drawing/2014/main" id="{5D5398A0-ED18-905E-186A-19FC002F4247}"/>
+              </a:ext>
+            </a:extLst>
+          </p:cNvPr>
+          <p:cNvSpPr txBox="1"/>
+          <p:nvPr/>
+        </p:nvSpPr>
+        <p:spPr>
+          <a:xfrm>
+            <a:off x="178172" y="3089485"/>
+            <a:ext cx="2695657" cy="2031325"/>
+          </a:xfrm>
+          <a:prstGeom prst="rect">
+            <a:avLst/>
+          </a:prstGeom>
+          <a:noFill/>
+        </p:spPr>
+        <p:txBody>
+          <a:bodyPr wrap="square" rtlCol="0">
+            <a:spAutoFit/>
+          </a:bodyPr>
+          <a:lstStyle/>
+          <a:p>
+            <a:r>
+              <a:rPr lang="en-US" sz="1400"/>
+              <a:t>Author, Strategic Advisor, Consultant, and Business Coach</a:t>
+            </a:r>
+          </a:p>
+          <a:p>
+            <a:endParaRPr lang="en-US" sz="1400"/>
+          </a:p>
+          <a:p>
+            <a:r>
+              <a:rPr lang="en-US" sz="1400"/>
+              <a:t>DAN S. KENNEDY is a strategic advisor, consultant, business coach, and author of the popular No B.S. book series. He directly influences more than one million business owners annually. </a:t>
+            </a:r>
+          </a:p>
+        </p:txBody>
+      </p:sp>
+    </p:spTree>
+    <p:extLst>
+      <p:ext uri="{BB962C8B-B14F-4D97-AF65-F5344CB8AC3E}">
+        <p14:creationId xmlns:p14="http://schemas.microsoft.com/office/powerpoint/2010/main" val="2932282663"/>
+      </p:ext>
+    </p:extLst>
+  </p:cSld>
+  <p:clrMapOvr>
+    <a:masterClrMapping/>
+  </p:clrMapOvr>
+</p:sld>
+</file>
+
+<file path=ppt/slides/slide15.xml><?xml version="1.0" encoding="utf-8"?>
+<p:sld xmlns:a="http://schemas.openxmlformats.org/drawingml/2006/main" xmlns:r="http://schemas.openxmlformats.org/officeDocument/2006/relationships" xmlns:p="http://schemas.openxmlformats.org/presentationml/2006/main">
+  <p:cSld>
+    <p:spTree>
+      <p:nvGrpSpPr>
+        <p:cNvPr id="1" name=""/>
+        <p:cNvGrpSpPr/>
+        <p:nvPr/>
+      </p:nvGrpSpPr>
+      <p:grpSpPr>
+        <a:xfrm>
+          <a:off x="0" y="0"/>
+          <a:ext cx="0" cy="0"/>
+          <a:chOff x="0" y="0"/>
+          <a:chExt cx="0" cy="0"/>
+        </a:xfrm>
+      </p:grpSpPr>
+      <p:sp>
+        <p:nvSpPr>
+          <p:cNvPr id="2" name="TextBox 1">
+            <a:extLst>
+              <a:ext uri="{FF2B5EF4-FFF2-40B4-BE49-F238E27FC236}">
+                <a16:creationId xmlns:a16="http://schemas.microsoft.com/office/drawing/2014/main" id="{03B9B352-5365-9CD5-05DB-8AF238BE2B2D}"/>
+              </a:ext>
+            </a:extLst>
+          </p:cNvPr>
+          <p:cNvSpPr txBox="1"/>
+          <p:nvPr/>
+        </p:nvSpPr>
+        <p:spPr>
+          <a:xfrm>
+            <a:off x="1" y="0"/>
+            <a:ext cx="3918856" cy="523220"/>
+          </a:xfrm>
+          <a:prstGeom prst="rect">
+            <a:avLst/>
+          </a:prstGeom>
+          <a:noFill/>
+        </p:spPr>
+        <p:txBody>
+          <a:bodyPr wrap="square" rtlCol="0">
+            <a:spAutoFit/>
+          </a:bodyPr>
+          <a:lstStyle/>
+          <a:p>
+            <a:r>
+              <a:rPr lang="en-US" sz="2800" b="1"/>
+              <a:t>More Marketing Topics</a:t>
+            </a:r>
+          </a:p>
+        </p:txBody>
+      </p:sp>
+      <p:sp>
+        <p:nvSpPr>
+          <p:cNvPr id="3" name="TextBox 2">
+            <a:extLst>
+              <a:ext uri="{FF2B5EF4-FFF2-40B4-BE49-F238E27FC236}">
+                <a16:creationId xmlns:a16="http://schemas.microsoft.com/office/drawing/2014/main" id="{3E853A59-860B-E7DD-2756-C6E5C9ECE9D3}"/>
+              </a:ext>
+            </a:extLst>
+          </p:cNvPr>
+          <p:cNvSpPr txBox="1"/>
+          <p:nvPr/>
+        </p:nvSpPr>
+        <p:spPr>
+          <a:xfrm>
+            <a:off x="523908" y="1495493"/>
+            <a:ext cx="1953074" cy="3323987"/>
+          </a:xfrm>
+          <a:prstGeom prst="rect">
+            <a:avLst/>
+          </a:prstGeom>
+          <a:solidFill>
+            <a:schemeClr val="accent4">
+              <a:lumMod val="20000"/>
+              <a:lumOff val="80000"/>
+            </a:schemeClr>
+          </a:solidFill>
+          <a:ln>
+            <a:solidFill>
+              <a:srgbClr val="FF0000"/>
+            </a:solidFill>
+          </a:ln>
+        </p:spPr>
+        <p:txBody>
+          <a:bodyPr wrap="square" rtlCol="0">
+            <a:spAutoFit/>
+          </a:bodyPr>
+          <a:lstStyle/>
+          <a:p>
+            <a:pPr marL="285750" indent="-285750">
+              <a:buFont typeface="Arial" panose="020B0604020202020204" pitchFamily="34" charset="0"/>
+              <a:buChar char="•"/>
+            </a:pPr>
+            <a:r>
+              <a:rPr lang="en-US" sz="1400"/>
+              <a:t>ask_campaign</a:t>
+            </a:r>
+          </a:p>
+          <a:p>
+            <a:pPr marL="285750" indent="-285750">
+              <a:buFont typeface="Arial" panose="020B0604020202020204" pitchFamily="34" charset="0"/>
+              <a:buChar char="•"/>
+            </a:pPr>
+            <a:r>
+              <a:rPr lang="en-US" sz="1400"/>
+              <a:t>audio_video</a:t>
+            </a:r>
+          </a:p>
+          <a:p>
+            <a:pPr marL="285750" indent="-285750">
+              <a:buFont typeface="Arial" panose="020B0604020202020204" pitchFamily="34" charset="0"/>
+              <a:buChar char="•"/>
+            </a:pPr>
+            <a:r>
+              <a:rPr lang="en-US" sz="1400"/>
+              <a:t>autoresponders</a:t>
+            </a:r>
+          </a:p>
+          <a:p>
+            <a:pPr marL="285750" indent="-285750">
+              <a:buFont typeface="Arial" panose="020B0604020202020204" pitchFamily="34" charset="0"/>
+              <a:buChar char="•"/>
+            </a:pPr>
+            <a:r>
+              <a:rPr lang="en-US" sz="1400"/>
+              <a:t>basics</a:t>
+            </a:r>
+          </a:p>
+          <a:p>
+            <a:pPr marL="285750" indent="-285750">
+              <a:buFont typeface="Arial" panose="020B0604020202020204" pitchFamily="34" charset="0"/>
+              <a:buChar char="•"/>
+            </a:pPr>
+            <a:r>
+              <a:rPr lang="en-US" sz="1400"/>
+              <a:t>conversion</a:t>
+            </a:r>
+          </a:p>
+          <a:p>
+            <a:pPr marL="285750" indent="-285750">
+              <a:buFont typeface="Arial" panose="020B0604020202020204" pitchFamily="34" charset="0"/>
+              <a:buChar char="•"/>
+            </a:pPr>
+            <a:r>
+              <a:rPr lang="en-US" sz="1400"/>
+              <a:t>copyrighting</a:t>
+            </a:r>
+          </a:p>
+          <a:p>
+            <a:pPr marL="285750" indent="-285750">
+              <a:buFont typeface="Arial" panose="020B0604020202020204" pitchFamily="34" charset="0"/>
+              <a:buChar char="•"/>
+            </a:pPr>
+            <a:r>
+              <a:rPr lang="en-US" sz="1400"/>
+              <a:t>direct_marketing</a:t>
+            </a:r>
+          </a:p>
+          <a:p>
+            <a:pPr marL="285750" indent="-285750">
+              <a:buFont typeface="Arial" panose="020B0604020202020204" pitchFamily="34" charset="0"/>
+              <a:buChar char="•"/>
+            </a:pPr>
+            <a:r>
+              <a:rPr lang="en-US" sz="1400"/>
+              <a:t>ebay</a:t>
+            </a:r>
+          </a:p>
+          <a:p>
+            <a:pPr marL="285750" indent="-285750">
+              <a:buFont typeface="Arial" panose="020B0604020202020204" pitchFamily="34" charset="0"/>
+              <a:buChar char="•"/>
+            </a:pPr>
+            <a:r>
+              <a:rPr lang="en-US" sz="1400"/>
+              <a:t>ebus_minisites</a:t>
+            </a:r>
+          </a:p>
+          <a:p>
+            <a:pPr marL="285750" indent="-285750">
+              <a:buFont typeface="Arial" panose="020B0604020202020204" pitchFamily="34" charset="0"/>
+              <a:buChar char="•"/>
+            </a:pPr>
+            <a:r>
+              <a:rPr lang="en-US" sz="1400"/>
+              <a:t>email_marketing</a:t>
+            </a:r>
+          </a:p>
+          <a:p>
+            <a:pPr marL="285750" indent="-285750">
+              <a:buFont typeface="Arial" panose="020B0604020202020204" pitchFamily="34" charset="0"/>
+              <a:buChar char="•"/>
+            </a:pPr>
+            <a:r>
+              <a:rPr lang="en-US" sz="1400"/>
+              <a:t>joint_ventures</a:t>
+            </a:r>
+          </a:p>
+          <a:p>
+            <a:pPr marL="285750" indent="-285750">
+              <a:buFont typeface="Arial" panose="020B0604020202020204" pitchFamily="34" charset="0"/>
+              <a:buChar char="•"/>
+            </a:pPr>
+            <a:r>
+              <a:rPr lang="en-US" sz="1400"/>
+              <a:t>affiliates</a:t>
+            </a:r>
+          </a:p>
+          <a:p>
+            <a:pPr marL="285750" indent="-285750">
+              <a:buFont typeface="Arial" panose="020B0604020202020204" pitchFamily="34" charset="0"/>
+              <a:buChar char="•"/>
+            </a:pPr>
+            <a:r>
+              <a:rPr lang="en-US" sz="1400"/>
+              <a:t>keywords</a:t>
+            </a:r>
+          </a:p>
+          <a:p>
+            <a:pPr marL="285750" indent="-285750">
+              <a:buFont typeface="Arial" panose="020B0604020202020204" pitchFamily="34" charset="0"/>
+              <a:buChar char="•"/>
+            </a:pPr>
+            <a:r>
+              <a:rPr lang="en-US" sz="1400"/>
+              <a:t>launch</a:t>
+            </a:r>
+          </a:p>
+          <a:p>
+            <a:pPr marL="285750" indent="-285750">
+              <a:buFont typeface="Arial" panose="020B0604020202020204" pitchFamily="34" charset="0"/>
+              <a:buChar char="•"/>
+            </a:pPr>
+            <a:r>
+              <a:rPr lang="en-US" sz="1400"/>
+              <a:t>law</a:t>
+            </a:r>
+          </a:p>
+        </p:txBody>
+      </p:sp>
+      <p:sp>
+        <p:nvSpPr>
+          <p:cNvPr id="5" name="TextBox 4">
+            <a:extLst>
+              <a:ext uri="{FF2B5EF4-FFF2-40B4-BE49-F238E27FC236}">
+                <a16:creationId xmlns:a16="http://schemas.microsoft.com/office/drawing/2014/main" id="{95B5C4B5-A934-F39F-939B-EF81CA013CD1}"/>
+              </a:ext>
+            </a:extLst>
+          </p:cNvPr>
+          <p:cNvSpPr txBox="1"/>
+          <p:nvPr/>
+        </p:nvSpPr>
+        <p:spPr>
+          <a:xfrm>
+            <a:off x="3009418" y="1497852"/>
+            <a:ext cx="1953074" cy="2893100"/>
+          </a:xfrm>
+          <a:prstGeom prst="rect">
+            <a:avLst/>
+          </a:prstGeom>
+          <a:solidFill>
+            <a:schemeClr val="accent4">
+              <a:lumMod val="20000"/>
+              <a:lumOff val="80000"/>
+            </a:schemeClr>
+          </a:solidFill>
+          <a:ln>
+            <a:solidFill>
+              <a:srgbClr val="FF0000"/>
+            </a:solidFill>
+          </a:ln>
+        </p:spPr>
+        <p:txBody>
+          <a:bodyPr wrap="square" rtlCol="0">
+            <a:spAutoFit/>
+          </a:bodyPr>
+          <a:lstStyle/>
+          <a:p>
+            <a:pPr marL="285750" indent="-285750">
+              <a:buFont typeface="Arial" panose="020B0604020202020204" pitchFamily="34" charset="0"/>
+              <a:buChar char="•"/>
+            </a:pPr>
+            <a:r>
+              <a:rPr lang="en-US" sz="1400"/>
+              <a:t>market_research</a:t>
+            </a:r>
+          </a:p>
+          <a:p>
+            <a:pPr marL="285750" indent="-285750">
+              <a:buFont typeface="Arial" panose="020B0604020202020204" pitchFamily="34" charset="0"/>
+              <a:buChar char="•"/>
+            </a:pPr>
+            <a:r>
+              <a:rPr lang="en-US" sz="1400"/>
+              <a:t>marketing_people</a:t>
+            </a:r>
+          </a:p>
+          <a:p>
+            <a:pPr marL="285750" indent="-285750">
+              <a:buFont typeface="Arial" panose="020B0604020202020204" pitchFamily="34" charset="0"/>
+              <a:buChar char="•"/>
+            </a:pPr>
+            <a:r>
+              <a:rPr lang="en-US" sz="1400"/>
+              <a:t>membership_sites</a:t>
+            </a:r>
+          </a:p>
+          <a:p>
+            <a:pPr marL="285750" indent="-285750">
+              <a:buFont typeface="Arial" panose="020B0604020202020204" pitchFamily="34" charset="0"/>
+              <a:buChar char="•"/>
+            </a:pPr>
+            <a:r>
+              <a:rPr lang="en-US" sz="1400"/>
+              <a:t>multi_page_sale</a:t>
+            </a:r>
+          </a:p>
+          <a:p>
+            <a:pPr marL="285750" indent="-285750">
+              <a:buFont typeface="Arial" panose="020B0604020202020204" pitchFamily="34" charset="0"/>
+              <a:buChar char="•"/>
+            </a:pPr>
+            <a:r>
+              <a:rPr lang="en-US" sz="1400"/>
+              <a:t>on_offline</a:t>
+            </a:r>
+          </a:p>
+          <a:p>
+            <a:pPr marL="285750" indent="-285750">
+              <a:buFont typeface="Arial" panose="020B0604020202020204" pitchFamily="34" charset="0"/>
+              <a:buChar char="•"/>
+            </a:pPr>
+            <a:r>
+              <a:rPr lang="en-US" sz="1400"/>
+              <a:t>opt-in-page</a:t>
+            </a:r>
+          </a:p>
+          <a:p>
+            <a:pPr marL="285750" indent="-285750">
+              <a:buFont typeface="Arial" panose="020B0604020202020204" pitchFamily="34" charset="0"/>
+              <a:buChar char="•"/>
+            </a:pPr>
+            <a:r>
+              <a:rPr lang="en-US" sz="1400"/>
+              <a:t>order-page</a:t>
+            </a:r>
+          </a:p>
+          <a:p>
+            <a:pPr marL="285750" indent="-285750">
+              <a:buFont typeface="Arial" panose="020B0604020202020204" pitchFamily="34" charset="0"/>
+              <a:buChar char="•"/>
+            </a:pPr>
+            <a:r>
+              <a:rPr lang="en-US" sz="1400"/>
+              <a:t>outsourcing</a:t>
+            </a:r>
+          </a:p>
+          <a:p>
+            <a:pPr marL="285750" indent="-285750">
+              <a:buFont typeface="Arial" panose="020B0604020202020204" pitchFamily="34" charset="0"/>
+              <a:buChar char="•"/>
+            </a:pPr>
+            <a:r>
+              <a:rPr lang="en-US" sz="1400"/>
+              <a:t>pay_per_click</a:t>
+            </a:r>
+          </a:p>
+          <a:p>
+            <a:pPr marL="285750" indent="-285750">
+              <a:buFont typeface="Arial" panose="020B0604020202020204" pitchFamily="34" charset="0"/>
+              <a:buChar char="•"/>
+            </a:pPr>
+            <a:r>
+              <a:rPr lang="en-US" sz="1400"/>
+              <a:t>PR-Public-relations</a:t>
+            </a:r>
+          </a:p>
+          <a:p>
+            <a:pPr marL="285750" indent="-285750">
+              <a:buFont typeface="Arial" panose="020B0604020202020204" pitchFamily="34" charset="0"/>
+              <a:buChar char="•"/>
+            </a:pPr>
+            <a:r>
+              <a:rPr lang="en-US" sz="1400"/>
+              <a:t>product_creation</a:t>
+            </a:r>
+          </a:p>
+          <a:p>
+            <a:pPr marL="285750" indent="-285750">
+              <a:buFont typeface="Arial" panose="020B0604020202020204" pitchFamily="34" charset="0"/>
+              <a:buChar char="•"/>
+            </a:pPr>
+            <a:r>
+              <a:rPr lang="en-US" sz="1400"/>
+              <a:t>public_domain</a:t>
+            </a:r>
+          </a:p>
+          <a:p>
+            <a:pPr marL="285750" indent="-285750">
+              <a:buFont typeface="Arial" panose="020B0604020202020204" pitchFamily="34" charset="0"/>
+              <a:buChar char="•"/>
+            </a:pPr>
+            <a:r>
+              <a:rPr lang="en-US" sz="1400"/>
+              <a:t>public_speaking</a:t>
+            </a:r>
+          </a:p>
+        </p:txBody>
+      </p:sp>
+      <p:sp>
+        <p:nvSpPr>
+          <p:cNvPr id="6" name="TextBox 5">
+            <a:extLst>
+              <a:ext uri="{FF2B5EF4-FFF2-40B4-BE49-F238E27FC236}">
+                <a16:creationId xmlns:a16="http://schemas.microsoft.com/office/drawing/2014/main" id="{98CE9769-27B7-605A-B518-70250B019FD3}"/>
+              </a:ext>
+            </a:extLst>
+          </p:cNvPr>
+          <p:cNvSpPr txBox="1"/>
+          <p:nvPr/>
+        </p:nvSpPr>
+        <p:spPr>
+          <a:xfrm>
+            <a:off x="5440102" y="1495493"/>
+            <a:ext cx="2222339" cy="2677656"/>
+          </a:xfrm>
+          <a:prstGeom prst="rect">
+            <a:avLst/>
+          </a:prstGeom>
+          <a:solidFill>
+            <a:schemeClr val="accent4">
+              <a:lumMod val="20000"/>
+              <a:lumOff val="80000"/>
+            </a:schemeClr>
+          </a:solidFill>
+          <a:ln>
+            <a:solidFill>
+              <a:srgbClr val="FF0000"/>
+            </a:solidFill>
+          </a:ln>
+        </p:spPr>
+        <p:txBody>
+          <a:bodyPr wrap="square" rtlCol="0">
+            <a:spAutoFit/>
+          </a:bodyPr>
+          <a:lstStyle/>
+          <a:p>
+            <a:pPr marL="285750" indent="-285750">
+              <a:buFont typeface="Arial" panose="020B0604020202020204" pitchFamily="34" charset="0"/>
+              <a:buChar char="•"/>
+            </a:pPr>
+            <a:r>
+              <a:rPr lang="en-US" sz="1400"/>
+              <a:t>search_engines</a:t>
+            </a:r>
+          </a:p>
+          <a:p>
+            <a:pPr marL="285750" indent="-285750">
+              <a:buFont typeface="Arial" panose="020B0604020202020204" pitchFamily="34" charset="0"/>
+              <a:buChar char="•"/>
+            </a:pPr>
+            <a:r>
+              <a:rPr lang="en-US" sz="1400"/>
+              <a:t>shopping-cart-billing</a:t>
+            </a:r>
+          </a:p>
+          <a:p>
+            <a:pPr marL="285750" indent="-285750">
+              <a:buFont typeface="Arial" panose="020B0604020202020204" pitchFamily="34" charset="0"/>
+              <a:buChar char="•"/>
+            </a:pPr>
+            <a:r>
+              <a:rPr lang="en-US" sz="1400"/>
+              <a:t>success</a:t>
+            </a:r>
+          </a:p>
+          <a:p>
+            <a:pPr marL="285750" indent="-285750">
+              <a:buFont typeface="Arial" panose="020B0604020202020204" pitchFamily="34" charset="0"/>
+              <a:buChar char="•"/>
+            </a:pPr>
+            <a:r>
+              <a:rPr lang="en-US" sz="1400"/>
+              <a:t>teleseminars</a:t>
+            </a:r>
+          </a:p>
+          <a:p>
+            <a:pPr marL="285750" indent="-285750">
+              <a:buFont typeface="Arial" panose="020B0604020202020204" pitchFamily="34" charset="0"/>
+              <a:buChar char="•"/>
+            </a:pPr>
+            <a:r>
+              <a:rPr lang="en-US" sz="1400"/>
+              <a:t>testing</a:t>
+            </a:r>
+          </a:p>
+          <a:p>
+            <a:pPr marL="285750" indent="-285750">
+              <a:buFont typeface="Arial" panose="020B0604020202020204" pitchFamily="34" charset="0"/>
+              <a:buChar char="•"/>
+            </a:pPr>
+            <a:r>
+              <a:rPr lang="en-US" sz="1400"/>
+              <a:t>time_management</a:t>
+            </a:r>
+          </a:p>
+          <a:p>
+            <a:pPr marL="285750" indent="-285750">
+              <a:buFont typeface="Arial" panose="020B0604020202020204" pitchFamily="34" charset="0"/>
+              <a:buChar char="•"/>
+            </a:pPr>
+            <a:r>
+              <a:rPr lang="en-US" sz="1400"/>
+              <a:t>tracking</a:t>
+            </a:r>
+          </a:p>
+          <a:p>
+            <a:pPr marL="285750" indent="-285750">
+              <a:buFont typeface="Arial" panose="020B0604020202020204" pitchFamily="34" charset="0"/>
+              <a:buChar char="•"/>
+            </a:pPr>
+            <a:r>
+              <a:rPr lang="en-US" sz="1400"/>
+              <a:t>traffic</a:t>
+            </a:r>
+          </a:p>
+          <a:p>
+            <a:pPr marL="285750" indent="-285750">
+              <a:buFont typeface="Arial" panose="020B0604020202020204" pitchFamily="34" charset="0"/>
+              <a:buChar char="•"/>
+            </a:pPr>
+            <a:r>
+              <a:rPr lang="en-US" sz="1400"/>
+              <a:t>twopage</a:t>
+            </a:r>
+          </a:p>
+          <a:p>
+            <a:pPr marL="285750" indent="-285750">
+              <a:buFont typeface="Arial" panose="020B0604020202020204" pitchFamily="34" charset="0"/>
+              <a:buChar char="•"/>
+            </a:pPr>
+            <a:r>
+              <a:rPr lang="en-US" sz="1400"/>
+              <a:t>upsell</a:t>
+            </a:r>
+          </a:p>
+          <a:p>
+            <a:pPr marL="285750" indent="-285750">
+              <a:buFont typeface="Arial" panose="020B0604020202020204" pitchFamily="34" charset="0"/>
+              <a:buChar char="•"/>
+            </a:pPr>
+            <a:r>
+              <a:rPr lang="en-US" sz="1400"/>
+              <a:t>video_on_web</a:t>
+            </a:r>
+          </a:p>
+          <a:p>
+            <a:pPr marL="285750" indent="-285750">
+              <a:buFont typeface="Arial" panose="020B0604020202020204" pitchFamily="34" charset="0"/>
+              <a:buChar char="•"/>
+            </a:pPr>
+            <a:r>
+              <a:rPr lang="en-US" sz="1400"/>
+              <a:t>wordpress</a:t>
+            </a:r>
+          </a:p>
+        </p:txBody>
+      </p:sp>
+    </p:spTree>
+    <p:extLst>
+      <p:ext uri="{BB962C8B-B14F-4D97-AF65-F5344CB8AC3E}">
+        <p14:creationId xmlns:p14="http://schemas.microsoft.com/office/powerpoint/2010/main" val="654408904"/>
       </p:ext>
     </p:extLst>
   </p:cSld>

--- a/Marketing.pptx
+++ b/Marketing.pptx
@@ -6784,7 +6784,7 @@
         </p:blipFill>
         <p:spPr>
           <a:xfrm>
-            <a:off x="3009702" y="1894115"/>
+            <a:off x="3009702" y="378132"/>
             <a:ext cx="4216968" cy="4729843"/>
           </a:xfrm>
           <a:prstGeom prst="rect">
@@ -6820,7 +6820,7 @@
         </p:blipFill>
         <p:spPr>
           <a:xfrm>
-            <a:off x="7796859" y="1894114"/>
+            <a:off x="7796859" y="378131"/>
             <a:ext cx="4216969" cy="4729844"/>
           </a:xfrm>
           <a:prstGeom prst="rect">
@@ -6925,7 +6925,7 @@
         <p:spPr>
           <a:xfrm>
             <a:off x="178172" y="3089485"/>
-            <a:ext cx="2695657" cy="2031325"/>
+            <a:ext cx="2695657" cy="3323987"/>
           </a:xfrm>
           <a:prstGeom prst="rect">
             <a:avLst/>
@@ -6949,7 +6949,37 @@
           <a:p>
             <a:r>
               <a:rPr lang="en-US" sz="1400"/>
-              <a:t>DAN S. KENNEDY is a strategic advisor, consultant, business coach, and author of the popular No B.S. book series. He directly influences more than one million business owners annually. </a:t>
+              <a:t>DAN S. KENNEDY is a strategic advisor, consultant, business coach, and author of the popular No B.S. book series. He directly influences more than one million business owners annually.</a:t>
+            </a:r>
+          </a:p>
+          <a:p>
+            <a:endParaRPr lang="en-US" sz="1400"/>
+          </a:p>
+          <a:p>
+            <a:endParaRPr lang="en-US" sz="1400"/>
+          </a:p>
+          <a:p>
+            <a:r>
+              <a:rPr lang="en-US" sz="1400"/>
+              <a:t>Copywriter</a:t>
+            </a:r>
+          </a:p>
+          <a:p>
+            <a:r>
+              <a:rPr lang="en-US" sz="1400"/>
+              <a:t>Magnetic Marketing</a:t>
+            </a:r>
+          </a:p>
+          <a:p>
+            <a:r>
+              <a:rPr lang="en-US" sz="1400"/>
+              <a:t>Super Conference </a:t>
+            </a:r>
+          </a:p>
+          <a:p>
+            <a:r>
+              <a:rPr lang="en-US" sz="1400"/>
+              <a:t>Inner Circle (Glazer-Kennedy)</a:t>
             </a:r>
           </a:p>
         </p:txBody>

--- a/Marketing.pptx
+++ b/Marketing.pptx
@@ -210,7 +210,7 @@
           </a:lstStyle>
           <a:p>
             <a:fld id="{610AF671-4685-124D-A41D-446D235EA8CE}" type="datetimeFigureOut">
-              <a:t>9/18/22</a:t>
+              <a:t>9/28/22</a:t>
             </a:fld>
             <a:endParaRPr lang="en-US"/>
           </a:p>
@@ -707,7 +707,7 @@
           <a:p>
             <a:fld id="{2D90B581-06C6-5A4B-9E30-3EAD5667F4B3}" type="datetimeFigureOut">
               <a:rPr lang="en-US" smtClean="0"/>
-              <a:t>9/18/22</a:t>
+              <a:t>9/28/22</a:t>
             </a:fld>
             <a:endParaRPr lang="en-US"/>
           </a:p>
@@ -905,7 +905,7 @@
           <a:p>
             <a:fld id="{2D90B581-06C6-5A4B-9E30-3EAD5667F4B3}" type="datetimeFigureOut">
               <a:rPr lang="en-US" smtClean="0"/>
-              <a:t>9/18/22</a:t>
+              <a:t>9/28/22</a:t>
             </a:fld>
             <a:endParaRPr lang="en-US"/>
           </a:p>
@@ -1113,7 +1113,7 @@
           <a:p>
             <a:fld id="{2D90B581-06C6-5A4B-9E30-3EAD5667F4B3}" type="datetimeFigureOut">
               <a:rPr lang="en-US" smtClean="0"/>
-              <a:t>9/18/22</a:t>
+              <a:t>9/28/22</a:t>
             </a:fld>
             <a:endParaRPr lang="en-US"/>
           </a:p>
@@ -1311,7 +1311,7 @@
           <a:p>
             <a:fld id="{2D90B581-06C6-5A4B-9E30-3EAD5667F4B3}" type="datetimeFigureOut">
               <a:rPr lang="en-US" smtClean="0"/>
-              <a:t>9/18/22</a:t>
+              <a:t>9/28/22</a:t>
             </a:fld>
             <a:endParaRPr lang="en-US"/>
           </a:p>
@@ -1586,7 +1586,7 @@
           <a:p>
             <a:fld id="{2D90B581-06C6-5A4B-9E30-3EAD5667F4B3}" type="datetimeFigureOut">
               <a:rPr lang="en-US" smtClean="0"/>
-              <a:t>9/18/22</a:t>
+              <a:t>9/28/22</a:t>
             </a:fld>
             <a:endParaRPr lang="en-US"/>
           </a:p>
@@ -1851,7 +1851,7 @@
           <a:p>
             <a:fld id="{2D90B581-06C6-5A4B-9E30-3EAD5667F4B3}" type="datetimeFigureOut">
               <a:rPr lang="en-US" smtClean="0"/>
-              <a:t>9/18/22</a:t>
+              <a:t>9/28/22</a:t>
             </a:fld>
             <a:endParaRPr lang="en-US"/>
           </a:p>
@@ -2263,7 +2263,7 @@
           <a:p>
             <a:fld id="{2D90B581-06C6-5A4B-9E30-3EAD5667F4B3}" type="datetimeFigureOut">
               <a:rPr lang="en-US" smtClean="0"/>
-              <a:t>9/18/22</a:t>
+              <a:t>9/28/22</a:t>
             </a:fld>
             <a:endParaRPr lang="en-US"/>
           </a:p>
@@ -2404,7 +2404,7 @@
           <a:p>
             <a:fld id="{2D90B581-06C6-5A4B-9E30-3EAD5667F4B3}" type="datetimeFigureOut">
               <a:rPr lang="en-US" smtClean="0"/>
-              <a:t>9/18/22</a:t>
+              <a:t>9/28/22</a:t>
             </a:fld>
             <a:endParaRPr lang="en-US"/>
           </a:p>
@@ -2517,7 +2517,7 @@
           <a:p>
             <a:fld id="{2D90B581-06C6-5A4B-9E30-3EAD5667F4B3}" type="datetimeFigureOut">
               <a:rPr lang="en-US" smtClean="0"/>
-              <a:t>9/18/22</a:t>
+              <a:t>9/28/22</a:t>
             </a:fld>
             <a:endParaRPr lang="en-US"/>
           </a:p>
@@ -2828,7 +2828,7 @@
           <a:p>
             <a:fld id="{2D90B581-06C6-5A4B-9E30-3EAD5667F4B3}" type="datetimeFigureOut">
               <a:rPr lang="en-US" smtClean="0"/>
-              <a:t>9/18/22</a:t>
+              <a:t>9/28/22</a:t>
             </a:fld>
             <a:endParaRPr lang="en-US"/>
           </a:p>
@@ -3116,7 +3116,7 @@
           <a:p>
             <a:fld id="{2D90B581-06C6-5A4B-9E30-3EAD5667F4B3}" type="datetimeFigureOut">
               <a:rPr lang="en-US" smtClean="0"/>
-              <a:t>9/18/22</a:t>
+              <a:t>9/28/22</a:t>
             </a:fld>
             <a:endParaRPr lang="en-US"/>
           </a:p>
@@ -3357,7 +3357,7 @@
           <a:p>
             <a:fld id="{2D90B581-06C6-5A4B-9E30-3EAD5667F4B3}" type="datetimeFigureOut">
               <a:rPr lang="en-US" smtClean="0"/>
-              <a:t>9/18/22</a:t>
+              <a:t>9/28/22</a:t>
             </a:fld>
             <a:endParaRPr lang="en-US"/>
           </a:p>
@@ -5126,6 +5126,15 @@
               </a:rPr>
               <a:t>lient acquisition cost. </a:t>
             </a:r>
+            <a:br>
+              <a:rPr lang="en-US" sz="1400" b="0" i="0">
+                <a:solidFill>
+                  <a:srgbClr val="202124"/>
+                </a:solidFill>
+                <a:effectLst/>
+                <a:latin typeface="Roboto" panose="02000000000000000000" pitchFamily="2" charset="0"/>
+              </a:rPr>
+            </a:br>
             <a:r>
               <a:rPr lang="en-US" sz="1400"/>
               <a:t>Example: </a:t>

--- a/Marketing.pptx
+++ b/Marketing.pptx
@@ -4789,7 +4789,7 @@
                   <a:srgbClr val="00B0F0"/>
                 </a:solidFill>
               </a:rPr>
-              <a:t>Getting someone intellectually engaged in a future result that is good for them and getting them to emotionally commit action to achieve that result" (Dan Sullivan)</a:t>
+              <a:t>Selling is getting someone intellectually engaged in a future result that is good for them and getting them to emotionally commit to take action to achieve that result" (Dan Sullivan)</a:t>
             </a:r>
             <a:r>
               <a:rPr lang="en-US" sz="1400"/>
@@ -9021,7 +9021,7 @@
         </p:nvSpPr>
         <p:spPr>
           <a:xfrm>
-            <a:off x="117969" y="91777"/>
+            <a:off x="0" y="0"/>
             <a:ext cx="3006589" cy="523220"/>
           </a:xfrm>
           <a:prstGeom prst="rect">
@@ -10798,7 +10798,7 @@
           <a:p>
             <a:r>
               <a:rPr lang="en-US" sz="1400"/>
-              <a:t>(captureaddress)</a:t>
+              <a:t>(capture address)</a:t>
             </a:r>
           </a:p>
         </p:txBody>
@@ -15382,7 +15382,7 @@
           <a:p>
             <a:r>
               <a:rPr lang="en-US" sz="1200"/>
-              <a:t>Step1</a:t>
+              <a:t>Step2</a:t>
             </a:r>
           </a:p>
           <a:p>
@@ -15436,7 +15436,7 @@
           <a:p>
             <a:r>
               <a:rPr lang="en-US" sz="1200"/>
-              <a:t>Step1</a:t>
+              <a:t>Step3</a:t>
             </a:r>
           </a:p>
           <a:p>
@@ -15481,7 +15481,7 @@
           <a:p>
             <a:r>
               <a:rPr lang="en-US" sz="1200"/>
-              <a:t>Step1</a:t>
+              <a:t>Step4</a:t>
             </a:r>
           </a:p>
         </p:txBody>
@@ -15523,7 +15523,7 @@
           <a:p>
             <a:r>
               <a:rPr lang="en-US" sz="800"/>
-              <a:t>Step1</a:t>
+              <a:t>Step5</a:t>
             </a:r>
           </a:p>
         </p:txBody>
